--- a/Caso86_Presentacion.pptx
+++ b/Caso86_Presentacion.pptx
@@ -12,7 +12,6 @@
     <p:sldId id="260" r:id="rId11"/>
     <p:sldId id="261" r:id="rId12"/>
     <p:sldId id="262" r:id="rId13"/>
-    <p:sldId id="263" r:id="rId14"/>
   </p:sldIdLst>
   <p:sldSz cx="12191695" cy="6858000" type="screen4x3"/>
   <p:notesSz cx="6858000" cy="9144000"/>
@@ -3110,7 +3109,7 @@
             <a:avLst/>
           </a:prstGeom>
           <a:solidFill>
-            <a:srgbClr val="CBCBCB"/>
+            <a:srgbClr val="1A3A5C"/>
           </a:solidFill>
           <a:ln>
             <a:noFill/>
@@ -3147,8 +3146,8 @@
         </p:nvSpPr>
         <p:spPr>
           <a:xfrm>
-            <a:off x="548640" y="274320"/>
-            <a:ext cx="10972800" cy="731520"/>
+            <a:off x="914400" y="822960"/>
+            <a:ext cx="10058400" cy="1280160"/>
           </a:xfrm>
           <a:prstGeom prst="rect">
             <a:avLst/>
@@ -3161,912 +3160,410 @@
           </a:bodyPr>
           <a:lstStyle/>
           <a:p>
-            <a:pPr algn="l"/>
-            <a:r>
-              <a:rPr sz="3200" b="0" i="0">
-                <a:solidFill>
-                  <a:srgbClr val="1C1C1C"/>
+            <a:pPr algn="ctr"/>
+            <a:r>
+              <a:rPr sz="5400" b="1" i="0">
+                <a:solidFill>
+                  <a:srgbClr val="FFFFFF"/>
                 </a:solidFill>
                 <a:latin typeface="Cambria"/>
               </a:rPr>
-              <a:t>Requisitos Sociedad de Profesionales</a:t>
-            </a:r>
-          </a:p>
-        </p:txBody>
-      </p:sp>
-      <p:sp>
-        <p:nvSpPr>
-          <p:cNvPr id="4" name="Rounded Rectangle 3"/>
-          <p:cNvSpPr/>
-          <p:nvPr/>
-        </p:nvSpPr>
-        <p:spPr>
-          <a:xfrm>
-            <a:off x="548640" y="1005840"/>
-            <a:ext cx="10972800" cy="457200"/>
+              <a:t>CASO 86</a:t>
+            </a:r>
+          </a:p>
+        </p:txBody>
+      </p:sp>
+      <p:sp>
+        <p:nvSpPr>
+          <p:cNvPr id="4" name="TextBox 3"/>
+          <p:cNvSpPr txBox="1"/>
+          <p:nvPr/>
+        </p:nvSpPr>
+        <p:spPr>
+          <a:xfrm>
+            <a:off x="914400" y="2011680"/>
+            <a:ext cx="10058400" cy="640080"/>
+          </a:xfrm>
+          <a:prstGeom prst="rect">
+            <a:avLst/>
+          </a:prstGeom>
+          <a:noFill/>
+        </p:spPr>
+        <p:txBody>
+          <a:bodyPr wrap="square" lIns="0" rIns="0" tIns="0" bIns="0">
+            <a:spAutoFit/>
+          </a:bodyPr>
+          <a:lstStyle/>
+          <a:p>
+            <a:pPr algn="ctr"/>
+            <a:r>
+              <a:rPr sz="1800" b="0" i="0">
+                <a:solidFill>
+                  <a:srgbClr val="8EB4E3"/>
+                </a:solidFill>
+                <a:latin typeface="Calibri"/>
+              </a:rPr>
+              <a:t>Prestación de Servicios Profesionales mediante Sociedad Interpuesta</a:t>
+            </a:r>
+          </a:p>
+        </p:txBody>
+      </p:sp>
+      <p:sp>
+        <p:nvSpPr>
+          <p:cNvPr id="5" name="TextBox 4"/>
+          <p:cNvSpPr txBox="1"/>
+          <p:nvPr/>
+        </p:nvSpPr>
+        <p:spPr>
+          <a:xfrm>
+            <a:off x="914400" y="2651760"/>
+            <a:ext cx="10058400" cy="457200"/>
+          </a:xfrm>
+          <a:prstGeom prst="rect">
+            <a:avLst/>
+          </a:prstGeom>
+          <a:noFill/>
+        </p:spPr>
+        <p:txBody>
+          <a:bodyPr wrap="square" lIns="0" rIns="0" tIns="0" bIns="0">
+            <a:spAutoFit/>
+          </a:bodyPr>
+          <a:lstStyle/>
+          <a:p>
+            <a:pPr algn="ctr"/>
+            <a:r>
+              <a:rPr sz="1400" b="0" i="0">
+                <a:solidFill>
+                  <a:srgbClr val="AABBCC"/>
+                </a:solidFill>
+                <a:latin typeface="Calibri"/>
+              </a:rPr>
+              <a:t>Catálogo de Esquemas Tributarios SII 2025</a:t>
+            </a:r>
+          </a:p>
+        </p:txBody>
+      </p:sp>
+      <p:sp>
+        <p:nvSpPr>
+          <p:cNvPr id="6" name="Rectangle 5"/>
+          <p:cNvSpPr/>
+          <p:nvPr/>
+        </p:nvSpPr>
+        <p:spPr>
+          <a:xfrm>
+            <a:off x="1371600" y="3246120"/>
+            <a:ext cx="9418320" cy="36576"/>
+          </a:xfrm>
+          <a:prstGeom prst="rect">
+            <a:avLst/>
+          </a:prstGeom>
+          <a:solidFill>
+            <a:srgbClr val="8EB4E3"/>
+          </a:solidFill>
+          <a:ln>
+            <a:noFill/>
+          </a:ln>
+        </p:spPr>
+        <p:style>
+          <a:lnRef idx="1">
+            <a:schemeClr val="accent1"/>
+          </a:lnRef>
+          <a:fillRef idx="3">
+            <a:schemeClr val="accent1"/>
+          </a:fillRef>
+          <a:effectRef idx="2">
+            <a:schemeClr val="accent1"/>
+          </a:effectRef>
+          <a:fontRef idx="minor">
+            <a:schemeClr val="lt1"/>
+          </a:fontRef>
+        </p:style>
+        <p:txBody>
+          <a:bodyPr rtlCol="0" anchor="ctr"/>
+          <a:lstStyle/>
+          <a:p>
+            <a:pPr algn="ctr"/>
+          </a:p>
+        </p:txBody>
+      </p:sp>
+      <p:sp>
+        <p:nvSpPr>
+          <p:cNvPr id="7" name="TextBox 6"/>
+          <p:cNvSpPr txBox="1"/>
+          <p:nvPr/>
+        </p:nvSpPr>
+        <p:spPr>
+          <a:xfrm>
+            <a:off x="914400" y="3474720"/>
+            <a:ext cx="10058400" cy="457200"/>
+          </a:xfrm>
+          <a:prstGeom prst="rect">
+            <a:avLst/>
+          </a:prstGeom>
+          <a:noFill/>
+        </p:spPr>
+        <p:txBody>
+          <a:bodyPr wrap="square" lIns="0" rIns="0" tIns="0" bIns="0">
+            <a:spAutoFit/>
+          </a:bodyPr>
+          <a:lstStyle/>
+          <a:p>
+            <a:pPr algn="ctr"/>
+            <a:r>
+              <a:rPr sz="1400" b="1" i="0">
+                <a:solidFill>
+                  <a:srgbClr val="E6A43C"/>
+                </a:solidFill>
+                <a:latin typeface="Calibri"/>
+              </a:rPr>
+              <a:t>Grupo 4</a:t>
+            </a:r>
+          </a:p>
+        </p:txBody>
+      </p:sp>
+      <p:sp>
+        <p:nvSpPr>
+          <p:cNvPr id="8" name="Rounded Rectangle 7"/>
+          <p:cNvSpPr/>
+          <p:nvPr/>
+        </p:nvSpPr>
+        <p:spPr>
+          <a:xfrm>
+            <a:off x="914400" y="4023360"/>
+            <a:ext cx="2377440" cy="594360"/>
           </a:xfrm>
           <a:prstGeom prst="roundRect">
             <a:avLst/>
           </a:prstGeom>
+          <a:solidFill>
+            <a:srgbClr val="254E80"/>
+          </a:solidFill>
+          <a:ln>
+            <a:noFill/>
+          </a:ln>
+          <a:effectLst/>
+        </p:spPr>
+        <p:style>
+          <a:lnRef idx="1">
+            <a:schemeClr val="accent1"/>
+          </a:lnRef>
+          <a:fillRef idx="3">
+            <a:schemeClr val="accent1"/>
+          </a:fillRef>
+          <a:effectRef idx="2">
+            <a:schemeClr val="accent1"/>
+          </a:effectRef>
+          <a:fontRef idx="minor">
+            <a:schemeClr val="lt1"/>
+          </a:fontRef>
+        </p:style>
+        <p:txBody>
+          <a:bodyPr rtlCol="0" anchor="ctr" wrap="square" lIns="137160" rIns="137160" tIns="91440" bIns="91440"/>
+          <a:lstStyle/>
+          <a:p>
+            <a:pPr algn="ctr"/>
+            <a:r>
+              <a:rPr b="0" sz="1300">
+                <a:solidFill>
+                  <a:srgbClr val="FFFFFF"/>
+                </a:solidFill>
+                <a:latin typeface="Calibri"/>
+              </a:rPr>
+              <a:t>Andrea Añasco</a:t>
+            </a:r>
+          </a:p>
+        </p:txBody>
+      </p:sp>
+      <p:sp>
+        <p:nvSpPr>
+          <p:cNvPr id="9" name="Rounded Rectangle 8"/>
+          <p:cNvSpPr/>
+          <p:nvPr/>
+        </p:nvSpPr>
+        <p:spPr>
+          <a:xfrm>
+            <a:off x="3456432" y="4023360"/>
+            <a:ext cx="2377440" cy="594360"/>
+          </a:xfrm>
+          <a:prstGeom prst="roundRect">
+            <a:avLst/>
+          </a:prstGeom>
+          <a:solidFill>
+            <a:srgbClr val="254E80"/>
+          </a:solidFill>
+          <a:ln>
+            <a:noFill/>
+          </a:ln>
+          <a:effectLst/>
+        </p:spPr>
+        <p:style>
+          <a:lnRef idx="1">
+            <a:schemeClr val="accent1"/>
+          </a:lnRef>
+          <a:fillRef idx="3">
+            <a:schemeClr val="accent1"/>
+          </a:fillRef>
+          <a:effectRef idx="2">
+            <a:schemeClr val="accent1"/>
+          </a:effectRef>
+          <a:fontRef idx="minor">
+            <a:schemeClr val="lt1"/>
+          </a:fontRef>
+        </p:style>
+        <p:txBody>
+          <a:bodyPr rtlCol="0" anchor="ctr" wrap="square" lIns="137160" rIns="137160" tIns="91440" bIns="91440"/>
+          <a:lstStyle/>
+          <a:p>
+            <a:pPr algn="ctr"/>
+            <a:r>
+              <a:rPr b="0" sz="1300">
+                <a:solidFill>
+                  <a:srgbClr val="FFFFFF"/>
+                </a:solidFill>
+                <a:latin typeface="Calibri"/>
+              </a:rPr>
+              <a:t>Gema Sepúlveda</a:t>
+            </a:r>
+          </a:p>
+        </p:txBody>
+      </p:sp>
+      <p:sp>
+        <p:nvSpPr>
+          <p:cNvPr id="10" name="Rounded Rectangle 9"/>
+          <p:cNvSpPr/>
+          <p:nvPr/>
+        </p:nvSpPr>
+        <p:spPr>
+          <a:xfrm>
+            <a:off x="5998464" y="4023360"/>
+            <a:ext cx="2377440" cy="594360"/>
+          </a:xfrm>
+          <a:prstGeom prst="roundRect">
+            <a:avLst/>
+          </a:prstGeom>
+          <a:solidFill>
+            <a:srgbClr val="254E80"/>
+          </a:solidFill>
+          <a:ln>
+            <a:noFill/>
+          </a:ln>
+          <a:effectLst/>
+        </p:spPr>
+        <p:style>
+          <a:lnRef idx="1">
+            <a:schemeClr val="accent1"/>
+          </a:lnRef>
+          <a:fillRef idx="3">
+            <a:schemeClr val="accent1"/>
+          </a:fillRef>
+          <a:effectRef idx="2">
+            <a:schemeClr val="accent1"/>
+          </a:effectRef>
+          <a:fontRef idx="minor">
+            <a:schemeClr val="lt1"/>
+          </a:fontRef>
+        </p:style>
+        <p:txBody>
+          <a:bodyPr rtlCol="0" anchor="ctr" wrap="square" lIns="137160" rIns="137160" tIns="91440" bIns="91440"/>
+          <a:lstStyle/>
+          <a:p>
+            <a:pPr algn="ctr"/>
+            <a:r>
+              <a:rPr b="0" sz="1300">
+                <a:solidFill>
+                  <a:srgbClr val="FFFFFF"/>
+                </a:solidFill>
+                <a:latin typeface="Calibri"/>
+              </a:rPr>
+              <a:t>Karen Rebolledo</a:t>
+            </a:r>
+          </a:p>
+        </p:txBody>
+      </p:sp>
+      <p:sp>
+        <p:nvSpPr>
+          <p:cNvPr id="11" name="Rounded Rectangle 10"/>
+          <p:cNvSpPr/>
+          <p:nvPr/>
+        </p:nvSpPr>
+        <p:spPr>
+          <a:xfrm>
+            <a:off x="8540496" y="4023360"/>
+            <a:ext cx="2377440" cy="594360"/>
+          </a:xfrm>
+          <a:prstGeom prst="roundRect">
+            <a:avLst/>
+          </a:prstGeom>
+          <a:solidFill>
+            <a:srgbClr val="254E80"/>
+          </a:solidFill>
+          <a:ln>
+            <a:noFill/>
+          </a:ln>
+          <a:effectLst/>
+        </p:spPr>
+        <p:style>
+          <a:lnRef idx="1">
+            <a:schemeClr val="accent1"/>
+          </a:lnRef>
+          <a:fillRef idx="3">
+            <a:schemeClr val="accent1"/>
+          </a:fillRef>
+          <a:effectRef idx="2">
+            <a:schemeClr val="accent1"/>
+          </a:effectRef>
+          <a:fontRef idx="minor">
+            <a:schemeClr val="lt1"/>
+          </a:fontRef>
+        </p:style>
+        <p:txBody>
+          <a:bodyPr rtlCol="0" anchor="ctr" wrap="square" lIns="137160" rIns="137160" tIns="91440" bIns="91440"/>
+          <a:lstStyle/>
+          <a:p>
+            <a:pPr algn="ctr"/>
+            <a:r>
+              <a:rPr b="0" sz="1300">
+                <a:solidFill>
+                  <a:srgbClr val="FFFFFF"/>
+                </a:solidFill>
+                <a:latin typeface="Calibri"/>
+              </a:rPr>
+              <a:t>Nicolás Muñoz</a:t>
+            </a:r>
+          </a:p>
+        </p:txBody>
+      </p:sp>
+      <p:sp>
+        <p:nvSpPr>
+          <p:cNvPr id="12" name="TextBox 11"/>
+          <p:cNvSpPr txBox="1"/>
+          <p:nvPr/>
+        </p:nvSpPr>
+        <p:spPr>
+          <a:xfrm>
+            <a:off x="914400" y="6217920"/>
+            <a:ext cx="10058400" cy="365760"/>
+          </a:xfrm>
+          <a:prstGeom prst="rect">
+            <a:avLst/>
+          </a:prstGeom>
           <a:noFill/>
-          <a:ln>
-            <a:noFill/>
-          </a:ln>
-          <a:effectLst/>
-        </p:spPr>
-        <p:style>
-          <a:lnRef idx="1">
-            <a:schemeClr val="accent1"/>
-          </a:lnRef>
-          <a:fillRef idx="3">
-            <a:schemeClr val="accent1"/>
-          </a:fillRef>
-          <a:effectRef idx="2">
-            <a:schemeClr val="accent1"/>
-          </a:effectRef>
-          <a:fontRef idx="minor">
-            <a:schemeClr val="lt1"/>
-          </a:fontRef>
-        </p:style>
-        <p:txBody>
-          <a:bodyPr rtlCol="0" anchor="t" wrap="square" lIns="137160" rIns="137160" tIns="91440" bIns="91440"/>
-          <a:lstStyle/>
-          <a:p>
-            <a:pPr algn="l"/>
-            <a:r>
-              <a:rPr b="0" sz="1400">
-                <a:solidFill>
-                  <a:srgbClr val="555555"/>
-                </a:solidFill>
-                <a:latin typeface="Calibri"/>
-              </a:rPr>
-              <a:t>Verificación de cumplimiento — Caso 86</a:t>
-            </a:r>
-          </a:p>
-        </p:txBody>
-      </p:sp>
-      <p:sp>
-        <p:nvSpPr>
-          <p:cNvPr id="5" name="Rounded Rectangle 4"/>
-          <p:cNvSpPr/>
-          <p:nvPr/>
-        </p:nvSpPr>
-        <p:spPr>
-          <a:xfrm>
-            <a:off x="548640" y="1691640"/>
-            <a:ext cx="6858000" cy="457200"/>
-          </a:xfrm>
-          <a:prstGeom prst="roundRect">
-            <a:avLst/>
-          </a:prstGeom>
-          <a:solidFill>
-            <a:srgbClr val="1A3A5C"/>
-          </a:solidFill>
-          <a:ln>
-            <a:noFill/>
-          </a:ln>
-          <a:effectLst/>
-        </p:spPr>
-        <p:style>
-          <a:lnRef idx="1">
-            <a:schemeClr val="accent1"/>
-          </a:lnRef>
-          <a:fillRef idx="3">
-            <a:schemeClr val="accent1"/>
-          </a:fillRef>
-          <a:effectRef idx="2">
-            <a:schemeClr val="accent1"/>
-          </a:effectRef>
-          <a:fontRef idx="minor">
-            <a:schemeClr val="lt1"/>
-          </a:fontRef>
-        </p:style>
-        <p:txBody>
-          <a:bodyPr rtlCol="0" anchor="ctr" wrap="square" lIns="137160" rIns="137160" tIns="91440" bIns="91440"/>
+        </p:spPr>
+        <p:txBody>
+          <a:bodyPr wrap="square" lIns="0" rIns="0" tIns="0" bIns="0">
+            <a:spAutoFit/>
+          </a:bodyPr>
           <a:lstStyle/>
           <a:p>
             <a:pPr algn="ctr"/>
             <a:r>
-              <a:rPr b="1" sz="1200">
-                <a:solidFill>
-                  <a:srgbClr val="FFFFFF"/>
-                </a:solidFill>
-                <a:latin typeface="Calibri"/>
-              </a:rPr>
-              <a:t>Requisito (Circular 21/1991 y 50/2020)</a:t>
-            </a:r>
-          </a:p>
-        </p:txBody>
-      </p:sp>
-      <p:sp>
-        <p:nvSpPr>
-          <p:cNvPr id="6" name="Rounded Rectangle 5"/>
-          <p:cNvSpPr/>
-          <p:nvPr/>
-        </p:nvSpPr>
-        <p:spPr>
-          <a:xfrm>
-            <a:off x="7498079" y="1691640"/>
-            <a:ext cx="4114800" cy="457200"/>
-          </a:xfrm>
-          <a:prstGeom prst="roundRect">
-            <a:avLst/>
-          </a:prstGeom>
-          <a:solidFill>
-            <a:srgbClr val="1A3A5C"/>
-          </a:solidFill>
-          <a:ln>
-            <a:noFill/>
-          </a:ln>
-          <a:effectLst/>
-        </p:spPr>
-        <p:style>
-          <a:lnRef idx="1">
-            <a:schemeClr val="accent1"/>
-          </a:lnRef>
-          <a:fillRef idx="3">
-            <a:schemeClr val="accent1"/>
-          </a:fillRef>
-          <a:effectRef idx="2">
-            <a:schemeClr val="accent1"/>
-          </a:effectRef>
-          <a:fontRef idx="minor">
-            <a:schemeClr val="lt1"/>
-          </a:fontRef>
-        </p:style>
-        <p:txBody>
-          <a:bodyPr rtlCol="0" anchor="ctr" wrap="square" lIns="137160" rIns="137160" tIns="91440" bIns="91440"/>
-          <a:lstStyle/>
-          <a:p>
-            <a:pPr algn="ctr"/>
-            <a:r>
-              <a:rPr b="1" sz="1200">
-                <a:solidFill>
-                  <a:srgbClr val="FFFFFF"/>
-                </a:solidFill>
-                <a:latin typeface="Calibri"/>
-              </a:rPr>
-              <a:t>¿Se cumple en el Caso 86?</a:t>
-            </a:r>
-          </a:p>
-        </p:txBody>
-      </p:sp>
-      <p:sp>
-        <p:nvSpPr>
-          <p:cNvPr id="7" name="Rounded Rectangle 6"/>
-          <p:cNvSpPr/>
-          <p:nvPr/>
-        </p:nvSpPr>
-        <p:spPr>
-          <a:xfrm>
-            <a:off x="548640" y="2194560"/>
-            <a:ext cx="6858000" cy="502920"/>
-          </a:xfrm>
-          <a:prstGeom prst="roundRect">
-            <a:avLst/>
-          </a:prstGeom>
-          <a:solidFill>
-            <a:srgbClr val="F4F6F9"/>
-          </a:solidFill>
-          <a:ln>
-            <a:noFill/>
-          </a:ln>
-          <a:effectLst/>
-        </p:spPr>
-        <p:style>
-          <a:lnRef idx="1">
-            <a:schemeClr val="accent1"/>
-          </a:lnRef>
-          <a:fillRef idx="3">
-            <a:schemeClr val="accent1"/>
-          </a:fillRef>
-          <a:effectRef idx="2">
-            <a:schemeClr val="accent1"/>
-          </a:effectRef>
-          <a:fontRef idx="minor">
-            <a:schemeClr val="lt1"/>
-          </a:fontRef>
-        </p:style>
-        <p:txBody>
-          <a:bodyPr rtlCol="0" anchor="ctr" wrap="square" lIns="137160" rIns="137160" tIns="91440" bIns="91440"/>
-          <a:lstStyle/>
-          <a:p>
-            <a:pPr algn="l"/>
-            <a:r>
-              <a:rPr b="0" sz="1000">
-                <a:solidFill>
-                  <a:srgbClr val="1C1C1C"/>
-                </a:solidFill>
-                <a:latin typeface="Calibri"/>
-              </a:rPr>
-              <a:t>Debe tratarse de una sociedad de personas</a:t>
-            </a:r>
-          </a:p>
-        </p:txBody>
-      </p:sp>
-      <p:sp>
-        <p:nvSpPr>
-          <p:cNvPr id="8" name="Rounded Rectangle 7"/>
-          <p:cNvSpPr/>
-          <p:nvPr/>
-        </p:nvSpPr>
-        <p:spPr>
-          <a:xfrm>
-            <a:off x="7498079" y="2194560"/>
-            <a:ext cx="4114800" cy="502920"/>
-          </a:xfrm>
-          <a:prstGeom prst="roundRect">
-            <a:avLst/>
-          </a:prstGeom>
-          <a:solidFill>
-            <a:srgbClr val="1A6B3C"/>
-          </a:solidFill>
-          <a:ln>
-            <a:noFill/>
-          </a:ln>
-          <a:effectLst/>
-        </p:spPr>
-        <p:style>
-          <a:lnRef idx="1">
-            <a:schemeClr val="accent1"/>
-          </a:lnRef>
-          <a:fillRef idx="3">
-            <a:schemeClr val="accent1"/>
-          </a:fillRef>
-          <a:effectRef idx="2">
-            <a:schemeClr val="accent1"/>
-          </a:effectRef>
-          <a:fontRef idx="minor">
-            <a:schemeClr val="lt1"/>
-          </a:fontRef>
-        </p:style>
-        <p:txBody>
-          <a:bodyPr rtlCol="0" anchor="ctr" wrap="square" lIns="137160" rIns="137160" tIns="91440" bIns="91440"/>
-          <a:lstStyle/>
-          <a:p>
-            <a:pPr algn="ctr"/>
-            <a:r>
-              <a:rPr b="1" sz="1050">
-                <a:solidFill>
-                  <a:srgbClr val="FFFFFF"/>
-                </a:solidFill>
-                <a:latin typeface="Calibri"/>
-              </a:rPr>
-              <a:t>Cumple — D es sociedad de personas</a:t>
-            </a:r>
-          </a:p>
-        </p:txBody>
-      </p:sp>
-      <p:sp>
-        <p:nvSpPr>
-          <p:cNvPr id="9" name="Rounded Rectangle 8"/>
-          <p:cNvSpPr/>
-          <p:nvPr/>
-        </p:nvSpPr>
-        <p:spPr>
-          <a:xfrm>
-            <a:off x="548640" y="2743200"/>
-            <a:ext cx="6858000" cy="502920"/>
-          </a:xfrm>
-          <a:prstGeom prst="roundRect">
-            <a:avLst/>
-          </a:prstGeom>
-          <a:solidFill>
-            <a:srgbClr val="F4F6F9"/>
-          </a:solidFill>
-          <a:ln>
-            <a:noFill/>
-          </a:ln>
-          <a:effectLst/>
-        </p:spPr>
-        <p:style>
-          <a:lnRef idx="1">
-            <a:schemeClr val="accent1"/>
-          </a:lnRef>
-          <a:fillRef idx="3">
-            <a:schemeClr val="accent1"/>
-          </a:fillRef>
-          <a:effectRef idx="2">
-            <a:schemeClr val="accent1"/>
-          </a:effectRef>
-          <a:fontRef idx="minor">
-            <a:schemeClr val="lt1"/>
-          </a:fontRef>
-        </p:style>
-        <p:txBody>
-          <a:bodyPr rtlCol="0" anchor="ctr" wrap="square" lIns="137160" rIns="137160" tIns="91440" bIns="91440"/>
-          <a:lstStyle/>
-          <a:p>
-            <a:pPr algn="l"/>
-            <a:r>
-              <a:rPr b="0" sz="1000">
-                <a:solidFill>
-                  <a:srgbClr val="1C1C1C"/>
-                </a:solidFill>
-                <a:latin typeface="Calibri"/>
-              </a:rPr>
-              <a:t>Objeto exclusivo: prestación de servicios o asesorías profesionales</a:t>
-            </a:r>
-          </a:p>
-        </p:txBody>
-      </p:sp>
-      <p:sp>
-        <p:nvSpPr>
-          <p:cNvPr id="10" name="Rounded Rectangle 9"/>
-          <p:cNvSpPr/>
-          <p:nvPr/>
-        </p:nvSpPr>
-        <p:spPr>
-          <a:xfrm>
-            <a:off x="7498079" y="2743200"/>
-            <a:ext cx="4114800" cy="502920"/>
-          </a:xfrm>
-          <a:prstGeom prst="roundRect">
-            <a:avLst/>
-          </a:prstGeom>
-          <a:solidFill>
-            <a:srgbClr val="1A6B3C"/>
-          </a:solidFill>
-          <a:ln>
-            <a:noFill/>
-          </a:ln>
-          <a:effectLst/>
-        </p:spPr>
-        <p:style>
-          <a:lnRef idx="1">
-            <a:schemeClr val="accent1"/>
-          </a:lnRef>
-          <a:fillRef idx="3">
-            <a:schemeClr val="accent1"/>
-          </a:fillRef>
-          <a:effectRef idx="2">
-            <a:schemeClr val="accent1"/>
-          </a:effectRef>
-          <a:fontRef idx="minor">
-            <a:schemeClr val="lt1"/>
-          </a:fontRef>
-        </p:style>
-        <p:txBody>
-          <a:bodyPr rtlCol="0" anchor="ctr" wrap="square" lIns="137160" rIns="137160" tIns="91440" bIns="91440"/>
-          <a:lstStyle/>
-          <a:p>
-            <a:pPr algn="ctr"/>
-            <a:r>
-              <a:rPr b="1" sz="1050">
-                <a:solidFill>
-                  <a:srgbClr val="FFFFFF"/>
-                </a:solidFill>
-                <a:latin typeface="Calibri"/>
-              </a:rPr>
-              <a:t>Cumple</a:t>
-            </a:r>
-          </a:p>
-        </p:txBody>
-      </p:sp>
-      <p:sp>
-        <p:nvSpPr>
-          <p:cNvPr id="11" name="Rounded Rectangle 10"/>
-          <p:cNvSpPr/>
-          <p:nvPr/>
-        </p:nvSpPr>
-        <p:spPr>
-          <a:xfrm>
-            <a:off x="548640" y="3291840"/>
-            <a:ext cx="6858000" cy="502920"/>
-          </a:xfrm>
-          <a:prstGeom prst="roundRect">
-            <a:avLst/>
-          </a:prstGeom>
-          <a:solidFill>
-            <a:srgbClr val="F4F6F9"/>
-          </a:solidFill>
-          <a:ln>
-            <a:noFill/>
-          </a:ln>
-          <a:effectLst/>
-        </p:spPr>
-        <p:style>
-          <a:lnRef idx="1">
-            <a:schemeClr val="accent1"/>
-          </a:lnRef>
-          <a:fillRef idx="3">
-            <a:schemeClr val="accent1"/>
-          </a:fillRef>
-          <a:effectRef idx="2">
-            <a:schemeClr val="accent1"/>
-          </a:effectRef>
-          <a:fontRef idx="minor">
-            <a:schemeClr val="lt1"/>
-          </a:fontRef>
-        </p:style>
-        <p:txBody>
-          <a:bodyPr rtlCol="0" anchor="ctr" wrap="square" lIns="137160" rIns="137160" tIns="91440" bIns="91440"/>
-          <a:lstStyle/>
-          <a:p>
-            <a:pPr algn="l"/>
-            <a:r>
-              <a:rPr b="0" sz="1000">
-                <a:solidFill>
-                  <a:srgbClr val="1C1C1C"/>
-                </a:solidFill>
-                <a:latin typeface="Calibri"/>
-              </a:rPr>
-              <a:t>Servicios prestados por intermedio de sus socios</a:t>
-            </a:r>
-          </a:p>
-        </p:txBody>
-      </p:sp>
-      <p:sp>
-        <p:nvSpPr>
-          <p:cNvPr id="12" name="Rounded Rectangle 11"/>
-          <p:cNvSpPr/>
-          <p:nvPr/>
-        </p:nvSpPr>
-        <p:spPr>
-          <a:xfrm>
-            <a:off x="7498079" y="3291840"/>
-            <a:ext cx="4114800" cy="502920"/>
-          </a:xfrm>
-          <a:prstGeom prst="roundRect">
-            <a:avLst/>
-          </a:prstGeom>
-          <a:solidFill>
-            <a:srgbClr val="1A6B3C"/>
-          </a:solidFill>
-          <a:ln>
-            <a:noFill/>
-          </a:ln>
-          <a:effectLst/>
-        </p:spPr>
-        <p:style>
-          <a:lnRef idx="1">
-            <a:schemeClr val="accent1"/>
-          </a:lnRef>
-          <a:fillRef idx="3">
-            <a:schemeClr val="accent1"/>
-          </a:fillRef>
-          <a:effectRef idx="2">
-            <a:schemeClr val="accent1"/>
-          </a:effectRef>
-          <a:fontRef idx="minor">
-            <a:schemeClr val="lt1"/>
-          </a:fontRef>
-        </p:style>
-        <p:txBody>
-          <a:bodyPr rtlCol="0" anchor="ctr" wrap="square" lIns="137160" rIns="137160" tIns="91440" bIns="91440"/>
-          <a:lstStyle/>
-          <a:p>
-            <a:pPr algn="ctr"/>
-            <a:r>
-              <a:rPr b="1" sz="1050">
-                <a:solidFill>
-                  <a:srgbClr val="FFFFFF"/>
-                </a:solidFill>
-                <a:latin typeface="Calibri"/>
-              </a:rPr>
-              <a:t>Cumple — A presta los servicios</a:t>
-            </a:r>
-          </a:p>
-        </p:txBody>
-      </p:sp>
-      <p:sp>
-        <p:nvSpPr>
-          <p:cNvPr id="13" name="Rounded Rectangle 12"/>
-          <p:cNvSpPr/>
-          <p:nvPr/>
-        </p:nvSpPr>
-        <p:spPr>
-          <a:xfrm>
-            <a:off x="548640" y="3840480"/>
-            <a:ext cx="6858000" cy="502920"/>
-          </a:xfrm>
-          <a:prstGeom prst="roundRect">
-            <a:avLst/>
-          </a:prstGeom>
-          <a:solidFill>
-            <a:srgbClr val="F4F6F9"/>
-          </a:solidFill>
-          <a:ln>
-            <a:noFill/>
-          </a:ln>
-          <a:effectLst/>
-        </p:spPr>
-        <p:style>
-          <a:lnRef idx="1">
-            <a:schemeClr val="accent1"/>
-          </a:lnRef>
-          <a:fillRef idx="3">
-            <a:schemeClr val="accent1"/>
-          </a:fillRef>
-          <a:effectRef idx="2">
-            <a:schemeClr val="accent1"/>
-          </a:effectRef>
-          <a:fontRef idx="minor">
-            <a:schemeClr val="lt1"/>
-          </a:fontRef>
-        </p:style>
-        <p:txBody>
-          <a:bodyPr rtlCol="0" anchor="ctr" wrap="square" lIns="137160" rIns="137160" tIns="91440" bIns="91440"/>
-          <a:lstStyle/>
-          <a:p>
-            <a:pPr algn="l"/>
-            <a:r>
-              <a:rPr b="0" sz="1000">
-                <a:solidFill>
-                  <a:srgbClr val="1C1C1C"/>
-                </a:solidFill>
-                <a:latin typeface="Calibri"/>
-              </a:rPr>
-              <a:t>TODOS los socios deben ejercer su profesión para la sociedad</a:t>
-            </a:r>
-          </a:p>
-        </p:txBody>
-      </p:sp>
-      <p:sp>
-        <p:nvSpPr>
-          <p:cNvPr id="14" name="Rounded Rectangle 13"/>
-          <p:cNvSpPr/>
-          <p:nvPr/>
-        </p:nvSpPr>
-        <p:spPr>
-          <a:xfrm>
-            <a:off x="7498079" y="3840480"/>
-            <a:ext cx="4114800" cy="502920"/>
-          </a:xfrm>
-          <a:prstGeom prst="roundRect">
-            <a:avLst/>
-          </a:prstGeom>
-          <a:solidFill>
-            <a:srgbClr val="B03030"/>
-          </a:solidFill>
-          <a:ln>
-            <a:noFill/>
-          </a:ln>
-          <a:effectLst/>
-        </p:spPr>
-        <p:style>
-          <a:lnRef idx="1">
-            <a:schemeClr val="accent1"/>
-          </a:lnRef>
-          <a:fillRef idx="3">
-            <a:schemeClr val="accent1"/>
-          </a:fillRef>
-          <a:effectRef idx="2">
-            <a:schemeClr val="accent1"/>
-          </a:effectRef>
-          <a:fontRef idx="minor">
-            <a:schemeClr val="lt1"/>
-          </a:fontRef>
-        </p:style>
-        <p:txBody>
-          <a:bodyPr rtlCol="0" anchor="ctr" wrap="square" lIns="137160" rIns="137160" tIns="91440" bIns="91440"/>
-          <a:lstStyle/>
-          <a:p>
-            <a:pPr algn="ctr"/>
-            <a:r>
-              <a:rPr b="1" sz="1050">
-                <a:solidFill>
-                  <a:srgbClr val="FFFFFF"/>
-                </a:solidFill>
-                <a:latin typeface="Calibri"/>
-              </a:rPr>
-              <a:t>NO CUMPLE — B y C no prestan servicios</a:t>
-            </a:r>
-          </a:p>
-        </p:txBody>
-      </p:sp>
-      <p:sp>
-        <p:nvSpPr>
-          <p:cNvPr id="15" name="Rounded Rectangle 14"/>
-          <p:cNvSpPr/>
-          <p:nvPr/>
-        </p:nvSpPr>
-        <p:spPr>
-          <a:xfrm>
-            <a:off x="548640" y="4389120"/>
-            <a:ext cx="6858000" cy="502920"/>
-          </a:xfrm>
-          <a:prstGeom prst="roundRect">
-            <a:avLst/>
-          </a:prstGeom>
-          <a:solidFill>
-            <a:srgbClr val="F4F6F9"/>
-          </a:solidFill>
-          <a:ln>
-            <a:noFill/>
-          </a:ln>
-          <a:effectLst/>
-        </p:spPr>
-        <p:style>
-          <a:lnRef idx="1">
-            <a:schemeClr val="accent1"/>
-          </a:lnRef>
-          <a:fillRef idx="3">
-            <a:schemeClr val="accent1"/>
-          </a:fillRef>
-          <a:effectRef idx="2">
-            <a:schemeClr val="accent1"/>
-          </a:effectRef>
-          <a:fontRef idx="minor">
-            <a:schemeClr val="lt1"/>
-          </a:fontRef>
-        </p:style>
-        <p:txBody>
-          <a:bodyPr rtlCol="0" anchor="ctr" wrap="square" lIns="137160" rIns="137160" tIns="91440" bIns="91440"/>
-          <a:lstStyle/>
-          <a:p>
-            <a:pPr algn="l"/>
-            <a:r>
-              <a:rPr b="0" sz="1000">
-                <a:solidFill>
-                  <a:srgbClr val="1C1C1C"/>
-                </a:solidFill>
-                <a:latin typeface="Calibri"/>
-              </a:rPr>
-              <a:t>No es aceptable que un socio solo aporte capital</a:t>
-            </a:r>
-          </a:p>
-        </p:txBody>
-      </p:sp>
-      <p:sp>
-        <p:nvSpPr>
-          <p:cNvPr id="16" name="Rounded Rectangle 15"/>
-          <p:cNvSpPr/>
-          <p:nvPr/>
-        </p:nvSpPr>
-        <p:spPr>
-          <a:xfrm>
-            <a:off x="7498079" y="4389120"/>
-            <a:ext cx="4114800" cy="502920"/>
-          </a:xfrm>
-          <a:prstGeom prst="roundRect">
-            <a:avLst/>
-          </a:prstGeom>
-          <a:solidFill>
-            <a:srgbClr val="B03030"/>
-          </a:solidFill>
-          <a:ln>
-            <a:noFill/>
-          </a:ln>
-          <a:effectLst/>
-        </p:spPr>
-        <p:style>
-          <a:lnRef idx="1">
-            <a:schemeClr val="accent1"/>
-          </a:lnRef>
-          <a:fillRef idx="3">
-            <a:schemeClr val="accent1"/>
-          </a:fillRef>
-          <a:effectRef idx="2">
-            <a:schemeClr val="accent1"/>
-          </a:effectRef>
-          <a:fontRef idx="minor">
-            <a:schemeClr val="lt1"/>
-          </a:fontRef>
-        </p:style>
-        <p:txBody>
-          <a:bodyPr rtlCol="0" anchor="ctr" wrap="square" lIns="137160" rIns="137160" tIns="91440" bIns="91440"/>
-          <a:lstStyle/>
-          <a:p>
-            <a:pPr algn="ctr"/>
-            <a:r>
-              <a:rPr b="1" sz="1050">
-                <a:solidFill>
-                  <a:srgbClr val="FFFFFF"/>
-                </a:solidFill>
-                <a:latin typeface="Calibri"/>
-              </a:rPr>
-              <a:t>NO CUMPLE — B y C solo aportan capital</a:t>
-            </a:r>
-          </a:p>
-        </p:txBody>
-      </p:sp>
-      <p:sp>
-        <p:nvSpPr>
-          <p:cNvPr id="17" name="Rounded Rectangle 16"/>
-          <p:cNvSpPr/>
-          <p:nvPr/>
-        </p:nvSpPr>
-        <p:spPr>
-          <a:xfrm>
-            <a:off x="548640" y="4937760"/>
-            <a:ext cx="6858000" cy="502920"/>
-          </a:xfrm>
-          <a:prstGeom prst="roundRect">
-            <a:avLst/>
-          </a:prstGeom>
-          <a:solidFill>
-            <a:srgbClr val="F4F6F9"/>
-          </a:solidFill>
-          <a:ln>
-            <a:noFill/>
-          </a:ln>
-          <a:effectLst/>
-        </p:spPr>
-        <p:style>
-          <a:lnRef idx="1">
-            <a:schemeClr val="accent1"/>
-          </a:lnRef>
-          <a:fillRef idx="3">
-            <a:schemeClr val="accent1"/>
-          </a:fillRef>
-          <a:effectRef idx="2">
-            <a:schemeClr val="accent1"/>
-          </a:effectRef>
-          <a:fontRef idx="minor">
-            <a:schemeClr val="lt1"/>
-          </a:fontRef>
-        </p:style>
-        <p:txBody>
-          <a:bodyPr rtlCol="0" anchor="ctr" wrap="square" lIns="137160" rIns="137160" tIns="91440" bIns="91440"/>
-          <a:lstStyle/>
-          <a:p>
-            <a:pPr algn="l"/>
-            <a:r>
-              <a:rPr b="0" sz="1000">
-                <a:solidFill>
-                  <a:srgbClr val="1C1C1C"/>
-                </a:solidFill>
-                <a:latin typeface="Calibri"/>
-              </a:rPr>
-              <a:t>La forma de remuneración no es relevante; sí la prestación efectiva</a:t>
-            </a:r>
-          </a:p>
-        </p:txBody>
-      </p:sp>
-      <p:sp>
-        <p:nvSpPr>
-          <p:cNvPr id="18" name="Rounded Rectangle 17"/>
-          <p:cNvSpPr/>
-          <p:nvPr/>
-        </p:nvSpPr>
-        <p:spPr>
-          <a:xfrm>
-            <a:off x="7498079" y="4937760"/>
-            <a:ext cx="4114800" cy="502920"/>
-          </a:xfrm>
-          <a:prstGeom prst="roundRect">
-            <a:avLst/>
-          </a:prstGeom>
-          <a:solidFill>
-            <a:srgbClr val="B03030"/>
-          </a:solidFill>
-          <a:ln>
-            <a:noFill/>
-          </a:ln>
-          <a:effectLst/>
-        </p:spPr>
-        <p:style>
-          <a:lnRef idx="1">
-            <a:schemeClr val="accent1"/>
-          </a:lnRef>
-          <a:fillRef idx="3">
-            <a:schemeClr val="accent1"/>
-          </a:fillRef>
-          <a:effectRef idx="2">
-            <a:schemeClr val="accent1"/>
-          </a:effectRef>
-          <a:fontRef idx="minor">
-            <a:schemeClr val="lt1"/>
-          </a:fontRef>
-        </p:style>
-        <p:txBody>
-          <a:bodyPr rtlCol="0" anchor="ctr" wrap="square" lIns="137160" rIns="137160" tIns="91440" bIns="91440"/>
-          <a:lstStyle/>
-          <a:p>
-            <a:pPr algn="ctr"/>
-            <a:r>
-              <a:rPr b="1" sz="1050">
-                <a:solidFill>
-                  <a:srgbClr val="FFFFFF"/>
-                </a:solidFill>
-                <a:latin typeface="Calibri"/>
-              </a:rPr>
-              <a:t>Solo A presta labor efectiva</a:t>
-            </a:r>
-          </a:p>
-        </p:txBody>
-      </p:sp>
-      <p:sp>
-        <p:nvSpPr>
-          <p:cNvPr id="19" name="Rounded Rectangle 18"/>
-          <p:cNvSpPr/>
-          <p:nvPr/>
-        </p:nvSpPr>
-        <p:spPr>
-          <a:xfrm>
-            <a:off x="548640" y="5852160"/>
-            <a:ext cx="10972800" cy="502920"/>
-          </a:xfrm>
-          <a:prstGeom prst="roundRect">
-            <a:avLst/>
-          </a:prstGeom>
-          <a:solidFill>
-            <a:srgbClr val="C5501A"/>
-          </a:solidFill>
-          <a:ln>
-            <a:noFill/>
-          </a:ln>
-          <a:effectLst/>
-        </p:spPr>
-        <p:style>
-          <a:lnRef idx="1">
-            <a:schemeClr val="accent1"/>
-          </a:lnRef>
-          <a:fillRef idx="3">
-            <a:schemeClr val="accent1"/>
-          </a:fillRef>
-          <a:effectRef idx="2">
-            <a:schemeClr val="accent1"/>
-          </a:effectRef>
-          <a:fontRef idx="minor">
-            <a:schemeClr val="lt1"/>
-          </a:fontRef>
-        </p:style>
-        <p:txBody>
-          <a:bodyPr rtlCol="0" anchor="ctr" wrap="square" lIns="137160" rIns="137160" tIns="91440" bIns="91440"/>
-          <a:lstStyle/>
-          <a:p>
-            <a:pPr algn="ctr"/>
-            <a:r>
-              <a:rPr b="1" sz="1200">
-                <a:solidFill>
-                  <a:srgbClr val="FFFFFF"/>
-                </a:solidFill>
-                <a:latin typeface="Calibri"/>
-              </a:rPr>
-              <a:t>→ La sociedad D NO califica como 'sociedad de profesionales' por incumplimiento de requisitos formales esenciales (Circulares N°21/1991 y N°50/2020 del SII).</a:t>
-            </a:r>
-          </a:p>
-        </p:txBody>
-      </p:sp>
-      <p:sp>
-        <p:nvSpPr>
-          <p:cNvPr id="20" name="Rounded Rectangle 19"/>
-          <p:cNvSpPr/>
-          <p:nvPr/>
-        </p:nvSpPr>
-        <p:spPr>
-          <a:xfrm>
-            <a:off x="274320" y="6492240"/>
-            <a:ext cx="11887200" cy="274320"/>
-          </a:xfrm>
-          <a:prstGeom prst="roundRect">
-            <a:avLst/>
-          </a:prstGeom>
-          <a:noFill/>
-          <a:ln>
-            <a:noFill/>
-          </a:ln>
-          <a:effectLst/>
-        </p:spPr>
-        <p:style>
-          <a:lnRef idx="1">
-            <a:schemeClr val="accent1"/>
-          </a:lnRef>
-          <a:fillRef idx="3">
-            <a:schemeClr val="accent1"/>
-          </a:fillRef>
-          <a:effectRef idx="2">
-            <a:schemeClr val="accent1"/>
-          </a:effectRef>
-          <a:fontRef idx="minor">
-            <a:schemeClr val="lt1"/>
-          </a:fontRef>
-        </p:style>
-        <p:txBody>
-          <a:bodyPr rtlCol="0" anchor="t" wrap="square" lIns="137160" rIns="137160" tIns="91440" bIns="91440"/>
-          <a:lstStyle/>
-          <a:p>
-            <a:pPr algn="r"/>
-            <a:r>
-              <a:rPr b="0" sz="800">
-                <a:solidFill>
-                  <a:srgbClr val="555555"/>
-                </a:solidFill>
-                <a:latin typeface="Calibri"/>
-              </a:rPr>
-              <a:t>Caso 86 · Magíster Dirección Tributaria UVM · Slide 3</a:t>
+              <a:rPr sz="1000" b="0" i="0">
+                <a:solidFill>
+                  <a:srgbClr val="8899AA"/>
+                </a:solidFill>
+                <a:latin typeface="Calibri"/>
+              </a:rPr>
+              <a:t>Magíster en Dirección Tributaria — Universidad Viña del Mar</a:t>
             </a:r>
           </a:p>
         </p:txBody>
@@ -4157,13 +3654,13 @@
           <a:p>
             <a:pPr algn="l"/>
             <a:r>
-              <a:rPr sz="3200" b="0" i="0">
+              <a:rPr sz="3000" b="0" i="0">
                 <a:solidFill>
                   <a:srgbClr val="1C1C1C"/>
                 </a:solidFill>
                 <a:latin typeface="Cambria"/>
               </a:rPr>
-              <a:t>Normas Generales Antielusivas (NGA)</a:t>
+              <a:t>El Esquema — ¿Qué hace Pedro?</a:t>
             </a:r>
           </a:p>
         </p:txBody>
@@ -4176,8 +3673,8 @@
         </p:nvSpPr>
         <p:spPr>
           <a:xfrm>
-            <a:off x="548640" y="1005840"/>
-            <a:ext cx="10972800" cy="457200"/>
+            <a:off x="548640" y="960120"/>
+            <a:ext cx="10972800" cy="411480"/>
           </a:xfrm>
           <a:prstGeom prst="roundRect">
             <a:avLst/>
@@ -4214,7 +3711,7 @@
                 </a:solidFill>
                 <a:latin typeface="Calibri"/>
               </a:rPr>
-              <a:t>Arts. 4 bis, 4 ter, 4 quáter y 4 quinquies del Código Tributario</a:t>
+              <a:t>Caso real: un médico y la sociedad que reduce su IGC</a:t>
             </a:r>
           </a:p>
         </p:txBody>
@@ -4227,8 +3724,8 @@
         </p:nvSpPr>
         <p:spPr>
           <a:xfrm>
-            <a:off x="548640" y="1691640"/>
-            <a:ext cx="5532120" cy="457200"/>
+            <a:off x="548640" y="1554480"/>
+            <a:ext cx="5303520" cy="1645920"/>
           </a:xfrm>
           <a:prstGeom prst="roundRect">
             <a:avLst/>
@@ -4256,39 +3753,415 @@
           </a:fontRef>
         </p:style>
         <p:txBody>
+          <a:bodyPr rtlCol="0" anchor="t" wrap="square" lIns="137160" rIns="137160" tIns="91440" bIns="91440"/>
+          <a:lstStyle/>
+          <a:p>
+            <a:pPr algn="l"/>
+            <a:r>
+              <a:rPr b="0" sz="1150">
+                <a:solidFill>
+                  <a:srgbClr val="FFFFFF"/>
+                </a:solidFill>
+                <a:latin typeface="Calibri"/>
+              </a:rPr>
+              <a:t>PEDRO — Médico cirujano</a:t>
+            </a:r>
+          </a:p>
+          <a:p>
+            <a:pPr algn="l"/>
+            <a:r>
+              <a:rPr b="0" sz="1150">
+                <a:solidFill>
+                  <a:srgbClr val="FFFFFF"/>
+                </a:solidFill>
+                <a:latin typeface="Calibri"/>
+              </a:rPr>
+              <a:t>• Ingresos anuales: $300 millones en honorarios</a:t>
+            </a:r>
+          </a:p>
+          <a:p>
+            <a:pPr algn="l"/>
+            <a:r>
+              <a:rPr b="0" sz="1150">
+                <a:solidFill>
+                  <a:srgbClr val="FFFFFF"/>
+                </a:solidFill>
+                <a:latin typeface="Calibri"/>
+              </a:rPr>
+              <a:t>• Sin esquema: tributa en tramo IGC ≈ 40%</a:t>
+            </a:r>
+          </a:p>
+          <a:p>
+            <a:pPr algn="l"/>
+            <a:r>
+              <a:rPr b="0" sz="1150">
+                <a:solidFill>
+                  <a:srgbClr val="FFFFFF"/>
+                </a:solidFill>
+                <a:latin typeface="Calibri"/>
+              </a:rPr>
+              <a:t>• Motivación: reducir impuesto fraccionando el ingreso en varios RUT</a:t>
+            </a:r>
+          </a:p>
+        </p:txBody>
+      </p:sp>
+      <p:sp>
+        <p:nvSpPr>
+          <p:cNvPr id="6" name="Rounded Rectangle 5"/>
+          <p:cNvSpPr/>
+          <p:nvPr/>
+        </p:nvSpPr>
+        <p:spPr>
+          <a:xfrm>
+            <a:off x="5989320" y="1554480"/>
+            <a:ext cx="5623560" cy="1645920"/>
+          </a:xfrm>
+          <a:prstGeom prst="roundRect">
+            <a:avLst/>
+          </a:prstGeom>
+          <a:solidFill>
+            <a:srgbClr val="2B2B2B"/>
+          </a:solidFill>
+          <a:ln>
+            <a:noFill/>
+          </a:ln>
+          <a:effectLst/>
+        </p:spPr>
+        <p:style>
+          <a:lnRef idx="1">
+            <a:schemeClr val="accent1"/>
+          </a:lnRef>
+          <a:fillRef idx="3">
+            <a:schemeClr val="accent1"/>
+          </a:fillRef>
+          <a:effectRef idx="2">
+            <a:schemeClr val="accent1"/>
+          </a:effectRef>
+          <a:fontRef idx="minor">
+            <a:schemeClr val="lt1"/>
+          </a:fontRef>
+        </p:style>
+        <p:txBody>
+          <a:bodyPr rtlCol="0" anchor="t" wrap="square" lIns="137160" rIns="137160" tIns="91440" bIns="91440"/>
+          <a:lstStyle/>
+          <a:p>
+            <a:pPr algn="l"/>
+            <a:r>
+              <a:rPr b="0" sz="1150">
+                <a:solidFill>
+                  <a:srgbClr val="FFFFFF"/>
+                </a:solidFill>
+                <a:latin typeface="Calibri"/>
+              </a:rPr>
+              <a:t>EL MECANISMO</a:t>
+            </a:r>
+          </a:p>
+          <a:p>
+            <a:pPr algn="l"/>
+            <a:r>
+              <a:rPr b="0" sz="1150">
+                <a:solidFill>
+                  <a:srgbClr val="FFFFFF"/>
+                </a:solidFill>
+                <a:latin typeface="Calibri"/>
+              </a:rPr>
+              <a:t>Pedro constituye con su señora y su cuñado</a:t>
+            </a:r>
+          </a:p>
+          <a:p>
+            <a:pPr algn="l"/>
+            <a:r>
+              <a:rPr b="0" sz="1150">
+                <a:solidFill>
+                  <a:srgbClr val="FFFFFF"/>
+                </a:solidFill>
+                <a:latin typeface="Calibri"/>
+              </a:rPr>
+              <a:t>la 'Sociedad Médica Ltda.' — 33% c/u</a:t>
+            </a:r>
+          </a:p>
+          <a:p>
+            <a:pPr algn="l"/>
+            <a:r>
+              <a:rPr b="0" sz="1150">
+                <a:solidFill>
+                  <a:srgbClr val="FFFFFF"/>
+                </a:solidFill>
+                <a:latin typeface="Calibri"/>
+              </a:rPr>
+              <a:t/>
+            </a:r>
+          </a:p>
+          <a:p>
+            <a:pPr algn="l"/>
+            <a:r>
+              <a:rPr b="0" sz="1150">
+                <a:solidFill>
+                  <a:srgbClr val="FFFFFF"/>
+                </a:solidFill>
+                <a:latin typeface="Calibri"/>
+              </a:rPr>
+              <a:t>Los $300 MM entran a la sociedad</a:t>
+            </a:r>
+          </a:p>
+          <a:p>
+            <a:pPr algn="l"/>
+            <a:r>
+              <a:rPr b="0" sz="1150">
+                <a:solidFill>
+                  <a:srgbClr val="FFFFFF"/>
+                </a:solidFill>
+                <a:latin typeface="Calibri"/>
+              </a:rPr>
+              <a:t>y se reparten en 3 partes iguales:</a:t>
+            </a:r>
+          </a:p>
+          <a:p>
+            <a:pPr algn="l"/>
+            <a:r>
+              <a:rPr b="0" sz="1150">
+                <a:solidFill>
+                  <a:srgbClr val="FFFFFF"/>
+                </a:solidFill>
+                <a:latin typeface="Calibri"/>
+              </a:rPr>
+              <a:t>→ Pedro, la señora y el cuñado</a:t>
+            </a:r>
+          </a:p>
+          <a:p>
+            <a:pPr algn="l"/>
+            <a:r>
+              <a:rPr b="0" sz="1150">
+                <a:solidFill>
+                  <a:srgbClr val="FFFFFF"/>
+                </a:solidFill>
+                <a:latin typeface="Calibri"/>
+              </a:rPr>
+              <a:t>declaran $100 MM cada uno</a:t>
+            </a:r>
+          </a:p>
+        </p:txBody>
+      </p:sp>
+      <p:sp>
+        <p:nvSpPr>
+          <p:cNvPr id="7" name="Rounded Rectangle 6"/>
+          <p:cNvSpPr/>
+          <p:nvPr/>
+        </p:nvSpPr>
+        <p:spPr>
+          <a:xfrm>
+            <a:off x="548640" y="3429000"/>
+            <a:ext cx="2194560" cy="1188720"/>
+          </a:xfrm>
+          <a:prstGeom prst="roundRect">
+            <a:avLst/>
+          </a:prstGeom>
+          <a:solidFill>
+            <a:srgbClr val="8EB4E3"/>
+          </a:solidFill>
+          <a:ln>
+            <a:noFill/>
+          </a:ln>
+          <a:effectLst/>
+        </p:spPr>
+        <p:style>
+          <a:lnRef idx="1">
+            <a:schemeClr val="accent1"/>
+          </a:lnRef>
+          <a:fillRef idx="3">
+            <a:schemeClr val="accent1"/>
+          </a:fillRef>
+          <a:effectRef idx="2">
+            <a:schemeClr val="accent1"/>
+          </a:effectRef>
+          <a:fontRef idx="minor">
+            <a:schemeClr val="lt1"/>
+          </a:fontRef>
+        </p:style>
+        <p:txBody>
           <a:bodyPr rtlCol="0" anchor="ctr" wrap="square" lIns="137160" rIns="137160" tIns="91440" bIns="91440"/>
           <a:lstStyle/>
           <a:p>
-            <a:pPr algn="l"/>
-            <a:r>
-              <a:rPr b="1" sz="1250">
+            <a:pPr algn="ctr"/>
+            <a:r>
+              <a:rPr b="1" sz="1200">
+                <a:solidFill>
+                  <a:srgbClr val="1A3A5C"/>
+                </a:solidFill>
+                <a:latin typeface="Calibri"/>
+              </a:rPr>
+              <a:t>Pedro</a:t>
+            </a:r>
+          </a:p>
+          <a:p>
+            <a:pPr algn="ctr"/>
+            <a:r>
+              <a:rPr b="1" sz="1200">
+                <a:solidFill>
+                  <a:srgbClr val="1A3A5C"/>
+                </a:solidFill>
+                <a:latin typeface="Calibri"/>
+              </a:rPr>
+              <a:t>médico</a:t>
+            </a:r>
+          </a:p>
+          <a:p>
+            <a:pPr algn="ctr"/>
+            <a:r>
+              <a:rPr b="1" sz="1200">
+                <a:solidFill>
+                  <a:srgbClr val="1A3A5C"/>
+                </a:solidFill>
+                <a:latin typeface="Calibri"/>
+              </a:rPr>
+              <a:t>$300 MM</a:t>
+            </a:r>
+          </a:p>
+        </p:txBody>
+      </p:sp>
+      <p:sp>
+        <p:nvSpPr>
+          <p:cNvPr id="8" name="Rounded Rectangle 7"/>
+          <p:cNvSpPr/>
+          <p:nvPr/>
+        </p:nvSpPr>
+        <p:spPr>
+          <a:xfrm>
+            <a:off x="2834640" y="3794760"/>
+            <a:ext cx="1920240" cy="457200"/>
+          </a:xfrm>
+          <a:prstGeom prst="roundRect">
+            <a:avLst/>
+          </a:prstGeom>
+          <a:noFill/>
+          <a:ln>
+            <a:noFill/>
+          </a:ln>
+          <a:effectLst/>
+        </p:spPr>
+        <p:style>
+          <a:lnRef idx="1">
+            <a:schemeClr val="accent1"/>
+          </a:lnRef>
+          <a:fillRef idx="3">
+            <a:schemeClr val="accent1"/>
+          </a:fillRef>
+          <a:effectRef idx="2">
+            <a:schemeClr val="accent1"/>
+          </a:effectRef>
+          <a:fontRef idx="minor">
+            <a:schemeClr val="lt1"/>
+          </a:fontRef>
+        </p:style>
+        <p:txBody>
+          <a:bodyPr rtlCol="0" anchor="t" wrap="square" lIns="137160" rIns="137160" tIns="91440" bIns="91440"/>
+          <a:lstStyle/>
+          <a:p>
+            <a:pPr algn="ctr"/>
+            <a:r>
+              <a:rPr b="0" sz="1200">
+                <a:solidFill>
+                  <a:srgbClr val="555555"/>
+                </a:solidFill>
+                <a:latin typeface="Calibri"/>
+              </a:rPr>
+              <a:t>→  honorarios  →</a:t>
+            </a:r>
+          </a:p>
+        </p:txBody>
+      </p:sp>
+      <p:sp>
+        <p:nvSpPr>
+          <p:cNvPr id="9" name="Rounded Rectangle 8"/>
+          <p:cNvSpPr/>
+          <p:nvPr/>
+        </p:nvSpPr>
+        <p:spPr>
+          <a:xfrm>
+            <a:off x="4846320" y="3429000"/>
+            <a:ext cx="2286000" cy="1188720"/>
+          </a:xfrm>
+          <a:prstGeom prst="roundRect">
+            <a:avLst/>
+          </a:prstGeom>
+          <a:solidFill>
+            <a:srgbClr val="1A3A5C"/>
+          </a:solidFill>
+          <a:ln>
+            <a:noFill/>
+          </a:ln>
+          <a:effectLst/>
+        </p:spPr>
+        <p:style>
+          <a:lnRef idx="1">
+            <a:schemeClr val="accent1"/>
+          </a:lnRef>
+          <a:fillRef idx="3">
+            <a:schemeClr val="accent1"/>
+          </a:fillRef>
+          <a:effectRef idx="2">
+            <a:schemeClr val="accent1"/>
+          </a:effectRef>
+          <a:fontRef idx="minor">
+            <a:schemeClr val="lt1"/>
+          </a:fontRef>
+        </p:style>
+        <p:txBody>
+          <a:bodyPr rtlCol="0" anchor="ctr" wrap="square" lIns="137160" rIns="137160" tIns="91440" bIns="91440"/>
+          <a:lstStyle/>
+          <a:p>
+            <a:pPr algn="ctr"/>
+            <a:r>
+              <a:rPr b="1" sz="1200">
                 <a:solidFill>
                   <a:srgbClr val="FFFFFF"/>
                 </a:solidFill>
                 <a:latin typeface="Calibri"/>
               </a:rPr>
-              <a:t>Art. 4 bis CT  ·  Principio de Buena Fe</a:t>
-            </a:r>
-          </a:p>
-        </p:txBody>
-      </p:sp>
-      <p:sp>
-        <p:nvSpPr>
-          <p:cNvPr id="6" name="Rounded Rectangle 5"/>
-          <p:cNvSpPr/>
-          <p:nvPr/>
-        </p:nvSpPr>
-        <p:spPr>
-          <a:xfrm>
-            <a:off x="548640" y="2148840"/>
-            <a:ext cx="5532120" cy="1828800"/>
+              <a:t>Sociedad</a:t>
+            </a:r>
+          </a:p>
+          <a:p>
+            <a:pPr algn="ctr"/>
+            <a:r>
+              <a:rPr b="1" sz="1200">
+                <a:solidFill>
+                  <a:srgbClr val="FFFFFF"/>
+                </a:solidFill>
+                <a:latin typeface="Calibri"/>
+              </a:rPr>
+              <a:t>Médica Ltda.</a:t>
+            </a:r>
+          </a:p>
+          <a:p>
+            <a:pPr algn="ctr"/>
+            <a:r>
+              <a:rPr b="1" sz="1200">
+                <a:solidFill>
+                  <a:srgbClr val="FFFFFF"/>
+                </a:solidFill>
+                <a:latin typeface="Calibri"/>
+              </a:rPr>
+              <a:t>(vehículo)</a:t>
+            </a:r>
+          </a:p>
+        </p:txBody>
+      </p:sp>
+      <p:sp>
+        <p:nvSpPr>
+          <p:cNvPr id="10" name="Rounded Rectangle 9"/>
+          <p:cNvSpPr/>
+          <p:nvPr/>
+        </p:nvSpPr>
+        <p:spPr>
+          <a:xfrm>
+            <a:off x="7223760" y="3794760"/>
+            <a:ext cx="1920240" cy="457200"/>
           </a:xfrm>
           <a:prstGeom prst="roundRect">
             <a:avLst/>
           </a:prstGeom>
-          <a:solidFill>
-            <a:srgbClr val="F4F6F9"/>
-          </a:solidFill>
+          <a:noFill/>
           <a:ln>
             <a:noFill/>
           </a:ln>
@@ -4312,29 +4185,29 @@
           <a:bodyPr rtlCol="0" anchor="t" wrap="square" lIns="137160" rIns="137160" tIns="91440" bIns="91440"/>
           <a:lstStyle/>
           <a:p>
-            <a:pPr algn="l"/>
-            <a:r>
-              <a:rPr b="0" sz="1050">
-                <a:solidFill>
-                  <a:srgbClr val="1C1C1C"/>
-                </a:solidFill>
-                <a:latin typeface="Calibri"/>
-              </a:rPr>
-              <a:t>Las obligaciones tributarias nacen y se exigen conforme a la NATURALEZA JURÍDICA de los hechos, cualquiera sea la forma o denominación que las partes les den.</a:t>
-            </a:r>
-          </a:p>
-        </p:txBody>
-      </p:sp>
-      <p:sp>
-        <p:nvSpPr>
-          <p:cNvPr id="7" name="Rounded Rectangle 6"/>
-          <p:cNvSpPr/>
-          <p:nvPr/>
-        </p:nvSpPr>
-        <p:spPr>
-          <a:xfrm>
-            <a:off x="6217920" y="1691640"/>
-            <a:ext cx="5532120" cy="457200"/>
+            <a:pPr algn="ctr"/>
+            <a:r>
+              <a:rPr b="0" sz="1200">
+                <a:solidFill>
+                  <a:srgbClr val="555555"/>
+                </a:solidFill>
+                <a:latin typeface="Calibri"/>
+              </a:rPr>
+              <a:t>→  divide 1/3  →</a:t>
+            </a:r>
+          </a:p>
+        </p:txBody>
+      </p:sp>
+      <p:sp>
+        <p:nvSpPr>
+          <p:cNvPr id="11" name="Rounded Rectangle 10"/>
+          <p:cNvSpPr/>
+          <p:nvPr/>
+        </p:nvSpPr>
+        <p:spPr>
+          <a:xfrm>
+            <a:off x="9235440" y="3429000"/>
+            <a:ext cx="2651760" cy="1188720"/>
           </a:xfrm>
           <a:prstGeom prst="roundRect">
             <a:avLst/>
@@ -4365,36 +4238,152 @@
           <a:bodyPr rtlCol="0" anchor="ctr" wrap="square" lIns="137160" rIns="137160" tIns="91440" bIns="91440"/>
           <a:lstStyle/>
           <a:p>
-            <a:pPr algn="l"/>
-            <a:r>
-              <a:rPr b="1" sz="1250">
+            <a:pPr algn="ctr"/>
+            <a:r>
+              <a:rPr b="1" sz="1100">
                 <a:solidFill>
                   <a:srgbClr val="FFFFFF"/>
                 </a:solidFill>
                 <a:latin typeface="Calibri"/>
               </a:rPr>
-              <a:t>Art. 4 ter CT  ·  ABUSO de las formas jurídicas</a:t>
-            </a:r>
-          </a:p>
-        </p:txBody>
-      </p:sp>
-      <p:sp>
-        <p:nvSpPr>
-          <p:cNvPr id="8" name="Rounded Rectangle 7"/>
-          <p:cNvSpPr/>
-          <p:nvPr/>
-        </p:nvSpPr>
-        <p:spPr>
-          <a:xfrm>
-            <a:off x="6217920" y="2148840"/>
-            <a:ext cx="5532120" cy="1828800"/>
+              <a:t>Pedro · Señora · Cuñado</a:t>
+            </a:r>
+          </a:p>
+          <a:p>
+            <a:pPr algn="ctr"/>
+            <a:r>
+              <a:rPr b="1" sz="1100">
+                <a:solidFill>
+                  <a:srgbClr val="FFFFFF"/>
+                </a:solidFill>
+                <a:latin typeface="Calibri"/>
+              </a:rPr>
+              <a:t>$100 MM c/u → IGC tramo bajo</a:t>
+            </a:r>
+          </a:p>
+        </p:txBody>
+      </p:sp>
+      <p:sp>
+        <p:nvSpPr>
+          <p:cNvPr id="12" name="Rounded Rectangle 11"/>
+          <p:cNvSpPr/>
+          <p:nvPr/>
+        </p:nvSpPr>
+        <p:spPr>
+          <a:xfrm>
+            <a:off x="548640" y="4846320"/>
+            <a:ext cx="11064240" cy="685800"/>
           </a:xfrm>
           <a:prstGeom prst="roundRect">
             <a:avLst/>
           </a:prstGeom>
           <a:solidFill>
-            <a:srgbClr val="F4F6F9"/>
-          </a:solidFill>
+            <a:srgbClr val="C5501A"/>
+          </a:solidFill>
+          <a:ln>
+            <a:noFill/>
+          </a:ln>
+          <a:effectLst/>
+        </p:spPr>
+        <p:style>
+          <a:lnRef idx="1">
+            <a:schemeClr val="accent1"/>
+          </a:lnRef>
+          <a:fillRef idx="3">
+            <a:schemeClr val="accent1"/>
+          </a:fillRef>
+          <a:effectRef idx="2">
+            <a:schemeClr val="accent1"/>
+          </a:effectRef>
+          <a:fontRef idx="minor">
+            <a:schemeClr val="lt1"/>
+          </a:fontRef>
+        </p:style>
+        <p:txBody>
+          <a:bodyPr rtlCol="0" anchor="ctr" wrap="square" lIns="137160" rIns="137160" tIns="91440" bIns="91440"/>
+          <a:lstStyle/>
+          <a:p>
+            <a:pPr algn="ctr"/>
+            <a:r>
+              <a:rPr b="1" sz="1200">
+                <a:solidFill>
+                  <a:srgbClr val="FFFFFF"/>
+                </a:solidFill>
+                <a:latin typeface="Calibri"/>
+              </a:rPr>
+              <a:t>RESULTADO: lo que debería tributar al ~40% queda dividido en tres tramos más bajos. El ahorro puede superar los $20–40 MM al año. La señora y el cuñado NUNCA trabajaron para la sociedad.</a:t>
+            </a:r>
+          </a:p>
+        </p:txBody>
+      </p:sp>
+      <p:sp>
+        <p:nvSpPr>
+          <p:cNvPr id="13" name="Rounded Rectangle 12"/>
+          <p:cNvSpPr/>
+          <p:nvPr/>
+        </p:nvSpPr>
+        <p:spPr>
+          <a:xfrm>
+            <a:off x="548640" y="5669280"/>
+            <a:ext cx="11064240" cy="457200"/>
+          </a:xfrm>
+          <a:prstGeom prst="roundRect">
+            <a:avLst/>
+          </a:prstGeom>
+          <a:solidFill>
+            <a:srgbClr val="2B2B2B"/>
+          </a:solidFill>
+          <a:ln>
+            <a:noFill/>
+          </a:ln>
+          <a:effectLst/>
+        </p:spPr>
+        <p:style>
+          <a:lnRef idx="1">
+            <a:schemeClr val="accent1"/>
+          </a:lnRef>
+          <a:fillRef idx="3">
+            <a:schemeClr val="accent1"/>
+          </a:fillRef>
+          <a:effectRef idx="2">
+            <a:schemeClr val="accent1"/>
+          </a:effectRef>
+          <a:fontRef idx="minor">
+            <a:schemeClr val="lt1"/>
+          </a:fontRef>
+        </p:style>
+        <p:txBody>
+          <a:bodyPr rtlCol="0" anchor="ctr" wrap="square" lIns="137160" rIns="137160" tIns="91440" bIns="91440"/>
+          <a:lstStyle/>
+          <a:p>
+            <a:pPr algn="ctr"/>
+            <a:r>
+              <a:rPr b="1" sz="1400">
+                <a:solidFill>
+                  <a:srgbClr val="E6A43C"/>
+                </a:solidFill>
+                <a:latin typeface="Calibri"/>
+              </a:rPr>
+              <a:t>¿Es esto legal? ¿Abuso o planificación legítima?</a:t>
+            </a:r>
+          </a:p>
+        </p:txBody>
+      </p:sp>
+      <p:sp>
+        <p:nvSpPr>
+          <p:cNvPr id="14" name="Rounded Rectangle 13"/>
+          <p:cNvSpPr/>
+          <p:nvPr/>
+        </p:nvSpPr>
+        <p:spPr>
+          <a:xfrm>
+            <a:off x="274320" y="6492240"/>
+            <a:ext cx="11612880" cy="274320"/>
+          </a:xfrm>
+          <a:prstGeom prst="roundRect">
+            <a:avLst/>
+          </a:prstGeom>
+          <a:noFill/>
           <a:ln>
             <a:noFill/>
           </a:ln>
@@ -4418,269 +4407,6 @@
           <a:bodyPr rtlCol="0" anchor="t" wrap="square" lIns="137160" rIns="137160" tIns="91440" bIns="91440"/>
           <a:lstStyle/>
           <a:p>
-            <a:pPr algn="l"/>
-            <a:r>
-              <a:rPr b="0" sz="1050">
-                <a:solidFill>
-                  <a:srgbClr val="1C1C1C"/>
-                </a:solidFill>
-                <a:latin typeface="Calibri"/>
-              </a:rPr>
-              <a:t>Existe abuso cuando se evita total o parcialmente el hecho gravado, o se disminuye la base imponible, mediante actos que no produzcan efectos jurídicos o económicos relevantes distintos de los meramente tributarios.</a:t>
-            </a:r>
-          </a:p>
-        </p:txBody>
-      </p:sp>
-      <p:sp>
-        <p:nvSpPr>
-          <p:cNvPr id="9" name="Rounded Rectangle 8"/>
-          <p:cNvSpPr/>
-          <p:nvPr/>
-        </p:nvSpPr>
-        <p:spPr>
-          <a:xfrm>
-            <a:off x="548640" y="4160520"/>
-            <a:ext cx="5532120" cy="457200"/>
-          </a:xfrm>
-          <a:prstGeom prst="roundRect">
-            <a:avLst/>
-          </a:prstGeom>
-          <a:solidFill>
-            <a:srgbClr val="C5501A"/>
-          </a:solidFill>
-          <a:ln>
-            <a:noFill/>
-          </a:ln>
-          <a:effectLst/>
-        </p:spPr>
-        <p:style>
-          <a:lnRef idx="1">
-            <a:schemeClr val="accent1"/>
-          </a:lnRef>
-          <a:fillRef idx="3">
-            <a:schemeClr val="accent1"/>
-          </a:fillRef>
-          <a:effectRef idx="2">
-            <a:schemeClr val="accent1"/>
-          </a:effectRef>
-          <a:fontRef idx="minor">
-            <a:schemeClr val="lt1"/>
-          </a:fontRef>
-        </p:style>
-        <p:txBody>
-          <a:bodyPr rtlCol="0" anchor="ctr" wrap="square" lIns="137160" rIns="137160" tIns="91440" bIns="91440"/>
-          <a:lstStyle/>
-          <a:p>
-            <a:pPr algn="l"/>
-            <a:r>
-              <a:rPr b="1" sz="1250">
-                <a:solidFill>
-                  <a:srgbClr val="FFFFFF"/>
-                </a:solidFill>
-                <a:latin typeface="Calibri"/>
-              </a:rPr>
-              <a:t>Art. 4 quáter CT  ·  SIMULACIÓN</a:t>
-            </a:r>
-          </a:p>
-        </p:txBody>
-      </p:sp>
-      <p:sp>
-        <p:nvSpPr>
-          <p:cNvPr id="10" name="Rounded Rectangle 9"/>
-          <p:cNvSpPr/>
-          <p:nvPr/>
-        </p:nvSpPr>
-        <p:spPr>
-          <a:xfrm>
-            <a:off x="548640" y="4617720"/>
-            <a:ext cx="5532120" cy="1828800"/>
-          </a:xfrm>
-          <a:prstGeom prst="roundRect">
-            <a:avLst/>
-          </a:prstGeom>
-          <a:solidFill>
-            <a:srgbClr val="F4F6F9"/>
-          </a:solidFill>
-          <a:ln>
-            <a:noFill/>
-          </a:ln>
-          <a:effectLst/>
-        </p:spPr>
-        <p:style>
-          <a:lnRef idx="1">
-            <a:schemeClr val="accent1"/>
-          </a:lnRef>
-          <a:fillRef idx="3">
-            <a:schemeClr val="accent1"/>
-          </a:fillRef>
-          <a:effectRef idx="2">
-            <a:schemeClr val="accent1"/>
-          </a:effectRef>
-          <a:fontRef idx="minor">
-            <a:schemeClr val="lt1"/>
-          </a:fontRef>
-        </p:style>
-        <p:txBody>
-          <a:bodyPr rtlCol="0" anchor="t" wrap="square" lIns="137160" rIns="137160" tIns="91440" bIns="91440"/>
-          <a:lstStyle/>
-          <a:p>
-            <a:pPr algn="l"/>
-            <a:r>
-              <a:rPr b="0" sz="1050">
-                <a:solidFill>
-                  <a:srgbClr val="1C1C1C"/>
-                </a:solidFill>
-                <a:latin typeface="Calibri"/>
-              </a:rPr>
-              <a:t>Habrá simulación cuando los actos disimulen la configuración del hecho gravado o la naturaleza de los elementos de la obligación tributaria, o su monto o data de nacimiento.</a:t>
-            </a:r>
-          </a:p>
-        </p:txBody>
-      </p:sp>
-      <p:sp>
-        <p:nvSpPr>
-          <p:cNvPr id="11" name="Rounded Rectangle 10"/>
-          <p:cNvSpPr/>
-          <p:nvPr/>
-        </p:nvSpPr>
-        <p:spPr>
-          <a:xfrm>
-            <a:off x="6217920" y="4160520"/>
-            <a:ext cx="5532120" cy="457200"/>
-          </a:xfrm>
-          <a:prstGeom prst="roundRect">
-            <a:avLst/>
-          </a:prstGeom>
-          <a:solidFill>
-            <a:srgbClr val="1A6B3C"/>
-          </a:solidFill>
-          <a:ln>
-            <a:noFill/>
-          </a:ln>
-          <a:effectLst/>
-        </p:spPr>
-        <p:style>
-          <a:lnRef idx="1">
-            <a:schemeClr val="accent1"/>
-          </a:lnRef>
-          <a:fillRef idx="3">
-            <a:schemeClr val="accent1"/>
-          </a:fillRef>
-          <a:effectRef idx="2">
-            <a:schemeClr val="accent1"/>
-          </a:effectRef>
-          <a:fontRef idx="minor">
-            <a:schemeClr val="lt1"/>
-          </a:fontRef>
-        </p:style>
-        <p:txBody>
-          <a:bodyPr rtlCol="0" anchor="ctr" wrap="square" lIns="137160" rIns="137160" tIns="91440" bIns="91440"/>
-          <a:lstStyle/>
-          <a:p>
-            <a:pPr algn="l"/>
-            <a:r>
-              <a:rPr b="1" sz="1250">
-                <a:solidFill>
-                  <a:srgbClr val="FFFFFF"/>
-                </a:solidFill>
-                <a:latin typeface="Calibri"/>
-              </a:rPr>
-              <a:t>Art. 4 quinquies CT  ·  Procedimiento</a:t>
-            </a:r>
-          </a:p>
-        </p:txBody>
-      </p:sp>
-      <p:sp>
-        <p:nvSpPr>
-          <p:cNvPr id="12" name="Rounded Rectangle 11"/>
-          <p:cNvSpPr/>
-          <p:nvPr/>
-        </p:nvSpPr>
-        <p:spPr>
-          <a:xfrm>
-            <a:off x="6217920" y="4617720"/>
-            <a:ext cx="5532120" cy="1828800"/>
-          </a:xfrm>
-          <a:prstGeom prst="roundRect">
-            <a:avLst/>
-          </a:prstGeom>
-          <a:solidFill>
-            <a:srgbClr val="F4F6F9"/>
-          </a:solidFill>
-          <a:ln>
-            <a:noFill/>
-          </a:ln>
-          <a:effectLst/>
-        </p:spPr>
-        <p:style>
-          <a:lnRef idx="1">
-            <a:schemeClr val="accent1"/>
-          </a:lnRef>
-          <a:fillRef idx="3">
-            <a:schemeClr val="accent1"/>
-          </a:fillRef>
-          <a:effectRef idx="2">
-            <a:schemeClr val="accent1"/>
-          </a:effectRef>
-          <a:fontRef idx="minor">
-            <a:schemeClr val="lt1"/>
-          </a:fontRef>
-        </p:style>
-        <p:txBody>
-          <a:bodyPr rtlCol="0" anchor="t" wrap="square" lIns="137160" rIns="137160" tIns="91440" bIns="91440"/>
-          <a:lstStyle/>
-          <a:p>
-            <a:pPr algn="l"/>
-            <a:r>
-              <a:rPr b="0" sz="1050">
-                <a:solidFill>
-                  <a:srgbClr val="1C1C1C"/>
-                </a:solidFill>
-                <a:latin typeface="Calibri"/>
-              </a:rPr>
-              <a:t>La existencia de abuso o simulación será declarada por el Tribunal Tributario y Aduanero, a requerimiento del Director del SII. Circular N°65 de 2015 imparte instrucciones.</a:t>
-            </a:r>
-          </a:p>
-        </p:txBody>
-      </p:sp>
-      <p:sp>
-        <p:nvSpPr>
-          <p:cNvPr id="13" name="Rounded Rectangle 12"/>
-          <p:cNvSpPr/>
-          <p:nvPr/>
-        </p:nvSpPr>
-        <p:spPr>
-          <a:xfrm>
-            <a:off x="274320" y="6492240"/>
-            <a:ext cx="11887200" cy="274320"/>
-          </a:xfrm>
-          <a:prstGeom prst="roundRect">
-            <a:avLst/>
-          </a:prstGeom>
-          <a:noFill/>
-          <a:ln>
-            <a:noFill/>
-          </a:ln>
-          <a:effectLst/>
-        </p:spPr>
-        <p:style>
-          <a:lnRef idx="1">
-            <a:schemeClr val="accent1"/>
-          </a:lnRef>
-          <a:fillRef idx="3">
-            <a:schemeClr val="accent1"/>
-          </a:fillRef>
-          <a:effectRef idx="2">
-            <a:schemeClr val="accent1"/>
-          </a:effectRef>
-          <a:fontRef idx="minor">
-            <a:schemeClr val="lt1"/>
-          </a:fontRef>
-        </p:style>
-        <p:txBody>
-          <a:bodyPr rtlCol="0" anchor="t" wrap="square" lIns="137160" rIns="137160" tIns="91440" bIns="91440"/>
-          <a:lstStyle/>
-          <a:p>
             <a:pPr algn="r"/>
             <a:r>
               <a:rPr b="0" sz="800">
@@ -4689,7 +4415,7 @@
                 </a:solidFill>
                 <a:latin typeface="Calibri"/>
               </a:rPr>
-              <a:t>Caso 86 · Magíster Dirección Tributaria UVM · Slide 4</a:t>
+              <a:t>Caso 86 · Catálogo SII 2025 · Grupo 4 — Magíster Dirección Tributaria UVM  |  4</a:t>
             </a:r>
           </a:p>
         </p:txBody>
@@ -4780,13 +4506,13 @@
           <a:p>
             <a:pPr algn="l"/>
             <a:r>
-              <a:rPr sz="3200" b="0" i="0">
+              <a:rPr sz="3000" b="0" i="0">
                 <a:solidFill>
                   <a:srgbClr val="1C1C1C"/>
                 </a:solidFill>
                 <a:latin typeface="Cambria"/>
               </a:rPr>
-              <a:t>¿Abuso o Simulación?</a:t>
+              <a:t>¿La Sociedad D es Legítima?</a:t>
             </a:r>
           </a:p>
         </p:txBody>
@@ -4799,8 +4525,8 @@
         </p:nvSpPr>
         <p:spPr>
           <a:xfrm>
-            <a:off x="548640" y="1005840"/>
-            <a:ext cx="10972800" cy="457200"/>
+            <a:off x="548640" y="960120"/>
+            <a:ext cx="10972800" cy="411480"/>
           </a:xfrm>
           <a:prstGeom prst="roundRect">
             <a:avLst/>
@@ -4837,7 +4563,7 @@
                 </a:solidFill>
                 <a:latin typeface="Calibri"/>
               </a:rPr>
-              <a:t>Calificación jurídica del esquema</a:t>
+              <a:t>Requisitos legales vs. realidad del Caso 86</a:t>
             </a:r>
           </a:p>
         </p:txBody>
@@ -4850,13 +4576,490 @@
         </p:nvSpPr>
         <p:spPr>
           <a:xfrm>
-            <a:off x="548640" y="1691640"/>
-            <a:ext cx="5623560" cy="502920"/>
+            <a:off x="548640" y="1554480"/>
+            <a:ext cx="6858000" cy="457200"/>
           </a:xfrm>
           <a:prstGeom prst="roundRect">
             <a:avLst/>
           </a:prstGeom>
           <a:solidFill>
+            <a:srgbClr val="1A3A5C"/>
+          </a:solidFill>
+          <a:ln>
+            <a:noFill/>
+          </a:ln>
+          <a:effectLst/>
+        </p:spPr>
+        <p:style>
+          <a:lnRef idx="1">
+            <a:schemeClr val="accent1"/>
+          </a:lnRef>
+          <a:fillRef idx="3">
+            <a:schemeClr val="accent1"/>
+          </a:fillRef>
+          <a:effectRef idx="2">
+            <a:schemeClr val="accent1"/>
+          </a:effectRef>
+          <a:fontRef idx="minor">
+            <a:schemeClr val="lt1"/>
+          </a:fontRef>
+        </p:style>
+        <p:txBody>
+          <a:bodyPr rtlCol="0" anchor="ctr" wrap="square" lIns="137160" rIns="137160" tIns="91440" bIns="91440"/>
+          <a:lstStyle/>
+          <a:p>
+            <a:pPr algn="ctr"/>
+            <a:r>
+              <a:rPr b="1" sz="1150">
+                <a:solidFill>
+                  <a:srgbClr val="FFFFFF"/>
+                </a:solidFill>
+                <a:latin typeface="Calibri"/>
+              </a:rPr>
+              <a:t>Requisito (Circ. N°21/1991 y N°50/2020)</a:t>
+            </a:r>
+          </a:p>
+        </p:txBody>
+      </p:sp>
+      <p:sp>
+        <p:nvSpPr>
+          <p:cNvPr id="6" name="Rounded Rectangle 5"/>
+          <p:cNvSpPr/>
+          <p:nvPr/>
+        </p:nvSpPr>
+        <p:spPr>
+          <a:xfrm>
+            <a:off x="7498079" y="1554480"/>
+            <a:ext cx="4114800" cy="457200"/>
+          </a:xfrm>
+          <a:prstGeom prst="roundRect">
+            <a:avLst/>
+          </a:prstGeom>
+          <a:solidFill>
+            <a:srgbClr val="1A3A5C"/>
+          </a:solidFill>
+          <a:ln>
+            <a:noFill/>
+          </a:ln>
+          <a:effectLst/>
+        </p:spPr>
+        <p:style>
+          <a:lnRef idx="1">
+            <a:schemeClr val="accent1"/>
+          </a:lnRef>
+          <a:fillRef idx="3">
+            <a:schemeClr val="accent1"/>
+          </a:fillRef>
+          <a:effectRef idx="2">
+            <a:schemeClr val="accent1"/>
+          </a:effectRef>
+          <a:fontRef idx="minor">
+            <a:schemeClr val="lt1"/>
+          </a:fontRef>
+        </p:style>
+        <p:txBody>
+          <a:bodyPr rtlCol="0" anchor="ctr" wrap="square" lIns="137160" rIns="137160" tIns="91440" bIns="91440"/>
+          <a:lstStyle/>
+          <a:p>
+            <a:pPr algn="ctr"/>
+            <a:r>
+              <a:rPr b="1" sz="1150">
+                <a:solidFill>
+                  <a:srgbClr val="FFFFFF"/>
+                </a:solidFill>
+                <a:latin typeface="Calibri"/>
+              </a:rPr>
+              <a:t>¿Cumple el Caso 86?</a:t>
+            </a:r>
+          </a:p>
+        </p:txBody>
+      </p:sp>
+      <p:sp>
+        <p:nvSpPr>
+          <p:cNvPr id="7" name="Rounded Rectangle 6"/>
+          <p:cNvSpPr/>
+          <p:nvPr/>
+        </p:nvSpPr>
+        <p:spPr>
+          <a:xfrm>
+            <a:off x="548640" y="2057400"/>
+            <a:ext cx="6858000" cy="621792"/>
+          </a:xfrm>
+          <a:prstGeom prst="roundRect">
+            <a:avLst/>
+          </a:prstGeom>
+          <a:solidFill>
+            <a:srgbClr val="F4F6F9"/>
+          </a:solidFill>
+          <a:ln>
+            <a:noFill/>
+          </a:ln>
+          <a:effectLst/>
+        </p:spPr>
+        <p:style>
+          <a:lnRef idx="1">
+            <a:schemeClr val="accent1"/>
+          </a:lnRef>
+          <a:fillRef idx="3">
+            <a:schemeClr val="accent1"/>
+          </a:fillRef>
+          <a:effectRef idx="2">
+            <a:schemeClr val="accent1"/>
+          </a:effectRef>
+          <a:fontRef idx="minor">
+            <a:schemeClr val="lt1"/>
+          </a:fontRef>
+        </p:style>
+        <p:txBody>
+          <a:bodyPr rtlCol="0" anchor="ctr" wrap="square" lIns="137160" rIns="137160" tIns="91440" bIns="91440"/>
+          <a:lstStyle/>
+          <a:p>
+            <a:pPr algn="l"/>
+            <a:r>
+              <a:rPr b="0" sz="1050">
+                <a:solidFill>
+                  <a:srgbClr val="1C1C1C"/>
+                </a:solidFill>
+                <a:latin typeface="Calibri"/>
+              </a:rPr>
+              <a:t>Sociedad de personas</a:t>
+            </a:r>
+          </a:p>
+        </p:txBody>
+      </p:sp>
+      <p:sp>
+        <p:nvSpPr>
+          <p:cNvPr id="8" name="Rounded Rectangle 7"/>
+          <p:cNvSpPr/>
+          <p:nvPr/>
+        </p:nvSpPr>
+        <p:spPr>
+          <a:xfrm>
+            <a:off x="7498079" y="2057400"/>
+            <a:ext cx="4114800" cy="621792"/>
+          </a:xfrm>
+          <a:prstGeom prst="roundRect">
+            <a:avLst/>
+          </a:prstGeom>
+          <a:solidFill>
+            <a:srgbClr val="1A6B3C"/>
+          </a:solidFill>
+          <a:ln>
+            <a:noFill/>
+          </a:ln>
+          <a:effectLst/>
+        </p:spPr>
+        <p:style>
+          <a:lnRef idx="1">
+            <a:schemeClr val="accent1"/>
+          </a:lnRef>
+          <a:fillRef idx="3">
+            <a:schemeClr val="accent1"/>
+          </a:fillRef>
+          <a:effectRef idx="2">
+            <a:schemeClr val="accent1"/>
+          </a:effectRef>
+          <a:fontRef idx="minor">
+            <a:schemeClr val="lt1"/>
+          </a:fontRef>
+        </p:style>
+        <p:txBody>
+          <a:bodyPr rtlCol="0" anchor="ctr" wrap="square" lIns="137160" rIns="137160" tIns="91440" bIns="91440"/>
+          <a:lstStyle/>
+          <a:p>
+            <a:pPr algn="ctr"/>
+            <a:r>
+              <a:rPr b="1" sz="1100">
+                <a:solidFill>
+                  <a:srgbClr val="FFFFFF"/>
+                </a:solidFill>
+                <a:latin typeface="Calibri"/>
+              </a:rPr>
+              <a:t>✔  Cumple</a:t>
+            </a:r>
+          </a:p>
+        </p:txBody>
+      </p:sp>
+      <p:sp>
+        <p:nvSpPr>
+          <p:cNvPr id="9" name="Rounded Rectangle 8"/>
+          <p:cNvSpPr/>
+          <p:nvPr/>
+        </p:nvSpPr>
+        <p:spPr>
+          <a:xfrm>
+            <a:off x="548640" y="2724912"/>
+            <a:ext cx="6858000" cy="621792"/>
+          </a:xfrm>
+          <a:prstGeom prst="roundRect">
+            <a:avLst/>
+          </a:prstGeom>
+          <a:solidFill>
+            <a:srgbClr val="F4F6F9"/>
+          </a:solidFill>
+          <a:ln>
+            <a:noFill/>
+          </a:ln>
+          <a:effectLst/>
+        </p:spPr>
+        <p:style>
+          <a:lnRef idx="1">
+            <a:schemeClr val="accent1"/>
+          </a:lnRef>
+          <a:fillRef idx="3">
+            <a:schemeClr val="accent1"/>
+          </a:fillRef>
+          <a:effectRef idx="2">
+            <a:schemeClr val="accent1"/>
+          </a:effectRef>
+          <a:fontRef idx="minor">
+            <a:schemeClr val="lt1"/>
+          </a:fontRef>
+        </p:style>
+        <p:txBody>
+          <a:bodyPr rtlCol="0" anchor="ctr" wrap="square" lIns="137160" rIns="137160" tIns="91440" bIns="91440"/>
+          <a:lstStyle/>
+          <a:p>
+            <a:pPr algn="l"/>
+            <a:r>
+              <a:rPr b="0" sz="1050">
+                <a:solidFill>
+                  <a:srgbClr val="1C1C1C"/>
+                </a:solidFill>
+                <a:latin typeface="Calibri"/>
+              </a:rPr>
+              <a:t>Objeto exclusivo: servicios profesionales</a:t>
+            </a:r>
+          </a:p>
+        </p:txBody>
+      </p:sp>
+      <p:sp>
+        <p:nvSpPr>
+          <p:cNvPr id="10" name="Rounded Rectangle 9"/>
+          <p:cNvSpPr/>
+          <p:nvPr/>
+        </p:nvSpPr>
+        <p:spPr>
+          <a:xfrm>
+            <a:off x="7498079" y="2724912"/>
+            <a:ext cx="4114800" cy="621792"/>
+          </a:xfrm>
+          <a:prstGeom prst="roundRect">
+            <a:avLst/>
+          </a:prstGeom>
+          <a:solidFill>
+            <a:srgbClr val="1A6B3C"/>
+          </a:solidFill>
+          <a:ln>
+            <a:noFill/>
+          </a:ln>
+          <a:effectLst/>
+        </p:spPr>
+        <p:style>
+          <a:lnRef idx="1">
+            <a:schemeClr val="accent1"/>
+          </a:lnRef>
+          <a:fillRef idx="3">
+            <a:schemeClr val="accent1"/>
+          </a:fillRef>
+          <a:effectRef idx="2">
+            <a:schemeClr val="accent1"/>
+          </a:effectRef>
+          <a:fontRef idx="minor">
+            <a:schemeClr val="lt1"/>
+          </a:fontRef>
+        </p:style>
+        <p:txBody>
+          <a:bodyPr rtlCol="0" anchor="ctr" wrap="square" lIns="137160" rIns="137160" tIns="91440" bIns="91440"/>
+          <a:lstStyle/>
+          <a:p>
+            <a:pPr algn="ctr"/>
+            <a:r>
+              <a:rPr b="1" sz="1100">
+                <a:solidFill>
+                  <a:srgbClr val="FFFFFF"/>
+                </a:solidFill>
+                <a:latin typeface="Calibri"/>
+              </a:rPr>
+              <a:t>✔  Cumple</a:t>
+            </a:r>
+          </a:p>
+        </p:txBody>
+      </p:sp>
+      <p:sp>
+        <p:nvSpPr>
+          <p:cNvPr id="11" name="Rounded Rectangle 10"/>
+          <p:cNvSpPr/>
+          <p:nvPr/>
+        </p:nvSpPr>
+        <p:spPr>
+          <a:xfrm>
+            <a:off x="548640" y="3392424"/>
+            <a:ext cx="6858000" cy="621792"/>
+          </a:xfrm>
+          <a:prstGeom prst="roundRect">
+            <a:avLst/>
+          </a:prstGeom>
+          <a:solidFill>
+            <a:srgbClr val="F4F6F9"/>
+          </a:solidFill>
+          <a:ln>
+            <a:noFill/>
+          </a:ln>
+          <a:effectLst/>
+        </p:spPr>
+        <p:style>
+          <a:lnRef idx="1">
+            <a:schemeClr val="accent1"/>
+          </a:lnRef>
+          <a:fillRef idx="3">
+            <a:schemeClr val="accent1"/>
+          </a:fillRef>
+          <a:effectRef idx="2">
+            <a:schemeClr val="accent1"/>
+          </a:effectRef>
+          <a:fontRef idx="minor">
+            <a:schemeClr val="lt1"/>
+          </a:fontRef>
+        </p:style>
+        <p:txBody>
+          <a:bodyPr rtlCol="0" anchor="ctr" wrap="square" lIns="137160" rIns="137160" tIns="91440" bIns="91440"/>
+          <a:lstStyle/>
+          <a:p>
+            <a:pPr algn="l"/>
+            <a:r>
+              <a:rPr b="0" sz="1050">
+                <a:solidFill>
+                  <a:srgbClr val="1C1C1C"/>
+                </a:solidFill>
+                <a:latin typeface="Calibri"/>
+              </a:rPr>
+              <a:t>Servicios prestados por los socios</a:t>
+            </a:r>
+          </a:p>
+        </p:txBody>
+      </p:sp>
+      <p:sp>
+        <p:nvSpPr>
+          <p:cNvPr id="12" name="Rounded Rectangle 11"/>
+          <p:cNvSpPr/>
+          <p:nvPr/>
+        </p:nvSpPr>
+        <p:spPr>
+          <a:xfrm>
+            <a:off x="7498079" y="3392424"/>
+            <a:ext cx="4114800" cy="621792"/>
+          </a:xfrm>
+          <a:prstGeom prst="roundRect">
+            <a:avLst/>
+          </a:prstGeom>
+          <a:solidFill>
+            <a:srgbClr val="E6A43C"/>
+          </a:solidFill>
+          <a:ln>
+            <a:noFill/>
+          </a:ln>
+          <a:effectLst/>
+        </p:spPr>
+        <p:style>
+          <a:lnRef idx="1">
+            <a:schemeClr val="accent1"/>
+          </a:lnRef>
+          <a:fillRef idx="3">
+            <a:schemeClr val="accent1"/>
+          </a:fillRef>
+          <a:effectRef idx="2">
+            <a:schemeClr val="accent1"/>
+          </a:effectRef>
+          <a:fontRef idx="minor">
+            <a:schemeClr val="lt1"/>
+          </a:fontRef>
+        </p:style>
+        <p:txBody>
+          <a:bodyPr rtlCol="0" anchor="ctr" wrap="square" lIns="137160" rIns="137160" tIns="91440" bIns="91440"/>
+          <a:lstStyle/>
+          <a:p>
+            <a:pPr algn="ctr"/>
+            <a:r>
+              <a:rPr b="1" sz="1100">
+                <a:solidFill>
+                  <a:srgbClr val="FFFFFF"/>
+                </a:solidFill>
+                <a:latin typeface="Calibri"/>
+              </a:rPr>
+              <a:t>✔  Solo A (Pedro) trabaja</a:t>
+            </a:r>
+          </a:p>
+        </p:txBody>
+      </p:sp>
+      <p:sp>
+        <p:nvSpPr>
+          <p:cNvPr id="13" name="Rounded Rectangle 12"/>
+          <p:cNvSpPr/>
+          <p:nvPr/>
+        </p:nvSpPr>
+        <p:spPr>
+          <a:xfrm>
+            <a:off x="548640" y="4059936"/>
+            <a:ext cx="6858000" cy="621792"/>
+          </a:xfrm>
+          <a:prstGeom prst="roundRect">
+            <a:avLst/>
+          </a:prstGeom>
+          <a:solidFill>
+            <a:srgbClr val="F4F6F9"/>
+          </a:solidFill>
+          <a:ln>
+            <a:noFill/>
+          </a:ln>
+          <a:effectLst/>
+        </p:spPr>
+        <p:style>
+          <a:lnRef idx="1">
+            <a:schemeClr val="accent1"/>
+          </a:lnRef>
+          <a:fillRef idx="3">
+            <a:schemeClr val="accent1"/>
+          </a:fillRef>
+          <a:effectRef idx="2">
+            <a:schemeClr val="accent1"/>
+          </a:effectRef>
+          <a:fontRef idx="minor">
+            <a:schemeClr val="lt1"/>
+          </a:fontRef>
+        </p:style>
+        <p:txBody>
+          <a:bodyPr rtlCol="0" anchor="ctr" wrap="square" lIns="137160" rIns="137160" tIns="91440" bIns="91440"/>
+          <a:lstStyle/>
+          <a:p>
+            <a:pPr algn="l"/>
+            <a:r>
+              <a:rPr b="0" sz="1050">
+                <a:solidFill>
+                  <a:srgbClr val="1C1C1C"/>
+                </a:solidFill>
+                <a:latin typeface="Calibri"/>
+              </a:rPr>
+              <a:t>TODOS los socios ejercen su profesión para la sociedad</a:t>
+            </a:r>
+          </a:p>
+        </p:txBody>
+      </p:sp>
+      <p:sp>
+        <p:nvSpPr>
+          <p:cNvPr id="14" name="Rounded Rectangle 13"/>
+          <p:cNvSpPr/>
+          <p:nvPr/>
+        </p:nvSpPr>
+        <p:spPr>
+          <a:xfrm>
+            <a:off x="7498079" y="4059936"/>
+            <a:ext cx="4114800" cy="621792"/>
+          </a:xfrm>
+          <a:prstGeom prst="roundRect">
+            <a:avLst/>
+          </a:prstGeom>
+          <a:solidFill>
             <a:srgbClr val="B03030"/>
           </a:solidFill>
           <a:ln>
@@ -4884,34 +5087,191 @@
           <a:p>
             <a:pPr algn="ctr"/>
             <a:r>
-              <a:rPr b="1" sz="1400">
+              <a:rPr b="1" sz="1100">
                 <a:solidFill>
                   <a:srgbClr val="FFFFFF"/>
                 </a:solidFill>
                 <a:latin typeface="Calibri"/>
               </a:rPr>
-              <a:t>ABUSO  (Art. 4 ter CT)</a:t>
-            </a:r>
-          </a:p>
-        </p:txBody>
-      </p:sp>
-      <p:sp>
-        <p:nvSpPr>
-          <p:cNvPr id="6" name="Rounded Rectangle 5"/>
-          <p:cNvSpPr/>
-          <p:nvPr/>
-        </p:nvSpPr>
-        <p:spPr>
-          <a:xfrm>
-            <a:off x="548640" y="2240280"/>
-            <a:ext cx="5623560" cy="4023360"/>
+              <a:t>✖  NO — B y C no prestan servicios</a:t>
+            </a:r>
+          </a:p>
+        </p:txBody>
+      </p:sp>
+      <p:sp>
+        <p:nvSpPr>
+          <p:cNvPr id="15" name="Rounded Rectangle 14"/>
+          <p:cNvSpPr/>
+          <p:nvPr/>
+        </p:nvSpPr>
+        <p:spPr>
+          <a:xfrm>
+            <a:off x="548640" y="4727448"/>
+            <a:ext cx="6858000" cy="621792"/>
           </a:xfrm>
           <a:prstGeom prst="roundRect">
             <a:avLst/>
           </a:prstGeom>
           <a:solidFill>
-            <a:srgbClr val="FDEAEA"/>
-          </a:solidFill>
+            <a:srgbClr val="F4F6F9"/>
+          </a:solidFill>
+          <a:ln>
+            <a:noFill/>
+          </a:ln>
+          <a:effectLst/>
+        </p:spPr>
+        <p:style>
+          <a:lnRef idx="1">
+            <a:schemeClr val="accent1"/>
+          </a:lnRef>
+          <a:fillRef idx="3">
+            <a:schemeClr val="accent1"/>
+          </a:fillRef>
+          <a:effectRef idx="2">
+            <a:schemeClr val="accent1"/>
+          </a:effectRef>
+          <a:fontRef idx="minor">
+            <a:schemeClr val="lt1"/>
+          </a:fontRef>
+        </p:style>
+        <p:txBody>
+          <a:bodyPr rtlCol="0" anchor="ctr" wrap="square" lIns="137160" rIns="137160" tIns="91440" bIns="91440"/>
+          <a:lstStyle/>
+          <a:p>
+            <a:pPr algn="l"/>
+            <a:r>
+              <a:rPr b="0" sz="1050">
+                <a:solidFill>
+                  <a:srgbClr val="1C1C1C"/>
+                </a:solidFill>
+                <a:latin typeface="Calibri"/>
+              </a:rPr>
+              <a:t>No se acepta que un socio solo aporte capital sin trabajar</a:t>
+            </a:r>
+          </a:p>
+        </p:txBody>
+      </p:sp>
+      <p:sp>
+        <p:nvSpPr>
+          <p:cNvPr id="16" name="Rounded Rectangle 15"/>
+          <p:cNvSpPr/>
+          <p:nvPr/>
+        </p:nvSpPr>
+        <p:spPr>
+          <a:xfrm>
+            <a:off x="7498079" y="4727448"/>
+            <a:ext cx="4114800" cy="621792"/>
+          </a:xfrm>
+          <a:prstGeom prst="roundRect">
+            <a:avLst/>
+          </a:prstGeom>
+          <a:solidFill>
+            <a:srgbClr val="B03030"/>
+          </a:solidFill>
+          <a:ln>
+            <a:noFill/>
+          </a:ln>
+          <a:effectLst/>
+        </p:spPr>
+        <p:style>
+          <a:lnRef idx="1">
+            <a:schemeClr val="accent1"/>
+          </a:lnRef>
+          <a:fillRef idx="3">
+            <a:schemeClr val="accent1"/>
+          </a:fillRef>
+          <a:effectRef idx="2">
+            <a:schemeClr val="accent1"/>
+          </a:effectRef>
+          <a:fontRef idx="minor">
+            <a:schemeClr val="lt1"/>
+          </a:fontRef>
+        </p:style>
+        <p:txBody>
+          <a:bodyPr rtlCol="0" anchor="ctr" wrap="square" lIns="137160" rIns="137160" tIns="91440" bIns="91440"/>
+          <a:lstStyle/>
+          <a:p>
+            <a:pPr algn="ctr"/>
+            <a:r>
+              <a:rPr b="1" sz="1100">
+                <a:solidFill>
+                  <a:srgbClr val="FFFFFF"/>
+                </a:solidFill>
+                <a:latin typeface="Calibri"/>
+              </a:rPr>
+              <a:t>✖  NO — B y C solo aportan capital</a:t>
+            </a:r>
+          </a:p>
+        </p:txBody>
+      </p:sp>
+      <p:sp>
+        <p:nvSpPr>
+          <p:cNvPr id="17" name="Rounded Rectangle 16"/>
+          <p:cNvSpPr/>
+          <p:nvPr/>
+        </p:nvSpPr>
+        <p:spPr>
+          <a:xfrm>
+            <a:off x="548640" y="5806440"/>
+            <a:ext cx="11064240" cy="594360"/>
+          </a:xfrm>
+          <a:prstGeom prst="roundRect">
+            <a:avLst/>
+          </a:prstGeom>
+          <a:solidFill>
+            <a:srgbClr val="B03030"/>
+          </a:solidFill>
+          <a:ln>
+            <a:noFill/>
+          </a:ln>
+          <a:effectLst/>
+        </p:spPr>
+        <p:style>
+          <a:lnRef idx="1">
+            <a:schemeClr val="accent1"/>
+          </a:lnRef>
+          <a:fillRef idx="3">
+            <a:schemeClr val="accent1"/>
+          </a:fillRef>
+          <a:effectRef idx="2">
+            <a:schemeClr val="accent1"/>
+          </a:effectRef>
+          <a:fontRef idx="minor">
+            <a:schemeClr val="lt1"/>
+          </a:fontRef>
+        </p:style>
+        <p:txBody>
+          <a:bodyPr rtlCol="0" anchor="ctr" wrap="square" lIns="137160" rIns="137160" tIns="91440" bIns="91440"/>
+          <a:lstStyle/>
+          <a:p>
+            <a:pPr algn="ctr"/>
+            <a:r>
+              <a:rPr b="1" sz="1250">
+                <a:solidFill>
+                  <a:srgbClr val="FFFFFF"/>
+                </a:solidFill>
+                <a:latin typeface="Calibri"/>
+              </a:rPr>
+              <a:t>La sociedad D NO califica como 'sociedad de profesionales'. Sin esa calificación, el esquema cae: no hay amparo legal para la distribución desigual del IGC.</a:t>
+            </a:r>
+          </a:p>
+        </p:txBody>
+      </p:sp>
+      <p:sp>
+        <p:nvSpPr>
+          <p:cNvPr id="18" name="Rounded Rectangle 17"/>
+          <p:cNvSpPr/>
+          <p:nvPr/>
+        </p:nvSpPr>
+        <p:spPr>
+          <a:xfrm>
+            <a:off x="274320" y="6492240"/>
+            <a:ext cx="11612880" cy="274320"/>
+          </a:xfrm>
+          <a:prstGeom prst="roundRect">
+            <a:avLst/>
+          </a:prstGeom>
+          <a:noFill/>
           <a:ln>
             <a:noFill/>
           </a:ln>
@@ -4935,408 +5295,6 @@
           <a:bodyPr rtlCol="0" anchor="t" wrap="square" lIns="137160" rIns="137160" tIns="91440" bIns="91440"/>
           <a:lstStyle/>
           <a:p>
-            <a:pPr algn="l"/>
-            <a:r>
-              <a:rPr b="0" sz="1100">
-                <a:solidFill>
-                  <a:srgbClr val="1C1C1C"/>
-                </a:solidFill>
-                <a:latin typeface="Calibri"/>
-              </a:rPr>
-              <a:t>✔ Los actos son REALES, pero la FORMA es inapropiada.</a:t>
-            </a:r>
-          </a:p>
-          <a:p>
-            <a:pPr algn="l"/>
-            <a:r>
-              <a:rPr b="0" sz="1100">
-                <a:solidFill>
-                  <a:srgbClr val="1C1C1C"/>
-                </a:solidFill>
-                <a:latin typeface="Calibri"/>
-              </a:rPr>
-              <a:t/>
-            </a:r>
-          </a:p>
-          <a:p>
-            <a:pPr algn="l"/>
-            <a:r>
-              <a:rPr b="0" sz="1100">
-                <a:solidFill>
-                  <a:srgbClr val="1C1C1C"/>
-                </a:solidFill>
-                <a:latin typeface="Calibri"/>
-              </a:rPr>
-              <a:t>✔ La sociedad D existe formalmente, hay socios, capital aportado, utilidades repartidas.</a:t>
-            </a:r>
-          </a:p>
-          <a:p>
-            <a:pPr algn="l"/>
-            <a:r>
-              <a:rPr b="0" sz="1100">
-                <a:solidFill>
-                  <a:srgbClr val="1C1C1C"/>
-                </a:solidFill>
-                <a:latin typeface="Calibri"/>
-              </a:rPr>
-              <a:t/>
-            </a:r>
-          </a:p>
-          <a:p>
-            <a:pPr algn="l"/>
-            <a:r>
-              <a:rPr b="0" sz="1100">
-                <a:solidFill>
-                  <a:srgbClr val="1C1C1C"/>
-                </a:solidFill>
-                <a:latin typeface="Calibri"/>
-              </a:rPr>
-              <a:t>✔ El abuso radica en utilizar una figura societaria que carece de sustancia económica para B y C: solo aportan capital insignificante.</a:t>
-            </a:r>
-          </a:p>
-          <a:p>
-            <a:pPr algn="l"/>
-            <a:r>
-              <a:rPr b="0" sz="1100">
-                <a:solidFill>
-                  <a:srgbClr val="1C1C1C"/>
-                </a:solidFill>
-                <a:latin typeface="Calibri"/>
-              </a:rPr>
-              <a:t/>
-            </a:r>
-          </a:p>
-          <a:p>
-            <a:pPr algn="l"/>
-            <a:r>
-              <a:rPr b="0" sz="1100">
-                <a:solidFill>
-                  <a:srgbClr val="1C1C1C"/>
-                </a:solidFill>
-                <a:latin typeface="Calibri"/>
-              </a:rPr>
-              <a:t>✔ Único efecto relevante distinto del tributario: NO HAY uno.</a:t>
-            </a:r>
-          </a:p>
-          <a:p>
-            <a:pPr algn="l"/>
-            <a:r>
-              <a:rPr b="0" sz="1100">
-                <a:solidFill>
-                  <a:srgbClr val="1C1C1C"/>
-                </a:solidFill>
-                <a:latin typeface="Calibri"/>
-              </a:rPr>
-              <a:t/>
-            </a:r>
-          </a:p>
-          <a:p>
-            <a:pPr algn="l"/>
-            <a:r>
-              <a:rPr b="0" sz="1100">
-                <a:solidFill>
-                  <a:srgbClr val="1C1C1C"/>
-                </a:solidFill>
-                <a:latin typeface="Calibri"/>
-              </a:rPr>
-              <a:t>✔ El esquema reduce artificialmente la progresión del IGC de A.</a:t>
-            </a:r>
-          </a:p>
-        </p:txBody>
-      </p:sp>
-      <p:sp>
-        <p:nvSpPr>
-          <p:cNvPr id="7" name="Rounded Rectangle 6"/>
-          <p:cNvSpPr/>
-          <p:nvPr/>
-        </p:nvSpPr>
-        <p:spPr>
-          <a:xfrm>
-            <a:off x="6355080" y="1691640"/>
-            <a:ext cx="5623560" cy="502920"/>
-          </a:xfrm>
-          <a:prstGeom prst="roundRect">
-            <a:avLst/>
-          </a:prstGeom>
-          <a:solidFill>
-            <a:srgbClr val="C5501A"/>
-          </a:solidFill>
-          <a:ln>
-            <a:noFill/>
-          </a:ln>
-          <a:effectLst/>
-        </p:spPr>
-        <p:style>
-          <a:lnRef idx="1">
-            <a:schemeClr val="accent1"/>
-          </a:lnRef>
-          <a:fillRef idx="3">
-            <a:schemeClr val="accent1"/>
-          </a:fillRef>
-          <a:effectRef idx="2">
-            <a:schemeClr val="accent1"/>
-          </a:effectRef>
-          <a:fontRef idx="minor">
-            <a:schemeClr val="lt1"/>
-          </a:fontRef>
-        </p:style>
-        <p:txBody>
-          <a:bodyPr rtlCol="0" anchor="ctr" wrap="square" lIns="137160" rIns="137160" tIns="91440" bIns="91440"/>
-          <a:lstStyle/>
-          <a:p>
-            <a:pPr algn="ctr"/>
-            <a:r>
-              <a:rPr b="1" sz="1400">
-                <a:solidFill>
-                  <a:srgbClr val="FFFFFF"/>
-                </a:solidFill>
-                <a:latin typeface="Calibri"/>
-              </a:rPr>
-              <a:t>SIMULACIÓN  (Art. 4 quáter CT)</a:t>
-            </a:r>
-          </a:p>
-        </p:txBody>
-      </p:sp>
-      <p:sp>
-        <p:nvSpPr>
-          <p:cNvPr id="8" name="Rounded Rectangle 7"/>
-          <p:cNvSpPr/>
-          <p:nvPr/>
-        </p:nvSpPr>
-        <p:spPr>
-          <a:xfrm>
-            <a:off x="6355080" y="2240280"/>
-            <a:ext cx="5623560" cy="4023360"/>
-          </a:xfrm>
-          <a:prstGeom prst="roundRect">
-            <a:avLst/>
-          </a:prstGeom>
-          <a:solidFill>
-            <a:srgbClr val="FDF0E6"/>
-          </a:solidFill>
-          <a:ln>
-            <a:noFill/>
-          </a:ln>
-          <a:effectLst/>
-        </p:spPr>
-        <p:style>
-          <a:lnRef idx="1">
-            <a:schemeClr val="accent1"/>
-          </a:lnRef>
-          <a:fillRef idx="3">
-            <a:schemeClr val="accent1"/>
-          </a:fillRef>
-          <a:effectRef idx="2">
-            <a:schemeClr val="accent1"/>
-          </a:effectRef>
-          <a:fontRef idx="minor">
-            <a:schemeClr val="lt1"/>
-          </a:fontRef>
-        </p:style>
-        <p:txBody>
-          <a:bodyPr rtlCol="0" anchor="t" wrap="square" lIns="137160" rIns="137160" tIns="91440" bIns="91440"/>
-          <a:lstStyle/>
-          <a:p>
-            <a:pPr algn="l"/>
-            <a:r>
-              <a:rPr b="0" sz="1100">
-                <a:solidFill>
-                  <a:srgbClr val="1C1C1C"/>
-                </a:solidFill>
-                <a:latin typeface="Calibri"/>
-              </a:rPr>
-              <a:t>✖ Supondría que los actos jurídicos disimulan algo distinto de lo declarado.</a:t>
-            </a:r>
-          </a:p>
-          <a:p>
-            <a:pPr algn="l"/>
-            <a:r>
-              <a:rPr b="0" sz="1100">
-                <a:solidFill>
-                  <a:srgbClr val="1C1C1C"/>
-                </a:solidFill>
-                <a:latin typeface="Calibri"/>
-              </a:rPr>
-              <a:t/>
-            </a:r>
-          </a:p>
-          <a:p>
-            <a:pPr algn="l"/>
-            <a:r>
-              <a:rPr b="0" sz="1100">
-                <a:solidFill>
-                  <a:srgbClr val="1C1C1C"/>
-                </a:solidFill>
-                <a:latin typeface="Calibri"/>
-              </a:rPr>
-              <a:t>✖ En el caso, NO hay un acto disimulado: los participantes son realmente socios.</a:t>
-            </a:r>
-          </a:p>
-          <a:p>
-            <a:pPr algn="l"/>
-            <a:r>
-              <a:rPr b="0" sz="1100">
-                <a:solidFill>
-                  <a:srgbClr val="1C1C1C"/>
-                </a:solidFill>
-                <a:latin typeface="Calibri"/>
-              </a:rPr>
-              <a:t/>
-            </a:r>
-          </a:p>
-          <a:p>
-            <a:pPr algn="l"/>
-            <a:r>
-              <a:rPr b="0" sz="1100">
-                <a:solidFill>
-                  <a:srgbClr val="1C1C1C"/>
-                </a:solidFill>
-                <a:latin typeface="Calibri"/>
-              </a:rPr>
-              <a:t>✖ No hay divergencia consciente entre voluntad real y declarada.</a:t>
-            </a:r>
-          </a:p>
-          <a:p>
-            <a:pPr algn="l"/>
-            <a:r>
-              <a:rPr b="0" sz="1100">
-                <a:solidFill>
-                  <a:srgbClr val="1C1C1C"/>
-                </a:solidFill>
-                <a:latin typeface="Calibri"/>
-              </a:rPr>
-              <a:t/>
-            </a:r>
-          </a:p>
-          <a:p>
-            <a:pPr algn="l"/>
-            <a:r>
-              <a:rPr b="0" sz="1100">
-                <a:solidFill>
-                  <a:srgbClr val="1C1C1C"/>
-                </a:solidFill>
-                <a:latin typeface="Calibri"/>
-              </a:rPr>
-              <a:t>✖ El SII y la doctrina entienden simulación como existencia de un acto secreto que oculta otro.</a:t>
-            </a:r>
-          </a:p>
-          <a:p>
-            <a:pPr algn="l"/>
-            <a:r>
-              <a:rPr b="0" sz="1100">
-                <a:solidFill>
-                  <a:srgbClr val="1C1C1C"/>
-                </a:solidFill>
-                <a:latin typeface="Calibri"/>
-              </a:rPr>
-              <a:t/>
-            </a:r>
-          </a:p>
-          <a:p>
-            <a:pPr algn="l"/>
-            <a:r>
-              <a:rPr b="0" sz="1100">
-                <a:solidFill>
-                  <a:srgbClr val="1C1C1C"/>
-                </a:solidFill>
-                <a:latin typeface="Calibri"/>
-              </a:rPr>
-              <a:t>✖ Se descarta esta figura para el Caso 86.</a:t>
-            </a:r>
-          </a:p>
-        </p:txBody>
-      </p:sp>
-      <p:sp>
-        <p:nvSpPr>
-          <p:cNvPr id="9" name="Rounded Rectangle 8"/>
-          <p:cNvSpPr/>
-          <p:nvPr/>
-        </p:nvSpPr>
-        <p:spPr>
-          <a:xfrm>
-            <a:off x="548640" y="6355080"/>
-            <a:ext cx="11064240" cy="457200"/>
-          </a:xfrm>
-          <a:prstGeom prst="roundRect">
-            <a:avLst/>
-          </a:prstGeom>
-          <a:solidFill>
-            <a:srgbClr val="1A3A5C"/>
-          </a:solidFill>
-          <a:ln>
-            <a:noFill/>
-          </a:ln>
-          <a:effectLst/>
-        </p:spPr>
-        <p:style>
-          <a:lnRef idx="1">
-            <a:schemeClr val="accent1"/>
-          </a:lnRef>
-          <a:fillRef idx="3">
-            <a:schemeClr val="accent1"/>
-          </a:fillRef>
-          <a:effectRef idx="2">
-            <a:schemeClr val="accent1"/>
-          </a:effectRef>
-          <a:fontRef idx="minor">
-            <a:schemeClr val="lt1"/>
-          </a:fontRef>
-        </p:style>
-        <p:txBody>
-          <a:bodyPr rtlCol="0" anchor="ctr" wrap="square" lIns="137160" rIns="137160" tIns="91440" bIns="91440"/>
-          <a:lstStyle/>
-          <a:p>
-            <a:pPr algn="ctr"/>
-            <a:r>
-              <a:rPr b="1" sz="1300">
-                <a:solidFill>
-                  <a:srgbClr val="FFFFFF"/>
-                </a:solidFill>
-                <a:latin typeface="Calibri"/>
-              </a:rPr>
-              <a:t>POSICIÓN DEL GRUPO:  el Caso 86 configura ABUSO DE FORMAS JURÍDICAS (Art. 4 ter CT)</a:t>
-            </a:r>
-          </a:p>
-        </p:txBody>
-      </p:sp>
-      <p:sp>
-        <p:nvSpPr>
-          <p:cNvPr id="10" name="Rounded Rectangle 9"/>
-          <p:cNvSpPr/>
-          <p:nvPr/>
-        </p:nvSpPr>
-        <p:spPr>
-          <a:xfrm>
-            <a:off x="274320" y="6492240"/>
-            <a:ext cx="11887200" cy="274320"/>
-          </a:xfrm>
-          <a:prstGeom prst="roundRect">
-            <a:avLst/>
-          </a:prstGeom>
-          <a:noFill/>
-          <a:ln>
-            <a:noFill/>
-          </a:ln>
-          <a:effectLst/>
-        </p:spPr>
-        <p:style>
-          <a:lnRef idx="1">
-            <a:schemeClr val="accent1"/>
-          </a:lnRef>
-          <a:fillRef idx="3">
-            <a:schemeClr val="accent1"/>
-          </a:fillRef>
-          <a:effectRef idx="2">
-            <a:schemeClr val="accent1"/>
-          </a:effectRef>
-          <a:fontRef idx="minor">
-            <a:schemeClr val="lt1"/>
-          </a:fontRef>
-        </p:style>
-        <p:txBody>
-          <a:bodyPr rtlCol="0" anchor="t" wrap="square" lIns="137160" rIns="137160" tIns="91440" bIns="91440"/>
-          <a:lstStyle/>
-          <a:p>
             <a:pPr algn="r"/>
             <a:r>
               <a:rPr b="0" sz="800">
@@ -5345,7 +5303,7 @@
                 </a:solidFill>
                 <a:latin typeface="Calibri"/>
               </a:rPr>
-              <a:t>Caso 86 · Magíster Dirección Tributaria UVM · Slide 5</a:t>
+              <a:t>Caso 86 · Catálogo SII 2025 · Grupo 4 — Magíster Dirección Tributaria UVM  |  5</a:t>
             </a:r>
           </a:p>
         </p:txBody>
@@ -5436,13 +5394,13 @@
           <a:p>
             <a:pPr algn="l"/>
             <a:r>
-              <a:rPr sz="3200" b="0" i="0">
+              <a:rPr sz="3000" b="0" i="0">
                 <a:solidFill>
                   <a:srgbClr val="1C1C1C"/>
                 </a:solidFill>
                 <a:latin typeface="Cambria"/>
               </a:rPr>
-              <a:t>¿Por qué es Abuso? — Fundamentos</a:t>
+              <a:t>¿Abuso o Simulación?</a:t>
             </a:r>
           </a:p>
         </p:txBody>
@@ -5455,8 +5413,8 @@
         </p:nvSpPr>
         <p:spPr>
           <a:xfrm>
-            <a:off x="548640" y="1005840"/>
-            <a:ext cx="10972800" cy="457200"/>
+            <a:off x="548640" y="960120"/>
+            <a:ext cx="10972800" cy="411480"/>
           </a:xfrm>
           <a:prstGeom prst="roundRect">
             <a:avLst/>
@@ -5493,78 +5451,434 @@
                 </a:solidFill>
                 <a:latin typeface="Calibri"/>
               </a:rPr>
-              <a:t>Caso 86 configura los 3 elementos del Art. 4 ter CT</a:t>
-            </a:r>
-          </a:p>
-        </p:txBody>
-      </p:sp>
-      <p:sp>
-        <p:nvSpPr>
-          <p:cNvPr id="5" name="Oval 4"/>
+              <a:t>La calificación correcta define qué norma aplica y qué debe probar el SII</a:t>
+            </a:r>
+          </a:p>
+        </p:txBody>
+      </p:sp>
+      <p:sp>
+        <p:nvSpPr>
+          <p:cNvPr id="5" name="Rounded Rectangle 4"/>
+          <p:cNvSpPr/>
+          <p:nvPr/>
+        </p:nvSpPr>
+        <p:spPr>
+          <a:xfrm>
+            <a:off x="548640" y="1554480"/>
+            <a:ext cx="5623560" cy="502920"/>
+          </a:xfrm>
+          <a:prstGeom prst="roundRect">
+            <a:avLst/>
+          </a:prstGeom>
+          <a:solidFill>
+            <a:srgbClr val="B03030"/>
+          </a:solidFill>
+          <a:ln>
+            <a:noFill/>
+          </a:ln>
+          <a:effectLst/>
+        </p:spPr>
+        <p:style>
+          <a:lnRef idx="1">
+            <a:schemeClr val="accent1"/>
+          </a:lnRef>
+          <a:fillRef idx="3">
+            <a:schemeClr val="accent1"/>
+          </a:fillRef>
+          <a:effectRef idx="2">
+            <a:schemeClr val="accent1"/>
+          </a:effectRef>
+          <a:fontRef idx="minor">
+            <a:schemeClr val="lt1"/>
+          </a:fontRef>
+        </p:style>
+        <p:txBody>
+          <a:bodyPr rtlCol="0" anchor="ctr" wrap="square" lIns="137160" rIns="137160" tIns="91440" bIns="91440"/>
+          <a:lstStyle/>
+          <a:p>
+            <a:pPr algn="ctr"/>
+            <a:r>
+              <a:rPr b="1" sz="1500">
+                <a:solidFill>
+                  <a:srgbClr val="FFFFFF"/>
+                </a:solidFill>
+                <a:latin typeface="Calibri"/>
+              </a:rPr>
+              <a:t>ABUSO  (Art. 4 ter CT)</a:t>
+            </a:r>
+          </a:p>
+        </p:txBody>
+      </p:sp>
+      <p:sp>
+        <p:nvSpPr>
+          <p:cNvPr id="6" name="Rounded Rectangle 5"/>
           <p:cNvSpPr/>
           <p:nvPr/>
         </p:nvSpPr>
         <p:spPr>
           <a:xfrm>
             <a:off x="548640" y="2103120"/>
-            <a:ext cx="640080" cy="640080"/>
-          </a:xfrm>
-          <a:prstGeom prst="ellipse">
-            <a:avLst/>
-          </a:prstGeom>
-          <a:solidFill>
-            <a:srgbClr val="B03030"/>
-          </a:solidFill>
-          <a:ln>
-            <a:noFill/>
-          </a:ln>
-          <a:effectLst/>
-        </p:spPr>
-        <p:style>
-          <a:lnRef idx="1">
-            <a:schemeClr val="accent1"/>
-          </a:lnRef>
-          <a:fillRef idx="3">
-            <a:schemeClr val="accent1"/>
-          </a:fillRef>
-          <a:effectRef idx="2">
-            <a:schemeClr val="accent1"/>
-          </a:effectRef>
-          <a:fontRef idx="minor">
-            <a:schemeClr val="lt1"/>
-          </a:fontRef>
-        </p:style>
-        <p:txBody>
-          <a:bodyPr rtlCol="0" anchor="ctr" lIns="0" rIns="0" tIns="0" bIns="0"/>
+            <a:ext cx="5623560" cy="4069080"/>
+          </a:xfrm>
+          <a:prstGeom prst="roundRect">
+            <a:avLst/>
+          </a:prstGeom>
+          <a:solidFill>
+            <a:srgbClr val="FDEAEA"/>
+          </a:solidFill>
+          <a:ln>
+            <a:noFill/>
+          </a:ln>
+          <a:effectLst/>
+        </p:spPr>
+        <p:style>
+          <a:lnRef idx="1">
+            <a:schemeClr val="accent1"/>
+          </a:lnRef>
+          <a:fillRef idx="3">
+            <a:schemeClr val="accent1"/>
+          </a:fillRef>
+          <a:effectRef idx="2">
+            <a:schemeClr val="accent1"/>
+          </a:effectRef>
+          <a:fontRef idx="minor">
+            <a:schemeClr val="lt1"/>
+          </a:fontRef>
+        </p:style>
+        <p:txBody>
+          <a:bodyPr rtlCol="0" anchor="t" wrap="square" lIns="137160" rIns="137160" tIns="91440" bIns="91440"/>
+          <a:lstStyle/>
+          <a:p>
+            <a:pPr algn="l"/>
+            <a:r>
+              <a:rPr b="0" sz="1150">
+                <a:solidFill>
+                  <a:srgbClr val="1C1C1C"/>
+                </a:solidFill>
+                <a:latin typeface="Calibri"/>
+              </a:rPr>
+              <a:t>✔  Los actos son REALES: la sociedad existe, los socios son reales, el capital fue aportado.</a:t>
+            </a:r>
+          </a:p>
+          <a:p>
+            <a:pPr algn="l"/>
+            <a:r>
+              <a:rPr b="0" sz="1150">
+                <a:solidFill>
+                  <a:srgbClr val="1C1C1C"/>
+                </a:solidFill>
+                <a:latin typeface="Calibri"/>
+              </a:rPr>
+              <a:t/>
+            </a:r>
+          </a:p>
+          <a:p>
+            <a:pPr algn="l"/>
+            <a:r>
+              <a:rPr b="0" sz="1150">
+                <a:solidFill>
+                  <a:srgbClr val="1C1C1C"/>
+                </a:solidFill>
+                <a:latin typeface="Calibri"/>
+              </a:rPr>
+              <a:t>✔  El PROBLEMA es la FORMA: se usa la figura de 'sociedad de profesionales' para algo que no corresponde.</a:t>
+            </a:r>
+          </a:p>
+          <a:p>
+            <a:pPr algn="l"/>
+            <a:r>
+              <a:rPr b="0" sz="1150">
+                <a:solidFill>
+                  <a:srgbClr val="1C1C1C"/>
+                </a:solidFill>
+                <a:latin typeface="Calibri"/>
+              </a:rPr>
+              <a:t/>
+            </a:r>
+          </a:p>
+          <a:p>
+            <a:pPr algn="l"/>
+            <a:r>
+              <a:rPr b="0" sz="1150">
+                <a:solidFill>
+                  <a:srgbClr val="1C1C1C"/>
+                </a:solidFill>
+                <a:latin typeface="Calibri"/>
+              </a:rPr>
+              <a:t>✔  B y C no aportan valor económico real. Su único rol es absorber utilidades de Pedro para bajar su tramo de IGC.</a:t>
+            </a:r>
+          </a:p>
+          <a:p>
+            <a:pPr algn="l"/>
+            <a:r>
+              <a:rPr b="0" sz="1150">
+                <a:solidFill>
+                  <a:srgbClr val="1C1C1C"/>
+                </a:solidFill>
+                <a:latin typeface="Calibri"/>
+              </a:rPr>
+              <a:t/>
+            </a:r>
+          </a:p>
+          <a:p>
+            <a:pPr algn="l"/>
+            <a:r>
+              <a:rPr b="0" sz="1150">
+                <a:solidFill>
+                  <a:srgbClr val="1C1C1C"/>
+                </a:solidFill>
+                <a:latin typeface="Calibri"/>
+              </a:rPr>
+              <a:t>✔  Único efecto distinto del tributario: NINGUNO.</a:t>
+            </a:r>
+          </a:p>
+        </p:txBody>
+      </p:sp>
+      <p:sp>
+        <p:nvSpPr>
+          <p:cNvPr id="7" name="Rounded Rectangle 6"/>
+          <p:cNvSpPr/>
+          <p:nvPr/>
+        </p:nvSpPr>
+        <p:spPr>
+          <a:xfrm>
+            <a:off x="6355080" y="1554480"/>
+            <a:ext cx="5623560" cy="502920"/>
+          </a:xfrm>
+          <a:prstGeom prst="roundRect">
+            <a:avLst/>
+          </a:prstGeom>
+          <a:solidFill>
+            <a:srgbClr val="C5501A"/>
+          </a:solidFill>
+          <a:ln>
+            <a:noFill/>
+          </a:ln>
+          <a:effectLst/>
+        </p:spPr>
+        <p:style>
+          <a:lnRef idx="1">
+            <a:schemeClr val="accent1"/>
+          </a:lnRef>
+          <a:fillRef idx="3">
+            <a:schemeClr val="accent1"/>
+          </a:fillRef>
+          <a:effectRef idx="2">
+            <a:schemeClr val="accent1"/>
+          </a:effectRef>
+          <a:fontRef idx="minor">
+            <a:schemeClr val="lt1"/>
+          </a:fontRef>
+        </p:style>
+        <p:txBody>
+          <a:bodyPr rtlCol="0" anchor="ctr" wrap="square" lIns="137160" rIns="137160" tIns="91440" bIns="91440"/>
           <a:lstStyle/>
           <a:p>
             <a:pPr algn="ctr"/>
             <a:r>
-              <a:rPr sz="1600" b="1">
+              <a:rPr b="1" sz="1500">
                 <a:solidFill>
                   <a:srgbClr val="FFFFFF"/>
                 </a:solidFill>
                 <a:latin typeface="Calibri"/>
               </a:rPr>
-              <a:t>1</a:t>
-            </a:r>
-          </a:p>
-        </p:txBody>
-      </p:sp>
-      <p:sp>
-        <p:nvSpPr>
-          <p:cNvPr id="6" name="Rounded Rectangle 5"/>
-          <p:cNvSpPr/>
-          <p:nvPr/>
-        </p:nvSpPr>
-        <p:spPr>
-          <a:xfrm>
-            <a:off x="1371600" y="1691640"/>
-            <a:ext cx="10332720" cy="365760"/>
+              <a:t>SIMULACIÓN  (Art. 4 quáter CT)</a:t>
+            </a:r>
+          </a:p>
+        </p:txBody>
+      </p:sp>
+      <p:sp>
+        <p:nvSpPr>
+          <p:cNvPr id="8" name="Rounded Rectangle 7"/>
+          <p:cNvSpPr/>
+          <p:nvPr/>
+        </p:nvSpPr>
+        <p:spPr>
+          <a:xfrm>
+            <a:off x="6355080" y="2103120"/>
+            <a:ext cx="5623560" cy="4069080"/>
           </a:xfrm>
           <a:prstGeom prst="roundRect">
             <a:avLst/>
           </a:prstGeom>
+          <a:solidFill>
+            <a:srgbClr val="FDF0E6"/>
+          </a:solidFill>
+          <a:ln>
+            <a:noFill/>
+          </a:ln>
+          <a:effectLst/>
+        </p:spPr>
+        <p:style>
+          <a:lnRef idx="1">
+            <a:schemeClr val="accent1"/>
+          </a:lnRef>
+          <a:fillRef idx="3">
+            <a:schemeClr val="accent1"/>
+          </a:fillRef>
+          <a:effectRef idx="2">
+            <a:schemeClr val="accent1"/>
+          </a:effectRef>
+          <a:fontRef idx="minor">
+            <a:schemeClr val="lt1"/>
+          </a:fontRef>
+        </p:style>
+        <p:txBody>
+          <a:bodyPr rtlCol="0" anchor="t" wrap="square" lIns="137160" rIns="137160" tIns="91440" bIns="91440"/>
+          <a:lstStyle/>
+          <a:p>
+            <a:pPr algn="l"/>
+            <a:r>
+              <a:rPr b="0" sz="1150">
+                <a:solidFill>
+                  <a:srgbClr val="1C1C1C"/>
+                </a:solidFill>
+                <a:latin typeface="Calibri"/>
+              </a:rPr>
+              <a:t>✖  Requiere que los actos DISIMULEN algo distinto de lo declarado.</a:t>
+            </a:r>
+          </a:p>
+          <a:p>
+            <a:pPr algn="l"/>
+            <a:r>
+              <a:rPr b="0" sz="1150">
+                <a:solidFill>
+                  <a:srgbClr val="1C1C1C"/>
+                </a:solidFill>
+                <a:latin typeface="Calibri"/>
+              </a:rPr>
+              <a:t/>
+            </a:r>
+          </a:p>
+          <a:p>
+            <a:pPr algn="l"/>
+            <a:r>
+              <a:rPr b="0" sz="1150">
+                <a:solidFill>
+                  <a:srgbClr val="1C1C1C"/>
+                </a:solidFill>
+                <a:latin typeface="Calibri"/>
+              </a:rPr>
+              <a:t>✖  En el caso NO hay acto oculto: la sociedad y sus socios son lo que parecen.</a:t>
+            </a:r>
+          </a:p>
+          <a:p>
+            <a:pPr algn="l"/>
+            <a:r>
+              <a:rPr b="0" sz="1150">
+                <a:solidFill>
+                  <a:srgbClr val="1C1C1C"/>
+                </a:solidFill>
+                <a:latin typeface="Calibri"/>
+              </a:rPr>
+              <a:t/>
+            </a:r>
+          </a:p>
+          <a:p>
+            <a:pPr algn="l"/>
+            <a:r>
+              <a:rPr b="0" sz="1150">
+                <a:solidFill>
+                  <a:srgbClr val="1C1C1C"/>
+                </a:solidFill>
+                <a:latin typeface="Calibri"/>
+              </a:rPr>
+              <a:t>✖  No hay divergencia entre voluntad real y declarada.</a:t>
+            </a:r>
+          </a:p>
+          <a:p>
+            <a:pPr algn="l"/>
+            <a:r>
+              <a:rPr b="0" sz="1150">
+                <a:solidFill>
+                  <a:srgbClr val="1C1C1C"/>
+                </a:solidFill>
+                <a:latin typeface="Calibri"/>
+              </a:rPr>
+              <a:t/>
+            </a:r>
+          </a:p>
+          <a:p>
+            <a:pPr algn="l"/>
+            <a:r>
+              <a:rPr b="0" sz="1150">
+                <a:solidFill>
+                  <a:srgbClr val="1C1C1C"/>
+                </a:solidFill>
+                <a:latin typeface="Calibri"/>
+              </a:rPr>
+              <a:t>✖  Ejemplo de simulación: un contrato de 'arriendo' que en realidad es una donación. En el Caso 86 no hay nada oculto.</a:t>
+            </a:r>
+          </a:p>
+        </p:txBody>
+      </p:sp>
+      <p:sp>
+        <p:nvSpPr>
+          <p:cNvPr id="9" name="Rounded Rectangle 8"/>
+          <p:cNvSpPr/>
+          <p:nvPr/>
+        </p:nvSpPr>
+        <p:spPr>
+          <a:xfrm>
+            <a:off x="548640" y="6281928"/>
+            <a:ext cx="11064240" cy="457200"/>
+          </a:xfrm>
+          <a:prstGeom prst="roundRect">
+            <a:avLst/>
+          </a:prstGeom>
+          <a:solidFill>
+            <a:srgbClr val="1A3A5C"/>
+          </a:solidFill>
+          <a:ln>
+            <a:noFill/>
+          </a:ln>
+          <a:effectLst/>
+        </p:spPr>
+        <p:style>
+          <a:lnRef idx="1">
+            <a:schemeClr val="accent1"/>
+          </a:lnRef>
+          <a:fillRef idx="3">
+            <a:schemeClr val="accent1"/>
+          </a:fillRef>
+          <a:effectRef idx="2">
+            <a:schemeClr val="accent1"/>
+          </a:effectRef>
+          <a:fontRef idx="minor">
+            <a:schemeClr val="lt1"/>
+          </a:fontRef>
+        </p:style>
+        <p:txBody>
+          <a:bodyPr rtlCol="0" anchor="ctr" wrap="square" lIns="137160" rIns="137160" tIns="91440" bIns="91440"/>
+          <a:lstStyle/>
+          <a:p>
+            <a:pPr algn="ctr"/>
+            <a:r>
+              <a:rPr b="1" sz="1400">
+                <a:solidFill>
+                  <a:srgbClr val="FFFFFF"/>
+                </a:solidFill>
+                <a:latin typeface="Calibri"/>
+              </a:rPr>
+              <a:t>POSICIÓN DEL GRUPO:  ABUSO de formas jurídicas — Art. 4 ter CT</a:t>
+            </a:r>
+          </a:p>
+        </p:txBody>
+      </p:sp>
+      <p:sp>
+        <p:nvSpPr>
+          <p:cNvPr id="10" name="Rounded Rectangle 9"/>
+          <p:cNvSpPr/>
+          <p:nvPr/>
+        </p:nvSpPr>
+        <p:spPr>
+          <a:xfrm>
+            <a:off x="274320" y="6492240"/>
+            <a:ext cx="11612880" cy="274320"/>
+          </a:xfrm>
+          <a:prstGeom prst="roundRect">
+            <a:avLst/>
+          </a:prstGeom>
           <a:noFill/>
           <a:ln>
             <a:noFill/>
@@ -5589,484 +5903,6 @@
           <a:bodyPr rtlCol="0" anchor="t" wrap="square" lIns="137160" rIns="137160" tIns="91440" bIns="91440"/>
           <a:lstStyle/>
           <a:p>
-            <a:pPr algn="l"/>
-            <a:r>
-              <a:rPr b="1" sz="1400">
-                <a:solidFill>
-                  <a:srgbClr val="B03030"/>
-                </a:solidFill>
-                <a:latin typeface="Calibri"/>
-              </a:rPr>
-              <a:t>Reducción de la carga tributaria</a:t>
-            </a:r>
-          </a:p>
-        </p:txBody>
-      </p:sp>
-      <p:sp>
-        <p:nvSpPr>
-          <p:cNvPr id="7" name="Rounded Rectangle 6"/>
-          <p:cNvSpPr/>
-          <p:nvPr/>
-        </p:nvSpPr>
-        <p:spPr>
-          <a:xfrm>
-            <a:off x="1371600" y="2057400"/>
-            <a:ext cx="10332720" cy="1097280"/>
-          </a:xfrm>
-          <a:prstGeom prst="roundRect">
-            <a:avLst/>
-          </a:prstGeom>
-          <a:solidFill>
-            <a:srgbClr val="F4F6F9"/>
-          </a:solidFill>
-          <a:ln>
-            <a:noFill/>
-          </a:ln>
-          <a:effectLst/>
-        </p:spPr>
-        <p:style>
-          <a:lnRef idx="1">
-            <a:schemeClr val="accent1"/>
-          </a:lnRef>
-          <a:fillRef idx="3">
-            <a:schemeClr val="accent1"/>
-          </a:fillRef>
-          <a:effectRef idx="2">
-            <a:schemeClr val="accent1"/>
-          </a:effectRef>
-          <a:fontRef idx="minor">
-            <a:schemeClr val="lt1"/>
-          </a:fontRef>
-        </p:style>
-        <p:txBody>
-          <a:bodyPr rtlCol="0" anchor="t" wrap="square" lIns="137160" rIns="137160" tIns="91440" bIns="91440"/>
-          <a:lstStyle/>
-          <a:p>
-            <a:pPr algn="l"/>
-            <a:r>
-              <a:rPr b="0" sz="1050">
-                <a:solidFill>
-                  <a:srgbClr val="1C1C1C"/>
-                </a:solidFill>
-                <a:latin typeface="Calibri"/>
-              </a:rPr>
-              <a:t>El esquema diluye los ingresos de A en tres tramos independientes del IGC, reduciendo la tasa marginal efectiva. La carga del IGC del contribuyente A se ve disminuida en relación a lo que correspondería si los ingresos los percibiera directamente, sea como independiente del Art. 42 N°2 o como único prestador del servicio.</a:t>
-            </a:r>
-          </a:p>
-        </p:txBody>
-      </p:sp>
-      <p:sp>
-        <p:nvSpPr>
-          <p:cNvPr id="8" name="Oval 7"/>
-          <p:cNvSpPr/>
-          <p:nvPr/>
-        </p:nvSpPr>
-        <p:spPr>
-          <a:xfrm>
-            <a:off x="548640" y="3611880"/>
-            <a:ext cx="640080" cy="640080"/>
-          </a:xfrm>
-          <a:prstGeom prst="ellipse">
-            <a:avLst/>
-          </a:prstGeom>
-          <a:solidFill>
-            <a:srgbClr val="C5501A"/>
-          </a:solidFill>
-          <a:ln>
-            <a:noFill/>
-          </a:ln>
-          <a:effectLst/>
-        </p:spPr>
-        <p:style>
-          <a:lnRef idx="1">
-            <a:schemeClr val="accent1"/>
-          </a:lnRef>
-          <a:fillRef idx="3">
-            <a:schemeClr val="accent1"/>
-          </a:fillRef>
-          <a:effectRef idx="2">
-            <a:schemeClr val="accent1"/>
-          </a:effectRef>
-          <a:fontRef idx="minor">
-            <a:schemeClr val="lt1"/>
-          </a:fontRef>
-        </p:style>
-        <p:txBody>
-          <a:bodyPr rtlCol="0" anchor="ctr" lIns="0" rIns="0" tIns="0" bIns="0"/>
-          <a:lstStyle/>
-          <a:p>
-            <a:pPr algn="ctr"/>
-            <a:r>
-              <a:rPr sz="1600" b="1">
-                <a:solidFill>
-                  <a:srgbClr val="FFFFFF"/>
-                </a:solidFill>
-                <a:latin typeface="Calibri"/>
-              </a:rPr>
-              <a:t>2</a:t>
-            </a:r>
-          </a:p>
-        </p:txBody>
-      </p:sp>
-      <p:sp>
-        <p:nvSpPr>
-          <p:cNvPr id="9" name="Rounded Rectangle 8"/>
-          <p:cNvSpPr/>
-          <p:nvPr/>
-        </p:nvSpPr>
-        <p:spPr>
-          <a:xfrm>
-            <a:off x="1371600" y="3200400"/>
-            <a:ext cx="10332720" cy="365760"/>
-          </a:xfrm>
-          <a:prstGeom prst="roundRect">
-            <a:avLst/>
-          </a:prstGeom>
-          <a:noFill/>
-          <a:ln>
-            <a:noFill/>
-          </a:ln>
-          <a:effectLst/>
-        </p:spPr>
-        <p:style>
-          <a:lnRef idx="1">
-            <a:schemeClr val="accent1"/>
-          </a:lnRef>
-          <a:fillRef idx="3">
-            <a:schemeClr val="accent1"/>
-          </a:fillRef>
-          <a:effectRef idx="2">
-            <a:schemeClr val="accent1"/>
-          </a:effectRef>
-          <a:fontRef idx="minor">
-            <a:schemeClr val="lt1"/>
-          </a:fontRef>
-        </p:style>
-        <p:txBody>
-          <a:bodyPr rtlCol="0" anchor="t" wrap="square" lIns="137160" rIns="137160" tIns="91440" bIns="91440"/>
-          <a:lstStyle/>
-          <a:p>
-            <a:pPr algn="l"/>
-            <a:r>
-              <a:rPr b="1" sz="1400">
-                <a:solidFill>
-                  <a:srgbClr val="C5501A"/>
-                </a:solidFill>
-                <a:latin typeface="Calibri"/>
-              </a:rPr>
-              <a:t>Ausencia de efectos jurídicos o económicos relevantes</a:t>
-            </a:r>
-          </a:p>
-        </p:txBody>
-      </p:sp>
-      <p:sp>
-        <p:nvSpPr>
-          <p:cNvPr id="10" name="Rounded Rectangle 9"/>
-          <p:cNvSpPr/>
-          <p:nvPr/>
-        </p:nvSpPr>
-        <p:spPr>
-          <a:xfrm>
-            <a:off x="1371600" y="3566160"/>
-            <a:ext cx="10332720" cy="1097280"/>
-          </a:xfrm>
-          <a:prstGeom prst="roundRect">
-            <a:avLst/>
-          </a:prstGeom>
-          <a:solidFill>
-            <a:srgbClr val="F4F6F9"/>
-          </a:solidFill>
-          <a:ln>
-            <a:noFill/>
-          </a:ln>
-          <a:effectLst/>
-        </p:spPr>
-        <p:style>
-          <a:lnRef idx="1">
-            <a:schemeClr val="accent1"/>
-          </a:lnRef>
-          <a:fillRef idx="3">
-            <a:schemeClr val="accent1"/>
-          </a:fillRef>
-          <a:effectRef idx="2">
-            <a:schemeClr val="accent1"/>
-          </a:effectRef>
-          <a:fontRef idx="minor">
-            <a:schemeClr val="lt1"/>
-          </a:fontRef>
-        </p:style>
-        <p:txBody>
-          <a:bodyPr rtlCol="0" anchor="t" wrap="square" lIns="137160" rIns="137160" tIns="91440" bIns="91440"/>
-          <a:lstStyle/>
-          <a:p>
-            <a:pPr algn="l"/>
-            <a:r>
-              <a:rPr b="0" sz="1050">
-                <a:solidFill>
-                  <a:srgbClr val="1C1C1C"/>
-                </a:solidFill>
-                <a:latin typeface="Calibri"/>
-              </a:rPr>
-              <a:t>La participación de B y C carece de motivo económico válido distinto del tributario:</a:t>
-            </a:r>
-          </a:p>
-          <a:p>
-            <a:pPr algn="l"/>
-            <a:r>
-              <a:rPr b="0" sz="1050">
-                <a:solidFill>
-                  <a:srgbClr val="1C1C1C"/>
-                </a:solidFill>
-                <a:latin typeface="Calibri"/>
-              </a:rPr>
-              <a:t>• Capital aportado insignificante frente a los ingresos</a:t>
-            </a:r>
-          </a:p>
-          <a:p>
-            <a:pPr algn="l"/>
-            <a:r>
-              <a:rPr b="0" sz="1050">
-                <a:solidFill>
-                  <a:srgbClr val="1C1C1C"/>
-                </a:solidFill>
-                <a:latin typeface="Calibri"/>
-              </a:rPr>
-              <a:t>• No prestan servicios profesionales</a:t>
-            </a:r>
-          </a:p>
-          <a:p>
-            <a:pPr algn="l"/>
-            <a:r>
-              <a:rPr b="0" sz="1050">
-                <a:solidFill>
-                  <a:srgbClr val="1C1C1C"/>
-                </a:solidFill>
-                <a:latin typeface="Calibri"/>
-              </a:rPr>
-              <a:t>• No aportan clientela ni cartera de clientes</a:t>
-            </a:r>
-          </a:p>
-          <a:p>
-            <a:pPr algn="l"/>
-            <a:r>
-              <a:rPr b="0" sz="1050">
-                <a:solidFill>
-                  <a:srgbClr val="1C1C1C"/>
-                </a:solidFill>
-                <a:latin typeface="Calibri"/>
-              </a:rPr>
-              <a:t>• No tienen rol estratégico ni decisional relevante</a:t>
-            </a:r>
-          </a:p>
-          <a:p>
-            <a:pPr algn="l"/>
-            <a:r>
-              <a:rPr b="0" sz="1050">
-                <a:solidFill>
-                  <a:srgbClr val="1C1C1C"/>
-                </a:solidFill>
-                <a:latin typeface="Calibri"/>
-              </a:rPr>
-              <a:t>• Su única función es absorber utilidades para diluir el IGC de A.</a:t>
-            </a:r>
-          </a:p>
-        </p:txBody>
-      </p:sp>
-      <p:sp>
-        <p:nvSpPr>
-          <p:cNvPr id="11" name="Oval 10"/>
-          <p:cNvSpPr/>
-          <p:nvPr/>
-        </p:nvSpPr>
-        <p:spPr>
-          <a:xfrm>
-            <a:off x="548640" y="5120640"/>
-            <a:ext cx="640080" cy="640080"/>
-          </a:xfrm>
-          <a:prstGeom prst="ellipse">
-            <a:avLst/>
-          </a:prstGeom>
-          <a:solidFill>
-            <a:srgbClr val="1A3A5C"/>
-          </a:solidFill>
-          <a:ln>
-            <a:noFill/>
-          </a:ln>
-          <a:effectLst/>
-        </p:spPr>
-        <p:style>
-          <a:lnRef idx="1">
-            <a:schemeClr val="accent1"/>
-          </a:lnRef>
-          <a:fillRef idx="3">
-            <a:schemeClr val="accent1"/>
-          </a:fillRef>
-          <a:effectRef idx="2">
-            <a:schemeClr val="accent1"/>
-          </a:effectRef>
-          <a:fontRef idx="minor">
-            <a:schemeClr val="lt1"/>
-          </a:fontRef>
-        </p:style>
-        <p:txBody>
-          <a:bodyPr rtlCol="0" anchor="ctr" lIns="0" rIns="0" tIns="0" bIns="0"/>
-          <a:lstStyle/>
-          <a:p>
-            <a:pPr algn="ctr"/>
-            <a:r>
-              <a:rPr sz="1600" b="1">
-                <a:solidFill>
-                  <a:srgbClr val="FFFFFF"/>
-                </a:solidFill>
-                <a:latin typeface="Calibri"/>
-              </a:rPr>
-              <a:t>3</a:t>
-            </a:r>
-          </a:p>
-        </p:txBody>
-      </p:sp>
-      <p:sp>
-        <p:nvSpPr>
-          <p:cNvPr id="12" name="Rounded Rectangle 11"/>
-          <p:cNvSpPr/>
-          <p:nvPr/>
-        </p:nvSpPr>
-        <p:spPr>
-          <a:xfrm>
-            <a:off x="1371600" y="4709160"/>
-            <a:ext cx="10332720" cy="365760"/>
-          </a:xfrm>
-          <a:prstGeom prst="roundRect">
-            <a:avLst/>
-          </a:prstGeom>
-          <a:noFill/>
-          <a:ln>
-            <a:noFill/>
-          </a:ln>
-          <a:effectLst/>
-        </p:spPr>
-        <p:style>
-          <a:lnRef idx="1">
-            <a:schemeClr val="accent1"/>
-          </a:lnRef>
-          <a:fillRef idx="3">
-            <a:schemeClr val="accent1"/>
-          </a:fillRef>
-          <a:effectRef idx="2">
-            <a:schemeClr val="accent1"/>
-          </a:effectRef>
-          <a:fontRef idx="minor">
-            <a:schemeClr val="lt1"/>
-          </a:fontRef>
-        </p:style>
-        <p:txBody>
-          <a:bodyPr rtlCol="0" anchor="t" wrap="square" lIns="137160" rIns="137160" tIns="91440" bIns="91440"/>
-          <a:lstStyle/>
-          <a:p>
-            <a:pPr algn="l"/>
-            <a:r>
-              <a:rPr b="1" sz="1400">
-                <a:solidFill>
-                  <a:srgbClr val="1A3A5C"/>
-                </a:solidFill>
-                <a:latin typeface="Calibri"/>
-              </a:rPr>
-              <a:t>Forma jurídica artificiosa para el sustrato económico</a:t>
-            </a:r>
-          </a:p>
-        </p:txBody>
-      </p:sp>
-      <p:sp>
-        <p:nvSpPr>
-          <p:cNvPr id="13" name="Rounded Rectangle 12"/>
-          <p:cNvSpPr/>
-          <p:nvPr/>
-        </p:nvSpPr>
-        <p:spPr>
-          <a:xfrm>
-            <a:off x="1371600" y="5074920"/>
-            <a:ext cx="10332720" cy="1097280"/>
-          </a:xfrm>
-          <a:prstGeom prst="roundRect">
-            <a:avLst/>
-          </a:prstGeom>
-          <a:solidFill>
-            <a:srgbClr val="F4F6F9"/>
-          </a:solidFill>
-          <a:ln>
-            <a:noFill/>
-          </a:ln>
-          <a:effectLst/>
-        </p:spPr>
-        <p:style>
-          <a:lnRef idx="1">
-            <a:schemeClr val="accent1"/>
-          </a:lnRef>
-          <a:fillRef idx="3">
-            <a:schemeClr val="accent1"/>
-          </a:fillRef>
-          <a:effectRef idx="2">
-            <a:schemeClr val="accent1"/>
-          </a:effectRef>
-          <a:fontRef idx="minor">
-            <a:schemeClr val="lt1"/>
-          </a:fontRef>
-        </p:style>
-        <p:txBody>
-          <a:bodyPr rtlCol="0" anchor="t" wrap="square" lIns="137160" rIns="137160" tIns="91440" bIns="91440"/>
-          <a:lstStyle/>
-          <a:p>
-            <a:pPr algn="l"/>
-            <a:r>
-              <a:rPr b="0" sz="1050">
-                <a:solidFill>
-                  <a:srgbClr val="1C1C1C"/>
-                </a:solidFill>
-                <a:latin typeface="Calibri"/>
-              </a:rPr>
-              <a:t>La figura 'sociedad de profesionales' del Art. 42 N°2 LIR está concebida para profesionales que efectivamente trabajan en conjunto. Su uso para canalizar la labor de uno solo, con socios pasivos, constituye una utilización inapropiada y artificial de la institución jurídica.</a:t>
-            </a:r>
-          </a:p>
-        </p:txBody>
-      </p:sp>
-      <p:sp>
-        <p:nvSpPr>
-          <p:cNvPr id="14" name="Rounded Rectangle 13"/>
-          <p:cNvSpPr/>
-          <p:nvPr/>
-        </p:nvSpPr>
-        <p:spPr>
-          <a:xfrm>
-            <a:off x="274320" y="6492240"/>
-            <a:ext cx="11887200" cy="274320"/>
-          </a:xfrm>
-          <a:prstGeom prst="roundRect">
-            <a:avLst/>
-          </a:prstGeom>
-          <a:noFill/>
-          <a:ln>
-            <a:noFill/>
-          </a:ln>
-          <a:effectLst/>
-        </p:spPr>
-        <p:style>
-          <a:lnRef idx="1">
-            <a:schemeClr val="accent1"/>
-          </a:lnRef>
-          <a:fillRef idx="3">
-            <a:schemeClr val="accent1"/>
-          </a:fillRef>
-          <a:effectRef idx="2">
-            <a:schemeClr val="accent1"/>
-          </a:effectRef>
-          <a:fontRef idx="minor">
-            <a:schemeClr val="lt1"/>
-          </a:fontRef>
-        </p:style>
-        <p:txBody>
-          <a:bodyPr rtlCol="0" anchor="t" wrap="square" lIns="137160" rIns="137160" tIns="91440" bIns="91440"/>
-          <a:lstStyle/>
-          <a:p>
             <a:pPr algn="r"/>
             <a:r>
               <a:rPr b="0" sz="800">
@@ -6075,7 +5911,7 @@
                 </a:solidFill>
                 <a:latin typeface="Calibri"/>
               </a:rPr>
-              <a:t>Caso 86 · Magíster Dirección Tributaria UVM · Slide 6</a:t>
+              <a:t>Caso 86 · Catálogo SII 2025 · Grupo 4 — Magíster Dirección Tributaria UVM  |  6</a:t>
             </a:r>
           </a:p>
         </p:txBody>
@@ -6166,13 +6002,13 @@
           <a:p>
             <a:pPr algn="l"/>
             <a:r>
-              <a:rPr sz="3200" b="0" i="0">
+              <a:rPr sz="3000" b="0" i="0">
                 <a:solidFill>
                   <a:srgbClr val="1C1C1C"/>
                 </a:solidFill>
                 <a:latin typeface="Cambria"/>
               </a:rPr>
-              <a:t>Efecto Tributario del Esquema</a:t>
+              <a:t>El Impacto en Números</a:t>
             </a:r>
           </a:p>
         </p:txBody>
@@ -6185,8 +6021,8 @@
         </p:nvSpPr>
         <p:spPr>
           <a:xfrm>
-            <a:off x="548640" y="1005840"/>
-            <a:ext cx="10972800" cy="457200"/>
+            <a:off x="548640" y="960120"/>
+            <a:ext cx="10972800" cy="411480"/>
           </a:xfrm>
           <a:prstGeom prst="roundRect">
             <a:avLst/>
@@ -6223,7 +6059,7 @@
                 </a:solidFill>
                 <a:latin typeface="Calibri"/>
               </a:rPr>
-              <a:t>Ejemplo ilustrativo — Dilución de la progresión del IGC</a:t>
+              <a:t>Ejemplo ilustrativo — ¿Cuánto pierde el Fisco?</a:t>
             </a:r>
           </a:p>
         </p:txBody>
@@ -6236,8 +6072,8 @@
         </p:nvSpPr>
         <p:spPr>
           <a:xfrm>
-            <a:off x="548640" y="1691640"/>
-            <a:ext cx="2926080" cy="457200"/>
+            <a:off x="548640" y="1554480"/>
+            <a:ext cx="2743200" cy="457200"/>
           </a:xfrm>
           <a:prstGeom prst="roundRect">
             <a:avLst/>
@@ -6289,8 +6125,8 @@
         </p:nvSpPr>
         <p:spPr>
           <a:xfrm>
-            <a:off x="3520440" y="1691640"/>
-            <a:ext cx="4114800" cy="457200"/>
+            <a:off x="3337560" y="1554480"/>
+            <a:ext cx="4023360" cy="457200"/>
           </a:xfrm>
           <a:prstGeom prst="roundRect">
             <a:avLst/>
@@ -6329,7 +6165,7 @@
                 </a:solidFill>
                 <a:latin typeface="Calibri"/>
               </a:rPr>
-              <a:t>Atribución de la renta</a:t>
+              <a:t>¿Quién declara qué?</a:t>
             </a:r>
           </a:p>
         </p:txBody>
@@ -6342,8 +6178,8 @@
         </p:nvSpPr>
         <p:spPr>
           <a:xfrm>
-            <a:off x="7680960" y="1691640"/>
-            <a:ext cx="2377440" cy="457200"/>
+            <a:off x="7406640" y="1554480"/>
+            <a:ext cx="2286000" cy="457200"/>
           </a:xfrm>
           <a:prstGeom prst="roundRect">
             <a:avLst/>
@@ -6382,7 +6218,7 @@
                 </a:solidFill>
                 <a:latin typeface="Calibri"/>
               </a:rPr>
-              <a:t>Tramo marginal IGC aprox.</a:t>
+              <a:t>Tramo IGC aprox.</a:t>
             </a:r>
           </a:p>
         </p:txBody>
@@ -6395,8 +6231,8 @@
         </p:nvSpPr>
         <p:spPr>
           <a:xfrm>
-            <a:off x="10104120" y="1691640"/>
-            <a:ext cx="1554480" cy="457200"/>
+            <a:off x="9738360" y="1554480"/>
+            <a:ext cx="1828800" cy="457200"/>
           </a:xfrm>
           <a:prstGeom prst="roundRect">
             <a:avLst/>
@@ -6435,7 +6271,7 @@
                 </a:solidFill>
                 <a:latin typeface="Calibri"/>
               </a:rPr>
-              <a:t>Resultado</a:t>
+              <a:t>Efecto</a:t>
             </a:r>
           </a:p>
         </p:txBody>
@@ -6448,8 +6284,8 @@
         </p:nvSpPr>
         <p:spPr>
           <a:xfrm>
-            <a:off x="548640" y="2194560"/>
-            <a:ext cx="2926080" cy="914400"/>
+            <a:off x="548640" y="2057400"/>
+            <a:ext cx="2743200" cy="960120"/>
           </a:xfrm>
           <a:prstGeom prst="roundRect">
             <a:avLst/>
@@ -6480,47 +6316,519 @@
           <a:bodyPr rtlCol="0" anchor="ctr" wrap="square" lIns="137160" rIns="137160" tIns="91440" bIns="91440"/>
           <a:lstStyle/>
           <a:p>
+            <a:pPr algn="ctr"/>
+            <a:r>
+              <a:rPr b="1" sz="1050">
+                <a:solidFill>
+                  <a:srgbClr val="1C1C1C"/>
+                </a:solidFill>
+                <a:latin typeface="Calibri"/>
+              </a:rPr>
+              <a:t>Sin esquema</a:t>
+            </a:r>
+          </a:p>
+          <a:p>
+            <a:pPr algn="ctr"/>
+            <a:r>
+              <a:rPr b="1" sz="1050">
+                <a:solidFill>
+                  <a:srgbClr val="1C1C1C"/>
+                </a:solidFill>
+                <a:latin typeface="Calibri"/>
+              </a:rPr>
+              <a:t>(Pedro trabaja solo)</a:t>
+            </a:r>
+          </a:p>
+        </p:txBody>
+      </p:sp>
+      <p:sp>
+        <p:nvSpPr>
+          <p:cNvPr id="10" name="Rounded Rectangle 9"/>
+          <p:cNvSpPr/>
+          <p:nvPr/>
+        </p:nvSpPr>
+        <p:spPr>
+          <a:xfrm>
+            <a:off x="3337560" y="2057400"/>
+            <a:ext cx="4023360" cy="960120"/>
+          </a:xfrm>
+          <a:prstGeom prst="roundRect">
+            <a:avLst/>
+          </a:prstGeom>
+          <a:solidFill>
+            <a:srgbClr val="E8F3E8"/>
+          </a:solidFill>
+          <a:ln>
+            <a:noFill/>
+          </a:ln>
+          <a:effectLst/>
+        </p:spPr>
+        <p:style>
+          <a:lnRef idx="1">
+            <a:schemeClr val="accent1"/>
+          </a:lnRef>
+          <a:fillRef idx="3">
+            <a:schemeClr val="accent1"/>
+          </a:fillRef>
+          <a:effectRef idx="2">
+            <a:schemeClr val="accent1"/>
+          </a:effectRef>
+          <a:fontRef idx="minor">
+            <a:schemeClr val="lt1"/>
+          </a:fontRef>
+        </p:style>
+        <p:txBody>
+          <a:bodyPr rtlCol="0" anchor="ctr" wrap="square" lIns="137160" rIns="137160" tIns="91440" bIns="91440"/>
+          <a:lstStyle/>
+          <a:p>
             <a:pPr algn="l"/>
             <a:r>
+              <a:rPr b="0" sz="1050">
+                <a:solidFill>
+                  <a:srgbClr val="1C1C1C"/>
+                </a:solidFill>
+                <a:latin typeface="Calibri"/>
+              </a:rPr>
+              <a:t>Pedro declara $300 MM</a:t>
+            </a:r>
+          </a:p>
+        </p:txBody>
+      </p:sp>
+      <p:sp>
+        <p:nvSpPr>
+          <p:cNvPr id="11" name="Rounded Rectangle 10"/>
+          <p:cNvSpPr/>
+          <p:nvPr/>
+        </p:nvSpPr>
+        <p:spPr>
+          <a:xfrm>
+            <a:off x="7406640" y="2057400"/>
+            <a:ext cx="2286000" cy="960120"/>
+          </a:xfrm>
+          <a:prstGeom prst="roundRect">
+            <a:avLst/>
+          </a:prstGeom>
+          <a:solidFill>
+            <a:srgbClr val="E8F3E8"/>
+          </a:solidFill>
+          <a:ln>
+            <a:noFill/>
+          </a:ln>
+          <a:effectLst/>
+        </p:spPr>
+        <p:style>
+          <a:lnRef idx="1">
+            <a:schemeClr val="accent1"/>
+          </a:lnRef>
+          <a:fillRef idx="3">
+            <a:schemeClr val="accent1"/>
+          </a:fillRef>
+          <a:effectRef idx="2">
+            <a:schemeClr val="accent1"/>
+          </a:effectRef>
+          <a:fontRef idx="minor">
+            <a:schemeClr val="lt1"/>
+          </a:fontRef>
+        </p:style>
+        <p:txBody>
+          <a:bodyPr rtlCol="0" anchor="ctr" wrap="square" lIns="137160" rIns="137160" tIns="91440" bIns="91440"/>
+          <a:lstStyle/>
+          <a:p>
+            <a:pPr algn="ctr"/>
+            <a:r>
+              <a:rPr b="0" sz="1050">
+                <a:solidFill>
+                  <a:srgbClr val="1C1C1C"/>
+                </a:solidFill>
+                <a:latin typeface="Calibri"/>
+              </a:rPr>
+              <a:t>Tramo marginal ≈ 40%</a:t>
+            </a:r>
+          </a:p>
+        </p:txBody>
+      </p:sp>
+      <p:sp>
+        <p:nvSpPr>
+          <p:cNvPr id="12" name="Rounded Rectangle 11"/>
+          <p:cNvSpPr/>
+          <p:nvPr/>
+        </p:nvSpPr>
+        <p:spPr>
+          <a:xfrm>
+            <a:off x="9738360" y="2057400"/>
+            <a:ext cx="1828800" cy="960120"/>
+          </a:xfrm>
+          <a:prstGeom prst="roundRect">
+            <a:avLst/>
+          </a:prstGeom>
+          <a:solidFill>
+            <a:srgbClr val="E8F3E8"/>
+          </a:solidFill>
+          <a:ln>
+            <a:noFill/>
+          </a:ln>
+          <a:effectLst/>
+        </p:spPr>
+        <p:style>
+          <a:lnRef idx="1">
+            <a:schemeClr val="accent1"/>
+          </a:lnRef>
+          <a:fillRef idx="3">
+            <a:schemeClr val="accent1"/>
+          </a:fillRef>
+          <a:effectRef idx="2">
+            <a:schemeClr val="accent1"/>
+          </a:effectRef>
+          <a:fontRef idx="minor">
+            <a:schemeClr val="lt1"/>
+          </a:fontRef>
+        </p:style>
+        <p:txBody>
+          <a:bodyPr rtlCol="0" anchor="ctr" wrap="square" lIns="137160" rIns="137160" tIns="91440" bIns="91440"/>
+          <a:lstStyle/>
+          <a:p>
+            <a:pPr algn="ctr"/>
+            <a:r>
+              <a:rPr b="1" sz="1000">
+                <a:solidFill>
+                  <a:srgbClr val="1C1C1C"/>
+                </a:solidFill>
+                <a:latin typeface="Calibri"/>
+              </a:rPr>
+              <a:t>Tributación</a:t>
+            </a:r>
+          </a:p>
+          <a:p>
+            <a:pPr algn="ctr"/>
+            <a:r>
+              <a:rPr b="1" sz="1000">
+                <a:solidFill>
+                  <a:srgbClr val="1C1C1C"/>
+                </a:solidFill>
+                <a:latin typeface="Calibri"/>
+              </a:rPr>
+              <a:t>correcta</a:t>
+            </a:r>
+          </a:p>
+        </p:txBody>
+      </p:sp>
+      <p:sp>
+        <p:nvSpPr>
+          <p:cNvPr id="13" name="Rounded Rectangle 12"/>
+          <p:cNvSpPr/>
+          <p:nvPr/>
+        </p:nvSpPr>
+        <p:spPr>
+          <a:xfrm>
+            <a:off x="548640" y="3063240"/>
+            <a:ext cx="2743200" cy="960120"/>
+          </a:xfrm>
+          <a:prstGeom prst="roundRect">
+            <a:avLst/>
+          </a:prstGeom>
+          <a:solidFill>
+            <a:srgbClr val="FBE5E5"/>
+          </a:solidFill>
+          <a:ln>
+            <a:noFill/>
+          </a:ln>
+          <a:effectLst/>
+        </p:spPr>
+        <p:style>
+          <a:lnRef idx="1">
+            <a:schemeClr val="accent1"/>
+          </a:lnRef>
+          <a:fillRef idx="3">
+            <a:schemeClr val="accent1"/>
+          </a:fillRef>
+          <a:effectRef idx="2">
+            <a:schemeClr val="accent1"/>
+          </a:effectRef>
+          <a:fontRef idx="minor">
+            <a:schemeClr val="lt1"/>
+          </a:fontRef>
+        </p:style>
+        <p:txBody>
+          <a:bodyPr rtlCol="0" anchor="ctr" wrap="square" lIns="137160" rIns="137160" tIns="91440" bIns="91440"/>
+          <a:lstStyle/>
+          <a:p>
+            <a:pPr algn="ctr"/>
+            <a:r>
               <a:rPr b="1" sz="1050">
                 <a:solidFill>
                   <a:srgbClr val="1C1C1C"/>
                 </a:solidFill>
                 <a:latin typeface="Calibri"/>
               </a:rPr>
-              <a:t>Sin esquema</a:t>
-            </a:r>
-          </a:p>
+              <a:t>Con esquema D</a:t>
+            </a:r>
+          </a:p>
+          <a:p>
+            <a:pPr algn="ctr"/>
+            <a:r>
+              <a:rPr b="1" sz="1050">
+                <a:solidFill>
+                  <a:srgbClr val="1C1C1C"/>
+                </a:solidFill>
+                <a:latin typeface="Calibri"/>
+              </a:rPr>
+              <a:t>(3 socios simbólicos)</a:t>
+            </a:r>
+          </a:p>
+        </p:txBody>
+      </p:sp>
+      <p:sp>
+        <p:nvSpPr>
+          <p:cNvPr id="14" name="Rounded Rectangle 13"/>
+          <p:cNvSpPr/>
+          <p:nvPr/>
+        </p:nvSpPr>
+        <p:spPr>
+          <a:xfrm>
+            <a:off x="3337560" y="3063240"/>
+            <a:ext cx="4023360" cy="960120"/>
+          </a:xfrm>
+          <a:prstGeom prst="roundRect">
+            <a:avLst/>
+          </a:prstGeom>
+          <a:solidFill>
+            <a:srgbClr val="FBE5E5"/>
+          </a:solidFill>
+          <a:ln>
+            <a:noFill/>
+          </a:ln>
+          <a:effectLst/>
+        </p:spPr>
+        <p:style>
+          <a:lnRef idx="1">
+            <a:schemeClr val="accent1"/>
+          </a:lnRef>
+          <a:fillRef idx="3">
+            <a:schemeClr val="accent1"/>
+          </a:fillRef>
+          <a:effectRef idx="2">
+            <a:schemeClr val="accent1"/>
+          </a:effectRef>
+          <a:fontRef idx="minor">
+            <a:schemeClr val="lt1"/>
+          </a:fontRef>
+        </p:style>
+        <p:txBody>
+          <a:bodyPr rtlCol="0" anchor="ctr" wrap="square" lIns="137160" rIns="137160" tIns="91440" bIns="91440"/>
+          <a:lstStyle/>
           <a:p>
             <a:pPr algn="l"/>
             <a:r>
+              <a:rPr b="0" sz="1050">
+                <a:solidFill>
+                  <a:srgbClr val="1C1C1C"/>
+                </a:solidFill>
+                <a:latin typeface="Calibri"/>
+              </a:rPr>
+              <a:t>Pedro $100 MM · Señora $100 MM · Cuñado $100 MM</a:t>
+            </a:r>
+          </a:p>
+        </p:txBody>
+      </p:sp>
+      <p:sp>
+        <p:nvSpPr>
+          <p:cNvPr id="15" name="Rounded Rectangle 14"/>
+          <p:cNvSpPr/>
+          <p:nvPr/>
+        </p:nvSpPr>
+        <p:spPr>
+          <a:xfrm>
+            <a:off x="7406640" y="3063240"/>
+            <a:ext cx="2286000" cy="960120"/>
+          </a:xfrm>
+          <a:prstGeom prst="roundRect">
+            <a:avLst/>
+          </a:prstGeom>
+          <a:solidFill>
+            <a:srgbClr val="FBE5E5"/>
+          </a:solidFill>
+          <a:ln>
+            <a:noFill/>
+          </a:ln>
+          <a:effectLst/>
+        </p:spPr>
+        <p:style>
+          <a:lnRef idx="1">
+            <a:schemeClr val="accent1"/>
+          </a:lnRef>
+          <a:fillRef idx="3">
+            <a:schemeClr val="accent1"/>
+          </a:fillRef>
+          <a:effectRef idx="2">
+            <a:schemeClr val="accent1"/>
+          </a:effectRef>
+          <a:fontRef idx="minor">
+            <a:schemeClr val="lt1"/>
+          </a:fontRef>
+        </p:style>
+        <p:txBody>
+          <a:bodyPr rtlCol="0" anchor="ctr" wrap="square" lIns="137160" rIns="137160" tIns="91440" bIns="91440"/>
+          <a:lstStyle/>
+          <a:p>
+            <a:pPr algn="ctr"/>
+            <a:r>
+              <a:rPr b="0" sz="1050">
+                <a:solidFill>
+                  <a:srgbClr val="1C1C1C"/>
+                </a:solidFill>
+                <a:latin typeface="Calibri"/>
+              </a:rPr>
+              <a:t>Cada uno en tramo ≈ 23–35%</a:t>
+            </a:r>
+          </a:p>
+        </p:txBody>
+      </p:sp>
+      <p:sp>
+        <p:nvSpPr>
+          <p:cNvPr id="16" name="Rounded Rectangle 15"/>
+          <p:cNvSpPr/>
+          <p:nvPr/>
+        </p:nvSpPr>
+        <p:spPr>
+          <a:xfrm>
+            <a:off x="9738360" y="3063240"/>
+            <a:ext cx="1828800" cy="960120"/>
+          </a:xfrm>
+          <a:prstGeom prst="roundRect">
+            <a:avLst/>
+          </a:prstGeom>
+          <a:solidFill>
+            <a:srgbClr val="FBE5E5"/>
+          </a:solidFill>
+          <a:ln>
+            <a:noFill/>
+          </a:ln>
+          <a:effectLst/>
+        </p:spPr>
+        <p:style>
+          <a:lnRef idx="1">
+            <a:schemeClr val="accent1"/>
+          </a:lnRef>
+          <a:fillRef idx="3">
+            <a:schemeClr val="accent1"/>
+          </a:fillRef>
+          <a:effectRef idx="2">
+            <a:schemeClr val="accent1"/>
+          </a:effectRef>
+          <a:fontRef idx="minor">
+            <a:schemeClr val="lt1"/>
+          </a:fontRef>
+        </p:style>
+        <p:txBody>
+          <a:bodyPr rtlCol="0" anchor="ctr" wrap="square" lIns="137160" rIns="137160" tIns="91440" bIns="91440"/>
+          <a:lstStyle/>
+          <a:p>
+            <a:pPr algn="ctr"/>
+            <a:r>
+              <a:rPr b="1" sz="1000">
+                <a:solidFill>
+                  <a:srgbClr val="1C1C1C"/>
+                </a:solidFill>
+                <a:latin typeface="Calibri"/>
+              </a:rPr>
+              <a:t>Ahorro fiscal</a:t>
+            </a:r>
+          </a:p>
+          <a:p>
+            <a:pPr algn="ctr"/>
+            <a:r>
+              <a:rPr b="1" sz="1000">
+                <a:solidFill>
+                  <a:srgbClr val="1C1C1C"/>
+                </a:solidFill>
+                <a:latin typeface="Calibri"/>
+              </a:rPr>
+              <a:t>ARTIFICIAL</a:t>
+            </a:r>
+          </a:p>
+        </p:txBody>
+      </p:sp>
+      <p:sp>
+        <p:nvSpPr>
+          <p:cNvPr id="17" name="Rounded Rectangle 16"/>
+          <p:cNvSpPr/>
+          <p:nvPr/>
+        </p:nvSpPr>
+        <p:spPr>
+          <a:xfrm>
+            <a:off x="548640" y="4069080"/>
+            <a:ext cx="2743200" cy="960120"/>
+          </a:xfrm>
+          <a:prstGeom prst="roundRect">
+            <a:avLst/>
+          </a:prstGeom>
+          <a:solidFill>
+            <a:srgbClr val="FDE9D9"/>
+          </a:solidFill>
+          <a:ln>
+            <a:noFill/>
+          </a:ln>
+          <a:effectLst/>
+        </p:spPr>
+        <p:style>
+          <a:lnRef idx="1">
+            <a:schemeClr val="accent1"/>
+          </a:lnRef>
+          <a:fillRef idx="3">
+            <a:schemeClr val="accent1"/>
+          </a:fillRef>
+          <a:effectRef idx="2">
+            <a:schemeClr val="accent1"/>
+          </a:effectRef>
+          <a:fontRef idx="minor">
+            <a:schemeClr val="lt1"/>
+          </a:fontRef>
+        </p:style>
+        <p:txBody>
+          <a:bodyPr rtlCol="0" anchor="ctr" wrap="square" lIns="137160" rIns="137160" tIns="91440" bIns="91440"/>
+          <a:lstStyle/>
+          <a:p>
+            <a:pPr algn="ctr"/>
+            <a:r>
               <a:rPr b="1" sz="1050">
                 <a:solidFill>
                   <a:srgbClr val="1C1C1C"/>
                 </a:solidFill>
                 <a:latin typeface="Calibri"/>
               </a:rPr>
-              <a:t>(A trabajaría solo, sin sociedad)</a:t>
-            </a:r>
-          </a:p>
-        </p:txBody>
-      </p:sp>
-      <p:sp>
-        <p:nvSpPr>
-          <p:cNvPr id="10" name="Rounded Rectangle 9"/>
-          <p:cNvSpPr/>
-          <p:nvPr/>
-        </p:nvSpPr>
-        <p:spPr>
-          <a:xfrm>
-            <a:off x="3520440" y="2194560"/>
-            <a:ext cx="4114800" cy="914400"/>
+              <a:t>Diferencial</a:t>
+            </a:r>
+          </a:p>
+          <a:p>
+            <a:pPr algn="ctr"/>
+            <a:r>
+              <a:rPr b="1" sz="1050">
+                <a:solidFill>
+                  <a:srgbClr val="1C1C1C"/>
+                </a:solidFill>
+                <a:latin typeface="Calibri"/>
+              </a:rPr>
+              <a:t>(perjuicio fiscal)</a:t>
+            </a:r>
+          </a:p>
+        </p:txBody>
+      </p:sp>
+      <p:sp>
+        <p:nvSpPr>
+          <p:cNvPr id="18" name="Rounded Rectangle 17"/>
+          <p:cNvSpPr/>
+          <p:nvPr/>
+        </p:nvSpPr>
+        <p:spPr>
+          <a:xfrm>
+            <a:off x="3337560" y="4069080"/>
+            <a:ext cx="4023360" cy="960120"/>
           </a:xfrm>
           <a:prstGeom prst="roundRect">
             <a:avLst/>
           </a:prstGeom>
           <a:solidFill>
-            <a:srgbClr val="E8F3E8"/>
+            <a:srgbClr val="FDE9D9"/>
           </a:solidFill>
           <a:ln>
             <a:noFill/>
@@ -6553,27 +6861,27 @@
                 </a:solidFill>
                 <a:latin typeface="Calibri"/>
               </a:rPr>
-              <a:t>A: $300 MM íntegro</a:t>
-            </a:r>
-          </a:p>
-        </p:txBody>
-      </p:sp>
-      <p:sp>
-        <p:nvSpPr>
-          <p:cNvPr id="11" name="Rounded Rectangle 10"/>
-          <p:cNvSpPr/>
-          <p:nvPr/>
-        </p:nvSpPr>
-        <p:spPr>
-          <a:xfrm>
-            <a:off x="7680960" y="2194560"/>
-            <a:ext cx="2377440" cy="914400"/>
+              <a:t>Pedro genera el 100% de los ingresos. La señora y el cuñado no atendieron pacientes.</a:t>
+            </a:r>
+          </a:p>
+        </p:txBody>
+      </p:sp>
+      <p:sp>
+        <p:nvSpPr>
+          <p:cNvPr id="19" name="Rounded Rectangle 18"/>
+          <p:cNvSpPr/>
+          <p:nvPr/>
+        </p:nvSpPr>
+        <p:spPr>
+          <a:xfrm>
+            <a:off x="7406640" y="4069080"/>
+            <a:ext cx="2286000" cy="960120"/>
           </a:xfrm>
           <a:prstGeom prst="roundRect">
             <a:avLst/>
           </a:prstGeom>
           <a:solidFill>
-            <a:srgbClr val="E8F3E8"/>
+            <a:srgbClr val="FDE9D9"/>
           </a:solidFill>
           <a:ln>
             <a:noFill/>
@@ -6606,27 +6914,27 @@
                 </a:solidFill>
                 <a:latin typeface="Calibri"/>
               </a:rPr>
-              <a:t>Tramo alto (≈ 40%)</a:t>
-            </a:r>
-          </a:p>
-        </p:txBody>
-      </p:sp>
-      <p:sp>
-        <p:nvSpPr>
-          <p:cNvPr id="12" name="Rounded Rectangle 11"/>
-          <p:cNvSpPr/>
-          <p:nvPr/>
-        </p:nvSpPr>
-        <p:spPr>
-          <a:xfrm>
-            <a:off x="10104120" y="2194560"/>
-            <a:ext cx="1554480" cy="914400"/>
+              <a:t>Diferencia real de tramos = ahorro real de Pedro</a:t>
+            </a:r>
+          </a:p>
+        </p:txBody>
+      </p:sp>
+      <p:sp>
+        <p:nvSpPr>
+          <p:cNvPr id="20" name="Rounded Rectangle 19"/>
+          <p:cNvSpPr/>
+          <p:nvPr/>
+        </p:nvSpPr>
+        <p:spPr>
+          <a:xfrm>
+            <a:off x="9738360" y="4069080"/>
+            <a:ext cx="1828800" cy="960120"/>
           </a:xfrm>
           <a:prstGeom prst="roundRect">
             <a:avLst/>
           </a:prstGeom>
           <a:solidFill>
-            <a:srgbClr val="E8F3E8"/>
+            <a:srgbClr val="FDE9D9"/>
           </a:solidFill>
           <a:ln>
             <a:noFill/>
@@ -6659,27 +6967,39 @@
                 </a:solidFill>
                 <a:latin typeface="Calibri"/>
               </a:rPr>
-              <a:t>Tributación correcta</a:t>
-            </a:r>
-          </a:p>
-        </p:txBody>
-      </p:sp>
-      <p:sp>
-        <p:nvSpPr>
-          <p:cNvPr id="13" name="Rounded Rectangle 12"/>
-          <p:cNvSpPr/>
-          <p:nvPr/>
-        </p:nvSpPr>
-        <p:spPr>
-          <a:xfrm>
-            <a:off x="548640" y="3154680"/>
-            <a:ext cx="2926080" cy="914400"/>
+              <a:t>ABUSO</a:t>
+            </a:r>
+          </a:p>
+          <a:p>
+            <a:pPr algn="ctr"/>
+            <a:r>
+              <a:rPr b="1" sz="1000">
+                <a:solidFill>
+                  <a:srgbClr val="1C1C1C"/>
+                </a:solidFill>
+                <a:latin typeface="Calibri"/>
+              </a:rPr>
+              <a:t>Art. 4 ter CT</a:t>
+            </a:r>
+          </a:p>
+        </p:txBody>
+      </p:sp>
+      <p:sp>
+        <p:nvSpPr>
+          <p:cNvPr id="21" name="Rounded Rectangle 20"/>
+          <p:cNvSpPr/>
+          <p:nvPr/>
+        </p:nvSpPr>
+        <p:spPr>
+          <a:xfrm>
+            <a:off x="548640" y="5120640"/>
+            <a:ext cx="11064240" cy="548640"/>
           </a:xfrm>
           <a:prstGeom prst="roundRect">
             <a:avLst/>
           </a:prstGeom>
           <a:solidFill>
-            <a:srgbClr val="FBE5E5"/>
+            <a:srgbClr val="B03030"/>
           </a:solidFill>
           <a:ln>
             <a:noFill/>
@@ -6704,452 +7024,84 @@
           <a:bodyPr rtlCol="0" anchor="ctr" wrap="square" lIns="137160" rIns="137160" tIns="91440" bIns="91440"/>
           <a:lstStyle/>
           <a:p>
+            <a:pPr algn="ctr"/>
+            <a:r>
+              <a:rPr b="1" sz="1200">
+                <a:solidFill>
+                  <a:srgbClr val="FFFFFF"/>
+                </a:solidFill>
+                <a:latin typeface="Calibri"/>
+              </a:rPr>
+              <a:t>Si el TTA declara el abuso:  Pedro queda con $300 MM en su IGC + intereses + multas. La señora y el cuñado también deben reliquidar sus IGC. (Art. 4 quinquies CT)</a:t>
+            </a:r>
+          </a:p>
+        </p:txBody>
+      </p:sp>
+      <p:sp>
+        <p:nvSpPr>
+          <p:cNvPr id="22" name="Rounded Rectangle 21"/>
+          <p:cNvSpPr/>
+          <p:nvPr/>
+        </p:nvSpPr>
+        <p:spPr>
+          <a:xfrm>
+            <a:off x="548640" y="5760720"/>
+            <a:ext cx="11064240" cy="365760"/>
+          </a:xfrm>
+          <a:prstGeom prst="roundRect">
+            <a:avLst/>
+          </a:prstGeom>
+          <a:noFill/>
+          <a:ln>
+            <a:noFill/>
+          </a:ln>
+          <a:effectLst/>
+        </p:spPr>
+        <p:style>
+          <a:lnRef idx="1">
+            <a:schemeClr val="accent1"/>
+          </a:lnRef>
+          <a:fillRef idx="3">
+            <a:schemeClr val="accent1"/>
+          </a:fillRef>
+          <a:effectRef idx="2">
+            <a:schemeClr val="accent1"/>
+          </a:effectRef>
+          <a:fontRef idx="minor">
+            <a:schemeClr val="lt1"/>
+          </a:fontRef>
+        </p:style>
+        <p:txBody>
+          <a:bodyPr rtlCol="0" anchor="t" wrap="square" lIns="137160" rIns="137160" tIns="91440" bIns="91440"/>
+          <a:lstStyle/>
+          <a:p>
             <a:pPr algn="l"/>
             <a:r>
-              <a:rPr b="1" sz="1050">
-                <a:solidFill>
-                  <a:srgbClr val="1C1C1C"/>
-                </a:solidFill>
-                <a:latin typeface="Calibri"/>
-              </a:rPr>
-              <a:t>Con esquema D</a:t>
-            </a:r>
-          </a:p>
-          <a:p>
-            <a:pPr algn="l"/>
-            <a:r>
-              <a:rPr b="1" sz="1050">
-                <a:solidFill>
-                  <a:srgbClr val="1C1C1C"/>
-                </a:solidFill>
-                <a:latin typeface="Calibri"/>
-              </a:rPr>
-              <a:t>(3 socios, capital simbólico)</a:t>
-            </a:r>
-          </a:p>
-        </p:txBody>
-      </p:sp>
-      <p:sp>
-        <p:nvSpPr>
-          <p:cNvPr id="14" name="Rounded Rectangle 13"/>
-          <p:cNvSpPr/>
-          <p:nvPr/>
-        </p:nvSpPr>
-        <p:spPr>
-          <a:xfrm>
-            <a:off x="3520440" y="3154680"/>
-            <a:ext cx="4114800" cy="914400"/>
+              <a:rPr b="0" sz="900">
+                <a:solidFill>
+                  <a:srgbClr val="555555"/>
+                </a:solidFill>
+                <a:latin typeface="Calibri"/>
+              </a:rPr>
+              <a:t>Nota: cifras ilustrativas. El ahorro real depende de los ingresos totales, rentas de los socios y otras deducciones.</a:t>
+            </a:r>
+          </a:p>
+        </p:txBody>
+      </p:sp>
+      <p:sp>
+        <p:nvSpPr>
+          <p:cNvPr id="23" name="Rounded Rectangle 22"/>
+          <p:cNvSpPr/>
+          <p:nvPr/>
+        </p:nvSpPr>
+        <p:spPr>
+          <a:xfrm>
+            <a:off x="274320" y="6492240"/>
+            <a:ext cx="11612880" cy="274320"/>
           </a:xfrm>
           <a:prstGeom prst="roundRect">
             <a:avLst/>
           </a:prstGeom>
-          <a:solidFill>
-            <a:srgbClr val="FBE5E5"/>
-          </a:solidFill>
-          <a:ln>
-            <a:noFill/>
-          </a:ln>
-          <a:effectLst/>
-        </p:spPr>
-        <p:style>
-          <a:lnRef idx="1">
-            <a:schemeClr val="accent1"/>
-          </a:lnRef>
-          <a:fillRef idx="3">
-            <a:schemeClr val="accent1"/>
-          </a:fillRef>
-          <a:effectRef idx="2">
-            <a:schemeClr val="accent1"/>
-          </a:effectRef>
-          <a:fontRef idx="minor">
-            <a:schemeClr val="lt1"/>
-          </a:fontRef>
-        </p:style>
-        <p:txBody>
-          <a:bodyPr rtlCol="0" anchor="ctr" wrap="square" lIns="137160" rIns="137160" tIns="91440" bIns="91440"/>
-          <a:lstStyle/>
-          <a:p>
-            <a:pPr algn="l"/>
-            <a:r>
-              <a:rPr b="0" sz="1050">
-                <a:solidFill>
-                  <a:srgbClr val="1C1C1C"/>
-                </a:solidFill>
-                <a:latin typeface="Calibri"/>
-              </a:rPr>
-              <a:t>A: $100 MM</a:t>
-            </a:r>
-          </a:p>
-          <a:p>
-            <a:pPr algn="l"/>
-            <a:r>
-              <a:rPr b="0" sz="1050">
-                <a:solidFill>
-                  <a:srgbClr val="1C1C1C"/>
-                </a:solidFill>
-                <a:latin typeface="Calibri"/>
-              </a:rPr>
-              <a:t>B: $100 MM</a:t>
-            </a:r>
-          </a:p>
-          <a:p>
-            <a:pPr algn="l"/>
-            <a:r>
-              <a:rPr b="0" sz="1050">
-                <a:solidFill>
-                  <a:srgbClr val="1C1C1C"/>
-                </a:solidFill>
-                <a:latin typeface="Calibri"/>
-              </a:rPr>
-              <a:t>C: $100 MM</a:t>
-            </a:r>
-          </a:p>
-        </p:txBody>
-      </p:sp>
-      <p:sp>
-        <p:nvSpPr>
-          <p:cNvPr id="15" name="Rounded Rectangle 14"/>
-          <p:cNvSpPr/>
-          <p:nvPr/>
-        </p:nvSpPr>
-        <p:spPr>
-          <a:xfrm>
-            <a:off x="7680960" y="3154680"/>
-            <a:ext cx="2377440" cy="914400"/>
-          </a:xfrm>
-          <a:prstGeom prst="roundRect">
-            <a:avLst/>
-          </a:prstGeom>
-          <a:solidFill>
-            <a:srgbClr val="FBE5E5"/>
-          </a:solidFill>
-          <a:ln>
-            <a:noFill/>
-          </a:ln>
-          <a:effectLst/>
-        </p:spPr>
-        <p:style>
-          <a:lnRef idx="1">
-            <a:schemeClr val="accent1"/>
-          </a:lnRef>
-          <a:fillRef idx="3">
-            <a:schemeClr val="accent1"/>
-          </a:fillRef>
-          <a:effectRef idx="2">
-            <a:schemeClr val="accent1"/>
-          </a:effectRef>
-          <a:fontRef idx="minor">
-            <a:schemeClr val="lt1"/>
-          </a:fontRef>
-        </p:style>
-        <p:txBody>
-          <a:bodyPr rtlCol="0" anchor="ctr" wrap="square" lIns="137160" rIns="137160" tIns="91440" bIns="91440"/>
-          <a:lstStyle/>
-          <a:p>
-            <a:pPr algn="ctr"/>
-            <a:r>
-              <a:rPr b="0" sz="1050">
-                <a:solidFill>
-                  <a:srgbClr val="1C1C1C"/>
-                </a:solidFill>
-                <a:latin typeface="Calibri"/>
-              </a:rPr>
-              <a:t>Cada uno en tramo medio</a:t>
-            </a:r>
-          </a:p>
-        </p:txBody>
-      </p:sp>
-      <p:sp>
-        <p:nvSpPr>
-          <p:cNvPr id="16" name="Rounded Rectangle 15"/>
-          <p:cNvSpPr/>
-          <p:nvPr/>
-        </p:nvSpPr>
-        <p:spPr>
-          <a:xfrm>
-            <a:off x="10104120" y="3154680"/>
-            <a:ext cx="1554480" cy="914400"/>
-          </a:xfrm>
-          <a:prstGeom prst="roundRect">
-            <a:avLst/>
-          </a:prstGeom>
-          <a:solidFill>
-            <a:srgbClr val="FBE5E5"/>
-          </a:solidFill>
-          <a:ln>
-            <a:noFill/>
-          </a:ln>
-          <a:effectLst/>
-        </p:spPr>
-        <p:style>
-          <a:lnRef idx="1">
-            <a:schemeClr val="accent1"/>
-          </a:lnRef>
-          <a:fillRef idx="3">
-            <a:schemeClr val="accent1"/>
-          </a:fillRef>
-          <a:effectRef idx="2">
-            <a:schemeClr val="accent1"/>
-          </a:effectRef>
-          <a:fontRef idx="minor">
-            <a:schemeClr val="lt1"/>
-          </a:fontRef>
-        </p:style>
-        <p:txBody>
-          <a:bodyPr rtlCol="0" anchor="ctr" wrap="square" lIns="137160" rIns="137160" tIns="91440" bIns="91440"/>
-          <a:lstStyle/>
-          <a:p>
-            <a:pPr algn="ctr"/>
-            <a:r>
-              <a:rPr b="1" sz="1000">
-                <a:solidFill>
-                  <a:srgbClr val="1C1C1C"/>
-                </a:solidFill>
-                <a:latin typeface="Calibri"/>
-              </a:rPr>
-              <a:t>Ahorro fiscal artificial</a:t>
-            </a:r>
-          </a:p>
-        </p:txBody>
-      </p:sp>
-      <p:sp>
-        <p:nvSpPr>
-          <p:cNvPr id="17" name="Rounded Rectangle 16"/>
-          <p:cNvSpPr/>
-          <p:nvPr/>
-        </p:nvSpPr>
-        <p:spPr>
-          <a:xfrm>
-            <a:off x="548640" y="4114800"/>
-            <a:ext cx="2926080" cy="914400"/>
-          </a:xfrm>
-          <a:prstGeom prst="roundRect">
-            <a:avLst/>
-          </a:prstGeom>
-          <a:solidFill>
-            <a:srgbClr val="FDE9D9"/>
-          </a:solidFill>
-          <a:ln>
-            <a:noFill/>
-          </a:ln>
-          <a:effectLst/>
-        </p:spPr>
-        <p:style>
-          <a:lnRef idx="1">
-            <a:schemeClr val="accent1"/>
-          </a:lnRef>
-          <a:fillRef idx="3">
-            <a:schemeClr val="accent1"/>
-          </a:fillRef>
-          <a:effectRef idx="2">
-            <a:schemeClr val="accent1"/>
-          </a:effectRef>
-          <a:fontRef idx="minor">
-            <a:schemeClr val="lt1"/>
-          </a:fontRef>
-        </p:style>
-        <p:txBody>
-          <a:bodyPr rtlCol="0" anchor="ctr" wrap="square" lIns="137160" rIns="137160" tIns="91440" bIns="91440"/>
-          <a:lstStyle/>
-          <a:p>
-            <a:pPr algn="l"/>
-            <a:r>
-              <a:rPr b="1" sz="1050">
-                <a:solidFill>
-                  <a:srgbClr val="1C1C1C"/>
-                </a:solidFill>
-                <a:latin typeface="Calibri"/>
-              </a:rPr>
-              <a:t>Diferencial</a:t>
-            </a:r>
-          </a:p>
-        </p:txBody>
-      </p:sp>
-      <p:sp>
-        <p:nvSpPr>
-          <p:cNvPr id="18" name="Rounded Rectangle 17"/>
-          <p:cNvSpPr/>
-          <p:nvPr/>
-        </p:nvSpPr>
-        <p:spPr>
-          <a:xfrm>
-            <a:off x="3520440" y="4114800"/>
-            <a:ext cx="4114800" cy="914400"/>
-          </a:xfrm>
-          <a:prstGeom prst="roundRect">
-            <a:avLst/>
-          </a:prstGeom>
-          <a:solidFill>
-            <a:srgbClr val="FDE9D9"/>
-          </a:solidFill>
-          <a:ln>
-            <a:noFill/>
-          </a:ln>
-          <a:effectLst/>
-        </p:spPr>
-        <p:style>
-          <a:lnRef idx="1">
-            <a:schemeClr val="accent1"/>
-          </a:lnRef>
-          <a:fillRef idx="3">
-            <a:schemeClr val="accent1"/>
-          </a:fillRef>
-          <a:effectRef idx="2">
-            <a:schemeClr val="accent1"/>
-          </a:effectRef>
-          <a:fontRef idx="minor">
-            <a:schemeClr val="lt1"/>
-          </a:fontRef>
-        </p:style>
-        <p:txBody>
-          <a:bodyPr rtlCol="0" anchor="ctr" wrap="square" lIns="137160" rIns="137160" tIns="91440" bIns="91440"/>
-          <a:lstStyle/>
-          <a:p>
-            <a:pPr algn="l"/>
-            <a:r>
-              <a:rPr b="0" sz="1050">
-                <a:solidFill>
-                  <a:srgbClr val="1C1C1C"/>
-                </a:solidFill>
-                <a:latin typeface="Calibri"/>
-              </a:rPr>
-              <a:t>Mismo flujo económico real:</a:t>
-            </a:r>
-          </a:p>
-          <a:p>
-            <a:pPr algn="l"/>
-            <a:r>
-              <a:rPr b="0" sz="1050">
-                <a:solidFill>
-                  <a:srgbClr val="1C1C1C"/>
-                </a:solidFill>
-                <a:latin typeface="Calibri"/>
-              </a:rPr>
-              <a:t>los ingresos los generó A</a:t>
-            </a:r>
-          </a:p>
-        </p:txBody>
-      </p:sp>
-      <p:sp>
-        <p:nvSpPr>
-          <p:cNvPr id="19" name="Rounded Rectangle 18"/>
-          <p:cNvSpPr/>
-          <p:nvPr/>
-        </p:nvSpPr>
-        <p:spPr>
-          <a:xfrm>
-            <a:off x="7680960" y="4114800"/>
-            <a:ext cx="2377440" cy="914400"/>
-          </a:xfrm>
-          <a:prstGeom prst="roundRect">
-            <a:avLst/>
-          </a:prstGeom>
-          <a:solidFill>
-            <a:srgbClr val="FDE9D9"/>
-          </a:solidFill>
-          <a:ln>
-            <a:noFill/>
-          </a:ln>
-          <a:effectLst/>
-        </p:spPr>
-        <p:style>
-          <a:lnRef idx="1">
-            <a:schemeClr val="accent1"/>
-          </a:lnRef>
-          <a:fillRef idx="3">
-            <a:schemeClr val="accent1"/>
-          </a:fillRef>
-          <a:effectRef idx="2">
-            <a:schemeClr val="accent1"/>
-          </a:effectRef>
-          <a:fontRef idx="minor">
-            <a:schemeClr val="lt1"/>
-          </a:fontRef>
-        </p:style>
-        <p:txBody>
-          <a:bodyPr rtlCol="0" anchor="ctr" wrap="square" lIns="137160" rIns="137160" tIns="91440" bIns="91440"/>
-          <a:lstStyle/>
-          <a:p>
-            <a:pPr algn="ctr"/>
-            <a:r>
-              <a:rPr b="0" sz="1050">
-                <a:solidFill>
-                  <a:srgbClr val="1C1C1C"/>
-                </a:solidFill>
-                <a:latin typeface="Calibri"/>
-              </a:rPr>
-              <a:t>Disminución total IGC</a:t>
-            </a:r>
-          </a:p>
-        </p:txBody>
-      </p:sp>
-      <p:sp>
-        <p:nvSpPr>
-          <p:cNvPr id="20" name="Rounded Rectangle 19"/>
-          <p:cNvSpPr/>
-          <p:nvPr/>
-        </p:nvSpPr>
-        <p:spPr>
-          <a:xfrm>
-            <a:off x="10104120" y="4114800"/>
-            <a:ext cx="1554480" cy="914400"/>
-          </a:xfrm>
-          <a:prstGeom prst="roundRect">
-            <a:avLst/>
-          </a:prstGeom>
-          <a:solidFill>
-            <a:srgbClr val="FDE9D9"/>
-          </a:solidFill>
-          <a:ln>
-            <a:noFill/>
-          </a:ln>
-          <a:effectLst/>
-        </p:spPr>
-        <p:style>
-          <a:lnRef idx="1">
-            <a:schemeClr val="accent1"/>
-          </a:lnRef>
-          <a:fillRef idx="3">
-            <a:schemeClr val="accent1"/>
-          </a:fillRef>
-          <a:effectRef idx="2">
-            <a:schemeClr val="accent1"/>
-          </a:effectRef>
-          <a:fontRef idx="minor">
-            <a:schemeClr val="lt1"/>
-          </a:fontRef>
-        </p:style>
-        <p:txBody>
-          <a:bodyPr rtlCol="0" anchor="ctr" wrap="square" lIns="137160" rIns="137160" tIns="91440" bIns="91440"/>
-          <a:lstStyle/>
-          <a:p>
-            <a:pPr algn="ctr"/>
-            <a:r>
-              <a:rPr b="1" sz="1000">
-                <a:solidFill>
-                  <a:srgbClr val="1C1C1C"/>
-                </a:solidFill>
-                <a:latin typeface="Calibri"/>
-              </a:rPr>
-              <a:t>ABUSO Art. 4 ter CT</a:t>
-            </a:r>
-          </a:p>
-        </p:txBody>
-      </p:sp>
-      <p:sp>
-        <p:nvSpPr>
-          <p:cNvPr id="21" name="Rounded Rectangle 20"/>
-          <p:cNvSpPr/>
-          <p:nvPr/>
-        </p:nvSpPr>
-        <p:spPr>
-          <a:xfrm>
-            <a:off x="548640" y="5486400"/>
-            <a:ext cx="10972800" cy="457200"/>
-          </a:xfrm>
-          <a:prstGeom prst="roundRect">
-            <a:avLst/>
-          </a:prstGeom>
           <a:noFill/>
           <a:ln>
             <a:noFill/>
@@ -7174,119 +7126,15 @@
           <a:bodyPr rtlCol="0" anchor="t" wrap="square" lIns="137160" rIns="137160" tIns="91440" bIns="91440"/>
           <a:lstStyle/>
           <a:p>
-            <a:pPr algn="l"/>
-            <a:r>
-              <a:rPr b="0" sz="1000">
+            <a:pPr algn="r"/>
+            <a:r>
+              <a:rPr b="0" sz="800">
                 <a:solidFill>
                   <a:srgbClr val="555555"/>
                 </a:solidFill>
                 <a:latin typeface="Calibri"/>
               </a:rPr>
-              <a:t>Nota: cifras ilustrativas. El perjuicio fiscal efectivo dependerá del nivel real de ingresos, tasas marginales aplicables y otras rentas de los socios.</a:t>
-            </a:r>
-          </a:p>
-        </p:txBody>
-      </p:sp>
-      <p:sp>
-        <p:nvSpPr>
-          <p:cNvPr id="22" name="Rounded Rectangle 21"/>
-          <p:cNvSpPr/>
-          <p:nvPr/>
-        </p:nvSpPr>
-        <p:spPr>
-          <a:xfrm>
-            <a:off x="548640" y="5989320"/>
-            <a:ext cx="11064240" cy="502920"/>
-          </a:xfrm>
-          <a:prstGeom prst="roundRect">
-            <a:avLst/>
-          </a:prstGeom>
-          <a:solidFill>
-            <a:srgbClr val="B03030"/>
-          </a:solidFill>
-          <a:ln>
-            <a:noFill/>
-          </a:ln>
-          <a:effectLst/>
-        </p:spPr>
-        <p:style>
-          <a:lnRef idx="1">
-            <a:schemeClr val="accent1"/>
-          </a:lnRef>
-          <a:fillRef idx="3">
-            <a:schemeClr val="accent1"/>
-          </a:fillRef>
-          <a:effectRef idx="2">
-            <a:schemeClr val="accent1"/>
-          </a:effectRef>
-          <a:fontRef idx="minor">
-            <a:schemeClr val="lt1"/>
-          </a:fontRef>
-        </p:style>
-        <p:txBody>
-          <a:bodyPr rtlCol="0" anchor="ctr" wrap="square" lIns="137160" rIns="137160" tIns="91440" bIns="91440"/>
-          <a:lstStyle/>
-          <a:p>
-            <a:pPr algn="ctr"/>
-            <a:r>
-              <a:rPr b="1" sz="1150">
-                <a:solidFill>
-                  <a:srgbClr val="FFFFFF"/>
-                </a:solidFill>
-                <a:latin typeface="Calibri"/>
-              </a:rPr>
-              <a:t>Consecuencia jurídica:  el SII puede solicitar al TTA la declaración de ABUSO (Art. 4 quinquies CT), con efecto de recalificación y atribución íntegra de los ingresos a A para el cálculo del IGC + intereses + multas.</a:t>
-            </a:r>
-          </a:p>
-        </p:txBody>
-      </p:sp>
-      <p:sp>
-        <p:nvSpPr>
-          <p:cNvPr id="23" name="Rounded Rectangle 22"/>
-          <p:cNvSpPr/>
-          <p:nvPr/>
-        </p:nvSpPr>
-        <p:spPr>
-          <a:xfrm>
-            <a:off x="274320" y="6492240"/>
-            <a:ext cx="11887200" cy="274320"/>
-          </a:xfrm>
-          <a:prstGeom prst="roundRect">
-            <a:avLst/>
-          </a:prstGeom>
-          <a:noFill/>
-          <a:ln>
-            <a:noFill/>
-          </a:ln>
-          <a:effectLst/>
-        </p:spPr>
-        <p:style>
-          <a:lnRef idx="1">
-            <a:schemeClr val="accent1"/>
-          </a:lnRef>
-          <a:fillRef idx="3">
-            <a:schemeClr val="accent1"/>
-          </a:fillRef>
-          <a:effectRef idx="2">
-            <a:schemeClr val="accent1"/>
-          </a:effectRef>
-          <a:fontRef idx="minor">
-            <a:schemeClr val="lt1"/>
-          </a:fontRef>
-        </p:style>
-        <p:txBody>
-          <a:bodyPr rtlCol="0" anchor="t" wrap="square" lIns="137160" rIns="137160" tIns="91440" bIns="91440"/>
-          <a:lstStyle/>
-          <a:p>
-            <a:pPr algn="r"/>
-            <a:r>
-              <a:rPr b="0" sz="800">
-                <a:solidFill>
-                  <a:srgbClr val="555555"/>
-                </a:solidFill>
-                <a:latin typeface="Calibri"/>
-              </a:rPr>
-              <a:t>Caso 86 · Magíster Dirección Tributaria UVM · Slide 7</a:t>
+              <a:t>Caso 86 · Catálogo SII 2025 · Grupo 4 — Magíster Dirección Tributaria UVM  |  7</a:t>
             </a:r>
           </a:p>
         </p:txBody>
@@ -7377,13 +7225,13 @@
           <a:p>
             <a:pPr algn="l"/>
             <a:r>
-              <a:rPr sz="3200" b="0" i="0">
+              <a:rPr sz="3000" b="0" i="0">
                 <a:solidFill>
                   <a:srgbClr val="1C1C1C"/>
                 </a:solidFill>
                 <a:latin typeface="Cambria"/>
               </a:rPr>
-              <a:t>Alternativas de Solución (1/2)</a:t>
+              <a:t>¿Qué Puede Hacer Pedro?</a:t>
             </a:r>
           </a:p>
         </p:txBody>
@@ -7396,8 +7244,8 @@
         </p:nvSpPr>
         <p:spPr>
           <a:xfrm>
-            <a:off x="548640" y="1005840"/>
-            <a:ext cx="10972800" cy="457200"/>
+            <a:off x="548640" y="960120"/>
+            <a:ext cx="10972800" cy="411480"/>
           </a:xfrm>
           <a:prstGeom prst="roundRect">
             <a:avLst/>
@@ -7434,21 +7282,74 @@
                 </a:solidFill>
                 <a:latin typeface="Calibri"/>
               </a:rPr>
-              <a:t>Estructuras legítimas que A puede adoptar</a:t>
-            </a:r>
-          </a:p>
-        </p:txBody>
-      </p:sp>
-      <p:sp>
-        <p:nvSpPr>
-          <p:cNvPr id="5" name="Rounded Rectangle 4"/>
-          <p:cNvSpPr/>
-          <p:nvPr/>
-        </p:nvSpPr>
-        <p:spPr>
-          <a:xfrm>
-            <a:off x="548640" y="1691640"/>
-            <a:ext cx="1280160" cy="1508760"/>
+              <a:t>5 alternativas legítimas para organizar su actividad profesional</a:t>
+            </a:r>
+          </a:p>
+        </p:txBody>
+      </p:sp>
+      <p:sp>
+        <p:nvSpPr>
+          <p:cNvPr id="5" name="Oval 4"/>
+          <p:cNvSpPr/>
+          <p:nvPr/>
+        </p:nvSpPr>
+        <p:spPr>
+          <a:xfrm>
+            <a:off x="566928" y="1746504"/>
+            <a:ext cx="512064" cy="512064"/>
+          </a:xfrm>
+          <a:prstGeom prst="ellipse">
+            <a:avLst/>
+          </a:prstGeom>
+          <a:solidFill>
+            <a:srgbClr val="1A6B3C"/>
+          </a:solidFill>
+          <a:ln>
+            <a:noFill/>
+          </a:ln>
+          <a:effectLst/>
+        </p:spPr>
+        <p:style>
+          <a:lnRef idx="1">
+            <a:schemeClr val="accent1"/>
+          </a:lnRef>
+          <a:fillRef idx="3">
+            <a:schemeClr val="accent1"/>
+          </a:fillRef>
+          <a:effectRef idx="2">
+            <a:schemeClr val="accent1"/>
+          </a:effectRef>
+          <a:fontRef idx="minor">
+            <a:schemeClr val="lt1"/>
+          </a:fontRef>
+        </p:style>
+        <p:txBody>
+          <a:bodyPr rtlCol="0" anchor="ctr" lIns="0" rIns="0" tIns="0" bIns="0"/>
+          <a:lstStyle/>
+          <a:p>
+            <a:pPr algn="ctr"/>
+            <a:r>
+              <a:rPr sz="1600" b="1">
+                <a:solidFill>
+                  <a:srgbClr val="FFFFFF"/>
+                </a:solidFill>
+                <a:latin typeface="Calibri"/>
+              </a:rPr>
+              <a:t>1</a:t>
+            </a:r>
+          </a:p>
+        </p:txBody>
+      </p:sp>
+      <p:sp>
+        <p:nvSpPr>
+          <p:cNvPr id="6" name="Rounded Rectangle 5"/>
+          <p:cNvSpPr/>
+          <p:nvPr/>
+        </p:nvSpPr>
+        <p:spPr>
+          <a:xfrm>
+            <a:off x="1234440" y="1554480"/>
+            <a:ext cx="3657600" cy="896112"/>
           </a:xfrm>
           <a:prstGeom prst="roundRect">
             <a:avLst/>
@@ -7479,35 +7380,141 @@
           <a:bodyPr rtlCol="0" anchor="ctr" wrap="square" lIns="137160" rIns="137160" tIns="91440" bIns="91440"/>
           <a:lstStyle/>
           <a:p>
+            <a:pPr algn="l"/>
+            <a:r>
+              <a:rPr b="1" sz="1150">
+                <a:solidFill>
+                  <a:srgbClr val="FFFFFF"/>
+                </a:solidFill>
+                <a:latin typeface="Calibri"/>
+              </a:rPr>
+              <a:t>Profesional independiente</a:t>
+            </a:r>
+          </a:p>
+        </p:txBody>
+      </p:sp>
+      <p:sp>
+        <p:nvSpPr>
+          <p:cNvPr id="7" name="Rounded Rectangle 6"/>
+          <p:cNvSpPr/>
+          <p:nvPr/>
+        </p:nvSpPr>
+        <p:spPr>
+          <a:xfrm>
+            <a:off x="4983480" y="1554480"/>
+            <a:ext cx="6858000" cy="896112"/>
+          </a:xfrm>
+          <a:prstGeom prst="roundRect">
+            <a:avLst/>
+          </a:prstGeom>
+          <a:solidFill>
+            <a:srgbClr val="F4F6F9"/>
+          </a:solidFill>
+          <a:ln>
+            <a:noFill/>
+          </a:ln>
+          <a:effectLst/>
+        </p:spPr>
+        <p:style>
+          <a:lnRef idx="1">
+            <a:schemeClr val="accent1"/>
+          </a:lnRef>
+          <a:fillRef idx="3">
+            <a:schemeClr val="accent1"/>
+          </a:fillRef>
+          <a:effectRef idx="2">
+            <a:schemeClr val="accent1"/>
+          </a:effectRef>
+          <a:fontRef idx="minor">
+            <a:schemeClr val="lt1"/>
+          </a:fontRef>
+        </p:style>
+        <p:txBody>
+          <a:bodyPr rtlCol="0" anchor="ctr" wrap="square" lIns="137160" rIns="137160" tIns="91440" bIns="91440"/>
+          <a:lstStyle/>
+          <a:p>
+            <a:pPr algn="l"/>
+            <a:r>
+              <a:rPr b="0" sz="1050">
+                <a:solidFill>
+                  <a:srgbClr val="1C1C1C"/>
+                </a:solidFill>
+                <a:latin typeface="Calibri"/>
+              </a:rPr>
+              <a:t>Pedro emite boletas de honorarios y declara directamente. Puede deducir gastos efectivos o presuntos (30%, tope 15 UTA). Sin riesgo NGA.</a:t>
+            </a:r>
+          </a:p>
+        </p:txBody>
+      </p:sp>
+      <p:sp>
+        <p:nvSpPr>
+          <p:cNvPr id="8" name="Oval 7"/>
+          <p:cNvSpPr/>
+          <p:nvPr/>
+        </p:nvSpPr>
+        <p:spPr>
+          <a:xfrm>
+            <a:off x="566928" y="2688336"/>
+            <a:ext cx="512064" cy="512064"/>
+          </a:xfrm>
+          <a:prstGeom prst="ellipse">
+            <a:avLst/>
+          </a:prstGeom>
+          <a:solidFill>
+            <a:srgbClr val="1A3A5C"/>
+          </a:solidFill>
+          <a:ln>
+            <a:noFill/>
+          </a:ln>
+          <a:effectLst/>
+        </p:spPr>
+        <p:style>
+          <a:lnRef idx="1">
+            <a:schemeClr val="accent1"/>
+          </a:lnRef>
+          <a:fillRef idx="3">
+            <a:schemeClr val="accent1"/>
+          </a:fillRef>
+          <a:effectRef idx="2">
+            <a:schemeClr val="accent1"/>
+          </a:effectRef>
+          <a:fontRef idx="minor">
+            <a:schemeClr val="lt1"/>
+          </a:fontRef>
+        </p:style>
+        <p:txBody>
+          <a:bodyPr rtlCol="0" anchor="ctr" lIns="0" rIns="0" tIns="0" bIns="0"/>
+          <a:lstStyle/>
+          <a:p>
             <a:pPr algn="ctr"/>
             <a:r>
-              <a:rPr b="1" sz="1800">
+              <a:rPr sz="1600" b="1">
                 <a:solidFill>
                   <a:srgbClr val="FFFFFF"/>
                 </a:solidFill>
                 <a:latin typeface="Calibri"/>
               </a:rPr>
-              <a:t>Alt. 1</a:t>
-            </a:r>
-          </a:p>
-        </p:txBody>
-      </p:sp>
-      <p:sp>
-        <p:nvSpPr>
-          <p:cNvPr id="6" name="Rounded Rectangle 5"/>
-          <p:cNvSpPr/>
-          <p:nvPr/>
-        </p:nvSpPr>
-        <p:spPr>
-          <a:xfrm>
-            <a:off x="1920240" y="1691640"/>
-            <a:ext cx="9784080" cy="457200"/>
+              <a:t>2</a:t>
+            </a:r>
+          </a:p>
+        </p:txBody>
+      </p:sp>
+      <p:sp>
+        <p:nvSpPr>
+          <p:cNvPr id="9" name="Rounded Rectangle 8"/>
+          <p:cNvSpPr/>
+          <p:nvPr/>
+        </p:nvSpPr>
+        <p:spPr>
+          <a:xfrm>
+            <a:off x="1234440" y="2496312"/>
+            <a:ext cx="3657600" cy="896112"/>
           </a:xfrm>
           <a:prstGeom prst="roundRect">
             <a:avLst/>
           </a:prstGeom>
           <a:solidFill>
-            <a:srgbClr val="1A6B3C"/>
+            <a:srgbClr val="1A3A5C"/>
           </a:solidFill>
           <a:ln>
             <a:noFill/>
@@ -7534,27 +7541,27 @@
           <a:p>
             <a:pPr algn="l"/>
             <a:r>
-              <a:rPr b="1" sz="1250">
+              <a:rPr b="1" sz="1150">
                 <a:solidFill>
                   <a:srgbClr val="FFFFFF"/>
                 </a:solidFill>
                 <a:latin typeface="Calibri"/>
               </a:rPr>
-              <a:t>Tributación directa como profesional independiente (Art. 42 N°2 LIR)</a:t>
-            </a:r>
-          </a:p>
-        </p:txBody>
-      </p:sp>
-      <p:sp>
-        <p:nvSpPr>
-          <p:cNvPr id="7" name="Rounded Rectangle 6"/>
-          <p:cNvSpPr/>
-          <p:nvPr/>
-        </p:nvSpPr>
-        <p:spPr>
-          <a:xfrm>
-            <a:off x="1920240" y="2148840"/>
-            <a:ext cx="9784080" cy="1051560"/>
+              <a:t>Sociedad con socios que trabajen de verdad</a:t>
+            </a:r>
+          </a:p>
+        </p:txBody>
+      </p:sp>
+      <p:sp>
+        <p:nvSpPr>
+          <p:cNvPr id="10" name="Rounded Rectangle 9"/>
+          <p:cNvSpPr/>
+          <p:nvPr/>
+        </p:nvSpPr>
+        <p:spPr>
+          <a:xfrm>
+            <a:off x="4983480" y="2496312"/>
+            <a:ext cx="6858000" cy="896112"/>
           </a:xfrm>
           <a:prstGeom prst="roundRect">
             <a:avLst/>
@@ -7582,414 +7589,537 @@
           </a:fontRef>
         </p:style>
         <p:txBody>
+          <a:bodyPr rtlCol="0" anchor="ctr" wrap="square" lIns="137160" rIns="137160" tIns="91440" bIns="91440"/>
+          <a:lstStyle/>
+          <a:p>
+            <a:pPr algn="l"/>
+            <a:r>
+              <a:rPr b="0" sz="1050">
+                <a:solidFill>
+                  <a:srgbClr val="1C1C1C"/>
+                </a:solidFill>
+                <a:latin typeface="Calibri"/>
+              </a:rPr>
+              <a:t>Pedro se asocia con otros médicos que efectivamente atiendan pacientes. Cada socio aporta trabajo real → distribución de utilidades legítima.</a:t>
+            </a:r>
+          </a:p>
+        </p:txBody>
+      </p:sp>
+      <p:sp>
+        <p:nvSpPr>
+          <p:cNvPr id="11" name="Oval 10"/>
+          <p:cNvSpPr/>
+          <p:nvPr/>
+        </p:nvSpPr>
+        <p:spPr>
+          <a:xfrm>
+            <a:off x="566928" y="3630168"/>
+            <a:ext cx="512064" cy="512064"/>
+          </a:xfrm>
+          <a:prstGeom prst="ellipse">
+            <a:avLst/>
+          </a:prstGeom>
+          <a:solidFill>
+            <a:srgbClr val="8EB4E3"/>
+          </a:solidFill>
+          <a:ln>
+            <a:noFill/>
+          </a:ln>
+          <a:effectLst/>
+        </p:spPr>
+        <p:style>
+          <a:lnRef idx="1">
+            <a:schemeClr val="accent1"/>
+          </a:lnRef>
+          <a:fillRef idx="3">
+            <a:schemeClr val="accent1"/>
+          </a:fillRef>
+          <a:effectRef idx="2">
+            <a:schemeClr val="accent1"/>
+          </a:effectRef>
+          <a:fontRef idx="minor">
+            <a:schemeClr val="lt1"/>
+          </a:fontRef>
+        </p:style>
+        <p:txBody>
+          <a:bodyPr rtlCol="0" anchor="ctr" lIns="0" rIns="0" tIns="0" bIns="0"/>
+          <a:lstStyle/>
+          <a:p>
+            <a:pPr algn="ctr"/>
+            <a:r>
+              <a:rPr sz="1600" b="1">
+                <a:solidFill>
+                  <a:srgbClr val="FFFFFF"/>
+                </a:solidFill>
+                <a:latin typeface="Calibri"/>
+              </a:rPr>
+              <a:t>3</a:t>
+            </a:r>
+          </a:p>
+        </p:txBody>
+      </p:sp>
+      <p:sp>
+        <p:nvSpPr>
+          <p:cNvPr id="12" name="Rounded Rectangle 11"/>
+          <p:cNvSpPr/>
+          <p:nvPr/>
+        </p:nvSpPr>
+        <p:spPr>
+          <a:xfrm>
+            <a:off x="1234440" y="3438144"/>
+            <a:ext cx="3657600" cy="896112"/>
+          </a:xfrm>
+          <a:prstGeom prst="roundRect">
+            <a:avLst/>
+          </a:prstGeom>
+          <a:solidFill>
+            <a:srgbClr val="8EB4E3"/>
+          </a:solidFill>
+          <a:ln>
+            <a:noFill/>
+          </a:ln>
+          <a:effectLst/>
+        </p:spPr>
+        <p:style>
+          <a:lnRef idx="1">
+            <a:schemeClr val="accent1"/>
+          </a:lnRef>
+          <a:fillRef idx="3">
+            <a:schemeClr val="accent1"/>
+          </a:fillRef>
+          <a:effectRef idx="2">
+            <a:schemeClr val="accent1"/>
+          </a:effectRef>
+          <a:fontRef idx="minor">
+            <a:schemeClr val="lt1"/>
+          </a:fontRef>
+        </p:style>
+        <p:txBody>
+          <a:bodyPr rtlCol="0" anchor="ctr" wrap="square" lIns="137160" rIns="137160" tIns="91440" bIns="91440"/>
+          <a:lstStyle/>
+          <a:p>
+            <a:pPr algn="l"/>
+            <a:r>
+              <a:rPr b="1" sz="1150">
+                <a:solidFill>
+                  <a:srgbClr val="1A3A5C"/>
+                </a:solidFill>
+                <a:latin typeface="Calibri"/>
+              </a:rPr>
+              <a:t>Distribución proporcional al trabajo (misma sociedad)</a:t>
+            </a:r>
+          </a:p>
+        </p:txBody>
+      </p:sp>
+      <p:sp>
+        <p:nvSpPr>
+          <p:cNvPr id="13" name="Rounded Rectangle 12"/>
+          <p:cNvSpPr/>
+          <p:nvPr/>
+        </p:nvSpPr>
+        <p:spPr>
+          <a:xfrm>
+            <a:off x="4983480" y="3438144"/>
+            <a:ext cx="6858000" cy="896112"/>
+          </a:xfrm>
+          <a:prstGeom prst="roundRect">
+            <a:avLst/>
+          </a:prstGeom>
+          <a:solidFill>
+            <a:srgbClr val="F4F6F9"/>
+          </a:solidFill>
+          <a:ln>
+            <a:noFill/>
+          </a:ln>
+          <a:effectLst/>
+        </p:spPr>
+        <p:style>
+          <a:lnRef idx="1">
+            <a:schemeClr val="accent1"/>
+          </a:lnRef>
+          <a:fillRef idx="3">
+            <a:schemeClr val="accent1"/>
+          </a:fillRef>
+          <a:effectRef idx="2">
+            <a:schemeClr val="accent1"/>
+          </a:effectRef>
+          <a:fontRef idx="minor">
+            <a:schemeClr val="lt1"/>
+          </a:fontRef>
+        </p:style>
+        <p:txBody>
+          <a:bodyPr rtlCol="0" anchor="ctr" wrap="square" lIns="137160" rIns="137160" tIns="91440" bIns="91440"/>
+          <a:lstStyle/>
+          <a:p>
+            <a:pPr algn="l"/>
+            <a:r>
+              <a:rPr b="0" sz="1050">
+                <a:solidFill>
+                  <a:srgbClr val="1C1C1C"/>
+                </a:solidFill>
+                <a:latin typeface="Calibri"/>
+              </a:rPr>
+              <a:t>Si D se mantiene: Pedro recibe el 90% de utilidades y B/C el 5% c/u, acorde a su aporte real. Debe haber algún rol efectivo de B y C.</a:t>
+            </a:r>
+          </a:p>
+        </p:txBody>
+      </p:sp>
+      <p:sp>
+        <p:nvSpPr>
+          <p:cNvPr id="14" name="Oval 13"/>
+          <p:cNvSpPr/>
+          <p:nvPr/>
+        </p:nvSpPr>
+        <p:spPr>
+          <a:xfrm>
+            <a:off x="566928" y="4572000"/>
+            <a:ext cx="512064" cy="512064"/>
+          </a:xfrm>
+          <a:prstGeom prst="ellipse">
+            <a:avLst/>
+          </a:prstGeom>
+          <a:solidFill>
+            <a:srgbClr val="C5501A"/>
+          </a:solidFill>
+          <a:ln>
+            <a:noFill/>
+          </a:ln>
+          <a:effectLst/>
+        </p:spPr>
+        <p:style>
+          <a:lnRef idx="1">
+            <a:schemeClr val="accent1"/>
+          </a:lnRef>
+          <a:fillRef idx="3">
+            <a:schemeClr val="accent1"/>
+          </a:fillRef>
+          <a:effectRef idx="2">
+            <a:schemeClr val="accent1"/>
+          </a:effectRef>
+          <a:fontRef idx="minor">
+            <a:schemeClr val="lt1"/>
+          </a:fontRef>
+        </p:style>
+        <p:txBody>
+          <a:bodyPr rtlCol="0" anchor="ctr" lIns="0" rIns="0" tIns="0" bIns="0"/>
+          <a:lstStyle/>
+          <a:p>
+            <a:pPr algn="ctr"/>
+            <a:r>
+              <a:rPr sz="1600" b="1">
+                <a:solidFill>
+                  <a:srgbClr val="FFFFFF"/>
+                </a:solidFill>
+                <a:latin typeface="Calibri"/>
+              </a:rPr>
+              <a:t>4</a:t>
+            </a:r>
+          </a:p>
+        </p:txBody>
+      </p:sp>
+      <p:sp>
+        <p:nvSpPr>
+          <p:cNvPr id="15" name="Rounded Rectangle 14"/>
+          <p:cNvSpPr/>
+          <p:nvPr/>
+        </p:nvSpPr>
+        <p:spPr>
+          <a:xfrm>
+            <a:off x="1234440" y="4379976"/>
+            <a:ext cx="3657600" cy="896112"/>
+          </a:xfrm>
+          <a:prstGeom prst="roundRect">
+            <a:avLst/>
+          </a:prstGeom>
+          <a:solidFill>
+            <a:srgbClr val="C5501A"/>
+          </a:solidFill>
+          <a:ln>
+            <a:noFill/>
+          </a:ln>
+          <a:effectLst/>
+        </p:spPr>
+        <p:style>
+          <a:lnRef idx="1">
+            <a:schemeClr val="accent1"/>
+          </a:lnRef>
+          <a:fillRef idx="3">
+            <a:schemeClr val="accent1"/>
+          </a:fillRef>
+          <a:effectRef idx="2">
+            <a:schemeClr val="accent1"/>
+          </a:effectRef>
+          <a:fontRef idx="minor">
+            <a:schemeClr val="lt1"/>
+          </a:fontRef>
+        </p:style>
+        <p:txBody>
+          <a:bodyPr rtlCol="0" anchor="ctr" wrap="square" lIns="137160" rIns="137160" tIns="91440" bIns="91440"/>
+          <a:lstStyle/>
+          <a:p>
+            <a:pPr algn="l"/>
+            <a:r>
+              <a:rPr b="1" sz="1150">
+                <a:solidFill>
+                  <a:srgbClr val="FFFFFF"/>
+                </a:solidFill>
+                <a:latin typeface="Calibri"/>
+              </a:rPr>
+              <a:t>SpA — régimen Pro Pyme 14D N°3</a:t>
+            </a:r>
+          </a:p>
+        </p:txBody>
+      </p:sp>
+      <p:sp>
+        <p:nvSpPr>
+          <p:cNvPr id="16" name="Rounded Rectangle 15"/>
+          <p:cNvSpPr/>
+          <p:nvPr/>
+        </p:nvSpPr>
+        <p:spPr>
+          <a:xfrm>
+            <a:off x="4983480" y="4379976"/>
+            <a:ext cx="6858000" cy="896112"/>
+          </a:xfrm>
+          <a:prstGeom prst="roundRect">
+            <a:avLst/>
+          </a:prstGeom>
+          <a:solidFill>
+            <a:srgbClr val="F4F6F9"/>
+          </a:solidFill>
+          <a:ln>
+            <a:noFill/>
+          </a:ln>
+          <a:effectLst/>
+        </p:spPr>
+        <p:style>
+          <a:lnRef idx="1">
+            <a:schemeClr val="accent1"/>
+          </a:lnRef>
+          <a:fillRef idx="3">
+            <a:schemeClr val="accent1"/>
+          </a:fillRef>
+          <a:effectRef idx="2">
+            <a:schemeClr val="accent1"/>
+          </a:effectRef>
+          <a:fontRef idx="minor">
+            <a:schemeClr val="lt1"/>
+          </a:fontRef>
+        </p:style>
+        <p:txBody>
+          <a:bodyPr rtlCol="0" anchor="ctr" wrap="square" lIns="137160" rIns="137160" tIns="91440" bIns="91440"/>
+          <a:lstStyle/>
+          <a:p>
+            <a:pPr algn="l"/>
+            <a:r>
+              <a:rPr b="0" sz="1050">
+                <a:solidFill>
+                  <a:srgbClr val="1C1C1C"/>
+                </a:solidFill>
+                <a:latin typeface="Calibri"/>
+              </a:rPr>
+              <a:t>Pedro constituye SpA. IDPC al 25%; Pedro paga IGC sobre retiros. Permite reinversión y planificación. Exige sustancia económica.</a:t>
+            </a:r>
+          </a:p>
+        </p:txBody>
+      </p:sp>
+      <p:sp>
+        <p:nvSpPr>
+          <p:cNvPr id="17" name="Oval 16"/>
+          <p:cNvSpPr/>
+          <p:nvPr/>
+        </p:nvSpPr>
+        <p:spPr>
+          <a:xfrm>
+            <a:off x="566928" y="5513832"/>
+            <a:ext cx="512064" cy="512064"/>
+          </a:xfrm>
+          <a:prstGeom prst="ellipse">
+            <a:avLst/>
+          </a:prstGeom>
+          <a:solidFill>
+            <a:srgbClr val="E6A43C"/>
+          </a:solidFill>
+          <a:ln>
+            <a:noFill/>
+          </a:ln>
+          <a:effectLst/>
+        </p:spPr>
+        <p:style>
+          <a:lnRef idx="1">
+            <a:schemeClr val="accent1"/>
+          </a:lnRef>
+          <a:fillRef idx="3">
+            <a:schemeClr val="accent1"/>
+          </a:fillRef>
+          <a:effectRef idx="2">
+            <a:schemeClr val="accent1"/>
+          </a:effectRef>
+          <a:fontRef idx="minor">
+            <a:schemeClr val="lt1"/>
+          </a:fontRef>
+        </p:style>
+        <p:txBody>
+          <a:bodyPr rtlCol="0" anchor="ctr" lIns="0" rIns="0" tIns="0" bIns="0"/>
+          <a:lstStyle/>
+          <a:p>
+            <a:pPr algn="ctr"/>
+            <a:r>
+              <a:rPr sz="1600" b="1">
+                <a:solidFill>
+                  <a:srgbClr val="FFFFFF"/>
+                </a:solidFill>
+                <a:latin typeface="Calibri"/>
+              </a:rPr>
+              <a:t>5</a:t>
+            </a:r>
+          </a:p>
+        </p:txBody>
+      </p:sp>
+      <p:sp>
+        <p:nvSpPr>
+          <p:cNvPr id="18" name="Rounded Rectangle 17"/>
+          <p:cNvSpPr/>
+          <p:nvPr/>
+        </p:nvSpPr>
+        <p:spPr>
+          <a:xfrm>
+            <a:off x="1234440" y="5321808"/>
+            <a:ext cx="3657600" cy="896112"/>
+          </a:xfrm>
+          <a:prstGeom prst="roundRect">
+            <a:avLst/>
+          </a:prstGeom>
+          <a:solidFill>
+            <a:srgbClr val="E6A43C"/>
+          </a:solidFill>
+          <a:ln>
+            <a:noFill/>
+          </a:ln>
+          <a:effectLst/>
+        </p:spPr>
+        <p:style>
+          <a:lnRef idx="1">
+            <a:schemeClr val="accent1"/>
+          </a:lnRef>
+          <a:fillRef idx="3">
+            <a:schemeClr val="accent1"/>
+          </a:fillRef>
+          <a:effectRef idx="2">
+            <a:schemeClr val="accent1"/>
+          </a:effectRef>
+          <a:fontRef idx="minor">
+            <a:schemeClr val="lt1"/>
+          </a:fontRef>
+        </p:style>
+        <p:txBody>
+          <a:bodyPr rtlCol="0" anchor="ctr" wrap="square" lIns="137160" rIns="137160" tIns="91440" bIns="91440"/>
+          <a:lstStyle/>
+          <a:p>
+            <a:pPr algn="l"/>
+            <a:r>
+              <a:rPr b="1" sz="1150">
+                <a:solidFill>
+                  <a:srgbClr val="FFFFFF"/>
+                </a:solidFill>
+                <a:latin typeface="Calibri"/>
+              </a:rPr>
+              <a:t>Régimen Transparente 14D N°8</a:t>
+            </a:r>
+          </a:p>
+        </p:txBody>
+      </p:sp>
+      <p:sp>
+        <p:nvSpPr>
+          <p:cNvPr id="19" name="Rounded Rectangle 18"/>
+          <p:cNvSpPr/>
+          <p:nvPr/>
+        </p:nvSpPr>
+        <p:spPr>
+          <a:xfrm>
+            <a:off x="4983480" y="5321808"/>
+            <a:ext cx="6858000" cy="896112"/>
+          </a:xfrm>
+          <a:prstGeom prst="roundRect">
+            <a:avLst/>
+          </a:prstGeom>
+          <a:solidFill>
+            <a:srgbClr val="F4F6F9"/>
+          </a:solidFill>
+          <a:ln>
+            <a:noFill/>
+          </a:ln>
+          <a:effectLst/>
+        </p:spPr>
+        <p:style>
+          <a:lnRef idx="1">
+            <a:schemeClr val="accent1"/>
+          </a:lnRef>
+          <a:fillRef idx="3">
+            <a:schemeClr val="accent1"/>
+          </a:fillRef>
+          <a:effectRef idx="2">
+            <a:schemeClr val="accent1"/>
+          </a:effectRef>
+          <a:fontRef idx="minor">
+            <a:schemeClr val="lt1"/>
+          </a:fontRef>
+        </p:style>
+        <p:txBody>
+          <a:bodyPr rtlCol="0" anchor="ctr" wrap="square" lIns="137160" rIns="137160" tIns="91440" bIns="91440"/>
+          <a:lstStyle/>
+          <a:p>
+            <a:pPr algn="l"/>
+            <a:r>
+              <a:rPr b="0" sz="1050">
+                <a:solidFill>
+                  <a:srgbClr val="1C1C1C"/>
+                </a:solidFill>
+                <a:latin typeface="Calibri"/>
+              </a:rPr>
+              <a:t>La empresa no paga IDPC; socios pagan IGC directo. Solo válido si los socios tienen rol económico real; no resuelve el problema si B y C siguen sin trabajar.</a:t>
+            </a:r>
+          </a:p>
+        </p:txBody>
+      </p:sp>
+      <p:sp>
+        <p:nvSpPr>
+          <p:cNvPr id="20" name="Rounded Rectangle 19"/>
+          <p:cNvSpPr/>
+          <p:nvPr/>
+        </p:nvSpPr>
+        <p:spPr>
+          <a:xfrm>
+            <a:off x="274320" y="6492240"/>
+            <a:ext cx="11612880" cy="274320"/>
+          </a:xfrm>
+          <a:prstGeom prst="roundRect">
+            <a:avLst/>
+          </a:prstGeom>
+          <a:noFill/>
+          <a:ln>
+            <a:noFill/>
+          </a:ln>
+          <a:effectLst/>
+        </p:spPr>
+        <p:style>
+          <a:lnRef idx="1">
+            <a:schemeClr val="accent1"/>
+          </a:lnRef>
+          <a:fillRef idx="3">
+            <a:schemeClr val="accent1"/>
+          </a:fillRef>
+          <a:effectRef idx="2">
+            <a:schemeClr val="accent1"/>
+          </a:effectRef>
+          <a:fontRef idx="minor">
+            <a:schemeClr val="lt1"/>
+          </a:fontRef>
+        </p:style>
+        <p:txBody>
           <a:bodyPr rtlCol="0" anchor="t" wrap="square" lIns="137160" rIns="137160" tIns="91440" bIns="91440"/>
           <a:lstStyle/>
           <a:p>
-            <a:pPr algn="l"/>
-            <a:r>
-              <a:rPr b="0" sz="1100">
-                <a:solidFill>
-                  <a:srgbClr val="1C1C1C"/>
-                </a:solidFill>
-                <a:latin typeface="Calibri"/>
-              </a:rPr>
-              <a:t>A ejerce como persona natural, emite boletas de honorarios, declara en segunda categoría. Opción gastos efectivos o presuntos (30%, tope 15 UTA). Paga IGC sobre la totalidad. Opción más simple y libre de cuestionamiento.</a:t>
-            </a:r>
-          </a:p>
-        </p:txBody>
-      </p:sp>
-      <p:sp>
-        <p:nvSpPr>
-          <p:cNvPr id="8" name="Rounded Rectangle 7"/>
-          <p:cNvSpPr/>
-          <p:nvPr/>
-        </p:nvSpPr>
-        <p:spPr>
-          <a:xfrm>
-            <a:off x="548640" y="3291840"/>
-            <a:ext cx="1280160" cy="1508760"/>
-          </a:xfrm>
-          <a:prstGeom prst="roundRect">
-            <a:avLst/>
-          </a:prstGeom>
-          <a:solidFill>
-            <a:srgbClr val="8EB4E3"/>
-          </a:solidFill>
-          <a:ln>
-            <a:noFill/>
-          </a:ln>
-          <a:effectLst/>
-        </p:spPr>
-        <p:style>
-          <a:lnRef idx="1">
-            <a:schemeClr val="accent1"/>
-          </a:lnRef>
-          <a:fillRef idx="3">
-            <a:schemeClr val="accent1"/>
-          </a:fillRef>
-          <a:effectRef idx="2">
-            <a:schemeClr val="accent1"/>
-          </a:effectRef>
-          <a:fontRef idx="minor">
-            <a:schemeClr val="lt1"/>
-          </a:fontRef>
-        </p:style>
-        <p:txBody>
-          <a:bodyPr rtlCol="0" anchor="ctr" wrap="square" lIns="137160" rIns="137160" tIns="91440" bIns="91440"/>
-          <a:lstStyle/>
-          <a:p>
-            <a:pPr algn="ctr"/>
-            <a:r>
-              <a:rPr b="1" sz="1800">
-                <a:solidFill>
-                  <a:srgbClr val="1A3A5C"/>
-                </a:solidFill>
-                <a:latin typeface="Calibri"/>
-              </a:rPr>
-              <a:t>Alt. 2</a:t>
-            </a:r>
-          </a:p>
-        </p:txBody>
-      </p:sp>
-      <p:sp>
-        <p:nvSpPr>
-          <p:cNvPr id="9" name="Rounded Rectangle 8"/>
-          <p:cNvSpPr/>
-          <p:nvPr/>
-        </p:nvSpPr>
-        <p:spPr>
-          <a:xfrm>
-            <a:off x="1920240" y="3291840"/>
-            <a:ext cx="9784080" cy="457200"/>
-          </a:xfrm>
-          <a:prstGeom prst="roundRect">
-            <a:avLst/>
-          </a:prstGeom>
-          <a:solidFill>
-            <a:srgbClr val="8EB4E3"/>
-          </a:solidFill>
-          <a:ln>
-            <a:noFill/>
-          </a:ln>
-          <a:effectLst/>
-        </p:spPr>
-        <p:style>
-          <a:lnRef idx="1">
-            <a:schemeClr val="accent1"/>
-          </a:lnRef>
-          <a:fillRef idx="3">
-            <a:schemeClr val="accent1"/>
-          </a:fillRef>
-          <a:effectRef idx="2">
-            <a:schemeClr val="accent1"/>
-          </a:effectRef>
-          <a:fontRef idx="minor">
-            <a:schemeClr val="lt1"/>
-          </a:fontRef>
-        </p:style>
-        <p:txBody>
-          <a:bodyPr rtlCol="0" anchor="ctr" wrap="square" lIns="137160" rIns="137160" tIns="91440" bIns="91440"/>
-          <a:lstStyle/>
-          <a:p>
-            <a:pPr algn="l"/>
-            <a:r>
-              <a:rPr b="1" sz="1250">
-                <a:solidFill>
-                  <a:srgbClr val="1A3A5C"/>
-                </a:solidFill>
-                <a:latin typeface="Calibri"/>
-              </a:rPr>
-              <a:t>Sociedad de profesionales con socios que efectivamente trabajen</a:t>
-            </a:r>
-          </a:p>
-        </p:txBody>
-      </p:sp>
-      <p:sp>
-        <p:nvSpPr>
-          <p:cNvPr id="10" name="Rounded Rectangle 9"/>
-          <p:cNvSpPr/>
-          <p:nvPr/>
-        </p:nvSpPr>
-        <p:spPr>
-          <a:xfrm>
-            <a:off x="1920240" y="3749040"/>
-            <a:ext cx="9784080" cy="1051560"/>
-          </a:xfrm>
-          <a:prstGeom prst="roundRect">
-            <a:avLst/>
-          </a:prstGeom>
-          <a:solidFill>
-            <a:srgbClr val="F4F6F9"/>
-          </a:solidFill>
-          <a:ln>
-            <a:noFill/>
-          </a:ln>
-          <a:effectLst/>
-        </p:spPr>
-        <p:style>
-          <a:lnRef idx="1">
-            <a:schemeClr val="accent1"/>
-          </a:lnRef>
-          <a:fillRef idx="3">
-            <a:schemeClr val="accent1"/>
-          </a:fillRef>
-          <a:effectRef idx="2">
-            <a:schemeClr val="accent1"/>
-          </a:effectRef>
-          <a:fontRef idx="minor">
-            <a:schemeClr val="lt1"/>
-          </a:fontRef>
-        </p:style>
-        <p:txBody>
-          <a:bodyPr rtlCol="0" anchor="t" wrap="square" lIns="137160" rIns="137160" tIns="91440" bIns="91440"/>
-          <a:lstStyle/>
-          <a:p>
-            <a:pPr algn="l"/>
-            <a:r>
-              <a:rPr b="0" sz="1100">
-                <a:solidFill>
-                  <a:srgbClr val="1C1C1C"/>
-                </a:solidFill>
-                <a:latin typeface="Calibri"/>
-              </a:rPr>
-              <a:t>A se asocia solo con profesionales que ejerzan su profesión para la sociedad. Todos coadyuvan al servicio. D califica legítimamente y puede optar por tributar en 1ª o 2ª categoría conforme Art. 42 N°2 inciso 3°.</a:t>
-            </a:r>
-          </a:p>
-        </p:txBody>
-      </p:sp>
-      <p:sp>
-        <p:nvSpPr>
-          <p:cNvPr id="11" name="Rounded Rectangle 10"/>
-          <p:cNvSpPr/>
-          <p:nvPr/>
-        </p:nvSpPr>
-        <p:spPr>
-          <a:xfrm>
-            <a:off x="548640" y="4892040"/>
-            <a:ext cx="1280160" cy="1508760"/>
-          </a:xfrm>
-          <a:prstGeom prst="roundRect">
-            <a:avLst/>
-          </a:prstGeom>
-          <a:solidFill>
-            <a:srgbClr val="E6A43C"/>
-          </a:solidFill>
-          <a:ln>
-            <a:noFill/>
-          </a:ln>
-          <a:effectLst/>
-        </p:spPr>
-        <p:style>
-          <a:lnRef idx="1">
-            <a:schemeClr val="accent1"/>
-          </a:lnRef>
-          <a:fillRef idx="3">
-            <a:schemeClr val="accent1"/>
-          </a:fillRef>
-          <a:effectRef idx="2">
-            <a:schemeClr val="accent1"/>
-          </a:effectRef>
-          <a:fontRef idx="minor">
-            <a:schemeClr val="lt1"/>
-          </a:fontRef>
-        </p:style>
-        <p:txBody>
-          <a:bodyPr rtlCol="0" anchor="ctr" wrap="square" lIns="137160" rIns="137160" tIns="91440" bIns="91440"/>
-          <a:lstStyle/>
-          <a:p>
-            <a:pPr algn="ctr"/>
-            <a:r>
-              <a:rPr b="1" sz="1800">
-                <a:solidFill>
-                  <a:srgbClr val="FFFFFF"/>
-                </a:solidFill>
-                <a:latin typeface="Calibri"/>
-              </a:rPr>
-              <a:t>Alt. 3</a:t>
-            </a:r>
-          </a:p>
-        </p:txBody>
-      </p:sp>
-      <p:sp>
-        <p:nvSpPr>
-          <p:cNvPr id="12" name="Rounded Rectangle 11"/>
-          <p:cNvSpPr/>
-          <p:nvPr/>
-        </p:nvSpPr>
-        <p:spPr>
-          <a:xfrm>
-            <a:off x="1920240" y="4892040"/>
-            <a:ext cx="9784080" cy="457200"/>
-          </a:xfrm>
-          <a:prstGeom prst="roundRect">
-            <a:avLst/>
-          </a:prstGeom>
-          <a:solidFill>
-            <a:srgbClr val="E6A43C"/>
-          </a:solidFill>
-          <a:ln>
-            <a:noFill/>
-          </a:ln>
-          <a:effectLst/>
-        </p:spPr>
-        <p:style>
-          <a:lnRef idx="1">
-            <a:schemeClr val="accent1"/>
-          </a:lnRef>
-          <a:fillRef idx="3">
-            <a:schemeClr val="accent1"/>
-          </a:fillRef>
-          <a:effectRef idx="2">
-            <a:schemeClr val="accent1"/>
-          </a:effectRef>
-          <a:fontRef idx="minor">
-            <a:schemeClr val="lt1"/>
-          </a:fontRef>
-        </p:style>
-        <p:txBody>
-          <a:bodyPr rtlCol="0" anchor="ctr" wrap="square" lIns="137160" rIns="137160" tIns="91440" bIns="91440"/>
-          <a:lstStyle/>
-          <a:p>
-            <a:pPr algn="l"/>
-            <a:r>
-              <a:rPr b="1" sz="1250">
-                <a:solidFill>
-                  <a:srgbClr val="FFFFFF"/>
-                </a:solidFill>
-                <a:latin typeface="Calibri"/>
-              </a:rPr>
-              <a:t>Distribución de utilidades proporcional al trabajo prestado</a:t>
-            </a:r>
-          </a:p>
-        </p:txBody>
-      </p:sp>
-      <p:sp>
-        <p:nvSpPr>
-          <p:cNvPr id="13" name="Rounded Rectangle 12"/>
-          <p:cNvSpPr/>
-          <p:nvPr/>
-        </p:nvSpPr>
-        <p:spPr>
-          <a:xfrm>
-            <a:off x="1920240" y="5349240"/>
-            <a:ext cx="9784080" cy="1051560"/>
-          </a:xfrm>
-          <a:prstGeom prst="roundRect">
-            <a:avLst/>
-          </a:prstGeom>
-          <a:solidFill>
-            <a:srgbClr val="F4F6F9"/>
-          </a:solidFill>
-          <a:ln>
-            <a:noFill/>
-          </a:ln>
-          <a:effectLst/>
-        </p:spPr>
-        <p:style>
-          <a:lnRef idx="1">
-            <a:schemeClr val="accent1"/>
-          </a:lnRef>
-          <a:fillRef idx="3">
-            <a:schemeClr val="accent1"/>
-          </a:fillRef>
-          <a:effectRef idx="2">
-            <a:schemeClr val="accent1"/>
-          </a:effectRef>
-          <a:fontRef idx="minor">
-            <a:schemeClr val="lt1"/>
-          </a:fontRef>
-        </p:style>
-        <p:txBody>
-          <a:bodyPr rtlCol="0" anchor="t" wrap="square" lIns="137160" rIns="137160" tIns="91440" bIns="91440"/>
-          <a:lstStyle/>
-          <a:p>
-            <a:pPr algn="l"/>
-            <a:r>
-              <a:rPr b="0" sz="1100">
-                <a:solidFill>
-                  <a:srgbClr val="1C1C1C"/>
-                </a:solidFill>
-                <a:latin typeface="Calibri"/>
-              </a:rPr>
-              <a:t>Si D se mantiene con A, B y C, los estatutos pueden contemplar:</a:t>
-            </a:r>
-          </a:p>
-          <a:p>
-            <a:pPr algn="l"/>
-            <a:r>
-              <a:rPr b="0" sz="1100">
-                <a:solidFill>
-                  <a:srgbClr val="1C1C1C"/>
-                </a:solidFill>
-                <a:latin typeface="Calibri"/>
-              </a:rPr>
-              <a:t>(i) participación diferenciada (ej. A 90%, B 5%, C 5%)</a:t>
-            </a:r>
-          </a:p>
-          <a:p>
-            <a:pPr algn="l"/>
-            <a:r>
-              <a:rPr b="0" sz="1100">
-                <a:solidFill>
-                  <a:srgbClr val="1C1C1C"/>
-                </a:solidFill>
-                <a:latin typeface="Calibri"/>
-              </a:rPr>
-              <a:t>(ii) sueldo patronal a A previo a repartir utilidades.</a:t>
-            </a:r>
-          </a:p>
-          <a:p>
-            <a:pPr algn="l"/>
-            <a:r>
-              <a:rPr b="0" sz="1100">
-                <a:solidFill>
-                  <a:srgbClr val="1C1C1C"/>
-                </a:solidFill>
-                <a:latin typeface="Calibri"/>
-              </a:rPr>
-              <a:t>La distribución debe reflejar el aporte económico real.</a:t>
-            </a:r>
-          </a:p>
-        </p:txBody>
-      </p:sp>
-      <p:sp>
-        <p:nvSpPr>
-          <p:cNvPr id="14" name="Rounded Rectangle 13"/>
-          <p:cNvSpPr/>
-          <p:nvPr/>
-        </p:nvSpPr>
-        <p:spPr>
-          <a:xfrm>
-            <a:off x="274320" y="6492240"/>
-            <a:ext cx="11887200" cy="274320"/>
-          </a:xfrm>
-          <a:prstGeom prst="roundRect">
-            <a:avLst/>
-          </a:prstGeom>
-          <a:noFill/>
-          <a:ln>
-            <a:noFill/>
-          </a:ln>
-          <a:effectLst/>
-        </p:spPr>
-        <p:style>
-          <a:lnRef idx="1">
-            <a:schemeClr val="accent1"/>
-          </a:lnRef>
-          <a:fillRef idx="3">
-            <a:schemeClr val="accent1"/>
-          </a:fillRef>
-          <a:effectRef idx="2">
-            <a:schemeClr val="accent1"/>
-          </a:effectRef>
-          <a:fontRef idx="minor">
-            <a:schemeClr val="lt1"/>
-          </a:fontRef>
-        </p:style>
-        <p:txBody>
-          <a:bodyPr rtlCol="0" anchor="t" wrap="square" lIns="137160" rIns="137160" tIns="91440" bIns="91440"/>
-          <a:lstStyle/>
-          <a:p>
             <a:pPr algn="r"/>
             <a:r>
               <a:rPr b="0" sz="800">
@@ -7998,7 +8128,7 @@
                 </a:solidFill>
                 <a:latin typeface="Calibri"/>
               </a:rPr>
-              <a:t>Caso 86 · Magíster Dirección Tributaria UVM · Slide 8</a:t>
+              <a:t>Caso 86 · Catálogo SII 2025 · Grupo 4 — Magíster Dirección Tributaria UVM  |  8</a:t>
             </a:r>
           </a:p>
         </p:txBody>
@@ -8089,13 +8219,13 @@
           <a:p>
             <a:pPr algn="l"/>
             <a:r>
-              <a:rPr sz="3200" b="0" i="0">
+              <a:rPr sz="3400" b="0" i="0">
                 <a:solidFill>
                   <a:srgbClr val="1C1C1C"/>
                 </a:solidFill>
                 <a:latin typeface="Cambria"/>
               </a:rPr>
-              <a:t>Alternativas de Solución (2/2)</a:t>
+              <a:t>Conclusiones</a:t>
             </a:r>
           </a:p>
         </p:txBody>
@@ -8109,7 +8239,7 @@
         <p:spPr>
           <a:xfrm>
             <a:off x="548640" y="1005840"/>
-            <a:ext cx="10972800" cy="457200"/>
+            <a:ext cx="10972800" cy="411480"/>
           </a:xfrm>
           <a:prstGeom prst="roundRect">
             <a:avLst/>
@@ -8146,26 +8276,185 @@
                 </a:solidFill>
                 <a:latin typeface="Calibri"/>
               </a:rPr>
-              <a:t>Vehículos societarios alternativos con sustancia económica</a:t>
-            </a:r>
-          </a:p>
-        </p:txBody>
-      </p:sp>
-      <p:sp>
-        <p:nvSpPr>
-          <p:cNvPr id="5" name="Rounded Rectangle 4"/>
-          <p:cNvSpPr/>
-          <p:nvPr/>
-        </p:nvSpPr>
-        <p:spPr>
-          <a:xfrm>
-            <a:off x="548640" y="1691640"/>
-            <a:ext cx="1280160" cy="1691640"/>
+              <a:t>Caso 86 — ¿Qué aprendemos?</a:t>
+            </a:r>
+          </a:p>
+        </p:txBody>
+      </p:sp>
+      <p:sp>
+        <p:nvSpPr>
+          <p:cNvPr id="5" name="Oval 4"/>
+          <p:cNvSpPr/>
+          <p:nvPr/>
+        </p:nvSpPr>
+        <p:spPr>
+          <a:xfrm>
+            <a:off x="548640" y="1746504"/>
+            <a:ext cx="512064" cy="512064"/>
+          </a:xfrm>
+          <a:prstGeom prst="ellipse">
+            <a:avLst/>
+          </a:prstGeom>
+          <a:solidFill>
+            <a:srgbClr val="B03030"/>
+          </a:solidFill>
+          <a:ln>
+            <a:noFill/>
+          </a:ln>
+          <a:effectLst/>
+        </p:spPr>
+        <p:style>
+          <a:lnRef idx="1">
+            <a:schemeClr val="accent1"/>
+          </a:lnRef>
+          <a:fillRef idx="3">
+            <a:schemeClr val="accent1"/>
+          </a:fillRef>
+          <a:effectRef idx="2">
+            <a:schemeClr val="accent1"/>
+          </a:effectRef>
+          <a:fontRef idx="minor">
+            <a:schemeClr val="lt1"/>
+          </a:fontRef>
+        </p:style>
+        <p:txBody>
+          <a:bodyPr rtlCol="0" anchor="ctr" lIns="0" rIns="0" tIns="0" bIns="0"/>
+          <a:lstStyle/>
+          <a:p>
+            <a:pPr algn="ctr"/>
+            <a:r>
+              <a:rPr sz="1600" b="1">
+                <a:solidFill>
+                  <a:srgbClr val="FFFFFF"/>
+                </a:solidFill>
+                <a:latin typeface="Calibri"/>
+              </a:rPr>
+              <a:t>1</a:t>
+            </a:r>
+          </a:p>
+        </p:txBody>
+      </p:sp>
+      <p:sp>
+        <p:nvSpPr>
+          <p:cNvPr id="6" name="Rounded Rectangle 5"/>
+          <p:cNvSpPr/>
+          <p:nvPr/>
+        </p:nvSpPr>
+        <p:spPr>
+          <a:xfrm>
+            <a:off x="1234440" y="1600200"/>
+            <a:ext cx="2926080" cy="804672"/>
           </a:xfrm>
           <a:prstGeom prst="roundRect">
             <a:avLst/>
           </a:prstGeom>
           <a:solidFill>
+            <a:srgbClr val="B03030"/>
+          </a:solidFill>
+          <a:ln>
+            <a:noFill/>
+          </a:ln>
+          <a:effectLst/>
+        </p:spPr>
+        <p:style>
+          <a:lnRef idx="1">
+            <a:schemeClr val="accent1"/>
+          </a:lnRef>
+          <a:fillRef idx="3">
+            <a:schemeClr val="accent1"/>
+          </a:fillRef>
+          <a:effectRef idx="2">
+            <a:schemeClr val="accent1"/>
+          </a:effectRef>
+          <a:fontRef idx="minor">
+            <a:schemeClr val="lt1"/>
+          </a:fontRef>
+        </p:style>
+        <p:txBody>
+          <a:bodyPr rtlCol="0" anchor="ctr" wrap="square" lIns="137160" rIns="137160" tIns="91440" bIns="91440"/>
+          <a:lstStyle/>
+          <a:p>
+            <a:pPr algn="l"/>
+            <a:r>
+              <a:rPr b="1" sz="1150">
+                <a:solidFill>
+                  <a:srgbClr val="FFFFFF"/>
+                </a:solidFill>
+                <a:latin typeface="Calibri"/>
+              </a:rPr>
+              <a:t>Abuso, no simulación</a:t>
+            </a:r>
+          </a:p>
+        </p:txBody>
+      </p:sp>
+      <p:sp>
+        <p:nvSpPr>
+          <p:cNvPr id="7" name="Rounded Rectangle 6"/>
+          <p:cNvSpPr/>
+          <p:nvPr/>
+        </p:nvSpPr>
+        <p:spPr>
+          <a:xfrm>
+            <a:off x="4251960" y="1600200"/>
+            <a:ext cx="7589520" cy="804672"/>
+          </a:xfrm>
+          <a:prstGeom prst="roundRect">
+            <a:avLst/>
+          </a:prstGeom>
+          <a:solidFill>
+            <a:srgbClr val="F4F6F9"/>
+          </a:solidFill>
+          <a:ln>
+            <a:noFill/>
+          </a:ln>
+          <a:effectLst/>
+        </p:spPr>
+        <p:style>
+          <a:lnRef idx="1">
+            <a:schemeClr val="accent1"/>
+          </a:lnRef>
+          <a:fillRef idx="3">
+            <a:schemeClr val="accent1"/>
+          </a:fillRef>
+          <a:effectRef idx="2">
+            <a:schemeClr val="accent1"/>
+          </a:effectRef>
+          <a:fontRef idx="minor">
+            <a:schemeClr val="lt1"/>
+          </a:fontRef>
+        </p:style>
+        <p:txBody>
+          <a:bodyPr rtlCol="0" anchor="ctr" wrap="square" lIns="137160" rIns="137160" tIns="91440" bIns="91440"/>
+          <a:lstStyle/>
+          <a:p>
+            <a:pPr algn="l"/>
+            <a:r>
+              <a:rPr b="0" sz="1050">
+                <a:solidFill>
+                  <a:srgbClr val="1C1C1C"/>
+                </a:solidFill>
+                <a:latin typeface="Calibri"/>
+              </a:rPr>
+              <a:t>Los actos son reales. El problema es la FORMA inapropiada. La sociedad y los socios existen, pero B y C no aportan valor económico real.</a:t>
+            </a:r>
+          </a:p>
+        </p:txBody>
+      </p:sp>
+      <p:sp>
+        <p:nvSpPr>
+          <p:cNvPr id="8" name="Oval 7"/>
+          <p:cNvSpPr/>
+          <p:nvPr/>
+        </p:nvSpPr>
+        <p:spPr>
+          <a:xfrm>
+            <a:off x="548640" y="2624328"/>
+            <a:ext cx="512064" cy="512064"/>
+          </a:xfrm>
+          <a:prstGeom prst="ellipse">
+            <a:avLst/>
+          </a:prstGeom>
+          <a:solidFill>
             <a:srgbClr val="C5501A"/>
           </a:solidFill>
           <a:ln>
@@ -8188,38 +8477,197 @@
           </a:fontRef>
         </p:style>
         <p:txBody>
+          <a:bodyPr rtlCol="0" anchor="ctr" lIns="0" rIns="0" tIns="0" bIns="0"/>
+          <a:lstStyle/>
+          <a:p>
+            <a:pPr algn="ctr"/>
+            <a:r>
+              <a:rPr sz="1600" b="1">
+                <a:solidFill>
+                  <a:srgbClr val="FFFFFF"/>
+                </a:solidFill>
+                <a:latin typeface="Calibri"/>
+              </a:rPr>
+              <a:t>2</a:t>
+            </a:r>
+          </a:p>
+        </p:txBody>
+      </p:sp>
+      <p:sp>
+        <p:nvSpPr>
+          <p:cNvPr id="9" name="Rounded Rectangle 8"/>
+          <p:cNvSpPr/>
+          <p:nvPr/>
+        </p:nvSpPr>
+        <p:spPr>
+          <a:xfrm>
+            <a:off x="1234440" y="2478024"/>
+            <a:ext cx="2926080" cy="804672"/>
+          </a:xfrm>
+          <a:prstGeom prst="roundRect">
+            <a:avLst/>
+          </a:prstGeom>
+          <a:solidFill>
+            <a:srgbClr val="C5501A"/>
+          </a:solidFill>
+          <a:ln>
+            <a:noFill/>
+          </a:ln>
+          <a:effectLst/>
+        </p:spPr>
+        <p:style>
+          <a:lnRef idx="1">
+            <a:schemeClr val="accent1"/>
+          </a:lnRef>
+          <a:fillRef idx="3">
+            <a:schemeClr val="accent1"/>
+          </a:fillRef>
+          <a:effectRef idx="2">
+            <a:schemeClr val="accent1"/>
+          </a:effectRef>
+          <a:fontRef idx="minor">
+            <a:schemeClr val="lt1"/>
+          </a:fontRef>
+        </p:style>
+        <p:txBody>
           <a:bodyPr rtlCol="0" anchor="ctr" wrap="square" lIns="137160" rIns="137160" tIns="91440" bIns="91440"/>
           <a:lstStyle/>
           <a:p>
+            <a:pPr algn="l"/>
+            <a:r>
+              <a:rPr b="1" sz="1150">
+                <a:solidFill>
+                  <a:srgbClr val="FFFFFF"/>
+                </a:solidFill>
+                <a:latin typeface="Calibri"/>
+              </a:rPr>
+              <a:t>La sociedad D no califica</a:t>
+            </a:r>
+          </a:p>
+        </p:txBody>
+      </p:sp>
+      <p:sp>
+        <p:nvSpPr>
+          <p:cNvPr id="10" name="Rounded Rectangle 9"/>
+          <p:cNvSpPr/>
+          <p:nvPr/>
+        </p:nvSpPr>
+        <p:spPr>
+          <a:xfrm>
+            <a:off x="4251960" y="2478024"/>
+            <a:ext cx="7589520" cy="804672"/>
+          </a:xfrm>
+          <a:prstGeom prst="roundRect">
+            <a:avLst/>
+          </a:prstGeom>
+          <a:solidFill>
+            <a:srgbClr val="F4F6F9"/>
+          </a:solidFill>
+          <a:ln>
+            <a:noFill/>
+          </a:ln>
+          <a:effectLst/>
+        </p:spPr>
+        <p:style>
+          <a:lnRef idx="1">
+            <a:schemeClr val="accent1"/>
+          </a:lnRef>
+          <a:fillRef idx="3">
+            <a:schemeClr val="accent1"/>
+          </a:fillRef>
+          <a:effectRef idx="2">
+            <a:schemeClr val="accent1"/>
+          </a:effectRef>
+          <a:fontRef idx="minor">
+            <a:schemeClr val="lt1"/>
+          </a:fontRef>
+        </p:style>
+        <p:txBody>
+          <a:bodyPr rtlCol="0" anchor="ctr" wrap="square" lIns="137160" rIns="137160" tIns="91440" bIns="91440"/>
+          <a:lstStyle/>
+          <a:p>
+            <a:pPr algn="l"/>
+            <a:r>
+              <a:rPr b="0" sz="1050">
+                <a:solidFill>
+                  <a:srgbClr val="1C1C1C"/>
+                </a:solidFill>
+                <a:latin typeface="Calibri"/>
+              </a:rPr>
+              <a:t>Sin cumplir los requisitos de las Circulares N°21/1991 y N°50/2020, D no es sociedad de profesionales → el esquema no tiene amparo legal.</a:t>
+            </a:r>
+          </a:p>
+        </p:txBody>
+      </p:sp>
+      <p:sp>
+        <p:nvSpPr>
+          <p:cNvPr id="11" name="Oval 10"/>
+          <p:cNvSpPr/>
+          <p:nvPr/>
+        </p:nvSpPr>
+        <p:spPr>
+          <a:xfrm>
+            <a:off x="548640" y="3502152"/>
+            <a:ext cx="512064" cy="512064"/>
+          </a:xfrm>
+          <a:prstGeom prst="ellipse">
+            <a:avLst/>
+          </a:prstGeom>
+          <a:solidFill>
+            <a:srgbClr val="1A3A5C"/>
+          </a:solidFill>
+          <a:ln>
+            <a:noFill/>
+          </a:ln>
+          <a:effectLst/>
+        </p:spPr>
+        <p:style>
+          <a:lnRef idx="1">
+            <a:schemeClr val="accent1"/>
+          </a:lnRef>
+          <a:fillRef idx="3">
+            <a:schemeClr val="accent1"/>
+          </a:fillRef>
+          <a:effectRef idx="2">
+            <a:schemeClr val="accent1"/>
+          </a:effectRef>
+          <a:fontRef idx="minor">
+            <a:schemeClr val="lt1"/>
+          </a:fontRef>
+        </p:style>
+        <p:txBody>
+          <a:bodyPr rtlCol="0" anchor="ctr" lIns="0" rIns="0" tIns="0" bIns="0"/>
+          <a:lstStyle/>
+          <a:p>
             <a:pPr algn="ctr"/>
             <a:r>
-              <a:rPr b="1" sz="1800">
+              <a:rPr sz="1600" b="1">
                 <a:solidFill>
                   <a:srgbClr val="FFFFFF"/>
                 </a:solidFill>
                 <a:latin typeface="Calibri"/>
               </a:rPr>
-              <a:t>Alt. 4</a:t>
-            </a:r>
-          </a:p>
-        </p:txBody>
-      </p:sp>
-      <p:sp>
-        <p:nvSpPr>
-          <p:cNvPr id="6" name="Rounded Rectangle 5"/>
-          <p:cNvSpPr/>
-          <p:nvPr/>
-        </p:nvSpPr>
-        <p:spPr>
-          <a:xfrm>
-            <a:off x="1920240" y="1691640"/>
-            <a:ext cx="9784080" cy="457200"/>
+              <a:t>3</a:t>
+            </a:r>
+          </a:p>
+        </p:txBody>
+      </p:sp>
+      <p:sp>
+        <p:nvSpPr>
+          <p:cNvPr id="12" name="Rounded Rectangle 11"/>
+          <p:cNvSpPr/>
+          <p:nvPr/>
+        </p:nvSpPr>
+        <p:spPr>
+          <a:xfrm>
+            <a:off x="1234440" y="3355848"/>
+            <a:ext cx="2926080" cy="804672"/>
           </a:xfrm>
           <a:prstGeom prst="roundRect">
             <a:avLst/>
           </a:prstGeom>
           <a:solidFill>
-            <a:srgbClr val="C5501A"/>
+            <a:srgbClr val="1A3A5C"/>
           </a:solidFill>
           <a:ln>
             <a:noFill/>
@@ -8246,27 +8694,27 @@
           <a:p>
             <a:pPr algn="l"/>
             <a:r>
-              <a:rPr b="1" sz="1250">
+              <a:rPr b="1" sz="1150">
                 <a:solidFill>
                   <a:srgbClr val="FFFFFF"/>
                 </a:solidFill>
                 <a:latin typeface="Calibri"/>
               </a:rPr>
-              <a:t>Sociedad por Acciones (SpA) — régimen 14D N°3 Pro Pyme General</a:t>
-            </a:r>
-          </a:p>
-        </p:txBody>
-      </p:sp>
-      <p:sp>
-        <p:nvSpPr>
-          <p:cNvPr id="7" name="Rounded Rectangle 6"/>
-          <p:cNvSpPr/>
-          <p:nvPr/>
-        </p:nvSpPr>
-        <p:spPr>
-          <a:xfrm>
-            <a:off x="1920240" y="2148840"/>
-            <a:ext cx="9784080" cy="1234440"/>
+              <a:t>El SII puede actuar — consecuencias concretas</a:t>
+            </a:r>
+          </a:p>
+        </p:txBody>
+      </p:sp>
+      <p:sp>
+        <p:nvSpPr>
+          <p:cNvPr id="13" name="Rounded Rectangle 12"/>
+          <p:cNvSpPr/>
+          <p:nvPr/>
+        </p:nvSpPr>
+        <p:spPr>
+          <a:xfrm>
+            <a:off x="4251960" y="3355848"/>
+            <a:ext cx="7589520" cy="804672"/>
           </a:xfrm>
           <a:prstGeom prst="roundRect">
             <a:avLst/>
@@ -8294,272 +8742,431 @@
           </a:fontRef>
         </p:style>
         <p:txBody>
+          <a:bodyPr rtlCol="0" anchor="ctr" wrap="square" lIns="137160" rIns="137160" tIns="91440" bIns="91440"/>
+          <a:lstStyle/>
+          <a:p>
+            <a:pPr algn="l"/>
+            <a:r>
+              <a:rPr b="0" sz="1050">
+                <a:solidFill>
+                  <a:srgbClr val="1C1C1C"/>
+                </a:solidFill>
+                <a:latin typeface="Calibri"/>
+              </a:rPr>
+              <a:t>Art. 4 quinquies CT: declaración de abuso ante el TTA → Pedro recibe los $300 MM íntegros en su IGC + intereses + multas.</a:t>
+            </a:r>
+          </a:p>
+        </p:txBody>
+      </p:sp>
+      <p:sp>
+        <p:nvSpPr>
+          <p:cNvPr id="14" name="Oval 13"/>
+          <p:cNvSpPr/>
+          <p:nvPr/>
+        </p:nvSpPr>
+        <p:spPr>
+          <a:xfrm>
+            <a:off x="548640" y="4379976"/>
+            <a:ext cx="512064" cy="512064"/>
+          </a:xfrm>
+          <a:prstGeom prst="ellipse">
+            <a:avLst/>
+          </a:prstGeom>
+          <a:solidFill>
+            <a:srgbClr val="1A6B3C"/>
+          </a:solidFill>
+          <a:ln>
+            <a:noFill/>
+          </a:ln>
+          <a:effectLst/>
+        </p:spPr>
+        <p:style>
+          <a:lnRef idx="1">
+            <a:schemeClr val="accent1"/>
+          </a:lnRef>
+          <a:fillRef idx="3">
+            <a:schemeClr val="accent1"/>
+          </a:fillRef>
+          <a:effectRef idx="2">
+            <a:schemeClr val="accent1"/>
+          </a:effectRef>
+          <a:fontRef idx="minor">
+            <a:schemeClr val="lt1"/>
+          </a:fontRef>
+        </p:style>
+        <p:txBody>
+          <a:bodyPr rtlCol="0" anchor="ctr" lIns="0" rIns="0" tIns="0" bIns="0"/>
+          <a:lstStyle/>
+          <a:p>
+            <a:pPr algn="ctr"/>
+            <a:r>
+              <a:rPr sz="1600" b="1">
+                <a:solidFill>
+                  <a:srgbClr val="FFFFFF"/>
+                </a:solidFill>
+                <a:latin typeface="Calibri"/>
+              </a:rPr>
+              <a:t>4</a:t>
+            </a:r>
+          </a:p>
+        </p:txBody>
+      </p:sp>
+      <p:sp>
+        <p:nvSpPr>
+          <p:cNvPr id="15" name="Rounded Rectangle 14"/>
+          <p:cNvSpPr/>
+          <p:nvPr/>
+        </p:nvSpPr>
+        <p:spPr>
+          <a:xfrm>
+            <a:off x="1234440" y="4233672"/>
+            <a:ext cx="2926080" cy="804672"/>
+          </a:xfrm>
+          <a:prstGeom prst="roundRect">
+            <a:avLst/>
+          </a:prstGeom>
+          <a:solidFill>
+            <a:srgbClr val="1A6B3C"/>
+          </a:solidFill>
+          <a:ln>
+            <a:noFill/>
+          </a:ln>
+          <a:effectLst/>
+        </p:spPr>
+        <p:style>
+          <a:lnRef idx="1">
+            <a:schemeClr val="accent1"/>
+          </a:lnRef>
+          <a:fillRef idx="3">
+            <a:schemeClr val="accent1"/>
+          </a:fillRef>
+          <a:effectRef idx="2">
+            <a:schemeClr val="accent1"/>
+          </a:effectRef>
+          <a:fontRef idx="minor">
+            <a:schemeClr val="lt1"/>
+          </a:fontRef>
+        </p:style>
+        <p:txBody>
+          <a:bodyPr rtlCol="0" anchor="ctr" wrap="square" lIns="137160" rIns="137160" tIns="91440" bIns="91440"/>
+          <a:lstStyle/>
+          <a:p>
+            <a:pPr algn="l"/>
+            <a:r>
+              <a:rPr b="1" sz="1150">
+                <a:solidFill>
+                  <a:srgbClr val="FFFFFF"/>
+                </a:solidFill>
+                <a:latin typeface="Calibri"/>
+              </a:rPr>
+              <a:t>La clave: sustancia económica</a:t>
+            </a:r>
+          </a:p>
+        </p:txBody>
+      </p:sp>
+      <p:sp>
+        <p:nvSpPr>
+          <p:cNvPr id="16" name="Rounded Rectangle 15"/>
+          <p:cNvSpPr/>
+          <p:nvPr/>
+        </p:nvSpPr>
+        <p:spPr>
+          <a:xfrm>
+            <a:off x="4251960" y="4233672"/>
+            <a:ext cx="7589520" cy="804672"/>
+          </a:xfrm>
+          <a:prstGeom prst="roundRect">
+            <a:avLst/>
+          </a:prstGeom>
+          <a:solidFill>
+            <a:srgbClr val="F4F6F9"/>
+          </a:solidFill>
+          <a:ln>
+            <a:noFill/>
+          </a:ln>
+          <a:effectLst/>
+        </p:spPr>
+        <p:style>
+          <a:lnRef idx="1">
+            <a:schemeClr val="accent1"/>
+          </a:lnRef>
+          <a:fillRef idx="3">
+            <a:schemeClr val="accent1"/>
+          </a:fillRef>
+          <a:effectRef idx="2">
+            <a:schemeClr val="accent1"/>
+          </a:effectRef>
+          <a:fontRef idx="minor">
+            <a:schemeClr val="lt1"/>
+          </a:fontRef>
+        </p:style>
+        <p:txBody>
+          <a:bodyPr rtlCol="0" anchor="ctr" wrap="square" lIns="137160" rIns="137160" tIns="91440" bIns="91440"/>
+          <a:lstStyle/>
+          <a:p>
+            <a:pPr algn="l"/>
+            <a:r>
+              <a:rPr b="0" sz="1050">
+                <a:solidFill>
+                  <a:srgbClr val="1C1C1C"/>
+                </a:solidFill>
+                <a:latin typeface="Calibri"/>
+              </a:rPr>
+              <a:t>Cualquier estructura es aceptable si cada socio aporta trabajo real, capital relevante, clientela o dirección. La forma jurídica sola no basta.</a:t>
+            </a:r>
+          </a:p>
+        </p:txBody>
+      </p:sp>
+      <p:sp>
+        <p:nvSpPr>
+          <p:cNvPr id="17" name="Oval 16"/>
+          <p:cNvSpPr/>
+          <p:nvPr/>
+        </p:nvSpPr>
+        <p:spPr>
+          <a:xfrm>
+            <a:off x="548640" y="5257800"/>
+            <a:ext cx="512064" cy="512064"/>
+          </a:xfrm>
+          <a:prstGeom prst="ellipse">
+            <a:avLst/>
+          </a:prstGeom>
+          <a:solidFill>
+            <a:srgbClr val="8EB4E3"/>
+          </a:solidFill>
+          <a:ln>
+            <a:noFill/>
+          </a:ln>
+          <a:effectLst/>
+        </p:spPr>
+        <p:style>
+          <a:lnRef idx="1">
+            <a:schemeClr val="accent1"/>
+          </a:lnRef>
+          <a:fillRef idx="3">
+            <a:schemeClr val="accent1"/>
+          </a:fillRef>
+          <a:effectRef idx="2">
+            <a:schemeClr val="accent1"/>
+          </a:effectRef>
+          <a:fontRef idx="minor">
+            <a:schemeClr val="lt1"/>
+          </a:fontRef>
+        </p:style>
+        <p:txBody>
+          <a:bodyPr rtlCol="0" anchor="ctr" lIns="0" rIns="0" tIns="0" bIns="0"/>
+          <a:lstStyle/>
+          <a:p>
+            <a:pPr algn="ctr"/>
+            <a:r>
+              <a:rPr sz="1600" b="1">
+                <a:solidFill>
+                  <a:srgbClr val="1A3A5C"/>
+                </a:solidFill>
+                <a:latin typeface="Calibri"/>
+              </a:rPr>
+              <a:t>5</a:t>
+            </a:r>
+          </a:p>
+        </p:txBody>
+      </p:sp>
+      <p:sp>
+        <p:nvSpPr>
+          <p:cNvPr id="18" name="Rounded Rectangle 17"/>
+          <p:cNvSpPr/>
+          <p:nvPr/>
+        </p:nvSpPr>
+        <p:spPr>
+          <a:xfrm>
+            <a:off x="1234440" y="5111496"/>
+            <a:ext cx="2926080" cy="804672"/>
+          </a:xfrm>
+          <a:prstGeom prst="roundRect">
+            <a:avLst/>
+          </a:prstGeom>
+          <a:solidFill>
+            <a:srgbClr val="8EB4E3"/>
+          </a:solidFill>
+          <a:ln>
+            <a:noFill/>
+          </a:ln>
+          <a:effectLst/>
+        </p:spPr>
+        <p:style>
+          <a:lnRef idx="1">
+            <a:schemeClr val="accent1"/>
+          </a:lnRef>
+          <a:fillRef idx="3">
+            <a:schemeClr val="accent1"/>
+          </a:fillRef>
+          <a:effectRef idx="2">
+            <a:schemeClr val="accent1"/>
+          </a:effectRef>
+          <a:fontRef idx="minor">
+            <a:schemeClr val="lt1"/>
+          </a:fontRef>
+        </p:style>
+        <p:txBody>
+          <a:bodyPr rtlCol="0" anchor="ctr" wrap="square" lIns="137160" rIns="137160" tIns="91440" bIns="91440"/>
+          <a:lstStyle/>
+          <a:p>
+            <a:pPr algn="l"/>
+            <a:r>
+              <a:rPr b="1" sz="1150">
+                <a:solidFill>
+                  <a:srgbClr val="1A3A5C"/>
+                </a:solidFill>
+                <a:latin typeface="Calibri"/>
+              </a:rPr>
+              <a:t>Mensaje del Caso 86</a:t>
+            </a:r>
+          </a:p>
+        </p:txBody>
+      </p:sp>
+      <p:sp>
+        <p:nvSpPr>
+          <p:cNvPr id="19" name="Rounded Rectangle 18"/>
+          <p:cNvSpPr/>
+          <p:nvPr/>
+        </p:nvSpPr>
+        <p:spPr>
+          <a:xfrm>
+            <a:off x="4251960" y="5111496"/>
+            <a:ext cx="7589520" cy="804672"/>
+          </a:xfrm>
+          <a:prstGeom prst="roundRect">
+            <a:avLst/>
+          </a:prstGeom>
+          <a:solidFill>
+            <a:srgbClr val="F4F6F9"/>
+          </a:solidFill>
+          <a:ln>
+            <a:noFill/>
+          </a:ln>
+          <a:effectLst/>
+        </p:spPr>
+        <p:style>
+          <a:lnRef idx="1">
+            <a:schemeClr val="accent1"/>
+          </a:lnRef>
+          <a:fillRef idx="3">
+            <a:schemeClr val="accent1"/>
+          </a:fillRef>
+          <a:effectRef idx="2">
+            <a:schemeClr val="accent1"/>
+          </a:effectRef>
+          <a:fontRef idx="minor">
+            <a:schemeClr val="lt1"/>
+          </a:fontRef>
+        </p:style>
+        <p:txBody>
+          <a:bodyPr rtlCol="0" anchor="ctr" wrap="square" lIns="137160" rIns="137160" tIns="91440" bIns="91440"/>
+          <a:lstStyle/>
+          <a:p>
+            <a:pPr algn="l"/>
+            <a:r>
+              <a:rPr b="0" sz="1050">
+                <a:solidFill>
+                  <a:srgbClr val="1C1C1C"/>
+                </a:solidFill>
+                <a:latin typeface="Calibri"/>
+              </a:rPr>
+              <a:t>Planificación tributaria ≠ abuso. El límite está en la sustancia económica. Si el único motivo es el ahorro fiscal, el SII tiene herramientas para actuar.</a:t>
+            </a:r>
+          </a:p>
+        </p:txBody>
+      </p:sp>
+      <p:sp>
+        <p:nvSpPr>
+          <p:cNvPr id="20" name="Rounded Rectangle 19"/>
+          <p:cNvSpPr/>
+          <p:nvPr/>
+        </p:nvSpPr>
+        <p:spPr>
+          <a:xfrm>
+            <a:off x="548640" y="6400800"/>
+            <a:ext cx="11064240" cy="320040"/>
+          </a:xfrm>
+          <a:prstGeom prst="roundRect">
+            <a:avLst/>
+          </a:prstGeom>
+          <a:solidFill>
+            <a:srgbClr val="1A3A5C"/>
+          </a:solidFill>
+          <a:ln>
+            <a:noFill/>
+          </a:ln>
+          <a:effectLst/>
+        </p:spPr>
+        <p:style>
+          <a:lnRef idx="1">
+            <a:schemeClr val="accent1"/>
+          </a:lnRef>
+          <a:fillRef idx="3">
+            <a:schemeClr val="accent1"/>
+          </a:fillRef>
+          <a:effectRef idx="2">
+            <a:schemeClr val="accent1"/>
+          </a:effectRef>
+          <a:fontRef idx="minor">
+            <a:schemeClr val="lt1"/>
+          </a:fontRef>
+        </p:style>
+        <p:txBody>
+          <a:bodyPr rtlCol="0" anchor="ctr" wrap="square" lIns="137160" rIns="137160" tIns="91440" bIns="91440"/>
+          <a:lstStyle/>
+          <a:p>
+            <a:pPr algn="ctr"/>
+            <a:r>
+              <a:rPr b="1" sz="1000">
+                <a:solidFill>
+                  <a:srgbClr val="FFFFFF"/>
+                </a:solidFill>
+                <a:latin typeface="Calibri"/>
+              </a:rPr>
+              <a:t>Grupo 4: Andrea Añasco · Gema Sepúlveda · Karen Rebolledo · Nicolás Muñoz</a:t>
+            </a:r>
+          </a:p>
+        </p:txBody>
+      </p:sp>
+      <p:sp>
+        <p:nvSpPr>
+          <p:cNvPr id="21" name="Rounded Rectangle 20"/>
+          <p:cNvSpPr/>
+          <p:nvPr/>
+        </p:nvSpPr>
+        <p:spPr>
+          <a:xfrm>
+            <a:off x="274320" y="6492240"/>
+            <a:ext cx="11612880" cy="274320"/>
+          </a:xfrm>
+          <a:prstGeom prst="roundRect">
+            <a:avLst/>
+          </a:prstGeom>
+          <a:noFill/>
+          <a:ln>
+            <a:noFill/>
+          </a:ln>
+          <a:effectLst/>
+        </p:spPr>
+        <p:style>
+          <a:lnRef idx="1">
+            <a:schemeClr val="accent1"/>
+          </a:lnRef>
+          <a:fillRef idx="3">
+            <a:schemeClr val="accent1"/>
+          </a:fillRef>
+          <a:effectRef idx="2">
+            <a:schemeClr val="accent1"/>
+          </a:effectRef>
+          <a:fontRef idx="minor">
+            <a:schemeClr val="lt1"/>
+          </a:fontRef>
+        </p:style>
+        <p:txBody>
           <a:bodyPr rtlCol="0" anchor="t" wrap="square" lIns="137160" rIns="137160" tIns="91440" bIns="91440"/>
           <a:lstStyle/>
           <a:p>
-            <a:pPr algn="l"/>
-            <a:r>
-              <a:rPr b="0" sz="1100">
-                <a:solidFill>
-                  <a:srgbClr val="1C1C1C"/>
-                </a:solidFill>
-                <a:latin typeface="Calibri"/>
-              </a:rPr>
-              <a:t>Constituir SpA acogida al régimen 14D N°3 con tasa IDPC del 25%. A puede ser único accionista o tener accionistas con rol económico real. Permite planificación de retiros, reinversión y deducción amplia de gastos. Sin restricción de la figura 'sociedad de profesionales' pero exige sustancia.</a:t>
-            </a:r>
-          </a:p>
-        </p:txBody>
-      </p:sp>
-      <p:sp>
-        <p:nvSpPr>
-          <p:cNvPr id="8" name="Rounded Rectangle 7"/>
-          <p:cNvSpPr/>
-          <p:nvPr/>
-        </p:nvSpPr>
-        <p:spPr>
-          <a:xfrm>
-            <a:off x="548640" y="3520440"/>
-            <a:ext cx="1280160" cy="1691640"/>
-          </a:xfrm>
-          <a:prstGeom prst="roundRect">
-            <a:avLst/>
-          </a:prstGeom>
-          <a:solidFill>
-            <a:srgbClr val="B03030"/>
-          </a:solidFill>
-          <a:ln>
-            <a:noFill/>
-          </a:ln>
-          <a:effectLst/>
-        </p:spPr>
-        <p:style>
-          <a:lnRef idx="1">
-            <a:schemeClr val="accent1"/>
-          </a:lnRef>
-          <a:fillRef idx="3">
-            <a:schemeClr val="accent1"/>
-          </a:fillRef>
-          <a:effectRef idx="2">
-            <a:schemeClr val="accent1"/>
-          </a:effectRef>
-          <a:fontRef idx="minor">
-            <a:schemeClr val="lt1"/>
-          </a:fontRef>
-        </p:style>
-        <p:txBody>
-          <a:bodyPr rtlCol="0" anchor="ctr" wrap="square" lIns="137160" rIns="137160" tIns="91440" bIns="91440"/>
-          <a:lstStyle/>
-          <a:p>
-            <a:pPr algn="ctr"/>
-            <a:r>
-              <a:rPr b="1" sz="1800">
-                <a:solidFill>
-                  <a:srgbClr val="FFFFFF"/>
-                </a:solidFill>
-                <a:latin typeface="Calibri"/>
-              </a:rPr>
-              <a:t>Alt. 5</a:t>
-            </a:r>
-          </a:p>
-        </p:txBody>
-      </p:sp>
-      <p:sp>
-        <p:nvSpPr>
-          <p:cNvPr id="9" name="Rounded Rectangle 8"/>
-          <p:cNvSpPr/>
-          <p:nvPr/>
-        </p:nvSpPr>
-        <p:spPr>
-          <a:xfrm>
-            <a:off x="1920240" y="3520440"/>
-            <a:ext cx="9784080" cy="457200"/>
-          </a:xfrm>
-          <a:prstGeom prst="roundRect">
-            <a:avLst/>
-          </a:prstGeom>
-          <a:solidFill>
-            <a:srgbClr val="B03030"/>
-          </a:solidFill>
-          <a:ln>
-            <a:noFill/>
-          </a:ln>
-          <a:effectLst/>
-        </p:spPr>
-        <p:style>
-          <a:lnRef idx="1">
-            <a:schemeClr val="accent1"/>
-          </a:lnRef>
-          <a:fillRef idx="3">
-            <a:schemeClr val="accent1"/>
-          </a:fillRef>
-          <a:effectRef idx="2">
-            <a:schemeClr val="accent1"/>
-          </a:effectRef>
-          <a:fontRef idx="minor">
-            <a:schemeClr val="lt1"/>
-          </a:fontRef>
-        </p:style>
-        <p:txBody>
-          <a:bodyPr rtlCol="0" anchor="ctr" wrap="square" lIns="137160" rIns="137160" tIns="91440" bIns="91440"/>
-          <a:lstStyle/>
-          <a:p>
-            <a:pPr algn="l"/>
-            <a:r>
-              <a:rPr b="1" sz="1250">
-                <a:solidFill>
-                  <a:srgbClr val="FFFFFF"/>
-                </a:solidFill>
-                <a:latin typeface="Calibri"/>
-              </a:rPr>
-              <a:t>Régimen Pro Pyme Transparente — 14D N°8</a:t>
-            </a:r>
-          </a:p>
-        </p:txBody>
-      </p:sp>
-      <p:sp>
-        <p:nvSpPr>
-          <p:cNvPr id="10" name="Rounded Rectangle 9"/>
-          <p:cNvSpPr/>
-          <p:nvPr/>
-        </p:nvSpPr>
-        <p:spPr>
-          <a:xfrm>
-            <a:off x="1920240" y="3977640"/>
-            <a:ext cx="9784080" cy="1234440"/>
-          </a:xfrm>
-          <a:prstGeom prst="roundRect">
-            <a:avLst/>
-          </a:prstGeom>
-          <a:solidFill>
-            <a:srgbClr val="F4F6F9"/>
-          </a:solidFill>
-          <a:ln>
-            <a:noFill/>
-          </a:ln>
-          <a:effectLst/>
-        </p:spPr>
-        <p:style>
-          <a:lnRef idx="1">
-            <a:schemeClr val="accent1"/>
-          </a:lnRef>
-          <a:fillRef idx="3">
-            <a:schemeClr val="accent1"/>
-          </a:fillRef>
-          <a:effectRef idx="2">
-            <a:schemeClr val="accent1"/>
-          </a:effectRef>
-          <a:fontRef idx="minor">
-            <a:schemeClr val="lt1"/>
-          </a:fontRef>
-        </p:style>
-        <p:txBody>
-          <a:bodyPr rtlCol="0" anchor="t" wrap="square" lIns="137160" rIns="137160" tIns="91440" bIns="91440"/>
-          <a:lstStyle/>
-          <a:p>
-            <a:pPr algn="l"/>
-            <a:r>
-              <a:rPr b="0" sz="1100">
-                <a:solidFill>
-                  <a:srgbClr val="1C1C1C"/>
-                </a:solidFill>
-                <a:latin typeface="Calibri"/>
-              </a:rPr>
-              <a:t>Si socios son personas naturales, considerar 14D N°8 (Transparencia Tributaria). La empresa no paga IDPC; los socios pagan IGC directo. ATENCIÓN: este régimen NO soluciona el problema de fondo si B y C siguen siendo ficticios — el SII puede igualmente aplicar NGA. Solo viable con socios reales.</a:t>
-            </a:r>
-          </a:p>
-        </p:txBody>
-      </p:sp>
-      <p:sp>
-        <p:nvSpPr>
-          <p:cNvPr id="11" name="Rounded Rectangle 10"/>
-          <p:cNvSpPr/>
-          <p:nvPr/>
-        </p:nvSpPr>
-        <p:spPr>
-          <a:xfrm>
-            <a:off x="548640" y="5486400"/>
-            <a:ext cx="11064240" cy="868680"/>
-          </a:xfrm>
-          <a:prstGeom prst="roundRect">
-            <a:avLst/>
-          </a:prstGeom>
-          <a:solidFill>
-            <a:srgbClr val="1A3A5C"/>
-          </a:solidFill>
-          <a:ln>
-            <a:noFill/>
-          </a:ln>
-          <a:effectLst/>
-        </p:spPr>
-        <p:style>
-          <a:lnRef idx="1">
-            <a:schemeClr val="accent1"/>
-          </a:lnRef>
-          <a:fillRef idx="3">
-            <a:schemeClr val="accent1"/>
-          </a:fillRef>
-          <a:effectRef idx="2">
-            <a:schemeClr val="accent1"/>
-          </a:effectRef>
-          <a:fontRef idx="minor">
-            <a:schemeClr val="lt1"/>
-          </a:fontRef>
-        </p:style>
-        <p:txBody>
-          <a:bodyPr rtlCol="0" anchor="ctr" wrap="square" lIns="137160" rIns="137160" tIns="91440" bIns="91440"/>
-          <a:lstStyle/>
-          <a:p>
-            <a:pPr algn="ctr"/>
-            <a:r>
-              <a:rPr b="1" sz="1150">
-                <a:solidFill>
-                  <a:srgbClr val="FFFFFF"/>
-                </a:solidFill>
-                <a:latin typeface="Calibri"/>
-              </a:rPr>
-              <a:t>Recomendación práctica:  cualquier estructura debe poder acreditar SUSTANCIA ECONÓMICA REAL. La forma jurídica por sí sola no es suficiente; el SII y los tribunales exigirán demostración del aporte efectivo (trabajo, capital, clientela, dirección) de cada socio.</a:t>
-            </a:r>
-          </a:p>
-        </p:txBody>
-      </p:sp>
-      <p:sp>
-        <p:nvSpPr>
-          <p:cNvPr id="12" name="Rounded Rectangle 11"/>
-          <p:cNvSpPr/>
-          <p:nvPr/>
-        </p:nvSpPr>
-        <p:spPr>
-          <a:xfrm>
-            <a:off x="274320" y="6492240"/>
-            <a:ext cx="11887200" cy="274320"/>
-          </a:xfrm>
-          <a:prstGeom prst="roundRect">
-            <a:avLst/>
-          </a:prstGeom>
-          <a:noFill/>
-          <a:ln>
-            <a:noFill/>
-          </a:ln>
-          <a:effectLst/>
-        </p:spPr>
-        <p:style>
-          <a:lnRef idx="1">
-            <a:schemeClr val="accent1"/>
-          </a:lnRef>
-          <a:fillRef idx="3">
-            <a:schemeClr val="accent1"/>
-          </a:fillRef>
-          <a:effectRef idx="2">
-            <a:schemeClr val="accent1"/>
-          </a:effectRef>
-          <a:fontRef idx="minor">
-            <a:schemeClr val="lt1"/>
-          </a:fontRef>
-        </p:style>
-        <p:txBody>
-          <a:bodyPr rtlCol="0" anchor="t" wrap="square" lIns="137160" rIns="137160" tIns="91440" bIns="91440"/>
-          <a:lstStyle/>
-          <a:p>
             <a:pPr algn="r"/>
             <a:r>
               <a:rPr b="0" sz="800">
@@ -8568,787 +9175,7 @@
                 </a:solidFill>
                 <a:latin typeface="Calibri"/>
               </a:rPr>
-              <a:t>Caso 86 · Magíster Dirección Tributaria UVM · Slide 9</a:t>
-            </a:r>
-          </a:p>
-        </p:txBody>
-      </p:sp>
-    </p:spTree>
-  </p:cSld>
-  <p:clrMapOvr>
-    <a:masterClrMapping/>
-  </p:clrMapOvr>
-</p:sld>
-</file>
-
-<file path=ppt/slides/slide8.xml><?xml version="1.0" encoding="utf-8"?>
-<p:sld xmlns:a="http://schemas.openxmlformats.org/drawingml/2006/main" xmlns:p="http://schemas.openxmlformats.org/presentationml/2006/main" xmlns:r="http://schemas.openxmlformats.org/officeDocument/2006/relationships">
-  <p:cSld>
-    <p:spTree>
-      <p:nvGrpSpPr>
-        <p:cNvPr id="1" name=""/>
-        <p:cNvGrpSpPr/>
-        <p:nvPr/>
-      </p:nvGrpSpPr>
-      <p:grpSpPr/>
-      <p:sp>
-        <p:nvSpPr>
-          <p:cNvPr id="2" name="Rectangle 1"/>
-          <p:cNvSpPr/>
-          <p:nvPr/>
-        </p:nvSpPr>
-        <p:spPr>
-          <a:xfrm>
-            <a:off x="0" y="0"/>
-            <a:ext cx="12191695" cy="6858000"/>
-          </a:xfrm>
-          <a:prstGeom prst="rect">
-            <a:avLst/>
-          </a:prstGeom>
-          <a:solidFill>
-            <a:srgbClr val="CBCBCB"/>
-          </a:solidFill>
-          <a:ln>
-            <a:noFill/>
-          </a:ln>
-          <a:effectLst/>
-        </p:spPr>
-        <p:style>
-          <a:lnRef idx="1">
-            <a:schemeClr val="accent1"/>
-          </a:lnRef>
-          <a:fillRef idx="3">
-            <a:schemeClr val="accent1"/>
-          </a:fillRef>
-          <a:effectRef idx="2">
-            <a:schemeClr val="accent1"/>
-          </a:effectRef>
-          <a:fontRef idx="minor">
-            <a:schemeClr val="lt1"/>
-          </a:fontRef>
-        </p:style>
-        <p:txBody>
-          <a:bodyPr rtlCol="0" anchor="ctr"/>
-          <a:lstStyle/>
-          <a:p>
-            <a:pPr algn="ctr"/>
-          </a:p>
-        </p:txBody>
-      </p:sp>
-      <p:sp>
-        <p:nvSpPr>
-          <p:cNvPr id="3" name="TextBox 2"/>
-          <p:cNvSpPr txBox="1"/>
-          <p:nvPr/>
-        </p:nvSpPr>
-        <p:spPr>
-          <a:xfrm>
-            <a:off x="548640" y="274320"/>
-            <a:ext cx="10972800" cy="731520"/>
-          </a:xfrm>
-          <a:prstGeom prst="rect">
-            <a:avLst/>
-          </a:prstGeom>
-          <a:noFill/>
-        </p:spPr>
-        <p:txBody>
-          <a:bodyPr wrap="square" lIns="0" rIns="0" tIns="0" bIns="0">
-            <a:spAutoFit/>
-          </a:bodyPr>
-          <a:lstStyle/>
-          <a:p>
-            <a:pPr algn="l"/>
-            <a:r>
-              <a:rPr sz="3600" b="0" i="0">
-                <a:solidFill>
-                  <a:srgbClr val="1C1C1C"/>
-                </a:solidFill>
-                <a:latin typeface="Cambria"/>
-              </a:rPr>
-              <a:t>Conclusiones</a:t>
-            </a:r>
-          </a:p>
-        </p:txBody>
-      </p:sp>
-      <p:sp>
-        <p:nvSpPr>
-          <p:cNvPr id="4" name="Rounded Rectangle 3"/>
-          <p:cNvSpPr/>
-          <p:nvPr/>
-        </p:nvSpPr>
-        <p:spPr>
-          <a:xfrm>
-            <a:off x="548640" y="1051560"/>
-            <a:ext cx="10972800" cy="457200"/>
-          </a:xfrm>
-          <a:prstGeom prst="roundRect">
-            <a:avLst/>
-          </a:prstGeom>
-          <a:noFill/>
-          <a:ln>
-            <a:noFill/>
-          </a:ln>
-          <a:effectLst/>
-        </p:spPr>
-        <p:style>
-          <a:lnRef idx="1">
-            <a:schemeClr val="accent1"/>
-          </a:lnRef>
-          <a:fillRef idx="3">
-            <a:schemeClr val="accent1"/>
-          </a:fillRef>
-          <a:effectRef idx="2">
-            <a:schemeClr val="accent1"/>
-          </a:effectRef>
-          <a:fontRef idx="minor">
-            <a:schemeClr val="lt1"/>
-          </a:fontRef>
-        </p:style>
-        <p:txBody>
-          <a:bodyPr rtlCol="0" anchor="t" wrap="square" lIns="137160" rIns="137160" tIns="91440" bIns="91440"/>
-          <a:lstStyle/>
-          <a:p>
-            <a:pPr algn="l"/>
-            <a:r>
-              <a:rPr b="0" sz="1400">
-                <a:solidFill>
-                  <a:srgbClr val="555555"/>
-                </a:solidFill>
-                <a:latin typeface="Calibri"/>
-              </a:rPr>
-              <a:t>Caso 86 — Catálogo de Esquemas Tributarios SII 2025</a:t>
-            </a:r>
-          </a:p>
-        </p:txBody>
-      </p:sp>
-      <p:sp>
-        <p:nvSpPr>
-          <p:cNvPr id="5" name="Oval 4"/>
-          <p:cNvSpPr/>
-          <p:nvPr/>
-        </p:nvSpPr>
-        <p:spPr>
-          <a:xfrm>
-            <a:off x="530352" y="1787652"/>
-            <a:ext cx="585216" cy="585216"/>
-          </a:xfrm>
-          <a:prstGeom prst="ellipse">
-            <a:avLst/>
-          </a:prstGeom>
-          <a:solidFill>
-            <a:srgbClr val="B03030"/>
-          </a:solidFill>
-          <a:ln>
-            <a:noFill/>
-          </a:ln>
-          <a:effectLst/>
-        </p:spPr>
-        <p:style>
-          <a:lnRef idx="1">
-            <a:schemeClr val="accent1"/>
-          </a:lnRef>
-          <a:fillRef idx="3">
-            <a:schemeClr val="accent1"/>
-          </a:fillRef>
-          <a:effectRef idx="2">
-            <a:schemeClr val="accent1"/>
-          </a:effectRef>
-          <a:fontRef idx="minor">
-            <a:schemeClr val="lt1"/>
-          </a:fontRef>
-        </p:style>
-        <p:txBody>
-          <a:bodyPr rtlCol="0" anchor="ctr" lIns="0" rIns="0" tIns="0" bIns="0"/>
-          <a:lstStyle/>
-          <a:p>
-            <a:pPr algn="ctr"/>
-            <a:r>
-              <a:rPr sz="1600" b="1">
-                <a:solidFill>
-                  <a:srgbClr val="FFFFFF"/>
-                </a:solidFill>
-                <a:latin typeface="Calibri"/>
-              </a:rPr>
-              <a:t>1</a:t>
-            </a:r>
-          </a:p>
-        </p:txBody>
-      </p:sp>
-      <p:sp>
-        <p:nvSpPr>
-          <p:cNvPr id="6" name="Rounded Rectangle 5"/>
-          <p:cNvSpPr/>
-          <p:nvPr/>
-        </p:nvSpPr>
-        <p:spPr>
-          <a:xfrm>
-            <a:off x="1280160" y="1691640"/>
-            <a:ext cx="10424160" cy="777240"/>
-          </a:xfrm>
-          <a:prstGeom prst="roundRect">
-            <a:avLst/>
-          </a:prstGeom>
-          <a:solidFill>
-            <a:srgbClr val="F4F6F9"/>
-          </a:solidFill>
-          <a:ln>
-            <a:noFill/>
-          </a:ln>
-          <a:effectLst/>
-        </p:spPr>
-        <p:style>
-          <a:lnRef idx="1">
-            <a:schemeClr val="accent1"/>
-          </a:lnRef>
-          <a:fillRef idx="3">
-            <a:schemeClr val="accent1"/>
-          </a:fillRef>
-          <a:effectRef idx="2">
-            <a:schemeClr val="accent1"/>
-          </a:effectRef>
-          <a:fontRef idx="minor">
-            <a:schemeClr val="lt1"/>
-          </a:fontRef>
-        </p:style>
-        <p:txBody>
-          <a:bodyPr rtlCol="0" anchor="ctr" wrap="square" lIns="137160" rIns="137160" tIns="91440" bIns="91440"/>
-          <a:lstStyle/>
-          <a:p>
-            <a:pPr algn="l"/>
-            <a:r>
-              <a:rPr b="0" sz="1200">
-                <a:solidFill>
-                  <a:srgbClr val="1C1C1C"/>
-                </a:solidFill>
-                <a:latin typeface="Calibri"/>
-              </a:rPr>
-              <a:t>El esquema configura ABUSO de las formas jurídicas (Art. 4 ter CT). NO es simulación: los actos son reales pero la forma es inapropiada.</a:t>
-            </a:r>
-          </a:p>
-        </p:txBody>
-      </p:sp>
-      <p:sp>
-        <p:nvSpPr>
-          <p:cNvPr id="7" name="Oval 6"/>
-          <p:cNvSpPr/>
-          <p:nvPr/>
-        </p:nvSpPr>
-        <p:spPr>
-          <a:xfrm>
-            <a:off x="530352" y="2656332"/>
-            <a:ext cx="585216" cy="585216"/>
-          </a:xfrm>
-          <a:prstGeom prst="ellipse">
-            <a:avLst/>
-          </a:prstGeom>
-          <a:solidFill>
-            <a:srgbClr val="C5501A"/>
-          </a:solidFill>
-          <a:ln>
-            <a:noFill/>
-          </a:ln>
-          <a:effectLst/>
-        </p:spPr>
-        <p:style>
-          <a:lnRef idx="1">
-            <a:schemeClr val="accent1"/>
-          </a:lnRef>
-          <a:fillRef idx="3">
-            <a:schemeClr val="accent1"/>
-          </a:fillRef>
-          <a:effectRef idx="2">
-            <a:schemeClr val="accent1"/>
-          </a:effectRef>
-          <a:fontRef idx="minor">
-            <a:schemeClr val="lt1"/>
-          </a:fontRef>
-        </p:style>
-        <p:txBody>
-          <a:bodyPr rtlCol="0" anchor="ctr" lIns="0" rIns="0" tIns="0" bIns="0"/>
-          <a:lstStyle/>
-          <a:p>
-            <a:pPr algn="ctr"/>
-            <a:r>
-              <a:rPr sz="1600" b="1">
-                <a:solidFill>
-                  <a:srgbClr val="FFFFFF"/>
-                </a:solidFill>
-                <a:latin typeface="Calibri"/>
-              </a:rPr>
-              <a:t>2</a:t>
-            </a:r>
-          </a:p>
-        </p:txBody>
-      </p:sp>
-      <p:sp>
-        <p:nvSpPr>
-          <p:cNvPr id="8" name="Rounded Rectangle 7"/>
-          <p:cNvSpPr/>
-          <p:nvPr/>
-        </p:nvSpPr>
-        <p:spPr>
-          <a:xfrm>
-            <a:off x="1280160" y="2560320"/>
-            <a:ext cx="10424160" cy="777240"/>
-          </a:xfrm>
-          <a:prstGeom prst="roundRect">
-            <a:avLst/>
-          </a:prstGeom>
-          <a:solidFill>
-            <a:srgbClr val="F4F6F9"/>
-          </a:solidFill>
-          <a:ln>
-            <a:noFill/>
-          </a:ln>
-          <a:effectLst/>
-        </p:spPr>
-        <p:style>
-          <a:lnRef idx="1">
-            <a:schemeClr val="accent1"/>
-          </a:lnRef>
-          <a:fillRef idx="3">
-            <a:schemeClr val="accent1"/>
-          </a:fillRef>
-          <a:effectRef idx="2">
-            <a:schemeClr val="accent1"/>
-          </a:effectRef>
-          <a:fontRef idx="minor">
-            <a:schemeClr val="lt1"/>
-          </a:fontRef>
-        </p:style>
-        <p:txBody>
-          <a:bodyPr rtlCol="0" anchor="ctr" wrap="square" lIns="137160" rIns="137160" tIns="91440" bIns="91440"/>
-          <a:lstStyle/>
-          <a:p>
-            <a:pPr algn="l"/>
-            <a:r>
-              <a:rPr b="0" sz="1200">
-                <a:solidFill>
-                  <a:srgbClr val="1C1C1C"/>
-                </a:solidFill>
-                <a:latin typeface="Calibri"/>
-              </a:rPr>
-              <a:t>La sociedad D NO califica como sociedad de profesionales conforme a las Circulares N°21/1991 y N°50/2020 del SII (B y C no ejercen profesión para D).</a:t>
-            </a:r>
-          </a:p>
-        </p:txBody>
-      </p:sp>
-      <p:sp>
-        <p:nvSpPr>
-          <p:cNvPr id="9" name="Oval 8"/>
-          <p:cNvSpPr/>
-          <p:nvPr/>
-        </p:nvSpPr>
-        <p:spPr>
-          <a:xfrm>
-            <a:off x="530352" y="3525012"/>
-            <a:ext cx="585216" cy="585216"/>
-          </a:xfrm>
-          <a:prstGeom prst="ellipse">
-            <a:avLst/>
-          </a:prstGeom>
-          <a:solidFill>
-            <a:srgbClr val="1A3A5C"/>
-          </a:solidFill>
-          <a:ln>
-            <a:noFill/>
-          </a:ln>
-          <a:effectLst/>
-        </p:spPr>
-        <p:style>
-          <a:lnRef idx="1">
-            <a:schemeClr val="accent1"/>
-          </a:lnRef>
-          <a:fillRef idx="3">
-            <a:schemeClr val="accent1"/>
-          </a:fillRef>
-          <a:effectRef idx="2">
-            <a:schemeClr val="accent1"/>
-          </a:effectRef>
-          <a:fontRef idx="minor">
-            <a:schemeClr val="lt1"/>
-          </a:fontRef>
-        </p:style>
-        <p:txBody>
-          <a:bodyPr rtlCol="0" anchor="ctr" lIns="0" rIns="0" tIns="0" bIns="0"/>
-          <a:lstStyle/>
-          <a:p>
-            <a:pPr algn="ctr"/>
-            <a:r>
-              <a:rPr sz="1600" b="1">
-                <a:solidFill>
-                  <a:srgbClr val="FFFFFF"/>
-                </a:solidFill>
-                <a:latin typeface="Calibri"/>
-              </a:rPr>
-              <a:t>3</a:t>
-            </a:r>
-          </a:p>
-        </p:txBody>
-      </p:sp>
-      <p:sp>
-        <p:nvSpPr>
-          <p:cNvPr id="10" name="Rounded Rectangle 9"/>
-          <p:cNvSpPr/>
-          <p:nvPr/>
-        </p:nvSpPr>
-        <p:spPr>
-          <a:xfrm>
-            <a:off x="1280160" y="3429000"/>
-            <a:ext cx="10424160" cy="777240"/>
-          </a:xfrm>
-          <a:prstGeom prst="roundRect">
-            <a:avLst/>
-          </a:prstGeom>
-          <a:solidFill>
-            <a:srgbClr val="F4F6F9"/>
-          </a:solidFill>
-          <a:ln>
-            <a:noFill/>
-          </a:ln>
-          <a:effectLst/>
-        </p:spPr>
-        <p:style>
-          <a:lnRef idx="1">
-            <a:schemeClr val="accent1"/>
-          </a:lnRef>
-          <a:fillRef idx="3">
-            <a:schemeClr val="accent1"/>
-          </a:fillRef>
-          <a:effectRef idx="2">
-            <a:schemeClr val="accent1"/>
-          </a:effectRef>
-          <a:fontRef idx="minor">
-            <a:schemeClr val="lt1"/>
-          </a:fontRef>
-        </p:style>
-        <p:txBody>
-          <a:bodyPr rtlCol="0" anchor="ctr" wrap="square" lIns="137160" rIns="137160" tIns="91440" bIns="91440"/>
-          <a:lstStyle/>
-          <a:p>
-            <a:pPr algn="l"/>
-            <a:r>
-              <a:rPr b="0" sz="1200">
-                <a:solidFill>
-                  <a:srgbClr val="1C1C1C"/>
-                </a:solidFill>
-                <a:latin typeface="Calibri"/>
-              </a:rPr>
-              <a:t>El SII puede solicitar al TTA la declaración de abuso (Art. 4 quinquies CT), con recalificación: atribución íntegra de ingresos a A para el IGC + intereses + multas.</a:t>
-            </a:r>
-          </a:p>
-        </p:txBody>
-      </p:sp>
-      <p:sp>
-        <p:nvSpPr>
-          <p:cNvPr id="11" name="Oval 10"/>
-          <p:cNvSpPr/>
-          <p:nvPr/>
-        </p:nvSpPr>
-        <p:spPr>
-          <a:xfrm>
-            <a:off x="530352" y="4393692"/>
-            <a:ext cx="585216" cy="585216"/>
-          </a:xfrm>
-          <a:prstGeom prst="ellipse">
-            <a:avLst/>
-          </a:prstGeom>
-          <a:solidFill>
-            <a:srgbClr val="1A6B3C"/>
-          </a:solidFill>
-          <a:ln>
-            <a:noFill/>
-          </a:ln>
-          <a:effectLst/>
-        </p:spPr>
-        <p:style>
-          <a:lnRef idx="1">
-            <a:schemeClr val="accent1"/>
-          </a:lnRef>
-          <a:fillRef idx="3">
-            <a:schemeClr val="accent1"/>
-          </a:fillRef>
-          <a:effectRef idx="2">
-            <a:schemeClr val="accent1"/>
-          </a:effectRef>
-          <a:fontRef idx="minor">
-            <a:schemeClr val="lt1"/>
-          </a:fontRef>
-        </p:style>
-        <p:txBody>
-          <a:bodyPr rtlCol="0" anchor="ctr" lIns="0" rIns="0" tIns="0" bIns="0"/>
-          <a:lstStyle/>
-          <a:p>
-            <a:pPr algn="ctr"/>
-            <a:r>
-              <a:rPr sz="1600" b="1">
-                <a:solidFill>
-                  <a:srgbClr val="FFFFFF"/>
-                </a:solidFill>
-                <a:latin typeface="Calibri"/>
-              </a:rPr>
-              <a:t>4</a:t>
-            </a:r>
-          </a:p>
-        </p:txBody>
-      </p:sp>
-      <p:sp>
-        <p:nvSpPr>
-          <p:cNvPr id="12" name="Rounded Rectangle 11"/>
-          <p:cNvSpPr/>
-          <p:nvPr/>
-        </p:nvSpPr>
-        <p:spPr>
-          <a:xfrm>
-            <a:off x="1280160" y="4297680"/>
-            <a:ext cx="10424160" cy="777240"/>
-          </a:xfrm>
-          <a:prstGeom prst="roundRect">
-            <a:avLst/>
-          </a:prstGeom>
-          <a:solidFill>
-            <a:srgbClr val="F4F6F9"/>
-          </a:solidFill>
-          <a:ln>
-            <a:noFill/>
-          </a:ln>
-          <a:effectLst/>
-        </p:spPr>
-        <p:style>
-          <a:lnRef idx="1">
-            <a:schemeClr val="accent1"/>
-          </a:lnRef>
-          <a:fillRef idx="3">
-            <a:schemeClr val="accent1"/>
-          </a:fillRef>
-          <a:effectRef idx="2">
-            <a:schemeClr val="accent1"/>
-          </a:effectRef>
-          <a:fontRef idx="minor">
-            <a:schemeClr val="lt1"/>
-          </a:fontRef>
-        </p:style>
-        <p:txBody>
-          <a:bodyPr rtlCol="0" anchor="ctr" wrap="square" lIns="137160" rIns="137160" tIns="91440" bIns="91440"/>
-          <a:lstStyle/>
-          <a:p>
-            <a:pPr algn="l"/>
-            <a:r>
-              <a:rPr b="0" sz="1200">
-                <a:solidFill>
-                  <a:srgbClr val="1C1C1C"/>
-                </a:solidFill>
-                <a:latin typeface="Calibri"/>
-              </a:rPr>
-              <a:t>Existen alternativas legítimas: profesional independiente, sociedad de profesionales con socios reales, SpA Pro Pyme, distribución proporcional al trabajo real.</a:t>
-            </a:r>
-          </a:p>
-        </p:txBody>
-      </p:sp>
-      <p:sp>
-        <p:nvSpPr>
-          <p:cNvPr id="13" name="Oval 12"/>
-          <p:cNvSpPr/>
-          <p:nvPr/>
-        </p:nvSpPr>
-        <p:spPr>
-          <a:xfrm>
-            <a:off x="530352" y="5262372"/>
-            <a:ext cx="585216" cy="585216"/>
-          </a:xfrm>
-          <a:prstGeom prst="ellipse">
-            <a:avLst/>
-          </a:prstGeom>
-          <a:solidFill>
-            <a:srgbClr val="8EB4E3"/>
-          </a:solidFill>
-          <a:ln>
-            <a:noFill/>
-          </a:ln>
-          <a:effectLst/>
-        </p:spPr>
-        <p:style>
-          <a:lnRef idx="1">
-            <a:schemeClr val="accent1"/>
-          </a:lnRef>
-          <a:fillRef idx="3">
-            <a:schemeClr val="accent1"/>
-          </a:fillRef>
-          <a:effectRef idx="2">
-            <a:schemeClr val="accent1"/>
-          </a:effectRef>
-          <a:fontRef idx="minor">
-            <a:schemeClr val="lt1"/>
-          </a:fontRef>
-        </p:style>
-        <p:txBody>
-          <a:bodyPr rtlCol="0" anchor="ctr" lIns="0" rIns="0" tIns="0" bIns="0"/>
-          <a:lstStyle/>
-          <a:p>
-            <a:pPr algn="ctr"/>
-            <a:r>
-              <a:rPr sz="1600" b="1">
-                <a:solidFill>
-                  <a:srgbClr val="1A3A5C"/>
-                </a:solidFill>
-                <a:latin typeface="Calibri"/>
-              </a:rPr>
-              <a:t>5</a:t>
-            </a:r>
-          </a:p>
-        </p:txBody>
-      </p:sp>
-      <p:sp>
-        <p:nvSpPr>
-          <p:cNvPr id="14" name="Rounded Rectangle 13"/>
-          <p:cNvSpPr/>
-          <p:nvPr/>
-        </p:nvSpPr>
-        <p:spPr>
-          <a:xfrm>
-            <a:off x="1280160" y="5166360"/>
-            <a:ext cx="10424160" cy="777240"/>
-          </a:xfrm>
-          <a:prstGeom prst="roundRect">
-            <a:avLst/>
-          </a:prstGeom>
-          <a:solidFill>
-            <a:srgbClr val="F4F6F9"/>
-          </a:solidFill>
-          <a:ln>
-            <a:noFill/>
-          </a:ln>
-          <a:effectLst/>
-        </p:spPr>
-        <p:style>
-          <a:lnRef idx="1">
-            <a:schemeClr val="accent1"/>
-          </a:lnRef>
-          <a:fillRef idx="3">
-            <a:schemeClr val="accent1"/>
-          </a:fillRef>
-          <a:effectRef idx="2">
-            <a:schemeClr val="accent1"/>
-          </a:effectRef>
-          <a:fontRef idx="minor">
-            <a:schemeClr val="lt1"/>
-          </a:fontRef>
-        </p:style>
-        <p:txBody>
-          <a:bodyPr rtlCol="0" anchor="ctr" wrap="square" lIns="137160" rIns="137160" tIns="91440" bIns="91440"/>
-          <a:lstStyle/>
-          <a:p>
-            <a:pPr algn="l"/>
-            <a:r>
-              <a:rPr b="0" sz="1200">
-                <a:solidFill>
-                  <a:srgbClr val="1C1C1C"/>
-                </a:solidFill>
-                <a:latin typeface="Calibri"/>
-              </a:rPr>
-              <a:t>Toda estructura debe acreditar SUSTANCIA ECONÓMICA. La forma jurídica no basta; los socios deben aportar trabajo, capital, clientela o rol estratégico verificable.</a:t>
-            </a:r>
-          </a:p>
-        </p:txBody>
-      </p:sp>
-      <p:sp>
-        <p:nvSpPr>
-          <p:cNvPr id="15" name="Rounded Rectangle 14"/>
-          <p:cNvSpPr/>
-          <p:nvPr/>
-        </p:nvSpPr>
-        <p:spPr>
-          <a:xfrm>
-            <a:off x="548640" y="6263640"/>
-            <a:ext cx="11064240" cy="320040"/>
-          </a:xfrm>
-          <a:prstGeom prst="roundRect">
-            <a:avLst/>
-          </a:prstGeom>
-          <a:noFill/>
-          <a:ln>
-            <a:noFill/>
-          </a:ln>
-          <a:effectLst/>
-        </p:spPr>
-        <p:style>
-          <a:lnRef idx="1">
-            <a:schemeClr val="accent1"/>
-          </a:lnRef>
-          <a:fillRef idx="3">
-            <a:schemeClr val="accent1"/>
-          </a:fillRef>
-          <a:effectRef idx="2">
-            <a:schemeClr val="accent1"/>
-          </a:effectRef>
-          <a:fontRef idx="minor">
-            <a:schemeClr val="lt1"/>
-          </a:fontRef>
-        </p:style>
-        <p:txBody>
-          <a:bodyPr rtlCol="0" anchor="t" wrap="square" lIns="137160" rIns="137160" tIns="91440" bIns="91440"/>
-          <a:lstStyle/>
-          <a:p>
-            <a:pPr algn="ctr"/>
-            <a:r>
-              <a:rPr b="0" sz="1000">
-                <a:solidFill>
-                  <a:srgbClr val="555555"/>
-                </a:solidFill>
-                <a:latin typeface="Calibri"/>
-              </a:rPr>
-              <a:t>Magíster en Dirección Tributaria — Universidad Viña del Mar</a:t>
-            </a:r>
-          </a:p>
-        </p:txBody>
-      </p:sp>
-      <p:sp>
-        <p:nvSpPr>
-          <p:cNvPr id="16" name="Rounded Rectangle 15"/>
-          <p:cNvSpPr/>
-          <p:nvPr/>
-        </p:nvSpPr>
-        <p:spPr>
-          <a:xfrm>
-            <a:off x="274320" y="6492240"/>
-            <a:ext cx="11887200" cy="274320"/>
-          </a:xfrm>
-          <a:prstGeom prst="roundRect">
-            <a:avLst/>
-          </a:prstGeom>
-          <a:noFill/>
-          <a:ln>
-            <a:noFill/>
-          </a:ln>
-          <a:effectLst/>
-        </p:spPr>
-        <p:style>
-          <a:lnRef idx="1">
-            <a:schemeClr val="accent1"/>
-          </a:lnRef>
-          <a:fillRef idx="3">
-            <a:schemeClr val="accent1"/>
-          </a:fillRef>
-          <a:effectRef idx="2">
-            <a:schemeClr val="accent1"/>
-          </a:effectRef>
-          <a:fontRef idx="minor">
-            <a:schemeClr val="lt1"/>
-          </a:fontRef>
-        </p:style>
-        <p:txBody>
-          <a:bodyPr rtlCol="0" anchor="t" wrap="square" lIns="137160" rIns="137160" tIns="91440" bIns="91440"/>
-          <a:lstStyle/>
-          <a:p>
-            <a:pPr algn="r"/>
-            <a:r>
-              <a:rPr b="0" sz="800">
-                <a:solidFill>
-                  <a:srgbClr val="555555"/>
-                </a:solidFill>
-                <a:latin typeface="Calibri"/>
-              </a:rPr>
-              <a:t>Caso 86 · Magíster Dirección Tributaria UVM · Slide 10</a:t>
+              <a:t>Caso 86 · Catálogo SII 2025 · Grupo 4 — Magíster Dirección Tributaria UVM  |  9</a:t>
             </a:r>
           </a:p>
         </p:txBody>

--- a/Caso86_Presentacion.pptx
+++ b/Caso86_Presentacion.pptx
@@ -12,6 +12,8 @@
     <p:sldId id="260" r:id="rId11"/>
     <p:sldId id="261" r:id="rId12"/>
     <p:sldId id="262" r:id="rId13"/>
+    <p:sldId id="263" r:id="rId14"/>
+    <p:sldId id="264" r:id="rId15"/>
   </p:sldIdLst>
   <p:sldSz cx="12191695" cy="6858000" type="screen4x3"/>
   <p:notesSz cx="6858000" cy="9144000"/>
@@ -3109,7 +3111,7 @@
             <a:avLst/>
           </a:prstGeom>
           <a:solidFill>
-            <a:srgbClr val="1A3A5C"/>
+            <a:srgbClr val="CBCBCB"/>
           </a:solidFill>
           <a:ln>
             <a:noFill/>
@@ -3146,8 +3148,8 @@
         </p:nvSpPr>
         <p:spPr>
           <a:xfrm>
-            <a:off x="914400" y="822960"/>
-            <a:ext cx="10058400" cy="1280160"/>
+            <a:off x="548640" y="274320"/>
+            <a:ext cx="11064240" cy="822960"/>
           </a:xfrm>
           <a:prstGeom prst="rect">
             <a:avLst/>
@@ -3160,109 +3162,40 @@
           </a:bodyPr>
           <a:lstStyle/>
           <a:p>
-            <a:pPr algn="ctr"/>
-            <a:r>
-              <a:rPr sz="5400" b="1" i="0">
-                <a:solidFill>
-                  <a:srgbClr val="FFFFFF"/>
+            <a:pPr algn="l"/>
+            <a:r>
+              <a:rPr sz="3600" b="0" i="0">
+                <a:solidFill>
+                  <a:srgbClr val="1C1C1C"/>
                 </a:solidFill>
                 <a:latin typeface="Cambria"/>
               </a:rPr>
-              <a:t>CASO 86</a:t>
-            </a:r>
-          </a:p>
-        </p:txBody>
-      </p:sp>
-      <p:sp>
-        <p:nvSpPr>
-          <p:cNvPr id="4" name="TextBox 3"/>
-          <p:cNvSpPr txBox="1"/>
-          <p:nvPr/>
-        </p:nvSpPr>
-        <p:spPr>
-          <a:xfrm>
-            <a:off x="914400" y="2011680"/>
-            <a:ext cx="10058400" cy="640080"/>
-          </a:xfrm>
-          <a:prstGeom prst="rect">
-            <a:avLst/>
-          </a:prstGeom>
-          <a:noFill/>
-        </p:spPr>
-        <p:txBody>
-          <a:bodyPr wrap="square" lIns="0" rIns="0" tIns="0" bIns="0">
-            <a:spAutoFit/>
-          </a:bodyPr>
-          <a:lstStyle/>
-          <a:p>
-            <a:pPr algn="ctr"/>
-            <a:r>
-              <a:rPr sz="1800" b="0" i="0">
-                <a:solidFill>
-                  <a:srgbClr val="8EB4E3"/>
-                </a:solidFill>
-                <a:latin typeface="Calibri"/>
-              </a:rPr>
-              <a:t>Prestación de Servicios Profesionales mediante Sociedad Interpuesta</a:t>
-            </a:r>
-          </a:p>
-        </p:txBody>
-      </p:sp>
-      <p:sp>
-        <p:nvSpPr>
-          <p:cNvPr id="5" name="TextBox 4"/>
-          <p:cNvSpPr txBox="1"/>
-          <p:nvPr/>
-        </p:nvSpPr>
-        <p:spPr>
-          <a:xfrm>
-            <a:off x="914400" y="2651760"/>
-            <a:ext cx="10058400" cy="457200"/>
-          </a:xfrm>
-          <a:prstGeom prst="rect">
-            <a:avLst/>
-          </a:prstGeom>
-          <a:noFill/>
-        </p:spPr>
-        <p:txBody>
-          <a:bodyPr wrap="square" lIns="0" rIns="0" tIns="0" bIns="0">
-            <a:spAutoFit/>
-          </a:bodyPr>
-          <a:lstStyle/>
-          <a:p>
-            <a:pPr algn="ctr"/>
-            <a:r>
-              <a:rPr sz="1400" b="0" i="0">
-                <a:solidFill>
-                  <a:srgbClr val="AABBCC"/>
-                </a:solidFill>
-                <a:latin typeface="Calibri"/>
-              </a:rPr>
-              <a:t>Catálogo de Esquemas Tributarios SII 2025</a:t>
-            </a:r>
-          </a:p>
-        </p:txBody>
-      </p:sp>
-      <p:sp>
-        <p:nvSpPr>
-          <p:cNvPr id="6" name="Rectangle 5"/>
+              <a:t>Análisis jurídico — Requisitos de la sociedad</a:t>
+            </a:r>
+          </a:p>
+        </p:txBody>
+      </p:sp>
+      <p:sp>
+        <p:nvSpPr>
+          <p:cNvPr id="4" name="Rectangle 3"/>
           <p:cNvSpPr/>
           <p:nvPr/>
         </p:nvSpPr>
         <p:spPr>
           <a:xfrm>
-            <a:off x="1371600" y="3246120"/>
-            <a:ext cx="9418320" cy="36576"/>
-          </a:xfrm>
-          <a:prstGeom prst="rect">
-            <a:avLst/>
-          </a:prstGeom>
-          <a:solidFill>
-            <a:srgbClr val="8EB4E3"/>
+            <a:off x="548640" y="1143000"/>
+            <a:ext cx="9601200" cy="502920"/>
+          </a:xfrm>
+          <a:prstGeom prst="rect">
+            <a:avLst/>
+          </a:prstGeom>
+          <a:solidFill>
+            <a:srgbClr val="2B2B2B"/>
           </a:solidFill>
           <a:ln>
             <a:noFill/>
           </a:ln>
+          <a:effectLst/>
         </p:spPr>
         <p:style>
           <a:lnRef idx="1">
@@ -3279,64 +3212,38 @@
           </a:fontRef>
         </p:style>
         <p:txBody>
-          <a:bodyPr rtlCol="0" anchor="ctr"/>
-          <a:lstStyle/>
-          <a:p>
-            <a:pPr algn="ctr"/>
-          </a:p>
-        </p:txBody>
-      </p:sp>
-      <p:sp>
-        <p:nvSpPr>
-          <p:cNvPr id="7" name="TextBox 6"/>
-          <p:cNvSpPr txBox="1"/>
-          <p:nvPr/>
-        </p:nvSpPr>
-        <p:spPr>
-          <a:xfrm>
-            <a:off x="914400" y="3474720"/>
-            <a:ext cx="10058400" cy="457200"/>
-          </a:xfrm>
-          <a:prstGeom prst="rect">
-            <a:avLst/>
-          </a:prstGeom>
-          <a:noFill/>
-        </p:spPr>
-        <p:txBody>
-          <a:bodyPr wrap="square" lIns="0" rIns="0" tIns="0" bIns="0">
-            <a:spAutoFit/>
-          </a:bodyPr>
-          <a:lstStyle/>
-          <a:p>
-            <a:pPr algn="ctr"/>
-            <a:r>
-              <a:rPr sz="1400" b="1" i="0">
+          <a:bodyPr rtlCol="0" anchor="ctr" lIns="182880" rIns="182880"/>
+          <a:lstStyle/>
+          <a:p>
+            <a:pPr algn="l"/>
+            <a:r>
+              <a:rPr sz="1800" b="1" u="sng">
                 <a:solidFill>
                   <a:srgbClr val="E6A43C"/>
                 </a:solidFill>
                 <a:latin typeface="Calibri"/>
               </a:rPr>
-              <a:t>Grupo 4</a:t>
-            </a:r>
-          </a:p>
-        </p:txBody>
-      </p:sp>
-      <p:sp>
-        <p:nvSpPr>
-          <p:cNvPr id="8" name="Rounded Rectangle 7"/>
+              <a:t>Verificación de los requisitos (Circ. N°21/1991 y N°50/2020 SII)</a:t>
+            </a:r>
+          </a:p>
+        </p:txBody>
+      </p:sp>
+      <p:sp>
+        <p:nvSpPr>
+          <p:cNvPr id="5" name="Rectangle 4"/>
           <p:cNvSpPr/>
           <p:nvPr/>
         </p:nvSpPr>
         <p:spPr>
           <a:xfrm>
-            <a:off x="914400" y="4023360"/>
-            <a:ext cx="2377440" cy="594360"/>
-          </a:xfrm>
-          <a:prstGeom prst="roundRect">
-            <a:avLst/>
-          </a:prstGeom>
-          <a:solidFill>
-            <a:srgbClr val="254E80"/>
+            <a:off x="548640" y="1828800"/>
+            <a:ext cx="6035040" cy="457200"/>
+          </a:xfrm>
+          <a:prstGeom prst="rect">
+            <a:avLst/>
+          </a:prstGeom>
+          <a:solidFill>
+            <a:srgbClr val="2B2B2B"/>
           </a:solidFill>
           <a:ln>
             <a:noFill/>
@@ -3361,35 +3268,35 @@
           <a:bodyPr rtlCol="0" anchor="ctr" wrap="square" lIns="137160" rIns="137160" tIns="91440" bIns="91440"/>
           <a:lstStyle/>
           <a:p>
-            <a:pPr algn="ctr"/>
-            <a:r>
-              <a:rPr b="0" sz="1300">
+            <a:pPr algn="l"/>
+            <a:r>
+              <a:rPr sz="1200" b="1">
                 <a:solidFill>
                   <a:srgbClr val="FFFFFF"/>
                 </a:solidFill>
                 <a:latin typeface="Calibri"/>
               </a:rPr>
-              <a:t>Andrea Añasco</a:t>
-            </a:r>
-          </a:p>
-        </p:txBody>
-      </p:sp>
-      <p:sp>
-        <p:nvSpPr>
-          <p:cNvPr id="9" name="Rounded Rectangle 8"/>
+              <a:t>Requisito copulativo</a:t>
+            </a:r>
+          </a:p>
+        </p:txBody>
+      </p:sp>
+      <p:sp>
+        <p:nvSpPr>
+          <p:cNvPr id="6" name="Rectangle 5"/>
           <p:cNvSpPr/>
           <p:nvPr/>
         </p:nvSpPr>
         <p:spPr>
           <a:xfrm>
-            <a:off x="3456432" y="4023360"/>
-            <a:ext cx="2377440" cy="594360"/>
-          </a:xfrm>
-          <a:prstGeom prst="roundRect">
-            <a:avLst/>
-          </a:prstGeom>
-          <a:solidFill>
-            <a:srgbClr val="254E80"/>
+            <a:off x="6675120" y="1828800"/>
+            <a:ext cx="3520440" cy="457200"/>
+          </a:xfrm>
+          <a:prstGeom prst="rect">
+            <a:avLst/>
+          </a:prstGeom>
+          <a:solidFill>
+            <a:srgbClr val="2B2B2B"/>
           </a:solidFill>
           <a:ln>
             <a:noFill/>
@@ -3416,33 +3323,33 @@
           <a:p>
             <a:pPr algn="ctr"/>
             <a:r>
-              <a:rPr b="0" sz="1300">
+              <a:rPr sz="1200" b="1">
                 <a:solidFill>
                   <a:srgbClr val="FFFFFF"/>
                 </a:solidFill>
                 <a:latin typeface="Calibri"/>
               </a:rPr>
-              <a:t>Gema Sepúlveda</a:t>
-            </a:r>
-          </a:p>
-        </p:txBody>
-      </p:sp>
-      <p:sp>
-        <p:nvSpPr>
-          <p:cNvPr id="10" name="Rounded Rectangle 9"/>
+              <a:t>¿Se cumple en el Caso 86?</a:t>
+            </a:r>
+          </a:p>
+        </p:txBody>
+      </p:sp>
+      <p:sp>
+        <p:nvSpPr>
+          <p:cNvPr id="7" name="Rectangle 6"/>
           <p:cNvSpPr/>
           <p:nvPr/>
         </p:nvSpPr>
         <p:spPr>
           <a:xfrm>
-            <a:off x="5998464" y="4023360"/>
-            <a:ext cx="2377440" cy="594360"/>
-          </a:xfrm>
-          <a:prstGeom prst="roundRect">
-            <a:avLst/>
-          </a:prstGeom>
-          <a:solidFill>
-            <a:srgbClr val="254E80"/>
+            <a:off x="548640" y="2331720"/>
+            <a:ext cx="6035040" cy="548640"/>
+          </a:xfrm>
+          <a:prstGeom prst="rect">
+            <a:avLst/>
+          </a:prstGeom>
+          <a:solidFill>
+            <a:srgbClr val="F4F6F9"/>
           </a:solidFill>
           <a:ln>
             <a:noFill/>
@@ -3467,35 +3374,35 @@
           <a:bodyPr rtlCol="0" anchor="ctr" wrap="square" lIns="137160" rIns="137160" tIns="91440" bIns="91440"/>
           <a:lstStyle/>
           <a:p>
-            <a:pPr algn="ctr"/>
-            <a:r>
-              <a:rPr b="0" sz="1300">
-                <a:solidFill>
-                  <a:srgbClr val="FFFFFF"/>
-                </a:solidFill>
-                <a:latin typeface="Calibri"/>
-              </a:rPr>
-              <a:t>Karen Rebolledo</a:t>
-            </a:r>
-          </a:p>
-        </p:txBody>
-      </p:sp>
-      <p:sp>
-        <p:nvSpPr>
-          <p:cNvPr id="11" name="Rounded Rectangle 10"/>
+            <a:pPr algn="l"/>
+            <a:r>
+              <a:rPr sz="1050" b="0">
+                <a:solidFill>
+                  <a:srgbClr val="1C1C1C"/>
+                </a:solidFill>
+                <a:latin typeface="Calibri"/>
+              </a:rPr>
+              <a:t>Debe tratarse de una sociedad de personas.</a:t>
+            </a:r>
+          </a:p>
+        </p:txBody>
+      </p:sp>
+      <p:sp>
+        <p:nvSpPr>
+          <p:cNvPr id="8" name="Rectangle 7"/>
           <p:cNvSpPr/>
           <p:nvPr/>
         </p:nvSpPr>
         <p:spPr>
           <a:xfrm>
-            <a:off x="8540496" y="4023360"/>
-            <a:ext cx="2377440" cy="594360"/>
-          </a:xfrm>
-          <a:prstGeom prst="roundRect">
-            <a:avLst/>
-          </a:prstGeom>
-          <a:solidFill>
-            <a:srgbClr val="254E80"/>
+            <a:off x="6675120" y="2331720"/>
+            <a:ext cx="3520440" cy="548640"/>
+          </a:xfrm>
+          <a:prstGeom prst="rect">
+            <a:avLst/>
+          </a:prstGeom>
+          <a:solidFill>
+            <a:srgbClr val="1A6B3C"/>
           </a:solidFill>
           <a:ln>
             <a:noFill/>
@@ -3522,48 +3429,613 @@
           <a:p>
             <a:pPr algn="ctr"/>
             <a:r>
-              <a:rPr b="0" sz="1300">
+              <a:rPr sz="1050" b="1">
                 <a:solidFill>
                   <a:srgbClr val="FFFFFF"/>
                 </a:solidFill>
                 <a:latin typeface="Calibri"/>
               </a:rPr>
-              <a:t>Nicolás Muñoz</a:t>
-            </a:r>
-          </a:p>
-        </p:txBody>
-      </p:sp>
-      <p:sp>
-        <p:nvSpPr>
-          <p:cNvPr id="12" name="TextBox 11"/>
-          <p:cNvSpPr txBox="1"/>
-          <p:nvPr/>
-        </p:nvSpPr>
-        <p:spPr>
-          <a:xfrm>
-            <a:off x="914400" y="6217920"/>
-            <a:ext cx="10058400" cy="365760"/>
-          </a:xfrm>
-          <a:prstGeom prst="rect">
-            <a:avLst/>
-          </a:prstGeom>
-          <a:noFill/>
-        </p:spPr>
-        <p:txBody>
-          <a:bodyPr wrap="square" lIns="0" rIns="0" tIns="0" bIns="0">
-            <a:spAutoFit/>
-          </a:bodyPr>
+              <a:t>Cumple</a:t>
+            </a:r>
+          </a:p>
+        </p:txBody>
+      </p:sp>
+      <p:sp>
+        <p:nvSpPr>
+          <p:cNvPr id="9" name="Rectangle 8"/>
+          <p:cNvSpPr/>
+          <p:nvPr/>
+        </p:nvSpPr>
+        <p:spPr>
+          <a:xfrm>
+            <a:off x="548640" y="2926080"/>
+            <a:ext cx="6035040" cy="548640"/>
+          </a:xfrm>
+          <a:prstGeom prst="rect">
+            <a:avLst/>
+          </a:prstGeom>
+          <a:solidFill>
+            <a:srgbClr val="F4F6F9"/>
+          </a:solidFill>
+          <a:ln>
+            <a:noFill/>
+          </a:ln>
+          <a:effectLst/>
+        </p:spPr>
+        <p:style>
+          <a:lnRef idx="1">
+            <a:schemeClr val="accent1"/>
+          </a:lnRef>
+          <a:fillRef idx="3">
+            <a:schemeClr val="accent1"/>
+          </a:fillRef>
+          <a:effectRef idx="2">
+            <a:schemeClr val="accent1"/>
+          </a:effectRef>
+          <a:fontRef idx="minor">
+            <a:schemeClr val="lt1"/>
+          </a:fontRef>
+        </p:style>
+        <p:txBody>
+          <a:bodyPr rtlCol="0" anchor="ctr" wrap="square" lIns="137160" rIns="137160" tIns="91440" bIns="91440"/>
+          <a:lstStyle/>
+          <a:p>
+            <a:pPr algn="l"/>
+            <a:r>
+              <a:rPr sz="1050" b="0">
+                <a:solidFill>
+                  <a:srgbClr val="1C1C1C"/>
+                </a:solidFill>
+                <a:latin typeface="Calibri"/>
+              </a:rPr>
+              <a:t>Objeto exclusivo: prestación de servicios o asesorías profesionales.</a:t>
+            </a:r>
+          </a:p>
+        </p:txBody>
+      </p:sp>
+      <p:sp>
+        <p:nvSpPr>
+          <p:cNvPr id="10" name="Rectangle 9"/>
+          <p:cNvSpPr/>
+          <p:nvPr/>
+        </p:nvSpPr>
+        <p:spPr>
+          <a:xfrm>
+            <a:off x="6675120" y="2926080"/>
+            <a:ext cx="3520440" cy="548640"/>
+          </a:xfrm>
+          <a:prstGeom prst="rect">
+            <a:avLst/>
+          </a:prstGeom>
+          <a:solidFill>
+            <a:srgbClr val="1A6B3C"/>
+          </a:solidFill>
+          <a:ln>
+            <a:noFill/>
+          </a:ln>
+          <a:effectLst/>
+        </p:spPr>
+        <p:style>
+          <a:lnRef idx="1">
+            <a:schemeClr val="accent1"/>
+          </a:lnRef>
+          <a:fillRef idx="3">
+            <a:schemeClr val="accent1"/>
+          </a:fillRef>
+          <a:effectRef idx="2">
+            <a:schemeClr val="accent1"/>
+          </a:effectRef>
+          <a:fontRef idx="minor">
+            <a:schemeClr val="lt1"/>
+          </a:fontRef>
+        </p:style>
+        <p:txBody>
+          <a:bodyPr rtlCol="0" anchor="ctr" wrap="square" lIns="137160" rIns="137160" tIns="91440" bIns="91440"/>
           <a:lstStyle/>
           <a:p>
             <a:pPr algn="ctr"/>
             <a:r>
-              <a:rPr sz="1000" b="0" i="0">
-                <a:solidFill>
-                  <a:srgbClr val="8899AA"/>
-                </a:solidFill>
-                <a:latin typeface="Calibri"/>
-              </a:rPr>
-              <a:t>Magíster en Dirección Tributaria — Universidad Viña del Mar</a:t>
+              <a:rPr sz="1050" b="1">
+                <a:solidFill>
+                  <a:srgbClr val="FFFFFF"/>
+                </a:solidFill>
+                <a:latin typeface="Calibri"/>
+              </a:rPr>
+              <a:t>Cumple</a:t>
+            </a:r>
+          </a:p>
+        </p:txBody>
+      </p:sp>
+      <p:sp>
+        <p:nvSpPr>
+          <p:cNvPr id="11" name="Rectangle 10"/>
+          <p:cNvSpPr/>
+          <p:nvPr/>
+        </p:nvSpPr>
+        <p:spPr>
+          <a:xfrm>
+            <a:off x="548640" y="3520440"/>
+            <a:ext cx="6035040" cy="548640"/>
+          </a:xfrm>
+          <a:prstGeom prst="rect">
+            <a:avLst/>
+          </a:prstGeom>
+          <a:solidFill>
+            <a:srgbClr val="F4F6F9"/>
+          </a:solidFill>
+          <a:ln>
+            <a:noFill/>
+          </a:ln>
+          <a:effectLst/>
+        </p:spPr>
+        <p:style>
+          <a:lnRef idx="1">
+            <a:schemeClr val="accent1"/>
+          </a:lnRef>
+          <a:fillRef idx="3">
+            <a:schemeClr val="accent1"/>
+          </a:fillRef>
+          <a:effectRef idx="2">
+            <a:schemeClr val="accent1"/>
+          </a:effectRef>
+          <a:fontRef idx="minor">
+            <a:schemeClr val="lt1"/>
+          </a:fontRef>
+        </p:style>
+        <p:txBody>
+          <a:bodyPr rtlCol="0" anchor="ctr" wrap="square" lIns="137160" rIns="137160" tIns="91440" bIns="91440"/>
+          <a:lstStyle/>
+          <a:p>
+            <a:pPr algn="l"/>
+            <a:r>
+              <a:rPr sz="1050" b="0">
+                <a:solidFill>
+                  <a:srgbClr val="1C1C1C"/>
+                </a:solidFill>
+                <a:latin typeface="Calibri"/>
+              </a:rPr>
+              <a:t>Servicios prestados por intermedio de sus socios.</a:t>
+            </a:r>
+          </a:p>
+        </p:txBody>
+      </p:sp>
+      <p:sp>
+        <p:nvSpPr>
+          <p:cNvPr id="12" name="Rectangle 11"/>
+          <p:cNvSpPr/>
+          <p:nvPr/>
+        </p:nvSpPr>
+        <p:spPr>
+          <a:xfrm>
+            <a:off x="6675120" y="3520440"/>
+            <a:ext cx="3520440" cy="548640"/>
+          </a:xfrm>
+          <a:prstGeom prst="rect">
+            <a:avLst/>
+          </a:prstGeom>
+          <a:solidFill>
+            <a:srgbClr val="E6A43C"/>
+          </a:solidFill>
+          <a:ln>
+            <a:noFill/>
+          </a:ln>
+          <a:effectLst/>
+        </p:spPr>
+        <p:style>
+          <a:lnRef idx="1">
+            <a:schemeClr val="accent1"/>
+          </a:lnRef>
+          <a:fillRef idx="3">
+            <a:schemeClr val="accent1"/>
+          </a:fillRef>
+          <a:effectRef idx="2">
+            <a:schemeClr val="accent1"/>
+          </a:effectRef>
+          <a:fontRef idx="minor">
+            <a:schemeClr val="lt1"/>
+          </a:fontRef>
+        </p:style>
+        <p:txBody>
+          <a:bodyPr rtlCol="0" anchor="ctr" wrap="square" lIns="137160" rIns="137160" tIns="91440" bIns="91440"/>
+          <a:lstStyle/>
+          <a:p>
+            <a:pPr algn="ctr"/>
+            <a:r>
+              <a:rPr sz="1050" b="1">
+                <a:solidFill>
+                  <a:srgbClr val="FFFFFF"/>
+                </a:solidFill>
+                <a:latin typeface="Calibri"/>
+              </a:rPr>
+              <a:t>Solo A presta servicios</a:t>
+            </a:r>
+          </a:p>
+        </p:txBody>
+      </p:sp>
+      <p:sp>
+        <p:nvSpPr>
+          <p:cNvPr id="13" name="Rectangle 12"/>
+          <p:cNvSpPr/>
+          <p:nvPr/>
+        </p:nvSpPr>
+        <p:spPr>
+          <a:xfrm>
+            <a:off x="548640" y="4114800"/>
+            <a:ext cx="6035040" cy="548640"/>
+          </a:xfrm>
+          <a:prstGeom prst="rect">
+            <a:avLst/>
+          </a:prstGeom>
+          <a:solidFill>
+            <a:srgbClr val="F4F6F9"/>
+          </a:solidFill>
+          <a:ln>
+            <a:noFill/>
+          </a:ln>
+          <a:effectLst/>
+        </p:spPr>
+        <p:style>
+          <a:lnRef idx="1">
+            <a:schemeClr val="accent1"/>
+          </a:lnRef>
+          <a:fillRef idx="3">
+            <a:schemeClr val="accent1"/>
+          </a:fillRef>
+          <a:effectRef idx="2">
+            <a:schemeClr val="accent1"/>
+          </a:effectRef>
+          <a:fontRef idx="minor">
+            <a:schemeClr val="lt1"/>
+          </a:fontRef>
+        </p:style>
+        <p:txBody>
+          <a:bodyPr rtlCol="0" anchor="ctr" wrap="square" lIns="137160" rIns="137160" tIns="91440" bIns="91440"/>
+          <a:lstStyle/>
+          <a:p>
+            <a:pPr algn="l"/>
+            <a:r>
+              <a:rPr sz="1050" b="0">
+                <a:solidFill>
+                  <a:srgbClr val="1C1C1C"/>
+                </a:solidFill>
+                <a:latin typeface="Calibri"/>
+              </a:rPr>
+              <a:t>TODOS los socios deben ejercer su profesión para la sociedad.</a:t>
+            </a:r>
+          </a:p>
+        </p:txBody>
+      </p:sp>
+      <p:sp>
+        <p:nvSpPr>
+          <p:cNvPr id="14" name="Rectangle 13"/>
+          <p:cNvSpPr/>
+          <p:nvPr/>
+        </p:nvSpPr>
+        <p:spPr>
+          <a:xfrm>
+            <a:off x="6675120" y="4114800"/>
+            <a:ext cx="3520440" cy="548640"/>
+          </a:xfrm>
+          <a:prstGeom prst="rect">
+            <a:avLst/>
+          </a:prstGeom>
+          <a:solidFill>
+            <a:srgbClr val="B03030"/>
+          </a:solidFill>
+          <a:ln>
+            <a:noFill/>
+          </a:ln>
+          <a:effectLst/>
+        </p:spPr>
+        <p:style>
+          <a:lnRef idx="1">
+            <a:schemeClr val="accent1"/>
+          </a:lnRef>
+          <a:fillRef idx="3">
+            <a:schemeClr val="accent1"/>
+          </a:fillRef>
+          <a:effectRef idx="2">
+            <a:schemeClr val="accent1"/>
+          </a:effectRef>
+          <a:fontRef idx="minor">
+            <a:schemeClr val="lt1"/>
+          </a:fontRef>
+        </p:style>
+        <p:txBody>
+          <a:bodyPr rtlCol="0" anchor="ctr" wrap="square" lIns="137160" rIns="137160" tIns="91440" bIns="91440"/>
+          <a:lstStyle/>
+          <a:p>
+            <a:pPr algn="ctr"/>
+            <a:r>
+              <a:rPr sz="1050" b="1">
+                <a:solidFill>
+                  <a:srgbClr val="FFFFFF"/>
+                </a:solidFill>
+                <a:latin typeface="Calibri"/>
+              </a:rPr>
+              <a:t>NO CUMPLE — B y C no prestan</a:t>
+            </a:r>
+          </a:p>
+        </p:txBody>
+      </p:sp>
+      <p:sp>
+        <p:nvSpPr>
+          <p:cNvPr id="15" name="Rectangle 14"/>
+          <p:cNvSpPr/>
+          <p:nvPr/>
+        </p:nvSpPr>
+        <p:spPr>
+          <a:xfrm>
+            <a:off x="548640" y="4709160"/>
+            <a:ext cx="6035040" cy="548640"/>
+          </a:xfrm>
+          <a:prstGeom prst="rect">
+            <a:avLst/>
+          </a:prstGeom>
+          <a:solidFill>
+            <a:srgbClr val="F4F6F9"/>
+          </a:solidFill>
+          <a:ln>
+            <a:noFill/>
+          </a:ln>
+          <a:effectLst/>
+        </p:spPr>
+        <p:style>
+          <a:lnRef idx="1">
+            <a:schemeClr val="accent1"/>
+          </a:lnRef>
+          <a:fillRef idx="3">
+            <a:schemeClr val="accent1"/>
+          </a:fillRef>
+          <a:effectRef idx="2">
+            <a:schemeClr val="accent1"/>
+          </a:effectRef>
+          <a:fontRef idx="minor">
+            <a:schemeClr val="lt1"/>
+          </a:fontRef>
+        </p:style>
+        <p:txBody>
+          <a:bodyPr rtlCol="0" anchor="ctr" wrap="square" lIns="137160" rIns="137160" tIns="91440" bIns="91440"/>
+          <a:lstStyle/>
+          <a:p>
+            <a:pPr algn="l"/>
+            <a:r>
+              <a:rPr sz="1050" b="0">
+                <a:solidFill>
+                  <a:srgbClr val="1C1C1C"/>
+                </a:solidFill>
+                <a:latin typeface="Calibri"/>
+              </a:rPr>
+              <a:t>No es aceptable que un socio solo aporte capital sin ejercer profesión.</a:t>
+            </a:r>
+          </a:p>
+        </p:txBody>
+      </p:sp>
+      <p:sp>
+        <p:nvSpPr>
+          <p:cNvPr id="16" name="Rectangle 15"/>
+          <p:cNvSpPr/>
+          <p:nvPr/>
+        </p:nvSpPr>
+        <p:spPr>
+          <a:xfrm>
+            <a:off x="6675120" y="4709160"/>
+            <a:ext cx="3520440" cy="548640"/>
+          </a:xfrm>
+          <a:prstGeom prst="rect">
+            <a:avLst/>
+          </a:prstGeom>
+          <a:solidFill>
+            <a:srgbClr val="B03030"/>
+          </a:solidFill>
+          <a:ln>
+            <a:noFill/>
+          </a:ln>
+          <a:effectLst/>
+        </p:spPr>
+        <p:style>
+          <a:lnRef idx="1">
+            <a:schemeClr val="accent1"/>
+          </a:lnRef>
+          <a:fillRef idx="3">
+            <a:schemeClr val="accent1"/>
+          </a:fillRef>
+          <a:effectRef idx="2">
+            <a:schemeClr val="accent1"/>
+          </a:effectRef>
+          <a:fontRef idx="minor">
+            <a:schemeClr val="lt1"/>
+          </a:fontRef>
+        </p:style>
+        <p:txBody>
+          <a:bodyPr rtlCol="0" anchor="ctr" wrap="square" lIns="137160" rIns="137160" tIns="91440" bIns="91440"/>
+          <a:lstStyle/>
+          <a:p>
+            <a:pPr algn="ctr"/>
+            <a:r>
+              <a:rPr sz="1050" b="1">
+                <a:solidFill>
+                  <a:srgbClr val="FFFFFF"/>
+                </a:solidFill>
+                <a:latin typeface="Calibri"/>
+              </a:rPr>
+              <a:t>NO CUMPLE — B y C solo aportan capital</a:t>
+            </a:r>
+          </a:p>
+        </p:txBody>
+      </p:sp>
+      <p:sp>
+        <p:nvSpPr>
+          <p:cNvPr id="17" name="Rectangle 16"/>
+          <p:cNvSpPr/>
+          <p:nvPr/>
+        </p:nvSpPr>
+        <p:spPr>
+          <a:xfrm>
+            <a:off x="548640" y="5303520"/>
+            <a:ext cx="6035040" cy="548640"/>
+          </a:xfrm>
+          <a:prstGeom prst="rect">
+            <a:avLst/>
+          </a:prstGeom>
+          <a:solidFill>
+            <a:srgbClr val="F4F6F9"/>
+          </a:solidFill>
+          <a:ln>
+            <a:noFill/>
+          </a:ln>
+          <a:effectLst/>
+        </p:spPr>
+        <p:style>
+          <a:lnRef idx="1">
+            <a:schemeClr val="accent1"/>
+          </a:lnRef>
+          <a:fillRef idx="3">
+            <a:schemeClr val="accent1"/>
+          </a:fillRef>
+          <a:effectRef idx="2">
+            <a:schemeClr val="accent1"/>
+          </a:effectRef>
+          <a:fontRef idx="minor">
+            <a:schemeClr val="lt1"/>
+          </a:fontRef>
+        </p:style>
+        <p:txBody>
+          <a:bodyPr rtlCol="0" anchor="ctr" wrap="square" lIns="137160" rIns="137160" tIns="91440" bIns="91440"/>
+          <a:lstStyle/>
+          <a:p>
+            <a:pPr algn="l"/>
+            <a:r>
+              <a:rPr sz="1050" b="0">
+                <a:solidFill>
+                  <a:srgbClr val="1C1C1C"/>
+                </a:solidFill>
+                <a:latin typeface="Calibri"/>
+              </a:rPr>
+              <a:t>La realización efectiva de labores profesionales es lo relevante, no la forma de remuneración.</a:t>
+            </a:r>
+          </a:p>
+        </p:txBody>
+      </p:sp>
+      <p:sp>
+        <p:nvSpPr>
+          <p:cNvPr id="18" name="Rectangle 17"/>
+          <p:cNvSpPr/>
+          <p:nvPr/>
+        </p:nvSpPr>
+        <p:spPr>
+          <a:xfrm>
+            <a:off x="6675120" y="5303520"/>
+            <a:ext cx="3520440" cy="548640"/>
+          </a:xfrm>
+          <a:prstGeom prst="rect">
+            <a:avLst/>
+          </a:prstGeom>
+          <a:solidFill>
+            <a:srgbClr val="B03030"/>
+          </a:solidFill>
+          <a:ln>
+            <a:noFill/>
+          </a:ln>
+          <a:effectLst/>
+        </p:spPr>
+        <p:style>
+          <a:lnRef idx="1">
+            <a:schemeClr val="accent1"/>
+          </a:lnRef>
+          <a:fillRef idx="3">
+            <a:schemeClr val="accent1"/>
+          </a:fillRef>
+          <a:effectRef idx="2">
+            <a:schemeClr val="accent1"/>
+          </a:effectRef>
+          <a:fontRef idx="minor">
+            <a:schemeClr val="lt1"/>
+          </a:fontRef>
+        </p:style>
+        <p:txBody>
+          <a:bodyPr rtlCol="0" anchor="ctr" wrap="square" lIns="137160" rIns="137160" tIns="91440" bIns="91440"/>
+          <a:lstStyle/>
+          <a:p>
+            <a:pPr algn="ctr"/>
+            <a:r>
+              <a:rPr sz="1050" b="1">
+                <a:solidFill>
+                  <a:srgbClr val="FFFFFF"/>
+                </a:solidFill>
+                <a:latin typeface="Calibri"/>
+              </a:rPr>
+              <a:t>Solo A realiza labor profesional</a:t>
+            </a:r>
+          </a:p>
+        </p:txBody>
+      </p:sp>
+      <p:sp>
+        <p:nvSpPr>
+          <p:cNvPr id="19" name="Rectangle 18"/>
+          <p:cNvSpPr/>
+          <p:nvPr/>
+        </p:nvSpPr>
+        <p:spPr>
+          <a:xfrm>
+            <a:off x="10332720" y="1828800"/>
+            <a:ext cx="1691640" cy="4297680"/>
+          </a:xfrm>
+          <a:prstGeom prst="rect">
+            <a:avLst/>
+          </a:prstGeom>
+          <a:solidFill>
+            <a:srgbClr val="FDE9D9"/>
+          </a:solidFill>
+          <a:ln>
+            <a:noFill/>
+          </a:ln>
+          <a:effectLst/>
+        </p:spPr>
+        <p:style>
+          <a:lnRef idx="1">
+            <a:schemeClr val="accent1"/>
+          </a:lnRef>
+          <a:fillRef idx="3">
+            <a:schemeClr val="accent1"/>
+          </a:fillRef>
+          <a:effectRef idx="2">
+            <a:schemeClr val="accent1"/>
+          </a:effectRef>
+          <a:fontRef idx="minor">
+            <a:schemeClr val="lt1"/>
+          </a:fontRef>
+        </p:style>
+        <p:txBody>
+          <a:bodyPr rtlCol="0" anchor="ctr" wrap="square" lIns="109728" rIns="109728" tIns="137160" bIns="137160"/>
+          <a:lstStyle/>
+          <a:p>
+            <a:pPr algn="ctr"/>
+            <a:r>
+              <a:rPr sz="1600" b="1">
+                <a:solidFill>
+                  <a:srgbClr val="C5501A"/>
+                </a:solidFill>
+                <a:latin typeface="Calibri"/>
+              </a:rPr>
+              <a:t>RESULTADO</a:t>
+            </a:r>
+          </a:p>
+          <a:p>
+            <a:pPr algn="ctr">
+              <a:spcBef>
+                <a:spcPts val="800"/>
+              </a:spcBef>
+            </a:pPr>
+            <a:r>
+              <a:rPr sz="1100">
+                <a:solidFill>
+                  <a:srgbClr val="1C1C1C"/>
+                </a:solidFill>
+                <a:latin typeface="Calibri"/>
+              </a:rPr>
+              <a:t>
+La sociedad D NO califica como sociedad de profesionales del Art. 42 N°2 inc. 3° LIR, al incumplir requisitos copulativos de las Circulares N°21/1991 y N°50/2020.</a:t>
             </a:r>
           </a:p>
         </p:txBody>
@@ -3639,7 +4111,7 @@
         <p:spPr>
           <a:xfrm>
             <a:off x="548640" y="274320"/>
-            <a:ext cx="10972800" cy="731520"/>
+            <a:ext cx="11064240" cy="822960"/>
           </a:xfrm>
           <a:prstGeom prst="rect">
             <a:avLst/>
@@ -3654,32 +4126,34 @@
           <a:p>
             <a:pPr algn="l"/>
             <a:r>
-              <a:rPr sz="3000" b="0" i="0">
+              <a:rPr sz="3600" b="0" i="0">
                 <a:solidFill>
                   <a:srgbClr val="1C1C1C"/>
                 </a:solidFill>
                 <a:latin typeface="Cambria"/>
               </a:rPr>
-              <a:t>El Esquema — ¿Qué hace Pedro?</a:t>
-            </a:r>
-          </a:p>
-        </p:txBody>
-      </p:sp>
-      <p:sp>
-        <p:nvSpPr>
-          <p:cNvPr id="4" name="Rounded Rectangle 3"/>
+              <a:t>Normas Generales Antielusivas (NGA)</a:t>
+            </a:r>
+          </a:p>
+        </p:txBody>
+      </p:sp>
+      <p:sp>
+        <p:nvSpPr>
+          <p:cNvPr id="4" name="Rectangle 3"/>
           <p:cNvSpPr/>
           <p:nvPr/>
         </p:nvSpPr>
         <p:spPr>
           <a:xfrm>
-            <a:off x="548640" y="960120"/>
-            <a:ext cx="10972800" cy="411480"/>
-          </a:xfrm>
-          <a:prstGeom prst="roundRect">
-            <a:avLst/>
-          </a:prstGeom>
-          <a:noFill/>
+            <a:off x="548640" y="1143000"/>
+            <a:ext cx="9601200" cy="502920"/>
+          </a:xfrm>
+          <a:prstGeom prst="rect">
+            <a:avLst/>
+          </a:prstGeom>
+          <a:solidFill>
+            <a:srgbClr val="2B2B2B"/>
+          </a:solidFill>
           <a:ln>
             <a:noFill/>
           </a:ln>
@@ -3700,38 +4174,38 @@
           </a:fontRef>
         </p:style>
         <p:txBody>
-          <a:bodyPr rtlCol="0" anchor="t" wrap="square" lIns="137160" rIns="137160" tIns="91440" bIns="91440"/>
+          <a:bodyPr rtlCol="0" anchor="ctr" lIns="182880" rIns="182880"/>
           <a:lstStyle/>
           <a:p>
             <a:pPr algn="l"/>
             <a:r>
-              <a:rPr b="0" sz="1400">
-                <a:solidFill>
-                  <a:srgbClr val="555555"/>
-                </a:solidFill>
-                <a:latin typeface="Calibri"/>
-              </a:rPr>
-              <a:t>Caso real: un médico y la sociedad que reduce su IGC</a:t>
-            </a:r>
-          </a:p>
-        </p:txBody>
-      </p:sp>
-      <p:sp>
-        <p:nvSpPr>
-          <p:cNvPr id="5" name="Rounded Rectangle 4"/>
+              <a:rPr sz="1800" b="1" u="sng">
+                <a:solidFill>
+                  <a:srgbClr val="E6A43C"/>
+                </a:solidFill>
+                <a:latin typeface="Calibri"/>
+              </a:rPr>
+              <a:t>Marco aplicable — Código Tributario</a:t>
+            </a:r>
+          </a:p>
+        </p:txBody>
+      </p:sp>
+      <p:sp>
+        <p:nvSpPr>
+          <p:cNvPr id="5" name="Rectangle 4"/>
           <p:cNvSpPr/>
           <p:nvPr/>
         </p:nvSpPr>
         <p:spPr>
           <a:xfrm>
-            <a:off x="548640" y="1554480"/>
-            <a:ext cx="5303520" cy="1645920"/>
-          </a:xfrm>
-          <a:prstGeom prst="roundRect">
-            <a:avLst/>
-          </a:prstGeom>
-          <a:solidFill>
-            <a:srgbClr val="1A3A5C"/>
+            <a:off x="548640" y="1828800"/>
+            <a:ext cx="4800600" cy="457200"/>
+          </a:xfrm>
+          <a:prstGeom prst="rect">
+            <a:avLst/>
+          </a:prstGeom>
+          <a:solidFill>
+            <a:srgbClr val="2B2B2B"/>
           </a:solidFill>
           <a:ln>
             <a:noFill/>
@@ -3753,74 +4227,38 @@
           </a:fontRef>
         </p:style>
         <p:txBody>
-          <a:bodyPr rtlCol="0" anchor="t" wrap="square" lIns="137160" rIns="137160" tIns="91440" bIns="91440"/>
+          <a:bodyPr rtlCol="0" anchor="ctr" lIns="182880" rIns="182880"/>
           <a:lstStyle/>
           <a:p>
             <a:pPr algn="l"/>
             <a:r>
-              <a:rPr b="0" sz="1150">
-                <a:solidFill>
-                  <a:srgbClr val="FFFFFF"/>
-                </a:solidFill>
-                <a:latin typeface="Calibri"/>
-              </a:rPr>
-              <a:t>PEDRO — Médico cirujano</a:t>
-            </a:r>
-          </a:p>
-          <a:p>
-            <a:pPr algn="l"/>
-            <a:r>
-              <a:rPr b="0" sz="1150">
-                <a:solidFill>
-                  <a:srgbClr val="FFFFFF"/>
-                </a:solidFill>
-                <a:latin typeface="Calibri"/>
-              </a:rPr>
-              <a:t>• Ingresos anuales: $300 millones en honorarios</a:t>
-            </a:r>
-          </a:p>
-          <a:p>
-            <a:pPr algn="l"/>
-            <a:r>
-              <a:rPr b="0" sz="1150">
-                <a:solidFill>
-                  <a:srgbClr val="FFFFFF"/>
-                </a:solidFill>
-                <a:latin typeface="Calibri"/>
-              </a:rPr>
-              <a:t>• Sin esquema: tributa en tramo IGC ≈ 40%</a:t>
-            </a:r>
-          </a:p>
-          <a:p>
-            <a:pPr algn="l"/>
-            <a:r>
-              <a:rPr b="0" sz="1150">
-                <a:solidFill>
-                  <a:srgbClr val="FFFFFF"/>
-                </a:solidFill>
-                <a:latin typeface="Calibri"/>
-              </a:rPr>
-              <a:t>• Motivación: reducir impuesto fraccionando el ingreso en varios RUT</a:t>
-            </a:r>
-          </a:p>
-        </p:txBody>
-      </p:sp>
-      <p:sp>
-        <p:nvSpPr>
-          <p:cNvPr id="6" name="Rounded Rectangle 5"/>
+              <a:rPr sz="1800" b="1" u="sng">
+                <a:solidFill>
+                  <a:srgbClr val="E6A43C"/>
+                </a:solidFill>
+                <a:latin typeface="Calibri"/>
+              </a:rPr>
+              <a:t>Art. 4 bis CT  ·  Principio de buena fe</a:t>
+            </a:r>
+          </a:p>
+        </p:txBody>
+      </p:sp>
+      <p:sp>
+        <p:nvSpPr>
+          <p:cNvPr id="6" name="Rectangle 5"/>
           <p:cNvSpPr/>
           <p:nvPr/>
         </p:nvSpPr>
         <p:spPr>
           <a:xfrm>
-            <a:off x="5989320" y="1554480"/>
-            <a:ext cx="5623560" cy="1645920"/>
-          </a:xfrm>
-          <a:prstGeom prst="roundRect">
-            <a:avLst/>
-          </a:prstGeom>
-          <a:solidFill>
-            <a:srgbClr val="2B2B2B"/>
+            <a:off x="548640" y="2286000"/>
+            <a:ext cx="4800600" cy="1691640"/>
+          </a:xfrm>
+          <a:prstGeom prst="rect">
+            <a:avLst/>
+          </a:prstGeom>
+          <a:solidFill>
+            <a:srgbClr val="F4F6F9"/>
           </a:solidFill>
           <a:ln>
             <a:noFill/>
@@ -3847,117 +4285,33 @@
           <a:p>
             <a:pPr algn="l"/>
             <a:r>
-              <a:rPr b="0" sz="1150">
-                <a:solidFill>
-                  <a:srgbClr val="FFFFFF"/>
-                </a:solidFill>
-                <a:latin typeface="Calibri"/>
-              </a:rPr>
-              <a:t>EL MECANISMO</a:t>
-            </a:r>
-          </a:p>
-          <a:p>
-            <a:pPr algn="l"/>
-            <a:r>
-              <a:rPr b="0" sz="1150">
-                <a:solidFill>
-                  <a:srgbClr val="FFFFFF"/>
-                </a:solidFill>
-                <a:latin typeface="Calibri"/>
-              </a:rPr>
-              <a:t>Pedro constituye con su señora y su cuñado</a:t>
-            </a:r>
-          </a:p>
-          <a:p>
-            <a:pPr algn="l"/>
-            <a:r>
-              <a:rPr b="0" sz="1150">
-                <a:solidFill>
-                  <a:srgbClr val="FFFFFF"/>
-                </a:solidFill>
-                <a:latin typeface="Calibri"/>
-              </a:rPr>
-              <a:t>la 'Sociedad Médica Ltda.' — 33% c/u</a:t>
-            </a:r>
-          </a:p>
-          <a:p>
-            <a:pPr algn="l"/>
-            <a:r>
-              <a:rPr b="0" sz="1150">
-                <a:solidFill>
-                  <a:srgbClr val="FFFFFF"/>
-                </a:solidFill>
-                <a:latin typeface="Calibri"/>
-              </a:rPr>
-              <a:t/>
-            </a:r>
-          </a:p>
-          <a:p>
-            <a:pPr algn="l"/>
-            <a:r>
-              <a:rPr b="0" sz="1150">
-                <a:solidFill>
-                  <a:srgbClr val="FFFFFF"/>
-                </a:solidFill>
-                <a:latin typeface="Calibri"/>
-              </a:rPr>
-              <a:t>Los $300 MM entran a la sociedad</a:t>
-            </a:r>
-          </a:p>
-          <a:p>
-            <a:pPr algn="l"/>
-            <a:r>
-              <a:rPr b="0" sz="1150">
-                <a:solidFill>
-                  <a:srgbClr val="FFFFFF"/>
-                </a:solidFill>
-                <a:latin typeface="Calibri"/>
-              </a:rPr>
-              <a:t>y se reparten en 3 partes iguales:</a:t>
-            </a:r>
-          </a:p>
-          <a:p>
-            <a:pPr algn="l"/>
-            <a:r>
-              <a:rPr b="0" sz="1150">
-                <a:solidFill>
-                  <a:srgbClr val="FFFFFF"/>
-                </a:solidFill>
-                <a:latin typeface="Calibri"/>
-              </a:rPr>
-              <a:t>→ Pedro, la señora y el cuñado</a:t>
-            </a:r>
-          </a:p>
-          <a:p>
-            <a:pPr algn="l"/>
-            <a:r>
-              <a:rPr b="0" sz="1150">
-                <a:solidFill>
-                  <a:srgbClr val="FFFFFF"/>
-                </a:solidFill>
-                <a:latin typeface="Calibri"/>
-              </a:rPr>
-              <a:t>declaran $100 MM cada uno</a:t>
-            </a:r>
-          </a:p>
-        </p:txBody>
-      </p:sp>
-      <p:sp>
-        <p:nvSpPr>
-          <p:cNvPr id="7" name="Rounded Rectangle 6"/>
+              <a:rPr sz="1100" b="0">
+                <a:solidFill>
+                  <a:srgbClr val="1C1C1C"/>
+                </a:solidFill>
+                <a:latin typeface="Calibri"/>
+              </a:rPr>
+              <a:t>Las obligaciones tributarias nacen y se exigen con arreglo a la naturaleza jurídica de los hechos, cualquiera sea la forma o denominación que los interesados les hubieren dado.</a:t>
+            </a:r>
+          </a:p>
+        </p:txBody>
+      </p:sp>
+      <p:sp>
+        <p:nvSpPr>
+          <p:cNvPr id="7" name="Rectangle 6"/>
           <p:cNvSpPr/>
           <p:nvPr/>
         </p:nvSpPr>
         <p:spPr>
           <a:xfrm>
-            <a:off x="548640" y="3429000"/>
-            <a:ext cx="2194560" cy="1188720"/>
-          </a:xfrm>
-          <a:prstGeom prst="roundRect">
-            <a:avLst/>
-          </a:prstGeom>
-          <a:solidFill>
-            <a:srgbClr val="8EB4E3"/>
+            <a:off x="5532120" y="1828800"/>
+            <a:ext cx="4800600" cy="457200"/>
+          </a:xfrm>
+          <a:prstGeom prst="rect">
+            <a:avLst/>
+          </a:prstGeom>
+          <a:solidFill>
+            <a:srgbClr val="2B2B2B"/>
           </a:solidFill>
           <a:ln>
             <a:noFill/>
@@ -3979,61 +4333,39 @@
           </a:fontRef>
         </p:style>
         <p:txBody>
-          <a:bodyPr rtlCol="0" anchor="ctr" wrap="square" lIns="137160" rIns="137160" tIns="91440" bIns="91440"/>
-          <a:lstStyle/>
-          <a:p>
-            <a:pPr algn="ctr"/>
-            <a:r>
-              <a:rPr b="1" sz="1200">
-                <a:solidFill>
-                  <a:srgbClr val="1A3A5C"/>
-                </a:solidFill>
-                <a:latin typeface="Calibri"/>
-              </a:rPr>
-              <a:t>Pedro</a:t>
-            </a:r>
-          </a:p>
-          <a:p>
-            <a:pPr algn="ctr"/>
-            <a:r>
-              <a:rPr b="1" sz="1200">
-                <a:solidFill>
-                  <a:srgbClr val="1A3A5C"/>
-                </a:solidFill>
-                <a:latin typeface="Calibri"/>
-              </a:rPr>
-              <a:t>médico</a:t>
-            </a:r>
-          </a:p>
-          <a:p>
-            <a:pPr algn="ctr"/>
-            <a:r>
-              <a:rPr b="1" sz="1200">
-                <a:solidFill>
-                  <a:srgbClr val="1A3A5C"/>
-                </a:solidFill>
-                <a:latin typeface="Calibri"/>
-              </a:rPr>
-              <a:t>$300 MM</a:t>
-            </a:r>
-          </a:p>
-        </p:txBody>
-      </p:sp>
-      <p:sp>
-        <p:nvSpPr>
-          <p:cNvPr id="8" name="Rounded Rectangle 7"/>
+          <a:bodyPr rtlCol="0" anchor="ctr" lIns="182880" rIns="182880"/>
+          <a:lstStyle/>
+          <a:p>
+            <a:pPr algn="l"/>
+            <a:r>
+              <a:rPr sz="1800" b="1" u="sng">
+                <a:solidFill>
+                  <a:srgbClr val="E6A43C"/>
+                </a:solidFill>
+                <a:latin typeface="Calibri"/>
+              </a:rPr>
+              <a:t>Art. 4 ter CT  ·  Abuso de las formas jurídicas</a:t>
+            </a:r>
+          </a:p>
+        </p:txBody>
+      </p:sp>
+      <p:sp>
+        <p:nvSpPr>
+          <p:cNvPr id="8" name="Rectangle 7"/>
           <p:cNvSpPr/>
           <p:nvPr/>
         </p:nvSpPr>
         <p:spPr>
           <a:xfrm>
-            <a:off x="2834640" y="3794760"/>
-            <a:ext cx="1920240" cy="457200"/>
-          </a:xfrm>
-          <a:prstGeom prst="roundRect">
-            <a:avLst/>
-          </a:prstGeom>
-          <a:noFill/>
+            <a:off x="5532120" y="2286000"/>
+            <a:ext cx="4800600" cy="1691640"/>
+          </a:xfrm>
+          <a:prstGeom prst="rect">
+            <a:avLst/>
+          </a:prstGeom>
+          <a:solidFill>
+            <a:srgbClr val="F4F6F9"/>
+          </a:solidFill>
           <a:ln>
             <a:noFill/>
           </a:ln>
@@ -4057,35 +4389,35 @@
           <a:bodyPr rtlCol="0" anchor="t" wrap="square" lIns="137160" rIns="137160" tIns="91440" bIns="91440"/>
           <a:lstStyle/>
           <a:p>
-            <a:pPr algn="ctr"/>
-            <a:r>
-              <a:rPr b="0" sz="1200">
-                <a:solidFill>
-                  <a:srgbClr val="555555"/>
-                </a:solidFill>
-                <a:latin typeface="Calibri"/>
-              </a:rPr>
-              <a:t>→  honorarios  →</a:t>
-            </a:r>
-          </a:p>
-        </p:txBody>
-      </p:sp>
-      <p:sp>
-        <p:nvSpPr>
-          <p:cNvPr id="9" name="Rounded Rectangle 8"/>
+            <a:pPr algn="l"/>
+            <a:r>
+              <a:rPr sz="1100" b="0">
+                <a:solidFill>
+                  <a:srgbClr val="1C1C1C"/>
+                </a:solidFill>
+                <a:latin typeface="Calibri"/>
+              </a:rPr>
+              <a:t>Hay abuso cuando se evita total o parcialmente el hecho gravado, o se disminuye la base imponible u obligación, mediante actos que no produzcan resultados o efectos jurídicos o económicos relevantes distintos de los meramente tributarios.</a:t>
+            </a:r>
+          </a:p>
+        </p:txBody>
+      </p:sp>
+      <p:sp>
+        <p:nvSpPr>
+          <p:cNvPr id="9" name="Rectangle 8"/>
           <p:cNvSpPr/>
           <p:nvPr/>
         </p:nvSpPr>
         <p:spPr>
           <a:xfrm>
-            <a:off x="4846320" y="3429000"/>
-            <a:ext cx="2286000" cy="1188720"/>
-          </a:xfrm>
-          <a:prstGeom prst="roundRect">
-            <a:avLst/>
-          </a:prstGeom>
-          <a:solidFill>
-            <a:srgbClr val="1A3A5C"/>
+            <a:off x="548640" y="4160520"/>
+            <a:ext cx="4800600" cy="457200"/>
+          </a:xfrm>
+          <a:prstGeom prst="rect">
+            <a:avLst/>
+          </a:prstGeom>
+          <a:solidFill>
+            <a:srgbClr val="2B2B2B"/>
           </a:solidFill>
           <a:ln>
             <a:noFill/>
@@ -4107,61 +4439,39 @@
           </a:fontRef>
         </p:style>
         <p:txBody>
-          <a:bodyPr rtlCol="0" anchor="ctr" wrap="square" lIns="137160" rIns="137160" tIns="91440" bIns="91440"/>
-          <a:lstStyle/>
-          <a:p>
-            <a:pPr algn="ctr"/>
-            <a:r>
-              <a:rPr b="1" sz="1200">
-                <a:solidFill>
-                  <a:srgbClr val="FFFFFF"/>
-                </a:solidFill>
-                <a:latin typeface="Calibri"/>
-              </a:rPr>
-              <a:t>Sociedad</a:t>
-            </a:r>
-          </a:p>
-          <a:p>
-            <a:pPr algn="ctr"/>
-            <a:r>
-              <a:rPr b="1" sz="1200">
-                <a:solidFill>
-                  <a:srgbClr val="FFFFFF"/>
-                </a:solidFill>
-                <a:latin typeface="Calibri"/>
-              </a:rPr>
-              <a:t>Médica Ltda.</a:t>
-            </a:r>
-          </a:p>
-          <a:p>
-            <a:pPr algn="ctr"/>
-            <a:r>
-              <a:rPr b="1" sz="1200">
-                <a:solidFill>
-                  <a:srgbClr val="FFFFFF"/>
-                </a:solidFill>
-                <a:latin typeface="Calibri"/>
-              </a:rPr>
-              <a:t>(vehículo)</a:t>
-            </a:r>
-          </a:p>
-        </p:txBody>
-      </p:sp>
-      <p:sp>
-        <p:nvSpPr>
-          <p:cNvPr id="10" name="Rounded Rectangle 9"/>
+          <a:bodyPr rtlCol="0" anchor="ctr" lIns="182880" rIns="182880"/>
+          <a:lstStyle/>
+          <a:p>
+            <a:pPr algn="l"/>
+            <a:r>
+              <a:rPr sz="1800" b="1" u="sng">
+                <a:solidFill>
+                  <a:srgbClr val="E6A43C"/>
+                </a:solidFill>
+                <a:latin typeface="Calibri"/>
+              </a:rPr>
+              <a:t>Art. 4 quáter CT  ·  Simulación</a:t>
+            </a:r>
+          </a:p>
+        </p:txBody>
+      </p:sp>
+      <p:sp>
+        <p:nvSpPr>
+          <p:cNvPr id="10" name="Rectangle 9"/>
           <p:cNvSpPr/>
           <p:nvPr/>
         </p:nvSpPr>
         <p:spPr>
           <a:xfrm>
-            <a:off x="7223760" y="3794760"/>
-            <a:ext cx="1920240" cy="457200"/>
-          </a:xfrm>
-          <a:prstGeom prst="roundRect">
-            <a:avLst/>
-          </a:prstGeom>
-          <a:noFill/>
+            <a:off x="548640" y="4617720"/>
+            <a:ext cx="4800600" cy="1691640"/>
+          </a:xfrm>
+          <a:prstGeom prst="rect">
+            <a:avLst/>
+          </a:prstGeom>
+          <a:solidFill>
+            <a:srgbClr val="F4F6F9"/>
+          </a:solidFill>
           <a:ln>
             <a:noFill/>
           </a:ln>
@@ -4185,35 +4495,35 @@
           <a:bodyPr rtlCol="0" anchor="t" wrap="square" lIns="137160" rIns="137160" tIns="91440" bIns="91440"/>
           <a:lstStyle/>
           <a:p>
-            <a:pPr algn="ctr"/>
-            <a:r>
-              <a:rPr b="0" sz="1200">
-                <a:solidFill>
-                  <a:srgbClr val="555555"/>
-                </a:solidFill>
-                <a:latin typeface="Calibri"/>
-              </a:rPr>
-              <a:t>→  divide 1/3  →</a:t>
-            </a:r>
-          </a:p>
-        </p:txBody>
-      </p:sp>
-      <p:sp>
-        <p:nvSpPr>
-          <p:cNvPr id="11" name="Rounded Rectangle 10"/>
+            <a:pPr algn="l"/>
+            <a:r>
+              <a:rPr sz="1100" b="0">
+                <a:solidFill>
+                  <a:srgbClr val="1C1C1C"/>
+                </a:solidFill>
+                <a:latin typeface="Calibri"/>
+              </a:rPr>
+              <a:t>Habrá simulación cuando los actos o negocios disimulen la configuración del hecho gravado o la naturaleza de los elementos constitutivos de la obligación tributaria, o su verdadero monto o data de nacimiento.</a:t>
+            </a:r>
+          </a:p>
+        </p:txBody>
+      </p:sp>
+      <p:sp>
+        <p:nvSpPr>
+          <p:cNvPr id="11" name="Rectangle 10"/>
           <p:cNvSpPr/>
           <p:nvPr/>
         </p:nvSpPr>
         <p:spPr>
           <a:xfrm>
-            <a:off x="9235440" y="3429000"/>
-            <a:ext cx="2651760" cy="1188720"/>
-          </a:xfrm>
-          <a:prstGeom prst="roundRect">
-            <a:avLst/>
-          </a:prstGeom>
-          <a:solidFill>
-            <a:srgbClr val="B03030"/>
+            <a:off x="5532120" y="4160520"/>
+            <a:ext cx="4800600" cy="457200"/>
+          </a:xfrm>
+          <a:prstGeom prst="rect">
+            <a:avLst/>
+          </a:prstGeom>
+          <a:solidFill>
+            <a:srgbClr val="2B2B2B"/>
           </a:solidFill>
           <a:ln>
             <a:noFill/>
@@ -4235,50 +4545,38 @@
           </a:fontRef>
         </p:style>
         <p:txBody>
-          <a:bodyPr rtlCol="0" anchor="ctr" wrap="square" lIns="137160" rIns="137160" tIns="91440" bIns="91440"/>
-          <a:lstStyle/>
-          <a:p>
-            <a:pPr algn="ctr"/>
-            <a:r>
-              <a:rPr b="1" sz="1100">
-                <a:solidFill>
-                  <a:srgbClr val="FFFFFF"/>
-                </a:solidFill>
-                <a:latin typeface="Calibri"/>
-              </a:rPr>
-              <a:t>Pedro · Señora · Cuñado</a:t>
-            </a:r>
-          </a:p>
-          <a:p>
-            <a:pPr algn="ctr"/>
-            <a:r>
-              <a:rPr b="1" sz="1100">
-                <a:solidFill>
-                  <a:srgbClr val="FFFFFF"/>
-                </a:solidFill>
-                <a:latin typeface="Calibri"/>
-              </a:rPr>
-              <a:t>$100 MM c/u → IGC tramo bajo</a:t>
-            </a:r>
-          </a:p>
-        </p:txBody>
-      </p:sp>
-      <p:sp>
-        <p:nvSpPr>
-          <p:cNvPr id="12" name="Rounded Rectangle 11"/>
+          <a:bodyPr rtlCol="0" anchor="ctr" lIns="182880" rIns="182880"/>
+          <a:lstStyle/>
+          <a:p>
+            <a:pPr algn="l"/>
+            <a:r>
+              <a:rPr sz="1800" b="1" u="sng">
+                <a:solidFill>
+                  <a:srgbClr val="E6A43C"/>
+                </a:solidFill>
+                <a:latin typeface="Calibri"/>
+              </a:rPr>
+              <a:t>Art. 4 quinquies CT  ·  Procedimiento</a:t>
+            </a:r>
+          </a:p>
+        </p:txBody>
+      </p:sp>
+      <p:sp>
+        <p:nvSpPr>
+          <p:cNvPr id="12" name="Rectangle 11"/>
           <p:cNvSpPr/>
           <p:nvPr/>
         </p:nvSpPr>
         <p:spPr>
           <a:xfrm>
-            <a:off x="548640" y="4846320"/>
-            <a:ext cx="11064240" cy="685800"/>
-          </a:xfrm>
-          <a:prstGeom prst="roundRect">
-            <a:avLst/>
-          </a:prstGeom>
-          <a:solidFill>
-            <a:srgbClr val="C5501A"/>
+            <a:off x="5532120" y="4617720"/>
+            <a:ext cx="4800600" cy="1691640"/>
+          </a:xfrm>
+          <a:prstGeom prst="rect">
+            <a:avLst/>
+          </a:prstGeom>
+          <a:solidFill>
+            <a:srgbClr val="F4F6F9"/>
           </a:solidFill>
           <a:ln>
             <a:noFill/>
@@ -4300,38 +4598,38 @@
           </a:fontRef>
         </p:style>
         <p:txBody>
-          <a:bodyPr rtlCol="0" anchor="ctr" wrap="square" lIns="137160" rIns="137160" tIns="91440" bIns="91440"/>
-          <a:lstStyle/>
-          <a:p>
-            <a:pPr algn="ctr"/>
-            <a:r>
-              <a:rPr b="1" sz="1200">
-                <a:solidFill>
-                  <a:srgbClr val="FFFFFF"/>
-                </a:solidFill>
-                <a:latin typeface="Calibri"/>
-              </a:rPr>
-              <a:t>RESULTADO: lo que debería tributar al ~40% queda dividido en tres tramos más bajos. El ahorro puede superar los $20–40 MM al año. La señora y el cuñado NUNCA trabajaron para la sociedad.</a:t>
-            </a:r>
-          </a:p>
-        </p:txBody>
-      </p:sp>
-      <p:sp>
-        <p:nvSpPr>
-          <p:cNvPr id="13" name="Rounded Rectangle 12"/>
+          <a:bodyPr rtlCol="0" anchor="t" wrap="square" lIns="137160" rIns="137160" tIns="91440" bIns="91440"/>
+          <a:lstStyle/>
+          <a:p>
+            <a:pPr algn="l"/>
+            <a:r>
+              <a:rPr sz="1100" b="0">
+                <a:solidFill>
+                  <a:srgbClr val="1C1C1C"/>
+                </a:solidFill>
+                <a:latin typeface="Calibri"/>
+              </a:rPr>
+              <a:t>La existencia de abuso o simulación será declarada por el Tribunal Tributario y Aduanero, a requerimiento del Director del SII. Instrucciones: Circular N°65 de 2015.</a:t>
+            </a:r>
+          </a:p>
+        </p:txBody>
+      </p:sp>
+      <p:sp>
+        <p:nvSpPr>
+          <p:cNvPr id="13" name="Rectangle 12"/>
           <p:cNvSpPr/>
           <p:nvPr/>
         </p:nvSpPr>
         <p:spPr>
           <a:xfrm>
-            <a:off x="548640" y="5669280"/>
-            <a:ext cx="11064240" cy="457200"/>
-          </a:xfrm>
-          <a:prstGeom prst="roundRect">
-            <a:avLst/>
-          </a:prstGeom>
-          <a:solidFill>
-            <a:srgbClr val="2B2B2B"/>
+            <a:off x="10332720" y="1828800"/>
+            <a:ext cx="1691640" cy="4480560"/>
+          </a:xfrm>
+          <a:prstGeom prst="rect">
+            <a:avLst/>
+          </a:prstGeom>
+          <a:solidFill>
+            <a:srgbClr val="FDE9D9"/>
           </a:solidFill>
           <a:ln>
             <a:noFill/>
@@ -4353,69 +4651,35 @@
           </a:fontRef>
         </p:style>
         <p:txBody>
-          <a:bodyPr rtlCol="0" anchor="ctr" wrap="square" lIns="137160" rIns="137160" tIns="91440" bIns="91440"/>
+          <a:bodyPr rtlCol="0" anchor="ctr" wrap="square" lIns="109728" rIns="109728" tIns="137160" bIns="137160"/>
           <a:lstStyle/>
           <a:p>
             <a:pPr algn="ctr"/>
             <a:r>
-              <a:rPr b="1" sz="1400">
-                <a:solidFill>
-                  <a:srgbClr val="E6A43C"/>
-                </a:solidFill>
-                <a:latin typeface="Calibri"/>
-              </a:rPr>
-              <a:t>¿Es esto legal? ¿Abuso o planificación legítima?</a:t>
-            </a:r>
-          </a:p>
-        </p:txBody>
-      </p:sp>
-      <p:sp>
-        <p:nvSpPr>
-          <p:cNvPr id="14" name="Rounded Rectangle 13"/>
-          <p:cNvSpPr/>
-          <p:nvPr/>
-        </p:nvSpPr>
-        <p:spPr>
-          <a:xfrm>
-            <a:off x="274320" y="6492240"/>
-            <a:ext cx="11612880" cy="274320"/>
-          </a:xfrm>
-          <a:prstGeom prst="roundRect">
-            <a:avLst/>
-          </a:prstGeom>
-          <a:noFill/>
-          <a:ln>
-            <a:noFill/>
-          </a:ln>
-          <a:effectLst/>
-        </p:spPr>
-        <p:style>
-          <a:lnRef idx="1">
-            <a:schemeClr val="accent1"/>
-          </a:lnRef>
-          <a:fillRef idx="3">
-            <a:schemeClr val="accent1"/>
-          </a:fillRef>
-          <a:effectRef idx="2">
-            <a:schemeClr val="accent1"/>
-          </a:effectRef>
-          <a:fontRef idx="minor">
-            <a:schemeClr val="lt1"/>
-          </a:fontRef>
-        </p:style>
-        <p:txBody>
-          <a:bodyPr rtlCol="0" anchor="t" wrap="square" lIns="137160" rIns="137160" tIns="91440" bIns="91440"/>
-          <a:lstStyle/>
-          <a:p>
-            <a:pPr algn="r"/>
-            <a:r>
-              <a:rPr b="0" sz="800">
-                <a:solidFill>
-                  <a:srgbClr val="555555"/>
-                </a:solidFill>
-                <a:latin typeface="Calibri"/>
-              </a:rPr>
-              <a:t>Caso 86 · Catálogo SII 2025 · Grupo 4 — Magíster Dirección Tributaria UVM  |  4</a:t>
+              <a:rPr sz="1600" b="1">
+                <a:solidFill>
+                  <a:srgbClr val="C5501A"/>
+                </a:solidFill>
+                <a:latin typeface="Calibri"/>
+              </a:rPr>
+              <a:t>RESULTADO</a:t>
+            </a:r>
+          </a:p>
+          <a:p>
+            <a:pPr algn="ctr">
+              <a:spcBef>
+                <a:spcPts val="800"/>
+              </a:spcBef>
+            </a:pPr>
+            <a:r>
+              <a:rPr sz="1100">
+                <a:solidFill>
+                  <a:srgbClr val="1C1C1C"/>
+                </a:solidFill>
+                <a:latin typeface="Calibri"/>
+              </a:rPr>
+              <a:t>
+Las NGA fueron incorporadas por la Ley N°20.780 (2014) y modificadas por la Ley N°21.210 (2020). La Circular N°65 de 2015 imparte instrucciones para su aplicación.</a:t>
             </a:r>
           </a:p>
         </p:txBody>
@@ -4491,7 +4755,7 @@
         <p:spPr>
           <a:xfrm>
             <a:off x="548640" y="274320"/>
-            <a:ext cx="10972800" cy="731520"/>
+            <a:ext cx="11064240" cy="822960"/>
           </a:xfrm>
           <a:prstGeom prst="rect">
             <a:avLst/>
@@ -4506,32 +4770,34 @@
           <a:p>
             <a:pPr algn="l"/>
             <a:r>
-              <a:rPr sz="3000" b="0" i="0">
+              <a:rPr sz="3600" b="0" i="0">
                 <a:solidFill>
                   <a:srgbClr val="1C1C1C"/>
                 </a:solidFill>
                 <a:latin typeface="Cambria"/>
               </a:rPr>
-              <a:t>¿La Sociedad D es Legítima?</a:t>
-            </a:r>
-          </a:p>
-        </p:txBody>
-      </p:sp>
-      <p:sp>
-        <p:nvSpPr>
-          <p:cNvPr id="4" name="Rounded Rectangle 3"/>
+              <a:t>¿Abuso o Simulación?</a:t>
+            </a:r>
+          </a:p>
+        </p:txBody>
+      </p:sp>
+      <p:sp>
+        <p:nvSpPr>
+          <p:cNvPr id="4" name="Rectangle 3"/>
           <p:cNvSpPr/>
           <p:nvPr/>
         </p:nvSpPr>
         <p:spPr>
           <a:xfrm>
-            <a:off x="548640" y="960120"/>
-            <a:ext cx="10972800" cy="411480"/>
-          </a:xfrm>
-          <a:prstGeom prst="roundRect">
-            <a:avLst/>
-          </a:prstGeom>
-          <a:noFill/>
+            <a:off x="548640" y="1143000"/>
+            <a:ext cx="9601200" cy="502920"/>
+          </a:xfrm>
+          <a:prstGeom prst="rect">
+            <a:avLst/>
+          </a:prstGeom>
+          <a:solidFill>
+            <a:srgbClr val="2B2B2B"/>
+          </a:solidFill>
           <a:ln>
             <a:noFill/>
           </a:ln>
@@ -4552,38 +4818,38 @@
           </a:fontRef>
         </p:style>
         <p:txBody>
-          <a:bodyPr rtlCol="0" anchor="t" wrap="square" lIns="137160" rIns="137160" tIns="91440" bIns="91440"/>
+          <a:bodyPr rtlCol="0" anchor="ctr" lIns="182880" rIns="182880"/>
           <a:lstStyle/>
           <a:p>
             <a:pPr algn="l"/>
             <a:r>
-              <a:rPr b="0" sz="1400">
-                <a:solidFill>
-                  <a:srgbClr val="555555"/>
-                </a:solidFill>
-                <a:latin typeface="Calibri"/>
-              </a:rPr>
-              <a:t>Requisitos legales vs. realidad del Caso 86</a:t>
-            </a:r>
-          </a:p>
-        </p:txBody>
-      </p:sp>
-      <p:sp>
-        <p:nvSpPr>
-          <p:cNvPr id="5" name="Rounded Rectangle 4"/>
+              <a:rPr sz="1800" b="1" u="sng">
+                <a:solidFill>
+                  <a:srgbClr val="E6A43C"/>
+                </a:solidFill>
+                <a:latin typeface="Calibri"/>
+              </a:rPr>
+              <a:t>Calificación del esquema bajo las NGA</a:t>
+            </a:r>
+          </a:p>
+        </p:txBody>
+      </p:sp>
+      <p:sp>
+        <p:nvSpPr>
+          <p:cNvPr id="5" name="Rectangle 4"/>
           <p:cNvSpPr/>
           <p:nvPr/>
         </p:nvSpPr>
         <p:spPr>
           <a:xfrm>
-            <a:off x="548640" y="1554480"/>
-            <a:ext cx="6858000" cy="457200"/>
-          </a:xfrm>
-          <a:prstGeom prst="roundRect">
-            <a:avLst/>
-          </a:prstGeom>
-          <a:solidFill>
-            <a:srgbClr val="1A3A5C"/>
+            <a:off x="548640" y="1828800"/>
+            <a:ext cx="4617720" cy="457200"/>
+          </a:xfrm>
+          <a:prstGeom prst="rect">
+            <a:avLst/>
+          </a:prstGeom>
+          <a:solidFill>
+            <a:srgbClr val="2B2B2B"/>
           </a:solidFill>
           <a:ln>
             <a:noFill/>
@@ -4605,38 +4871,38 @@
           </a:fontRef>
         </p:style>
         <p:txBody>
-          <a:bodyPr rtlCol="0" anchor="ctr" wrap="square" lIns="137160" rIns="137160" tIns="91440" bIns="91440"/>
-          <a:lstStyle/>
-          <a:p>
-            <a:pPr algn="ctr"/>
-            <a:r>
-              <a:rPr b="1" sz="1150">
-                <a:solidFill>
-                  <a:srgbClr val="FFFFFF"/>
-                </a:solidFill>
-                <a:latin typeface="Calibri"/>
-              </a:rPr>
-              <a:t>Requisito (Circ. N°21/1991 y N°50/2020)</a:t>
-            </a:r>
-          </a:p>
-        </p:txBody>
-      </p:sp>
-      <p:sp>
-        <p:nvSpPr>
-          <p:cNvPr id="6" name="Rounded Rectangle 5"/>
+          <a:bodyPr rtlCol="0" anchor="ctr" lIns="182880" rIns="182880"/>
+          <a:lstStyle/>
+          <a:p>
+            <a:pPr algn="l"/>
+            <a:r>
+              <a:rPr sz="1800" b="1" u="sng">
+                <a:solidFill>
+                  <a:srgbClr val="E6A43C"/>
+                </a:solidFill>
+                <a:latin typeface="Calibri"/>
+              </a:rPr>
+              <a:t>ABUSO  (Art. 4 ter CT)</a:t>
+            </a:r>
+          </a:p>
+        </p:txBody>
+      </p:sp>
+      <p:sp>
+        <p:nvSpPr>
+          <p:cNvPr id="6" name="Rectangle 5"/>
           <p:cNvSpPr/>
           <p:nvPr/>
         </p:nvSpPr>
         <p:spPr>
           <a:xfrm>
-            <a:off x="7498079" y="1554480"/>
-            <a:ext cx="4114800" cy="457200"/>
-          </a:xfrm>
-          <a:prstGeom prst="roundRect">
-            <a:avLst/>
-          </a:prstGeom>
-          <a:solidFill>
-            <a:srgbClr val="1A3A5C"/>
+            <a:off x="548640" y="2286000"/>
+            <a:ext cx="4617720" cy="3840480"/>
+          </a:xfrm>
+          <a:prstGeom prst="rect">
+            <a:avLst/>
+          </a:prstGeom>
+          <a:solidFill>
+            <a:srgbClr val="FBE5E5"/>
           </a:solidFill>
           <a:ln>
             <a:noFill/>
@@ -4658,38 +4924,110 @@
           </a:fontRef>
         </p:style>
         <p:txBody>
-          <a:bodyPr rtlCol="0" anchor="ctr" wrap="square" lIns="137160" rIns="137160" tIns="91440" bIns="91440"/>
-          <a:lstStyle/>
-          <a:p>
-            <a:pPr algn="ctr"/>
-            <a:r>
-              <a:rPr b="1" sz="1150">
-                <a:solidFill>
-                  <a:srgbClr val="FFFFFF"/>
-                </a:solidFill>
-                <a:latin typeface="Calibri"/>
-              </a:rPr>
-              <a:t>¿Cumple el Caso 86?</a:t>
-            </a:r>
-          </a:p>
-        </p:txBody>
-      </p:sp>
-      <p:sp>
-        <p:nvSpPr>
-          <p:cNvPr id="7" name="Rounded Rectangle 6"/>
+          <a:bodyPr rtlCol="0" anchor="t" wrap="square" lIns="137160" rIns="137160" tIns="91440" bIns="91440"/>
+          <a:lstStyle/>
+          <a:p>
+            <a:pPr algn="l"/>
+            <a:r>
+              <a:rPr sz="1100" b="0">
+                <a:solidFill>
+                  <a:srgbClr val="1C1C1C"/>
+                </a:solidFill>
+                <a:latin typeface="Calibri"/>
+              </a:rPr>
+              <a:t>• Los actos son REALES: la sociedad D existe, los socios son reales, hay capital aportado y distribución efectiva de utilidades.</a:t>
+            </a:r>
+          </a:p>
+          <a:p>
+            <a:pPr algn="l"/>
+            <a:r>
+              <a:rPr sz="1100" b="0">
+                <a:solidFill>
+                  <a:srgbClr val="1C1C1C"/>
+                </a:solidFill>
+                <a:latin typeface="Calibri"/>
+              </a:rPr>
+              <a:t/>
+            </a:r>
+          </a:p>
+          <a:p>
+            <a:pPr algn="l"/>
+            <a:r>
+              <a:rPr sz="1100" b="0">
+                <a:solidFill>
+                  <a:srgbClr val="1C1C1C"/>
+                </a:solidFill>
+                <a:latin typeface="Calibri"/>
+              </a:rPr>
+              <a:t>• La FORMA jurídica utilizada es inapropiada para el sustrato económico: la sociedad de profesionales no está prevista para canalizar el trabajo individual de un solo socio.</a:t>
+            </a:r>
+          </a:p>
+          <a:p>
+            <a:pPr algn="l"/>
+            <a:r>
+              <a:rPr sz="1100" b="0">
+                <a:solidFill>
+                  <a:srgbClr val="1C1C1C"/>
+                </a:solidFill>
+                <a:latin typeface="Calibri"/>
+              </a:rPr>
+              <a:t/>
+            </a:r>
+          </a:p>
+          <a:p>
+            <a:pPr algn="l"/>
+            <a:r>
+              <a:rPr sz="1100" b="0">
+                <a:solidFill>
+                  <a:srgbClr val="1C1C1C"/>
+                </a:solidFill>
+                <a:latin typeface="Calibri"/>
+              </a:rPr>
+              <a:t>• B y C no producen efectos jurídicos ni económicos relevantes distintos del meramente tributario.</a:t>
+            </a:r>
+          </a:p>
+          <a:p>
+            <a:pPr algn="l"/>
+            <a:r>
+              <a:rPr sz="1100" b="0">
+                <a:solidFill>
+                  <a:srgbClr val="1C1C1C"/>
+                </a:solidFill>
+                <a:latin typeface="Calibri"/>
+              </a:rPr>
+              <a:t/>
+            </a:r>
+          </a:p>
+          <a:p>
+            <a:pPr algn="l"/>
+            <a:r>
+              <a:rPr sz="1100" b="0">
+                <a:solidFill>
+                  <a:srgbClr val="1C1C1C"/>
+                </a:solidFill>
+                <a:latin typeface="Calibri"/>
+              </a:rPr>
+              <a:t>• Único efecto: reducción de la progresión del IGC del socio A.</a:t>
+            </a:r>
+          </a:p>
+        </p:txBody>
+      </p:sp>
+      <p:sp>
+        <p:nvSpPr>
+          <p:cNvPr id="7" name="Rectangle 6"/>
           <p:cNvSpPr/>
           <p:nvPr/>
         </p:nvSpPr>
         <p:spPr>
           <a:xfrm>
-            <a:off x="548640" y="2057400"/>
-            <a:ext cx="6858000" cy="621792"/>
-          </a:xfrm>
-          <a:prstGeom prst="roundRect">
-            <a:avLst/>
-          </a:prstGeom>
-          <a:solidFill>
-            <a:srgbClr val="F4F6F9"/>
+            <a:off x="5349240" y="1828800"/>
+            <a:ext cx="4617720" cy="457200"/>
+          </a:xfrm>
+          <a:prstGeom prst="rect">
+            <a:avLst/>
+          </a:prstGeom>
+          <a:solidFill>
+            <a:srgbClr val="2B2B2B"/>
           </a:solidFill>
           <a:ln>
             <a:noFill/>
@@ -4711,38 +5049,38 @@
           </a:fontRef>
         </p:style>
         <p:txBody>
-          <a:bodyPr rtlCol="0" anchor="ctr" wrap="square" lIns="137160" rIns="137160" tIns="91440" bIns="91440"/>
+          <a:bodyPr rtlCol="0" anchor="ctr" lIns="182880" rIns="182880"/>
           <a:lstStyle/>
           <a:p>
             <a:pPr algn="l"/>
             <a:r>
-              <a:rPr b="0" sz="1050">
-                <a:solidFill>
-                  <a:srgbClr val="1C1C1C"/>
-                </a:solidFill>
-                <a:latin typeface="Calibri"/>
-              </a:rPr>
-              <a:t>Sociedad de personas</a:t>
-            </a:r>
-          </a:p>
-        </p:txBody>
-      </p:sp>
-      <p:sp>
-        <p:nvSpPr>
-          <p:cNvPr id="8" name="Rounded Rectangle 7"/>
+              <a:rPr sz="1800" b="1" u="sng">
+                <a:solidFill>
+                  <a:srgbClr val="E6A43C"/>
+                </a:solidFill>
+                <a:latin typeface="Calibri"/>
+              </a:rPr>
+              <a:t>SIMULACIÓN  (Art. 4 quáter CT)</a:t>
+            </a:r>
+          </a:p>
+        </p:txBody>
+      </p:sp>
+      <p:sp>
+        <p:nvSpPr>
+          <p:cNvPr id="8" name="Rectangle 7"/>
           <p:cNvSpPr/>
           <p:nvPr/>
         </p:nvSpPr>
         <p:spPr>
           <a:xfrm>
-            <a:off x="7498079" y="2057400"/>
-            <a:ext cx="4114800" cy="621792"/>
-          </a:xfrm>
-          <a:prstGeom prst="roundRect">
-            <a:avLst/>
-          </a:prstGeom>
-          <a:solidFill>
-            <a:srgbClr val="1A6B3C"/>
+            <a:off x="5349240" y="2286000"/>
+            <a:ext cx="4617720" cy="3840480"/>
+          </a:xfrm>
+          <a:prstGeom prst="rect">
+            <a:avLst/>
+          </a:prstGeom>
+          <a:solidFill>
+            <a:srgbClr val="FDF0E6"/>
           </a:solidFill>
           <a:ln>
             <a:noFill/>
@@ -4764,38 +5102,110 @@
           </a:fontRef>
         </p:style>
         <p:txBody>
-          <a:bodyPr rtlCol="0" anchor="ctr" wrap="square" lIns="137160" rIns="137160" tIns="91440" bIns="91440"/>
-          <a:lstStyle/>
-          <a:p>
-            <a:pPr algn="ctr"/>
-            <a:r>
-              <a:rPr b="1" sz="1100">
-                <a:solidFill>
-                  <a:srgbClr val="FFFFFF"/>
-                </a:solidFill>
-                <a:latin typeface="Calibri"/>
-              </a:rPr>
-              <a:t>✔  Cumple</a:t>
-            </a:r>
-          </a:p>
-        </p:txBody>
-      </p:sp>
-      <p:sp>
-        <p:nvSpPr>
-          <p:cNvPr id="9" name="Rounded Rectangle 8"/>
+          <a:bodyPr rtlCol="0" anchor="t" wrap="square" lIns="137160" rIns="137160" tIns="91440" bIns="91440"/>
+          <a:lstStyle/>
+          <a:p>
+            <a:pPr algn="l"/>
+            <a:r>
+              <a:rPr sz="1100" b="0">
+                <a:solidFill>
+                  <a:srgbClr val="1C1C1C"/>
+                </a:solidFill>
+                <a:latin typeface="Calibri"/>
+              </a:rPr>
+              <a:t>• Requiere divergencia consciente entre la voluntad real y la declarada.</a:t>
+            </a:r>
+          </a:p>
+          <a:p>
+            <a:pPr algn="l"/>
+            <a:r>
+              <a:rPr sz="1100" b="0">
+                <a:solidFill>
+                  <a:srgbClr val="1C1C1C"/>
+                </a:solidFill>
+                <a:latin typeface="Calibri"/>
+              </a:rPr>
+              <a:t/>
+            </a:r>
+          </a:p>
+          <a:p>
+            <a:pPr algn="l"/>
+            <a:r>
+              <a:rPr sz="1100" b="0">
+                <a:solidFill>
+                  <a:srgbClr val="1C1C1C"/>
+                </a:solidFill>
+                <a:latin typeface="Calibri"/>
+              </a:rPr>
+              <a:t>• Supone la existencia de un acto secreto u oculto que se disimula bajo otro aparente (negocio jurídico simulado).</a:t>
+            </a:r>
+          </a:p>
+          <a:p>
+            <a:pPr algn="l"/>
+            <a:r>
+              <a:rPr sz="1100" b="0">
+                <a:solidFill>
+                  <a:srgbClr val="1C1C1C"/>
+                </a:solidFill>
+                <a:latin typeface="Calibri"/>
+              </a:rPr>
+              <a:t/>
+            </a:r>
+          </a:p>
+          <a:p>
+            <a:pPr algn="l"/>
+            <a:r>
+              <a:rPr sz="1100" b="0">
+                <a:solidFill>
+                  <a:srgbClr val="1C1C1C"/>
+                </a:solidFill>
+                <a:latin typeface="Calibri"/>
+              </a:rPr>
+              <a:t>• En el Caso 86 NO existe acto disimulado: la sociedad y los socios son lo que aparentan ser; los actos societarios y la distribución de utilidades son reales.</a:t>
+            </a:r>
+          </a:p>
+          <a:p>
+            <a:pPr algn="l"/>
+            <a:r>
+              <a:rPr sz="1100" b="0">
+                <a:solidFill>
+                  <a:srgbClr val="1C1C1C"/>
+                </a:solidFill>
+                <a:latin typeface="Calibri"/>
+              </a:rPr>
+              <a:t/>
+            </a:r>
+          </a:p>
+          <a:p>
+            <a:pPr algn="l"/>
+            <a:r>
+              <a:rPr sz="1100" b="0">
+                <a:solidFill>
+                  <a:srgbClr val="1C1C1C"/>
+                </a:solidFill>
+                <a:latin typeface="Calibri"/>
+              </a:rPr>
+              <a:t>• Se descarta la figura de simulación para este esquema.</a:t>
+            </a:r>
+          </a:p>
+        </p:txBody>
+      </p:sp>
+      <p:sp>
+        <p:nvSpPr>
+          <p:cNvPr id="9" name="Rectangle 8"/>
           <p:cNvSpPr/>
           <p:nvPr/>
         </p:nvSpPr>
         <p:spPr>
           <a:xfrm>
-            <a:off x="548640" y="2724912"/>
-            <a:ext cx="6858000" cy="621792"/>
-          </a:xfrm>
-          <a:prstGeom prst="roundRect">
-            <a:avLst/>
-          </a:prstGeom>
-          <a:solidFill>
-            <a:srgbClr val="F4F6F9"/>
+            <a:off x="10332720" y="1828800"/>
+            <a:ext cx="1691640" cy="4297680"/>
+          </a:xfrm>
+          <a:prstGeom prst="rect">
+            <a:avLst/>
+          </a:prstGeom>
+          <a:solidFill>
+            <a:srgbClr val="FDE9D9"/>
           </a:solidFill>
           <a:ln>
             <a:noFill/>
@@ -4817,493 +5227,36 @@
           </a:fontRef>
         </p:style>
         <p:txBody>
-          <a:bodyPr rtlCol="0" anchor="ctr" wrap="square" lIns="137160" rIns="137160" tIns="91440" bIns="91440"/>
-          <a:lstStyle/>
-          <a:p>
-            <a:pPr algn="l"/>
-            <a:r>
-              <a:rPr b="0" sz="1050">
+          <a:bodyPr rtlCol="0" anchor="ctr" wrap="square" lIns="109728" rIns="109728" tIns="137160" bIns="137160"/>
+          <a:lstStyle/>
+          <a:p>
+            <a:pPr algn="ctr"/>
+            <a:r>
+              <a:rPr sz="1600" b="1">
+                <a:solidFill>
+                  <a:srgbClr val="C5501A"/>
+                </a:solidFill>
+                <a:latin typeface="Calibri"/>
+              </a:rPr>
+              <a:t>RESULTADO</a:t>
+            </a:r>
+          </a:p>
+          <a:p>
+            <a:pPr algn="ctr">
+              <a:spcBef>
+                <a:spcPts val="800"/>
+              </a:spcBef>
+            </a:pPr>
+            <a:r>
+              <a:rPr sz="1100">
                 <a:solidFill>
                   <a:srgbClr val="1C1C1C"/>
                 </a:solidFill>
                 <a:latin typeface="Calibri"/>
               </a:rPr>
-              <a:t>Objeto exclusivo: servicios profesionales</a:t>
-            </a:r>
-          </a:p>
-        </p:txBody>
-      </p:sp>
-      <p:sp>
-        <p:nvSpPr>
-          <p:cNvPr id="10" name="Rounded Rectangle 9"/>
-          <p:cNvSpPr/>
-          <p:nvPr/>
-        </p:nvSpPr>
-        <p:spPr>
-          <a:xfrm>
-            <a:off x="7498079" y="2724912"/>
-            <a:ext cx="4114800" cy="621792"/>
-          </a:xfrm>
-          <a:prstGeom prst="roundRect">
-            <a:avLst/>
-          </a:prstGeom>
-          <a:solidFill>
-            <a:srgbClr val="1A6B3C"/>
-          </a:solidFill>
-          <a:ln>
-            <a:noFill/>
-          </a:ln>
-          <a:effectLst/>
-        </p:spPr>
-        <p:style>
-          <a:lnRef idx="1">
-            <a:schemeClr val="accent1"/>
-          </a:lnRef>
-          <a:fillRef idx="3">
-            <a:schemeClr val="accent1"/>
-          </a:fillRef>
-          <a:effectRef idx="2">
-            <a:schemeClr val="accent1"/>
-          </a:effectRef>
-          <a:fontRef idx="minor">
-            <a:schemeClr val="lt1"/>
-          </a:fontRef>
-        </p:style>
-        <p:txBody>
-          <a:bodyPr rtlCol="0" anchor="ctr" wrap="square" lIns="137160" rIns="137160" tIns="91440" bIns="91440"/>
-          <a:lstStyle/>
-          <a:p>
-            <a:pPr algn="ctr"/>
-            <a:r>
-              <a:rPr b="1" sz="1100">
-                <a:solidFill>
-                  <a:srgbClr val="FFFFFF"/>
-                </a:solidFill>
-                <a:latin typeface="Calibri"/>
-              </a:rPr>
-              <a:t>✔  Cumple</a:t>
-            </a:r>
-          </a:p>
-        </p:txBody>
-      </p:sp>
-      <p:sp>
-        <p:nvSpPr>
-          <p:cNvPr id="11" name="Rounded Rectangle 10"/>
-          <p:cNvSpPr/>
-          <p:nvPr/>
-        </p:nvSpPr>
-        <p:spPr>
-          <a:xfrm>
-            <a:off x="548640" y="3392424"/>
-            <a:ext cx="6858000" cy="621792"/>
-          </a:xfrm>
-          <a:prstGeom prst="roundRect">
-            <a:avLst/>
-          </a:prstGeom>
-          <a:solidFill>
-            <a:srgbClr val="F4F6F9"/>
-          </a:solidFill>
-          <a:ln>
-            <a:noFill/>
-          </a:ln>
-          <a:effectLst/>
-        </p:spPr>
-        <p:style>
-          <a:lnRef idx="1">
-            <a:schemeClr val="accent1"/>
-          </a:lnRef>
-          <a:fillRef idx="3">
-            <a:schemeClr val="accent1"/>
-          </a:fillRef>
-          <a:effectRef idx="2">
-            <a:schemeClr val="accent1"/>
-          </a:effectRef>
-          <a:fontRef idx="minor">
-            <a:schemeClr val="lt1"/>
-          </a:fontRef>
-        </p:style>
-        <p:txBody>
-          <a:bodyPr rtlCol="0" anchor="ctr" wrap="square" lIns="137160" rIns="137160" tIns="91440" bIns="91440"/>
-          <a:lstStyle/>
-          <a:p>
-            <a:pPr algn="l"/>
-            <a:r>
-              <a:rPr b="0" sz="1050">
-                <a:solidFill>
-                  <a:srgbClr val="1C1C1C"/>
-                </a:solidFill>
-                <a:latin typeface="Calibri"/>
-              </a:rPr>
-              <a:t>Servicios prestados por los socios</a:t>
-            </a:r>
-          </a:p>
-        </p:txBody>
-      </p:sp>
-      <p:sp>
-        <p:nvSpPr>
-          <p:cNvPr id="12" name="Rounded Rectangle 11"/>
-          <p:cNvSpPr/>
-          <p:nvPr/>
-        </p:nvSpPr>
-        <p:spPr>
-          <a:xfrm>
-            <a:off x="7498079" y="3392424"/>
-            <a:ext cx="4114800" cy="621792"/>
-          </a:xfrm>
-          <a:prstGeom prst="roundRect">
-            <a:avLst/>
-          </a:prstGeom>
-          <a:solidFill>
-            <a:srgbClr val="E6A43C"/>
-          </a:solidFill>
-          <a:ln>
-            <a:noFill/>
-          </a:ln>
-          <a:effectLst/>
-        </p:spPr>
-        <p:style>
-          <a:lnRef idx="1">
-            <a:schemeClr val="accent1"/>
-          </a:lnRef>
-          <a:fillRef idx="3">
-            <a:schemeClr val="accent1"/>
-          </a:fillRef>
-          <a:effectRef idx="2">
-            <a:schemeClr val="accent1"/>
-          </a:effectRef>
-          <a:fontRef idx="minor">
-            <a:schemeClr val="lt1"/>
-          </a:fontRef>
-        </p:style>
-        <p:txBody>
-          <a:bodyPr rtlCol="0" anchor="ctr" wrap="square" lIns="137160" rIns="137160" tIns="91440" bIns="91440"/>
-          <a:lstStyle/>
-          <a:p>
-            <a:pPr algn="ctr"/>
-            <a:r>
-              <a:rPr b="1" sz="1100">
-                <a:solidFill>
-                  <a:srgbClr val="FFFFFF"/>
-                </a:solidFill>
-                <a:latin typeface="Calibri"/>
-              </a:rPr>
-              <a:t>✔  Solo A (Pedro) trabaja</a:t>
-            </a:r>
-          </a:p>
-        </p:txBody>
-      </p:sp>
-      <p:sp>
-        <p:nvSpPr>
-          <p:cNvPr id="13" name="Rounded Rectangle 12"/>
-          <p:cNvSpPr/>
-          <p:nvPr/>
-        </p:nvSpPr>
-        <p:spPr>
-          <a:xfrm>
-            <a:off x="548640" y="4059936"/>
-            <a:ext cx="6858000" cy="621792"/>
-          </a:xfrm>
-          <a:prstGeom prst="roundRect">
-            <a:avLst/>
-          </a:prstGeom>
-          <a:solidFill>
-            <a:srgbClr val="F4F6F9"/>
-          </a:solidFill>
-          <a:ln>
-            <a:noFill/>
-          </a:ln>
-          <a:effectLst/>
-        </p:spPr>
-        <p:style>
-          <a:lnRef idx="1">
-            <a:schemeClr val="accent1"/>
-          </a:lnRef>
-          <a:fillRef idx="3">
-            <a:schemeClr val="accent1"/>
-          </a:fillRef>
-          <a:effectRef idx="2">
-            <a:schemeClr val="accent1"/>
-          </a:effectRef>
-          <a:fontRef idx="minor">
-            <a:schemeClr val="lt1"/>
-          </a:fontRef>
-        </p:style>
-        <p:txBody>
-          <a:bodyPr rtlCol="0" anchor="ctr" wrap="square" lIns="137160" rIns="137160" tIns="91440" bIns="91440"/>
-          <a:lstStyle/>
-          <a:p>
-            <a:pPr algn="l"/>
-            <a:r>
-              <a:rPr b="0" sz="1050">
-                <a:solidFill>
-                  <a:srgbClr val="1C1C1C"/>
-                </a:solidFill>
-                <a:latin typeface="Calibri"/>
-              </a:rPr>
-              <a:t>TODOS los socios ejercen su profesión para la sociedad</a:t>
-            </a:r>
-          </a:p>
-        </p:txBody>
-      </p:sp>
-      <p:sp>
-        <p:nvSpPr>
-          <p:cNvPr id="14" name="Rounded Rectangle 13"/>
-          <p:cNvSpPr/>
-          <p:nvPr/>
-        </p:nvSpPr>
-        <p:spPr>
-          <a:xfrm>
-            <a:off x="7498079" y="4059936"/>
-            <a:ext cx="4114800" cy="621792"/>
-          </a:xfrm>
-          <a:prstGeom prst="roundRect">
-            <a:avLst/>
-          </a:prstGeom>
-          <a:solidFill>
-            <a:srgbClr val="B03030"/>
-          </a:solidFill>
-          <a:ln>
-            <a:noFill/>
-          </a:ln>
-          <a:effectLst/>
-        </p:spPr>
-        <p:style>
-          <a:lnRef idx="1">
-            <a:schemeClr val="accent1"/>
-          </a:lnRef>
-          <a:fillRef idx="3">
-            <a:schemeClr val="accent1"/>
-          </a:fillRef>
-          <a:effectRef idx="2">
-            <a:schemeClr val="accent1"/>
-          </a:effectRef>
-          <a:fontRef idx="minor">
-            <a:schemeClr val="lt1"/>
-          </a:fontRef>
-        </p:style>
-        <p:txBody>
-          <a:bodyPr rtlCol="0" anchor="ctr" wrap="square" lIns="137160" rIns="137160" tIns="91440" bIns="91440"/>
-          <a:lstStyle/>
-          <a:p>
-            <a:pPr algn="ctr"/>
-            <a:r>
-              <a:rPr b="1" sz="1100">
-                <a:solidFill>
-                  <a:srgbClr val="FFFFFF"/>
-                </a:solidFill>
-                <a:latin typeface="Calibri"/>
-              </a:rPr>
-              <a:t>✖  NO — B y C no prestan servicios</a:t>
-            </a:r>
-          </a:p>
-        </p:txBody>
-      </p:sp>
-      <p:sp>
-        <p:nvSpPr>
-          <p:cNvPr id="15" name="Rounded Rectangle 14"/>
-          <p:cNvSpPr/>
-          <p:nvPr/>
-        </p:nvSpPr>
-        <p:spPr>
-          <a:xfrm>
-            <a:off x="548640" y="4727448"/>
-            <a:ext cx="6858000" cy="621792"/>
-          </a:xfrm>
-          <a:prstGeom prst="roundRect">
-            <a:avLst/>
-          </a:prstGeom>
-          <a:solidFill>
-            <a:srgbClr val="F4F6F9"/>
-          </a:solidFill>
-          <a:ln>
-            <a:noFill/>
-          </a:ln>
-          <a:effectLst/>
-        </p:spPr>
-        <p:style>
-          <a:lnRef idx="1">
-            <a:schemeClr val="accent1"/>
-          </a:lnRef>
-          <a:fillRef idx="3">
-            <a:schemeClr val="accent1"/>
-          </a:fillRef>
-          <a:effectRef idx="2">
-            <a:schemeClr val="accent1"/>
-          </a:effectRef>
-          <a:fontRef idx="minor">
-            <a:schemeClr val="lt1"/>
-          </a:fontRef>
-        </p:style>
-        <p:txBody>
-          <a:bodyPr rtlCol="0" anchor="ctr" wrap="square" lIns="137160" rIns="137160" tIns="91440" bIns="91440"/>
-          <a:lstStyle/>
-          <a:p>
-            <a:pPr algn="l"/>
-            <a:r>
-              <a:rPr b="0" sz="1050">
-                <a:solidFill>
-                  <a:srgbClr val="1C1C1C"/>
-                </a:solidFill>
-                <a:latin typeface="Calibri"/>
-              </a:rPr>
-              <a:t>No se acepta que un socio solo aporte capital sin trabajar</a:t>
-            </a:r>
-          </a:p>
-        </p:txBody>
-      </p:sp>
-      <p:sp>
-        <p:nvSpPr>
-          <p:cNvPr id="16" name="Rounded Rectangle 15"/>
-          <p:cNvSpPr/>
-          <p:nvPr/>
-        </p:nvSpPr>
-        <p:spPr>
-          <a:xfrm>
-            <a:off x="7498079" y="4727448"/>
-            <a:ext cx="4114800" cy="621792"/>
-          </a:xfrm>
-          <a:prstGeom prst="roundRect">
-            <a:avLst/>
-          </a:prstGeom>
-          <a:solidFill>
-            <a:srgbClr val="B03030"/>
-          </a:solidFill>
-          <a:ln>
-            <a:noFill/>
-          </a:ln>
-          <a:effectLst/>
-        </p:spPr>
-        <p:style>
-          <a:lnRef idx="1">
-            <a:schemeClr val="accent1"/>
-          </a:lnRef>
-          <a:fillRef idx="3">
-            <a:schemeClr val="accent1"/>
-          </a:fillRef>
-          <a:effectRef idx="2">
-            <a:schemeClr val="accent1"/>
-          </a:effectRef>
-          <a:fontRef idx="minor">
-            <a:schemeClr val="lt1"/>
-          </a:fontRef>
-        </p:style>
-        <p:txBody>
-          <a:bodyPr rtlCol="0" anchor="ctr" wrap="square" lIns="137160" rIns="137160" tIns="91440" bIns="91440"/>
-          <a:lstStyle/>
-          <a:p>
-            <a:pPr algn="ctr"/>
-            <a:r>
-              <a:rPr b="1" sz="1100">
-                <a:solidFill>
-                  <a:srgbClr val="FFFFFF"/>
-                </a:solidFill>
-                <a:latin typeface="Calibri"/>
-              </a:rPr>
-              <a:t>✖  NO — B y C solo aportan capital</a:t>
-            </a:r>
-          </a:p>
-        </p:txBody>
-      </p:sp>
-      <p:sp>
-        <p:nvSpPr>
-          <p:cNvPr id="17" name="Rounded Rectangle 16"/>
-          <p:cNvSpPr/>
-          <p:nvPr/>
-        </p:nvSpPr>
-        <p:spPr>
-          <a:xfrm>
-            <a:off x="548640" y="5806440"/>
-            <a:ext cx="11064240" cy="594360"/>
-          </a:xfrm>
-          <a:prstGeom prst="roundRect">
-            <a:avLst/>
-          </a:prstGeom>
-          <a:solidFill>
-            <a:srgbClr val="B03030"/>
-          </a:solidFill>
-          <a:ln>
-            <a:noFill/>
-          </a:ln>
-          <a:effectLst/>
-        </p:spPr>
-        <p:style>
-          <a:lnRef idx="1">
-            <a:schemeClr val="accent1"/>
-          </a:lnRef>
-          <a:fillRef idx="3">
-            <a:schemeClr val="accent1"/>
-          </a:fillRef>
-          <a:effectRef idx="2">
-            <a:schemeClr val="accent1"/>
-          </a:effectRef>
-          <a:fontRef idx="minor">
-            <a:schemeClr val="lt1"/>
-          </a:fontRef>
-        </p:style>
-        <p:txBody>
-          <a:bodyPr rtlCol="0" anchor="ctr" wrap="square" lIns="137160" rIns="137160" tIns="91440" bIns="91440"/>
-          <a:lstStyle/>
-          <a:p>
-            <a:pPr algn="ctr"/>
-            <a:r>
-              <a:rPr b="1" sz="1250">
-                <a:solidFill>
-                  <a:srgbClr val="FFFFFF"/>
-                </a:solidFill>
-                <a:latin typeface="Calibri"/>
-              </a:rPr>
-              <a:t>La sociedad D NO califica como 'sociedad de profesionales'. Sin esa calificación, el esquema cae: no hay amparo legal para la distribución desigual del IGC.</a:t>
-            </a:r>
-          </a:p>
-        </p:txBody>
-      </p:sp>
-      <p:sp>
-        <p:nvSpPr>
-          <p:cNvPr id="18" name="Rounded Rectangle 17"/>
-          <p:cNvSpPr/>
-          <p:nvPr/>
-        </p:nvSpPr>
-        <p:spPr>
-          <a:xfrm>
-            <a:off x="274320" y="6492240"/>
-            <a:ext cx="11612880" cy="274320"/>
-          </a:xfrm>
-          <a:prstGeom prst="roundRect">
-            <a:avLst/>
-          </a:prstGeom>
-          <a:noFill/>
-          <a:ln>
-            <a:noFill/>
-          </a:ln>
-          <a:effectLst/>
-        </p:spPr>
-        <p:style>
-          <a:lnRef idx="1">
-            <a:schemeClr val="accent1"/>
-          </a:lnRef>
-          <a:fillRef idx="3">
-            <a:schemeClr val="accent1"/>
-          </a:fillRef>
-          <a:effectRef idx="2">
-            <a:schemeClr val="accent1"/>
-          </a:effectRef>
-          <a:fontRef idx="minor">
-            <a:schemeClr val="lt1"/>
-          </a:fontRef>
-        </p:style>
-        <p:txBody>
-          <a:bodyPr rtlCol="0" anchor="t" wrap="square" lIns="137160" rIns="137160" tIns="91440" bIns="91440"/>
-          <a:lstStyle/>
-          <a:p>
-            <a:pPr algn="r"/>
-            <a:r>
-              <a:rPr b="0" sz="800">
-                <a:solidFill>
-                  <a:srgbClr val="555555"/>
-                </a:solidFill>
-                <a:latin typeface="Calibri"/>
-              </a:rPr>
-              <a:t>Caso 86 · Catálogo SII 2025 · Grupo 4 — Magíster Dirección Tributaria UVM  |  5</a:t>
+              <a:t>
+Posición del grupo:
+El Caso 86 configura ABUSO de las formas jurídicas (Art. 4 ter CT), no simulación.</a:t>
             </a:r>
           </a:p>
         </p:txBody>
@@ -5379,7 +5332,7 @@
         <p:spPr>
           <a:xfrm>
             <a:off x="548640" y="274320"/>
-            <a:ext cx="10972800" cy="731520"/>
+            <a:ext cx="11064240" cy="822960"/>
           </a:xfrm>
           <a:prstGeom prst="rect">
             <a:avLst/>
@@ -5394,32 +5347,34 @@
           <a:p>
             <a:pPr algn="l"/>
             <a:r>
-              <a:rPr sz="3000" b="0" i="0">
+              <a:rPr sz="3600" b="0" i="0">
                 <a:solidFill>
                   <a:srgbClr val="1C1C1C"/>
                 </a:solidFill>
                 <a:latin typeface="Cambria"/>
               </a:rPr>
-              <a:t>¿Abuso o Simulación?</a:t>
-            </a:r>
-          </a:p>
-        </p:txBody>
-      </p:sp>
-      <p:sp>
-        <p:nvSpPr>
-          <p:cNvPr id="4" name="Rounded Rectangle 3"/>
+              <a:t>Fundamentos del abuso — Art. 4 ter CT</a:t>
+            </a:r>
+          </a:p>
+        </p:txBody>
+      </p:sp>
+      <p:sp>
+        <p:nvSpPr>
+          <p:cNvPr id="4" name="Rectangle 3"/>
           <p:cNvSpPr/>
           <p:nvPr/>
         </p:nvSpPr>
         <p:spPr>
           <a:xfrm>
-            <a:off x="548640" y="960120"/>
-            <a:ext cx="10972800" cy="411480"/>
-          </a:xfrm>
-          <a:prstGeom prst="roundRect">
-            <a:avLst/>
-          </a:prstGeom>
-          <a:noFill/>
+            <a:off x="548640" y="1143000"/>
+            <a:ext cx="9601200" cy="502920"/>
+          </a:xfrm>
+          <a:prstGeom prst="rect">
+            <a:avLst/>
+          </a:prstGeom>
+          <a:solidFill>
+            <a:srgbClr val="2B2B2B"/>
+          </a:solidFill>
           <a:ln>
             <a:noFill/>
           </a:ln>
@@ -5440,38 +5395,38 @@
           </a:fontRef>
         </p:style>
         <p:txBody>
-          <a:bodyPr rtlCol="0" anchor="t" wrap="square" lIns="137160" rIns="137160" tIns="91440" bIns="91440"/>
+          <a:bodyPr rtlCol="0" anchor="ctr" lIns="182880" rIns="182880"/>
           <a:lstStyle/>
           <a:p>
             <a:pPr algn="l"/>
             <a:r>
-              <a:rPr b="0" sz="1400">
-                <a:solidFill>
-                  <a:srgbClr val="555555"/>
-                </a:solidFill>
-                <a:latin typeface="Calibri"/>
-              </a:rPr>
-              <a:t>La calificación correcta define qué norma aplica y qué debe probar el SII</a:t>
-            </a:r>
-          </a:p>
-        </p:txBody>
-      </p:sp>
-      <p:sp>
-        <p:nvSpPr>
-          <p:cNvPr id="5" name="Rounded Rectangle 4"/>
+              <a:rPr sz="1800" b="1" u="sng">
+                <a:solidFill>
+                  <a:srgbClr val="E6A43C"/>
+                </a:solidFill>
+                <a:latin typeface="Calibri"/>
+              </a:rPr>
+              <a:t>Los tres elementos están presentes en el Caso 86</a:t>
+            </a:r>
+          </a:p>
+        </p:txBody>
+      </p:sp>
+      <p:sp>
+        <p:nvSpPr>
+          <p:cNvPr id="5" name="Rectangle 4"/>
           <p:cNvSpPr/>
           <p:nvPr/>
         </p:nvSpPr>
         <p:spPr>
           <a:xfrm>
-            <a:off x="548640" y="1554480"/>
-            <a:ext cx="5623560" cy="502920"/>
-          </a:xfrm>
-          <a:prstGeom prst="roundRect">
-            <a:avLst/>
-          </a:prstGeom>
-          <a:solidFill>
-            <a:srgbClr val="B03030"/>
+            <a:off x="548640" y="1828800"/>
+            <a:ext cx="9601200" cy="457200"/>
+          </a:xfrm>
+          <a:prstGeom prst="rect">
+            <a:avLst/>
+          </a:prstGeom>
+          <a:solidFill>
+            <a:srgbClr val="2B2B2B"/>
           </a:solidFill>
           <a:ln>
             <a:noFill/>
@@ -5493,38 +5448,38 @@
           </a:fontRef>
         </p:style>
         <p:txBody>
-          <a:bodyPr rtlCol="0" anchor="ctr" wrap="square" lIns="137160" rIns="137160" tIns="91440" bIns="91440"/>
-          <a:lstStyle/>
-          <a:p>
-            <a:pPr algn="ctr"/>
-            <a:r>
-              <a:rPr b="1" sz="1500">
-                <a:solidFill>
-                  <a:srgbClr val="FFFFFF"/>
-                </a:solidFill>
-                <a:latin typeface="Calibri"/>
-              </a:rPr>
-              <a:t>ABUSO  (Art. 4 ter CT)</a:t>
-            </a:r>
-          </a:p>
-        </p:txBody>
-      </p:sp>
-      <p:sp>
-        <p:nvSpPr>
-          <p:cNvPr id="6" name="Rounded Rectangle 5"/>
+          <a:bodyPr rtlCol="0" anchor="ctr" lIns="182880" rIns="182880"/>
+          <a:lstStyle/>
+          <a:p>
+            <a:pPr algn="l"/>
+            <a:r>
+              <a:rPr sz="1800" b="1" u="sng">
+                <a:solidFill>
+                  <a:srgbClr val="E6A43C"/>
+                </a:solidFill>
+                <a:latin typeface="Calibri"/>
+              </a:rPr>
+              <a:t>Elemento 1 — Evitar o disminuir la obligación tributaria</a:t>
+            </a:r>
+          </a:p>
+        </p:txBody>
+      </p:sp>
+      <p:sp>
+        <p:nvSpPr>
+          <p:cNvPr id="6" name="Rectangle 5"/>
           <p:cNvSpPr/>
           <p:nvPr/>
         </p:nvSpPr>
         <p:spPr>
           <a:xfrm>
-            <a:off x="548640" y="2103120"/>
-            <a:ext cx="5623560" cy="4069080"/>
-          </a:xfrm>
-          <a:prstGeom prst="roundRect">
-            <a:avLst/>
-          </a:prstGeom>
-          <a:solidFill>
-            <a:srgbClr val="FDEAEA"/>
+            <a:off x="548640" y="2286000"/>
+            <a:ext cx="9601200" cy="960120"/>
+          </a:xfrm>
+          <a:prstGeom prst="rect">
+            <a:avLst/>
+          </a:prstGeom>
+          <a:solidFill>
+            <a:srgbClr val="F4F6F9"/>
           </a:solidFill>
           <a:ln>
             <a:noFill/>
@@ -5551,105 +5506,33 @@
           <a:p>
             <a:pPr algn="l"/>
             <a:r>
-              <a:rPr b="0" sz="1150">
+              <a:rPr sz="1050" b="0">
                 <a:solidFill>
                   <a:srgbClr val="1C1C1C"/>
                 </a:solidFill>
                 <a:latin typeface="Calibri"/>
               </a:rPr>
-              <a:t>✔  Los actos son REALES: la sociedad existe, los socios son reales, el capital fue aportado.</a:t>
-            </a:r>
-          </a:p>
-          <a:p>
-            <a:pPr algn="l"/>
-            <a:r>
-              <a:rPr b="0" sz="1150">
-                <a:solidFill>
-                  <a:srgbClr val="1C1C1C"/>
-                </a:solidFill>
-                <a:latin typeface="Calibri"/>
-              </a:rPr>
-              <a:t/>
-            </a:r>
-          </a:p>
-          <a:p>
-            <a:pPr algn="l"/>
-            <a:r>
-              <a:rPr b="0" sz="1150">
-                <a:solidFill>
-                  <a:srgbClr val="1C1C1C"/>
-                </a:solidFill>
-                <a:latin typeface="Calibri"/>
-              </a:rPr>
-              <a:t>✔  El PROBLEMA es la FORMA: se usa la figura de 'sociedad de profesionales' para algo que no corresponde.</a:t>
-            </a:r>
-          </a:p>
-          <a:p>
-            <a:pPr algn="l"/>
-            <a:r>
-              <a:rPr b="0" sz="1150">
-                <a:solidFill>
-                  <a:srgbClr val="1C1C1C"/>
-                </a:solidFill>
-                <a:latin typeface="Calibri"/>
-              </a:rPr>
-              <a:t/>
-            </a:r>
-          </a:p>
-          <a:p>
-            <a:pPr algn="l"/>
-            <a:r>
-              <a:rPr b="0" sz="1150">
-                <a:solidFill>
-                  <a:srgbClr val="1C1C1C"/>
-                </a:solidFill>
-                <a:latin typeface="Calibri"/>
-              </a:rPr>
-              <a:t>✔  B y C no aportan valor económico real. Su único rol es absorber utilidades de Pedro para bajar su tramo de IGC.</a:t>
-            </a:r>
-          </a:p>
-          <a:p>
-            <a:pPr algn="l"/>
-            <a:r>
-              <a:rPr b="0" sz="1150">
-                <a:solidFill>
-                  <a:srgbClr val="1C1C1C"/>
-                </a:solidFill>
-                <a:latin typeface="Calibri"/>
-              </a:rPr>
-              <a:t/>
-            </a:r>
-          </a:p>
-          <a:p>
-            <a:pPr algn="l"/>
-            <a:r>
-              <a:rPr b="0" sz="1150">
-                <a:solidFill>
-                  <a:srgbClr val="1C1C1C"/>
-                </a:solidFill>
-                <a:latin typeface="Calibri"/>
-              </a:rPr>
-              <a:t>✔  Único efecto distinto del tributario: NINGUNO.</a:t>
-            </a:r>
-          </a:p>
-        </p:txBody>
-      </p:sp>
-      <p:sp>
-        <p:nvSpPr>
-          <p:cNvPr id="7" name="Rounded Rectangle 6"/>
+              <a:t>El esquema diluye los ingresos del socio A en tres tramos independientes de IGC, reduciendo la tasa marginal efectiva. La carga tributaria del contribuyente A disminuye en relación a la que correspondería si los ingresos los percibiera directamente como independiente del Art. 42 N°2 LIR o como único prestador del servicio.</a:t>
+            </a:r>
+          </a:p>
+        </p:txBody>
+      </p:sp>
+      <p:sp>
+        <p:nvSpPr>
+          <p:cNvPr id="7" name="Rectangle 6"/>
           <p:cNvSpPr/>
           <p:nvPr/>
         </p:nvSpPr>
         <p:spPr>
           <a:xfrm>
-            <a:off x="6355080" y="1554480"/>
-            <a:ext cx="5623560" cy="502920"/>
-          </a:xfrm>
-          <a:prstGeom prst="roundRect">
-            <a:avLst/>
-          </a:prstGeom>
-          <a:solidFill>
-            <a:srgbClr val="C5501A"/>
+            <a:off x="548640" y="3319272"/>
+            <a:ext cx="9601200" cy="457200"/>
+          </a:xfrm>
+          <a:prstGeom prst="rect">
+            <a:avLst/>
+          </a:prstGeom>
+          <a:solidFill>
+            <a:srgbClr val="2B2B2B"/>
           </a:solidFill>
           <a:ln>
             <a:noFill/>
@@ -5671,38 +5554,38 @@
           </a:fontRef>
         </p:style>
         <p:txBody>
-          <a:bodyPr rtlCol="0" anchor="ctr" wrap="square" lIns="137160" rIns="137160" tIns="91440" bIns="91440"/>
-          <a:lstStyle/>
-          <a:p>
-            <a:pPr algn="ctr"/>
-            <a:r>
-              <a:rPr b="1" sz="1500">
-                <a:solidFill>
-                  <a:srgbClr val="FFFFFF"/>
-                </a:solidFill>
-                <a:latin typeface="Calibri"/>
-              </a:rPr>
-              <a:t>SIMULACIÓN  (Art. 4 quáter CT)</a:t>
-            </a:r>
-          </a:p>
-        </p:txBody>
-      </p:sp>
-      <p:sp>
-        <p:nvSpPr>
-          <p:cNvPr id="8" name="Rounded Rectangle 7"/>
+          <a:bodyPr rtlCol="0" anchor="ctr" lIns="182880" rIns="182880"/>
+          <a:lstStyle/>
+          <a:p>
+            <a:pPr algn="l"/>
+            <a:r>
+              <a:rPr sz="1800" b="1" u="sng">
+                <a:solidFill>
+                  <a:srgbClr val="E6A43C"/>
+                </a:solidFill>
+                <a:latin typeface="Calibri"/>
+              </a:rPr>
+              <a:t>Elemento 2 — Ausencia de efectos jurídicos o económicos relevantes</a:t>
+            </a:r>
+          </a:p>
+        </p:txBody>
+      </p:sp>
+      <p:sp>
+        <p:nvSpPr>
+          <p:cNvPr id="8" name="Rectangle 7"/>
           <p:cNvSpPr/>
           <p:nvPr/>
         </p:nvSpPr>
         <p:spPr>
           <a:xfrm>
-            <a:off x="6355080" y="2103120"/>
-            <a:ext cx="5623560" cy="4069080"/>
-          </a:xfrm>
-          <a:prstGeom prst="roundRect">
-            <a:avLst/>
-          </a:prstGeom>
-          <a:solidFill>
-            <a:srgbClr val="FDF0E6"/>
+            <a:off x="548640" y="3776472"/>
+            <a:ext cx="9601200" cy="960120"/>
+          </a:xfrm>
+          <a:prstGeom prst="rect">
+            <a:avLst/>
+          </a:prstGeom>
+          <a:solidFill>
+            <a:srgbClr val="F4F6F9"/>
           </a:solidFill>
           <a:ln>
             <a:noFill/>
@@ -5729,105 +5612,81 @@
           <a:p>
             <a:pPr algn="l"/>
             <a:r>
-              <a:rPr b="0" sz="1150">
+              <a:rPr sz="1050" b="0">
                 <a:solidFill>
                   <a:srgbClr val="1C1C1C"/>
                 </a:solidFill>
                 <a:latin typeface="Calibri"/>
               </a:rPr>
-              <a:t>✖  Requiere que los actos DISIMULEN algo distinto de lo declarado.</a:t>
+              <a:t>La participación de B y C no produce efectos relevantes distintos del tributario:</a:t>
             </a:r>
           </a:p>
           <a:p>
             <a:pPr algn="l"/>
             <a:r>
-              <a:rPr b="0" sz="1150">
+              <a:rPr sz="1050" b="0">
                 <a:solidFill>
                   <a:srgbClr val="1C1C1C"/>
                 </a:solidFill>
                 <a:latin typeface="Calibri"/>
               </a:rPr>
-              <a:t/>
+              <a:t>•  No prestan servicios profesionales para la sociedad.</a:t>
             </a:r>
           </a:p>
           <a:p>
             <a:pPr algn="l"/>
             <a:r>
-              <a:rPr b="0" sz="1150">
+              <a:rPr sz="1050" b="0">
                 <a:solidFill>
                   <a:srgbClr val="1C1C1C"/>
                 </a:solidFill>
                 <a:latin typeface="Calibri"/>
               </a:rPr>
-              <a:t>✖  En el caso NO hay acto oculto: la sociedad y sus socios son lo que parecen.</a:t>
+              <a:t>•  No tienen rol estratégico ni decisional.</a:t>
             </a:r>
           </a:p>
           <a:p>
             <a:pPr algn="l"/>
             <a:r>
-              <a:rPr b="0" sz="1150">
+              <a:rPr sz="1050" b="0">
                 <a:solidFill>
                   <a:srgbClr val="1C1C1C"/>
                 </a:solidFill>
                 <a:latin typeface="Calibri"/>
               </a:rPr>
-              <a:t/>
+              <a:t>•  El capital aportado no es significativo en relación a los ingresos.</a:t>
             </a:r>
           </a:p>
           <a:p>
             <a:pPr algn="l"/>
             <a:r>
-              <a:rPr b="0" sz="1150">
+              <a:rPr sz="1050" b="0">
                 <a:solidFill>
                   <a:srgbClr val="1C1C1C"/>
                 </a:solidFill>
                 <a:latin typeface="Calibri"/>
               </a:rPr>
-              <a:t>✖  No hay divergencia entre voluntad real y declarada.</a:t>
-            </a:r>
-          </a:p>
-          <a:p>
-            <a:pPr algn="l"/>
-            <a:r>
-              <a:rPr b="0" sz="1150">
-                <a:solidFill>
-                  <a:srgbClr val="1C1C1C"/>
-                </a:solidFill>
-                <a:latin typeface="Calibri"/>
-              </a:rPr>
-              <a:t/>
-            </a:r>
-          </a:p>
-          <a:p>
-            <a:pPr algn="l"/>
-            <a:r>
-              <a:rPr b="0" sz="1150">
-                <a:solidFill>
-                  <a:srgbClr val="1C1C1C"/>
-                </a:solidFill>
-                <a:latin typeface="Calibri"/>
-              </a:rPr>
-              <a:t>✖  Ejemplo de simulación: un contrato de 'arriendo' que en realidad es una donación. En el Caso 86 no hay nada oculto.</a:t>
-            </a:r>
-          </a:p>
-        </p:txBody>
-      </p:sp>
-      <p:sp>
-        <p:nvSpPr>
-          <p:cNvPr id="9" name="Rounded Rectangle 8"/>
+              <a:t>•  Su única función es absorber utilidades para diluir el IGC de A.</a:t>
+            </a:r>
+          </a:p>
+        </p:txBody>
+      </p:sp>
+      <p:sp>
+        <p:nvSpPr>
+          <p:cNvPr id="9" name="Rectangle 8"/>
           <p:cNvSpPr/>
           <p:nvPr/>
         </p:nvSpPr>
         <p:spPr>
           <a:xfrm>
-            <a:off x="548640" y="6281928"/>
-            <a:ext cx="11064240" cy="457200"/>
-          </a:xfrm>
-          <a:prstGeom prst="roundRect">
-            <a:avLst/>
-          </a:prstGeom>
-          <a:solidFill>
-            <a:srgbClr val="1A3A5C"/>
+            <a:off x="548640" y="4809744"/>
+            <a:ext cx="9601200" cy="457200"/>
+          </a:xfrm>
+          <a:prstGeom prst="rect">
+            <a:avLst/>
+          </a:prstGeom>
+          <a:solidFill>
+            <a:srgbClr val="2B2B2B"/>
           </a:solidFill>
           <a:ln>
             <a:noFill/>
@@ -5849,37 +5708,39 @@
           </a:fontRef>
         </p:style>
         <p:txBody>
-          <a:bodyPr rtlCol="0" anchor="ctr" wrap="square" lIns="137160" rIns="137160" tIns="91440" bIns="91440"/>
-          <a:lstStyle/>
-          <a:p>
-            <a:pPr algn="ctr"/>
-            <a:r>
-              <a:rPr b="1" sz="1400">
-                <a:solidFill>
-                  <a:srgbClr val="FFFFFF"/>
-                </a:solidFill>
-                <a:latin typeface="Calibri"/>
-              </a:rPr>
-              <a:t>POSICIÓN DEL GRUPO:  ABUSO de formas jurídicas — Art. 4 ter CT</a:t>
-            </a:r>
-          </a:p>
-        </p:txBody>
-      </p:sp>
-      <p:sp>
-        <p:nvSpPr>
-          <p:cNvPr id="10" name="Rounded Rectangle 9"/>
+          <a:bodyPr rtlCol="0" anchor="ctr" lIns="182880" rIns="182880"/>
+          <a:lstStyle/>
+          <a:p>
+            <a:pPr algn="l"/>
+            <a:r>
+              <a:rPr sz="1800" b="1" u="sng">
+                <a:solidFill>
+                  <a:srgbClr val="E6A43C"/>
+                </a:solidFill>
+                <a:latin typeface="Calibri"/>
+              </a:rPr>
+              <a:t>Elemento 3 — Forma jurídica inapropiada para el sustrato económico</a:t>
+            </a:r>
+          </a:p>
+        </p:txBody>
+      </p:sp>
+      <p:sp>
+        <p:nvSpPr>
+          <p:cNvPr id="10" name="Rectangle 9"/>
           <p:cNvSpPr/>
           <p:nvPr/>
         </p:nvSpPr>
         <p:spPr>
           <a:xfrm>
-            <a:off x="274320" y="6492240"/>
-            <a:ext cx="11612880" cy="274320"/>
-          </a:xfrm>
-          <a:prstGeom prst="roundRect">
-            <a:avLst/>
-          </a:prstGeom>
-          <a:noFill/>
+            <a:off x="548640" y="5266944"/>
+            <a:ext cx="9601200" cy="960120"/>
+          </a:xfrm>
+          <a:prstGeom prst="rect">
+            <a:avLst/>
+          </a:prstGeom>
+          <a:solidFill>
+            <a:srgbClr val="F4F6F9"/>
+          </a:solidFill>
           <a:ln>
             <a:noFill/>
           </a:ln>
@@ -5903,15 +5764,85 @@
           <a:bodyPr rtlCol="0" anchor="t" wrap="square" lIns="137160" rIns="137160" tIns="91440" bIns="91440"/>
           <a:lstStyle/>
           <a:p>
-            <a:pPr algn="r"/>
-            <a:r>
-              <a:rPr b="0" sz="800">
-                <a:solidFill>
-                  <a:srgbClr val="555555"/>
-                </a:solidFill>
-                <a:latin typeface="Calibri"/>
-              </a:rPr>
-              <a:t>Caso 86 · Catálogo SII 2025 · Grupo 4 — Magíster Dirección Tributaria UVM  |  6</a:t>
+            <a:pPr algn="l"/>
+            <a:r>
+              <a:rPr sz="1050" b="0">
+                <a:solidFill>
+                  <a:srgbClr val="1C1C1C"/>
+                </a:solidFill>
+                <a:latin typeface="Calibri"/>
+              </a:rPr>
+              <a:t>La figura 'sociedad de profesionales' (Art. 42 N°2 inc. 3° LIR) está prevista para profesionales que efectivamente trabajan en conjunto, según lo precisan las Circulares N°21/1991 y N°50/2020 del SII. Utilizarla para canalizar el trabajo individual de un solo socio constituye una utilización abusiva de la institución jurídica.</a:t>
+            </a:r>
+          </a:p>
+        </p:txBody>
+      </p:sp>
+      <p:sp>
+        <p:nvSpPr>
+          <p:cNvPr id="11" name="Rectangle 10"/>
+          <p:cNvSpPr/>
+          <p:nvPr/>
+        </p:nvSpPr>
+        <p:spPr>
+          <a:xfrm>
+            <a:off x="10332720" y="1828800"/>
+            <a:ext cx="1691640" cy="4526280"/>
+          </a:xfrm>
+          <a:prstGeom prst="rect">
+            <a:avLst/>
+          </a:prstGeom>
+          <a:solidFill>
+            <a:srgbClr val="FDE9D9"/>
+          </a:solidFill>
+          <a:ln>
+            <a:noFill/>
+          </a:ln>
+          <a:effectLst/>
+        </p:spPr>
+        <p:style>
+          <a:lnRef idx="1">
+            <a:schemeClr val="accent1"/>
+          </a:lnRef>
+          <a:fillRef idx="3">
+            <a:schemeClr val="accent1"/>
+          </a:fillRef>
+          <a:effectRef idx="2">
+            <a:schemeClr val="accent1"/>
+          </a:effectRef>
+          <a:fontRef idx="minor">
+            <a:schemeClr val="lt1"/>
+          </a:fontRef>
+        </p:style>
+        <p:txBody>
+          <a:bodyPr rtlCol="0" anchor="ctr" wrap="square" lIns="109728" rIns="109728" tIns="137160" bIns="137160"/>
+          <a:lstStyle/>
+          <a:p>
+            <a:pPr algn="ctr"/>
+            <a:r>
+              <a:rPr sz="1600" b="1">
+                <a:solidFill>
+                  <a:srgbClr val="C5501A"/>
+                </a:solidFill>
+                <a:latin typeface="Calibri"/>
+              </a:rPr>
+              <a:t>RESULTADO</a:t>
+            </a:r>
+          </a:p>
+          <a:p>
+            <a:pPr algn="ctr">
+              <a:spcBef>
+                <a:spcPts val="800"/>
+              </a:spcBef>
+            </a:pPr>
+            <a:r>
+              <a:rPr sz="1100">
+                <a:solidFill>
+                  <a:srgbClr val="1C1C1C"/>
+                </a:solidFill>
+                <a:latin typeface="Calibri"/>
+              </a:rPr>
+              <a:t>
+Configurándose los tres elementos del Art. 4 ter CT, el Director del SII puede requerir al TTA la declaración de abuso (Art. 4 quinquies CT).</a:t>
             </a:r>
           </a:p>
         </p:txBody>
@@ -5987,7 +5918,7 @@
         <p:spPr>
           <a:xfrm>
             <a:off x="548640" y="274320"/>
-            <a:ext cx="10972800" cy="731520"/>
+            <a:ext cx="11064240" cy="822960"/>
           </a:xfrm>
           <a:prstGeom prst="rect">
             <a:avLst/>
@@ -6002,29 +5933,990 @@
           <a:p>
             <a:pPr algn="l"/>
             <a:r>
-              <a:rPr sz="3000" b="0" i="0">
+              <a:rPr sz="3600" b="0" i="0">
                 <a:solidFill>
                   <a:srgbClr val="1C1C1C"/>
                 </a:solidFill>
                 <a:latin typeface="Cambria"/>
               </a:rPr>
-              <a:t>El Impacto en Números</a:t>
-            </a:r>
-          </a:p>
-        </p:txBody>
-      </p:sp>
-      <p:sp>
-        <p:nvSpPr>
-          <p:cNvPr id="4" name="Rounded Rectangle 3"/>
+              <a:t>Efecto tributario del esquema</a:t>
+            </a:r>
+          </a:p>
+        </p:txBody>
+      </p:sp>
+      <p:sp>
+        <p:nvSpPr>
+          <p:cNvPr id="4" name="Rectangle 3"/>
           <p:cNvSpPr/>
           <p:nvPr/>
         </p:nvSpPr>
         <p:spPr>
           <a:xfrm>
-            <a:off x="548640" y="960120"/>
-            <a:ext cx="10972800" cy="411480"/>
-          </a:xfrm>
-          <a:prstGeom prst="roundRect">
+            <a:off x="548640" y="1143000"/>
+            <a:ext cx="9601200" cy="502920"/>
+          </a:xfrm>
+          <a:prstGeom prst="rect">
+            <a:avLst/>
+          </a:prstGeom>
+          <a:solidFill>
+            <a:srgbClr val="2B2B2B"/>
+          </a:solidFill>
+          <a:ln>
+            <a:noFill/>
+          </a:ln>
+          <a:effectLst/>
+        </p:spPr>
+        <p:style>
+          <a:lnRef idx="1">
+            <a:schemeClr val="accent1"/>
+          </a:lnRef>
+          <a:fillRef idx="3">
+            <a:schemeClr val="accent1"/>
+          </a:fillRef>
+          <a:effectRef idx="2">
+            <a:schemeClr val="accent1"/>
+          </a:effectRef>
+          <a:fontRef idx="minor">
+            <a:schemeClr val="lt1"/>
+          </a:fontRef>
+        </p:style>
+        <p:txBody>
+          <a:bodyPr rtlCol="0" anchor="ctr" lIns="182880" rIns="182880"/>
+          <a:lstStyle/>
+          <a:p>
+            <a:pPr algn="l"/>
+            <a:r>
+              <a:rPr sz="1800" b="1" u="sng">
+                <a:solidFill>
+                  <a:srgbClr val="E6A43C"/>
+                </a:solidFill>
+                <a:latin typeface="Calibri"/>
+              </a:rPr>
+              <a:t>Comparación ilustrativa — Dilución de la progresión del IGC</a:t>
+            </a:r>
+          </a:p>
+        </p:txBody>
+      </p:sp>
+      <p:sp>
+        <p:nvSpPr>
+          <p:cNvPr id="5" name="Rectangle 4"/>
+          <p:cNvSpPr/>
+          <p:nvPr/>
+        </p:nvSpPr>
+        <p:spPr>
+          <a:xfrm>
+            <a:off x="548640" y="1828800"/>
+            <a:ext cx="2743200" cy="457200"/>
+          </a:xfrm>
+          <a:prstGeom prst="rect">
+            <a:avLst/>
+          </a:prstGeom>
+          <a:solidFill>
+            <a:srgbClr val="2B2B2B"/>
+          </a:solidFill>
+          <a:ln>
+            <a:noFill/>
+          </a:ln>
+          <a:effectLst/>
+        </p:spPr>
+        <p:style>
+          <a:lnRef idx="1">
+            <a:schemeClr val="accent1"/>
+          </a:lnRef>
+          <a:fillRef idx="3">
+            <a:schemeClr val="accent1"/>
+          </a:fillRef>
+          <a:effectRef idx="2">
+            <a:schemeClr val="accent1"/>
+          </a:effectRef>
+          <a:fontRef idx="minor">
+            <a:schemeClr val="lt1"/>
+          </a:fontRef>
+        </p:style>
+        <p:txBody>
+          <a:bodyPr rtlCol="0" anchor="ctr" wrap="square" lIns="137160" rIns="137160" tIns="91440" bIns="91440"/>
+          <a:lstStyle/>
+          <a:p>
+            <a:pPr algn="ctr"/>
+            <a:r>
+              <a:rPr sz="1100" b="1">
+                <a:solidFill>
+                  <a:srgbClr val="FFFFFF"/>
+                </a:solidFill>
+                <a:latin typeface="Calibri"/>
+              </a:rPr>
+              <a:t>Escenario</a:t>
+            </a:r>
+          </a:p>
+        </p:txBody>
+      </p:sp>
+      <p:sp>
+        <p:nvSpPr>
+          <p:cNvPr id="6" name="Rectangle 5"/>
+          <p:cNvSpPr/>
+          <p:nvPr/>
+        </p:nvSpPr>
+        <p:spPr>
+          <a:xfrm>
+            <a:off x="3337560" y="1828800"/>
+            <a:ext cx="3383280" cy="457200"/>
+          </a:xfrm>
+          <a:prstGeom prst="rect">
+            <a:avLst/>
+          </a:prstGeom>
+          <a:solidFill>
+            <a:srgbClr val="2B2B2B"/>
+          </a:solidFill>
+          <a:ln>
+            <a:noFill/>
+          </a:ln>
+          <a:effectLst/>
+        </p:spPr>
+        <p:style>
+          <a:lnRef idx="1">
+            <a:schemeClr val="accent1"/>
+          </a:lnRef>
+          <a:fillRef idx="3">
+            <a:schemeClr val="accent1"/>
+          </a:fillRef>
+          <a:effectRef idx="2">
+            <a:schemeClr val="accent1"/>
+          </a:effectRef>
+          <a:fontRef idx="minor">
+            <a:schemeClr val="lt1"/>
+          </a:fontRef>
+        </p:style>
+        <p:txBody>
+          <a:bodyPr rtlCol="0" anchor="ctr" wrap="square" lIns="137160" rIns="137160" tIns="91440" bIns="91440"/>
+          <a:lstStyle/>
+          <a:p>
+            <a:pPr algn="ctr"/>
+            <a:r>
+              <a:rPr sz="1100" b="1">
+                <a:solidFill>
+                  <a:srgbClr val="FFFFFF"/>
+                </a:solidFill>
+                <a:latin typeface="Calibri"/>
+              </a:rPr>
+              <a:t>Atribución de la renta</a:t>
+            </a:r>
+          </a:p>
+        </p:txBody>
+      </p:sp>
+      <p:sp>
+        <p:nvSpPr>
+          <p:cNvPr id="7" name="Rectangle 6"/>
+          <p:cNvSpPr/>
+          <p:nvPr/>
+        </p:nvSpPr>
+        <p:spPr>
+          <a:xfrm>
+            <a:off x="6766560" y="1828800"/>
+            <a:ext cx="1828800" cy="457200"/>
+          </a:xfrm>
+          <a:prstGeom prst="rect">
+            <a:avLst/>
+          </a:prstGeom>
+          <a:solidFill>
+            <a:srgbClr val="2B2B2B"/>
+          </a:solidFill>
+          <a:ln>
+            <a:noFill/>
+          </a:ln>
+          <a:effectLst/>
+        </p:spPr>
+        <p:style>
+          <a:lnRef idx="1">
+            <a:schemeClr val="accent1"/>
+          </a:lnRef>
+          <a:fillRef idx="3">
+            <a:schemeClr val="accent1"/>
+          </a:fillRef>
+          <a:effectRef idx="2">
+            <a:schemeClr val="accent1"/>
+          </a:effectRef>
+          <a:fontRef idx="minor">
+            <a:schemeClr val="lt1"/>
+          </a:fontRef>
+        </p:style>
+        <p:txBody>
+          <a:bodyPr rtlCol="0" anchor="ctr" wrap="square" lIns="137160" rIns="137160" tIns="91440" bIns="91440"/>
+          <a:lstStyle/>
+          <a:p>
+            <a:pPr algn="ctr"/>
+            <a:r>
+              <a:rPr sz="1100" b="1">
+                <a:solidFill>
+                  <a:srgbClr val="FFFFFF"/>
+                </a:solidFill>
+                <a:latin typeface="Calibri"/>
+              </a:rPr>
+              <a:t>Tramo marginal IGC aprox.</a:t>
+            </a:r>
+          </a:p>
+        </p:txBody>
+      </p:sp>
+      <p:sp>
+        <p:nvSpPr>
+          <p:cNvPr id="8" name="Rectangle 7"/>
+          <p:cNvSpPr/>
+          <p:nvPr/>
+        </p:nvSpPr>
+        <p:spPr>
+          <a:xfrm>
+            <a:off x="8641080" y="1828800"/>
+            <a:ext cx="1508760" cy="457200"/>
+          </a:xfrm>
+          <a:prstGeom prst="rect">
+            <a:avLst/>
+          </a:prstGeom>
+          <a:solidFill>
+            <a:srgbClr val="2B2B2B"/>
+          </a:solidFill>
+          <a:ln>
+            <a:noFill/>
+          </a:ln>
+          <a:effectLst/>
+        </p:spPr>
+        <p:style>
+          <a:lnRef idx="1">
+            <a:schemeClr val="accent1"/>
+          </a:lnRef>
+          <a:fillRef idx="3">
+            <a:schemeClr val="accent1"/>
+          </a:fillRef>
+          <a:effectRef idx="2">
+            <a:schemeClr val="accent1"/>
+          </a:effectRef>
+          <a:fontRef idx="minor">
+            <a:schemeClr val="lt1"/>
+          </a:fontRef>
+        </p:style>
+        <p:txBody>
+          <a:bodyPr rtlCol="0" anchor="ctr" wrap="square" lIns="137160" rIns="137160" tIns="91440" bIns="91440"/>
+          <a:lstStyle/>
+          <a:p>
+            <a:pPr algn="ctr"/>
+            <a:r>
+              <a:rPr sz="1100" b="1">
+                <a:solidFill>
+                  <a:srgbClr val="FFFFFF"/>
+                </a:solidFill>
+                <a:latin typeface="Calibri"/>
+              </a:rPr>
+              <a:t>Resultado</a:t>
+            </a:r>
+          </a:p>
+        </p:txBody>
+      </p:sp>
+      <p:sp>
+        <p:nvSpPr>
+          <p:cNvPr id="9" name="Rectangle 8"/>
+          <p:cNvSpPr/>
+          <p:nvPr/>
+        </p:nvSpPr>
+        <p:spPr>
+          <a:xfrm>
+            <a:off x="548640" y="2331720"/>
+            <a:ext cx="2743200" cy="1005840"/>
+          </a:xfrm>
+          <a:prstGeom prst="rect">
+            <a:avLst/>
+          </a:prstGeom>
+          <a:solidFill>
+            <a:srgbClr val="E8F3E8"/>
+          </a:solidFill>
+          <a:ln>
+            <a:noFill/>
+          </a:ln>
+          <a:effectLst/>
+        </p:spPr>
+        <p:style>
+          <a:lnRef idx="1">
+            <a:schemeClr val="accent1"/>
+          </a:lnRef>
+          <a:fillRef idx="3">
+            <a:schemeClr val="accent1"/>
+          </a:fillRef>
+          <a:effectRef idx="2">
+            <a:schemeClr val="accent1"/>
+          </a:effectRef>
+          <a:fontRef idx="minor">
+            <a:schemeClr val="lt1"/>
+          </a:fontRef>
+        </p:style>
+        <p:txBody>
+          <a:bodyPr rtlCol="0" anchor="ctr" wrap="square" lIns="137160" rIns="137160" tIns="91440" bIns="91440"/>
+          <a:lstStyle/>
+          <a:p>
+            <a:pPr algn="l"/>
+            <a:r>
+              <a:rPr sz="1050" b="1">
+                <a:solidFill>
+                  <a:srgbClr val="1C1C1C"/>
+                </a:solidFill>
+                <a:latin typeface="Calibri"/>
+              </a:rPr>
+              <a:t>Sin esquema</a:t>
+            </a:r>
+          </a:p>
+          <a:p>
+            <a:pPr algn="l"/>
+            <a:r>
+              <a:rPr sz="1050" b="1">
+                <a:solidFill>
+                  <a:srgbClr val="1C1C1C"/>
+                </a:solidFill>
+                <a:latin typeface="Calibri"/>
+              </a:rPr>
+              <a:t>(A trabaja solo, sin sociedad)</a:t>
+            </a:r>
+          </a:p>
+        </p:txBody>
+      </p:sp>
+      <p:sp>
+        <p:nvSpPr>
+          <p:cNvPr id="10" name="Rectangle 9"/>
+          <p:cNvSpPr/>
+          <p:nvPr/>
+        </p:nvSpPr>
+        <p:spPr>
+          <a:xfrm>
+            <a:off x="3337560" y="2331720"/>
+            <a:ext cx="3383280" cy="1005840"/>
+          </a:xfrm>
+          <a:prstGeom prst="rect">
+            <a:avLst/>
+          </a:prstGeom>
+          <a:solidFill>
+            <a:srgbClr val="E8F3E8"/>
+          </a:solidFill>
+          <a:ln>
+            <a:noFill/>
+          </a:ln>
+          <a:effectLst/>
+        </p:spPr>
+        <p:style>
+          <a:lnRef idx="1">
+            <a:schemeClr val="accent1"/>
+          </a:lnRef>
+          <a:fillRef idx="3">
+            <a:schemeClr val="accent1"/>
+          </a:fillRef>
+          <a:effectRef idx="2">
+            <a:schemeClr val="accent1"/>
+          </a:effectRef>
+          <a:fontRef idx="minor">
+            <a:schemeClr val="lt1"/>
+          </a:fontRef>
+        </p:style>
+        <p:txBody>
+          <a:bodyPr rtlCol="0" anchor="ctr" wrap="square" lIns="137160" rIns="137160" tIns="91440" bIns="91440"/>
+          <a:lstStyle/>
+          <a:p>
+            <a:pPr algn="l"/>
+            <a:r>
+              <a:rPr sz="1050" b="0">
+                <a:solidFill>
+                  <a:srgbClr val="1C1C1C"/>
+                </a:solidFill>
+                <a:latin typeface="Calibri"/>
+              </a:rPr>
+              <a:t>A declara el total de los ingresos</a:t>
+            </a:r>
+          </a:p>
+        </p:txBody>
+      </p:sp>
+      <p:sp>
+        <p:nvSpPr>
+          <p:cNvPr id="11" name="Rectangle 10"/>
+          <p:cNvSpPr/>
+          <p:nvPr/>
+        </p:nvSpPr>
+        <p:spPr>
+          <a:xfrm>
+            <a:off x="6766560" y="2331720"/>
+            <a:ext cx="1828800" cy="1005840"/>
+          </a:xfrm>
+          <a:prstGeom prst="rect">
+            <a:avLst/>
+          </a:prstGeom>
+          <a:solidFill>
+            <a:srgbClr val="E8F3E8"/>
+          </a:solidFill>
+          <a:ln>
+            <a:noFill/>
+          </a:ln>
+          <a:effectLst/>
+        </p:spPr>
+        <p:style>
+          <a:lnRef idx="1">
+            <a:schemeClr val="accent1"/>
+          </a:lnRef>
+          <a:fillRef idx="3">
+            <a:schemeClr val="accent1"/>
+          </a:fillRef>
+          <a:effectRef idx="2">
+            <a:schemeClr val="accent1"/>
+          </a:effectRef>
+          <a:fontRef idx="minor">
+            <a:schemeClr val="lt1"/>
+          </a:fontRef>
+        </p:style>
+        <p:txBody>
+          <a:bodyPr rtlCol="0" anchor="ctr" wrap="square" lIns="137160" rIns="137160" tIns="91440" bIns="91440"/>
+          <a:lstStyle/>
+          <a:p>
+            <a:pPr algn="ctr"/>
+            <a:r>
+              <a:rPr sz="1050" b="0">
+                <a:solidFill>
+                  <a:srgbClr val="1C1C1C"/>
+                </a:solidFill>
+                <a:latin typeface="Calibri"/>
+              </a:rPr>
+              <a:t>Tramo alto (≈40%)</a:t>
+            </a:r>
+          </a:p>
+        </p:txBody>
+      </p:sp>
+      <p:sp>
+        <p:nvSpPr>
+          <p:cNvPr id="12" name="Rectangle 11"/>
+          <p:cNvSpPr/>
+          <p:nvPr/>
+        </p:nvSpPr>
+        <p:spPr>
+          <a:xfrm>
+            <a:off x="8641080" y="2331720"/>
+            <a:ext cx="1508760" cy="1005840"/>
+          </a:xfrm>
+          <a:prstGeom prst="rect">
+            <a:avLst/>
+          </a:prstGeom>
+          <a:solidFill>
+            <a:srgbClr val="E8F3E8"/>
+          </a:solidFill>
+          <a:ln>
+            <a:noFill/>
+          </a:ln>
+          <a:effectLst/>
+        </p:spPr>
+        <p:style>
+          <a:lnRef idx="1">
+            <a:schemeClr val="accent1"/>
+          </a:lnRef>
+          <a:fillRef idx="3">
+            <a:schemeClr val="accent1"/>
+          </a:fillRef>
+          <a:effectRef idx="2">
+            <a:schemeClr val="accent1"/>
+          </a:effectRef>
+          <a:fontRef idx="minor">
+            <a:schemeClr val="lt1"/>
+          </a:fontRef>
+        </p:style>
+        <p:txBody>
+          <a:bodyPr rtlCol="0" anchor="ctr" wrap="square" lIns="137160" rIns="137160" tIns="91440" bIns="91440"/>
+          <a:lstStyle/>
+          <a:p>
+            <a:pPr algn="ctr"/>
+            <a:r>
+              <a:rPr sz="1000" b="1">
+                <a:solidFill>
+                  <a:srgbClr val="1C1C1C"/>
+                </a:solidFill>
+                <a:latin typeface="Calibri"/>
+              </a:rPr>
+              <a:t>Tributación</a:t>
+            </a:r>
+          </a:p>
+          <a:p>
+            <a:pPr algn="ctr"/>
+            <a:r>
+              <a:rPr sz="1000" b="1">
+                <a:solidFill>
+                  <a:srgbClr val="1C1C1C"/>
+                </a:solidFill>
+                <a:latin typeface="Calibri"/>
+              </a:rPr>
+              <a:t>correcta</a:t>
+            </a:r>
+          </a:p>
+        </p:txBody>
+      </p:sp>
+      <p:sp>
+        <p:nvSpPr>
+          <p:cNvPr id="13" name="Rectangle 12"/>
+          <p:cNvSpPr/>
+          <p:nvPr/>
+        </p:nvSpPr>
+        <p:spPr>
+          <a:xfrm>
+            <a:off x="548640" y="3383280"/>
+            <a:ext cx="2743200" cy="1005840"/>
+          </a:xfrm>
+          <a:prstGeom prst="rect">
+            <a:avLst/>
+          </a:prstGeom>
+          <a:solidFill>
+            <a:srgbClr val="FBE5E5"/>
+          </a:solidFill>
+          <a:ln>
+            <a:noFill/>
+          </a:ln>
+          <a:effectLst/>
+        </p:spPr>
+        <p:style>
+          <a:lnRef idx="1">
+            <a:schemeClr val="accent1"/>
+          </a:lnRef>
+          <a:fillRef idx="3">
+            <a:schemeClr val="accent1"/>
+          </a:fillRef>
+          <a:effectRef idx="2">
+            <a:schemeClr val="accent1"/>
+          </a:effectRef>
+          <a:fontRef idx="minor">
+            <a:schemeClr val="lt1"/>
+          </a:fontRef>
+        </p:style>
+        <p:txBody>
+          <a:bodyPr rtlCol="0" anchor="ctr" wrap="square" lIns="137160" rIns="137160" tIns="91440" bIns="91440"/>
+          <a:lstStyle/>
+          <a:p>
+            <a:pPr algn="l"/>
+            <a:r>
+              <a:rPr sz="1050" b="1">
+                <a:solidFill>
+                  <a:srgbClr val="1C1C1C"/>
+                </a:solidFill>
+                <a:latin typeface="Calibri"/>
+              </a:rPr>
+              <a:t>Con esquema D</a:t>
+            </a:r>
+          </a:p>
+          <a:p>
+            <a:pPr algn="l"/>
+            <a:r>
+              <a:rPr sz="1050" b="1">
+                <a:solidFill>
+                  <a:srgbClr val="1C1C1C"/>
+                </a:solidFill>
+                <a:latin typeface="Calibri"/>
+              </a:rPr>
+              <a:t>(3 socios, capital simbólico)</a:t>
+            </a:r>
+          </a:p>
+        </p:txBody>
+      </p:sp>
+      <p:sp>
+        <p:nvSpPr>
+          <p:cNvPr id="14" name="Rectangle 13"/>
+          <p:cNvSpPr/>
+          <p:nvPr/>
+        </p:nvSpPr>
+        <p:spPr>
+          <a:xfrm>
+            <a:off x="3337560" y="3383280"/>
+            <a:ext cx="3383280" cy="1005840"/>
+          </a:xfrm>
+          <a:prstGeom prst="rect">
+            <a:avLst/>
+          </a:prstGeom>
+          <a:solidFill>
+            <a:srgbClr val="FBE5E5"/>
+          </a:solidFill>
+          <a:ln>
+            <a:noFill/>
+          </a:ln>
+          <a:effectLst/>
+        </p:spPr>
+        <p:style>
+          <a:lnRef idx="1">
+            <a:schemeClr val="accent1"/>
+          </a:lnRef>
+          <a:fillRef idx="3">
+            <a:schemeClr val="accent1"/>
+          </a:fillRef>
+          <a:effectRef idx="2">
+            <a:schemeClr val="accent1"/>
+          </a:effectRef>
+          <a:fontRef idx="minor">
+            <a:schemeClr val="lt1"/>
+          </a:fontRef>
+        </p:style>
+        <p:txBody>
+          <a:bodyPr rtlCol="0" anchor="ctr" wrap="square" lIns="137160" rIns="137160" tIns="91440" bIns="91440"/>
+          <a:lstStyle/>
+          <a:p>
+            <a:pPr algn="l"/>
+            <a:r>
+              <a:rPr sz="1050" b="0">
+                <a:solidFill>
+                  <a:srgbClr val="1C1C1C"/>
+                </a:solidFill>
+                <a:latin typeface="Calibri"/>
+              </a:rPr>
+              <a:t>A : B : C en partes iguales (33,33% c/u)</a:t>
+            </a:r>
+          </a:p>
+        </p:txBody>
+      </p:sp>
+      <p:sp>
+        <p:nvSpPr>
+          <p:cNvPr id="15" name="Rectangle 14"/>
+          <p:cNvSpPr/>
+          <p:nvPr/>
+        </p:nvSpPr>
+        <p:spPr>
+          <a:xfrm>
+            <a:off x="6766560" y="3383280"/>
+            <a:ext cx="1828800" cy="1005840"/>
+          </a:xfrm>
+          <a:prstGeom prst="rect">
+            <a:avLst/>
+          </a:prstGeom>
+          <a:solidFill>
+            <a:srgbClr val="FBE5E5"/>
+          </a:solidFill>
+          <a:ln>
+            <a:noFill/>
+          </a:ln>
+          <a:effectLst/>
+        </p:spPr>
+        <p:style>
+          <a:lnRef idx="1">
+            <a:schemeClr val="accent1"/>
+          </a:lnRef>
+          <a:fillRef idx="3">
+            <a:schemeClr val="accent1"/>
+          </a:fillRef>
+          <a:effectRef idx="2">
+            <a:schemeClr val="accent1"/>
+          </a:effectRef>
+          <a:fontRef idx="minor">
+            <a:schemeClr val="lt1"/>
+          </a:fontRef>
+        </p:style>
+        <p:txBody>
+          <a:bodyPr rtlCol="0" anchor="ctr" wrap="square" lIns="137160" rIns="137160" tIns="91440" bIns="91440"/>
+          <a:lstStyle/>
+          <a:p>
+            <a:pPr algn="ctr"/>
+            <a:r>
+              <a:rPr sz="1050" b="0">
+                <a:solidFill>
+                  <a:srgbClr val="1C1C1C"/>
+                </a:solidFill>
+                <a:latin typeface="Calibri"/>
+              </a:rPr>
+              <a:t>Cada socio en tramo medio</a:t>
+            </a:r>
+          </a:p>
+        </p:txBody>
+      </p:sp>
+      <p:sp>
+        <p:nvSpPr>
+          <p:cNvPr id="16" name="Rectangle 15"/>
+          <p:cNvSpPr/>
+          <p:nvPr/>
+        </p:nvSpPr>
+        <p:spPr>
+          <a:xfrm>
+            <a:off x="8641080" y="3383280"/>
+            <a:ext cx="1508760" cy="1005840"/>
+          </a:xfrm>
+          <a:prstGeom prst="rect">
+            <a:avLst/>
+          </a:prstGeom>
+          <a:solidFill>
+            <a:srgbClr val="FBE5E5"/>
+          </a:solidFill>
+          <a:ln>
+            <a:noFill/>
+          </a:ln>
+          <a:effectLst/>
+        </p:spPr>
+        <p:style>
+          <a:lnRef idx="1">
+            <a:schemeClr val="accent1"/>
+          </a:lnRef>
+          <a:fillRef idx="3">
+            <a:schemeClr val="accent1"/>
+          </a:fillRef>
+          <a:effectRef idx="2">
+            <a:schemeClr val="accent1"/>
+          </a:effectRef>
+          <a:fontRef idx="minor">
+            <a:schemeClr val="lt1"/>
+          </a:fontRef>
+        </p:style>
+        <p:txBody>
+          <a:bodyPr rtlCol="0" anchor="ctr" wrap="square" lIns="137160" rIns="137160" tIns="91440" bIns="91440"/>
+          <a:lstStyle/>
+          <a:p>
+            <a:pPr algn="ctr"/>
+            <a:r>
+              <a:rPr sz="1000" b="1">
+                <a:solidFill>
+                  <a:srgbClr val="1C1C1C"/>
+                </a:solidFill>
+                <a:latin typeface="Calibri"/>
+              </a:rPr>
+              <a:t>Ahorro fiscal</a:t>
+            </a:r>
+          </a:p>
+          <a:p>
+            <a:pPr algn="ctr"/>
+            <a:r>
+              <a:rPr sz="1000" b="1">
+                <a:solidFill>
+                  <a:srgbClr val="1C1C1C"/>
+                </a:solidFill>
+                <a:latin typeface="Calibri"/>
+              </a:rPr>
+              <a:t>artificial</a:t>
+            </a:r>
+          </a:p>
+        </p:txBody>
+      </p:sp>
+      <p:sp>
+        <p:nvSpPr>
+          <p:cNvPr id="17" name="Rectangle 16"/>
+          <p:cNvSpPr/>
+          <p:nvPr/>
+        </p:nvSpPr>
+        <p:spPr>
+          <a:xfrm>
+            <a:off x="548640" y="4434840"/>
+            <a:ext cx="2743200" cy="1005840"/>
+          </a:xfrm>
+          <a:prstGeom prst="rect">
+            <a:avLst/>
+          </a:prstGeom>
+          <a:solidFill>
+            <a:srgbClr val="FDE9D9"/>
+          </a:solidFill>
+          <a:ln>
+            <a:noFill/>
+          </a:ln>
+          <a:effectLst/>
+        </p:spPr>
+        <p:style>
+          <a:lnRef idx="1">
+            <a:schemeClr val="accent1"/>
+          </a:lnRef>
+          <a:fillRef idx="3">
+            <a:schemeClr val="accent1"/>
+          </a:fillRef>
+          <a:effectRef idx="2">
+            <a:schemeClr val="accent1"/>
+          </a:effectRef>
+          <a:fontRef idx="minor">
+            <a:schemeClr val="lt1"/>
+          </a:fontRef>
+        </p:style>
+        <p:txBody>
+          <a:bodyPr rtlCol="0" anchor="ctr" wrap="square" lIns="137160" rIns="137160" tIns="91440" bIns="91440"/>
+          <a:lstStyle/>
+          <a:p>
+            <a:pPr algn="l"/>
+            <a:r>
+              <a:rPr sz="1050" b="1">
+                <a:solidFill>
+                  <a:srgbClr val="1C1C1C"/>
+                </a:solidFill>
+                <a:latin typeface="Calibri"/>
+              </a:rPr>
+              <a:t>Diferencial</a:t>
+            </a:r>
+          </a:p>
+        </p:txBody>
+      </p:sp>
+      <p:sp>
+        <p:nvSpPr>
+          <p:cNvPr id="18" name="Rectangle 17"/>
+          <p:cNvSpPr/>
+          <p:nvPr/>
+        </p:nvSpPr>
+        <p:spPr>
+          <a:xfrm>
+            <a:off x="3337560" y="4434840"/>
+            <a:ext cx="3383280" cy="1005840"/>
+          </a:xfrm>
+          <a:prstGeom prst="rect">
+            <a:avLst/>
+          </a:prstGeom>
+          <a:solidFill>
+            <a:srgbClr val="FDE9D9"/>
+          </a:solidFill>
+          <a:ln>
+            <a:noFill/>
+          </a:ln>
+          <a:effectLst/>
+        </p:spPr>
+        <p:style>
+          <a:lnRef idx="1">
+            <a:schemeClr val="accent1"/>
+          </a:lnRef>
+          <a:fillRef idx="3">
+            <a:schemeClr val="accent1"/>
+          </a:fillRef>
+          <a:effectRef idx="2">
+            <a:schemeClr val="accent1"/>
+          </a:effectRef>
+          <a:fontRef idx="minor">
+            <a:schemeClr val="lt1"/>
+          </a:fontRef>
+        </p:style>
+        <p:txBody>
+          <a:bodyPr rtlCol="0" anchor="ctr" wrap="square" lIns="137160" rIns="137160" tIns="91440" bIns="91440"/>
+          <a:lstStyle/>
+          <a:p>
+            <a:pPr algn="l"/>
+            <a:r>
+              <a:rPr sz="1050" b="0">
+                <a:solidFill>
+                  <a:srgbClr val="1C1C1C"/>
+                </a:solidFill>
+                <a:latin typeface="Calibri"/>
+              </a:rPr>
+              <a:t>Los ingresos los genera íntegramente el socio A</a:t>
+            </a:r>
+          </a:p>
+        </p:txBody>
+      </p:sp>
+      <p:sp>
+        <p:nvSpPr>
+          <p:cNvPr id="19" name="Rectangle 18"/>
+          <p:cNvSpPr/>
+          <p:nvPr/>
+        </p:nvSpPr>
+        <p:spPr>
+          <a:xfrm>
+            <a:off x="6766560" y="4434840"/>
+            <a:ext cx="1828800" cy="1005840"/>
+          </a:xfrm>
+          <a:prstGeom prst="rect">
+            <a:avLst/>
+          </a:prstGeom>
+          <a:solidFill>
+            <a:srgbClr val="FDE9D9"/>
+          </a:solidFill>
+          <a:ln>
+            <a:noFill/>
+          </a:ln>
+          <a:effectLst/>
+        </p:spPr>
+        <p:style>
+          <a:lnRef idx="1">
+            <a:schemeClr val="accent1"/>
+          </a:lnRef>
+          <a:fillRef idx="3">
+            <a:schemeClr val="accent1"/>
+          </a:fillRef>
+          <a:effectRef idx="2">
+            <a:schemeClr val="accent1"/>
+          </a:effectRef>
+          <a:fontRef idx="minor">
+            <a:schemeClr val="lt1"/>
+          </a:fontRef>
+        </p:style>
+        <p:txBody>
+          <a:bodyPr rtlCol="0" anchor="ctr" wrap="square" lIns="137160" rIns="137160" tIns="91440" bIns="91440"/>
+          <a:lstStyle/>
+          <a:p>
+            <a:pPr algn="ctr"/>
+            <a:r>
+              <a:rPr sz="1050" b="0">
+                <a:solidFill>
+                  <a:srgbClr val="1C1C1C"/>
+                </a:solidFill>
+                <a:latin typeface="Calibri"/>
+              </a:rPr>
+              <a:t>Disminución total del IGC</a:t>
+            </a:r>
+          </a:p>
+        </p:txBody>
+      </p:sp>
+      <p:sp>
+        <p:nvSpPr>
+          <p:cNvPr id="20" name="Rectangle 19"/>
+          <p:cNvSpPr/>
+          <p:nvPr/>
+        </p:nvSpPr>
+        <p:spPr>
+          <a:xfrm>
+            <a:off x="8641080" y="4434840"/>
+            <a:ext cx="1508760" cy="1005840"/>
+          </a:xfrm>
+          <a:prstGeom prst="rect">
+            <a:avLst/>
+          </a:prstGeom>
+          <a:solidFill>
+            <a:srgbClr val="FDE9D9"/>
+          </a:solidFill>
+          <a:ln>
+            <a:noFill/>
+          </a:ln>
+          <a:effectLst/>
+        </p:spPr>
+        <p:style>
+          <a:lnRef idx="1">
+            <a:schemeClr val="accent1"/>
+          </a:lnRef>
+          <a:fillRef idx="3">
+            <a:schemeClr val="accent1"/>
+          </a:fillRef>
+          <a:effectRef idx="2">
+            <a:schemeClr val="accent1"/>
+          </a:effectRef>
+          <a:fontRef idx="minor">
+            <a:schemeClr val="lt1"/>
+          </a:fontRef>
+        </p:style>
+        <p:txBody>
+          <a:bodyPr rtlCol="0" anchor="ctr" wrap="square" lIns="137160" rIns="137160" tIns="91440" bIns="91440"/>
+          <a:lstStyle/>
+          <a:p>
+            <a:pPr algn="ctr"/>
+            <a:r>
+              <a:rPr sz="1000" b="1">
+                <a:solidFill>
+                  <a:srgbClr val="1C1C1C"/>
+                </a:solidFill>
+                <a:latin typeface="Calibri"/>
+              </a:rPr>
+              <a:t>ABUSO</a:t>
+            </a:r>
+          </a:p>
+          <a:p>
+            <a:pPr algn="ctr"/>
+            <a:r>
+              <a:rPr sz="1000" b="1">
+                <a:solidFill>
+                  <a:srgbClr val="1C1C1C"/>
+                </a:solidFill>
+                <a:latin typeface="Calibri"/>
+              </a:rPr>
+              <a:t>Art. 4 ter CT</a:t>
+            </a:r>
+          </a:p>
+        </p:txBody>
+      </p:sp>
+      <p:sp>
+        <p:nvSpPr>
+          <p:cNvPr id="21" name="Rectangle 20"/>
+          <p:cNvSpPr/>
+          <p:nvPr/>
+        </p:nvSpPr>
+        <p:spPr>
+          <a:xfrm>
+            <a:off x="548640" y="5532120"/>
+            <a:ext cx="9601200" cy="365760"/>
+          </a:xfrm>
+          <a:prstGeom prst="rect">
             <a:avLst/>
           </a:prstGeom>
           <a:noFill/>
@@ -6053,33 +6945,33 @@
           <a:p>
             <a:pPr algn="l"/>
             <a:r>
-              <a:rPr b="0" sz="1400">
+              <a:rPr sz="1000" b="0">
                 <a:solidFill>
                   <a:srgbClr val="555555"/>
                 </a:solidFill>
                 <a:latin typeface="Calibri"/>
               </a:rPr>
-              <a:t>Ejemplo ilustrativo — ¿Cuánto pierde el Fisco?</a:t>
-            </a:r>
-          </a:p>
-        </p:txBody>
-      </p:sp>
-      <p:sp>
-        <p:nvSpPr>
-          <p:cNvPr id="5" name="Rounded Rectangle 4"/>
+              <a:t>Nota: las tasas son ilustrativas. El perjuicio fiscal real dependerá del monto efectivo de los ingresos y otras rentas de cada socio.</a:t>
+            </a:r>
+          </a:p>
+        </p:txBody>
+      </p:sp>
+      <p:sp>
+        <p:nvSpPr>
+          <p:cNvPr id="22" name="Rectangle 21"/>
           <p:cNvSpPr/>
           <p:nvPr/>
         </p:nvSpPr>
         <p:spPr>
           <a:xfrm>
-            <a:off x="548640" y="1554480"/>
-            <a:ext cx="2743200" cy="457200"/>
-          </a:xfrm>
-          <a:prstGeom prst="roundRect">
-            <a:avLst/>
-          </a:prstGeom>
-          <a:solidFill>
-            <a:srgbClr val="1A3A5C"/>
+            <a:off x="10332720" y="1828800"/>
+            <a:ext cx="1691640" cy="4526280"/>
+          </a:xfrm>
+          <a:prstGeom prst="rect">
+            <a:avLst/>
+          </a:prstGeom>
+          <a:solidFill>
+            <a:srgbClr val="FDE9D9"/>
           </a:solidFill>
           <a:ln>
             <a:noFill/>
@@ -6101,1040 +6993,35 @@
           </a:fontRef>
         </p:style>
         <p:txBody>
-          <a:bodyPr rtlCol="0" anchor="ctr" wrap="square" lIns="137160" rIns="137160" tIns="91440" bIns="91440"/>
+          <a:bodyPr rtlCol="0" anchor="ctr" wrap="square" lIns="109728" rIns="109728" tIns="137160" bIns="137160"/>
           <a:lstStyle/>
           <a:p>
             <a:pPr algn="ctr"/>
             <a:r>
-              <a:rPr b="1" sz="1100">
-                <a:solidFill>
-                  <a:srgbClr val="FFFFFF"/>
-                </a:solidFill>
-                <a:latin typeface="Calibri"/>
-              </a:rPr>
-              <a:t>Escenario</a:t>
-            </a:r>
-          </a:p>
-        </p:txBody>
-      </p:sp>
-      <p:sp>
-        <p:nvSpPr>
-          <p:cNvPr id="6" name="Rounded Rectangle 5"/>
-          <p:cNvSpPr/>
-          <p:nvPr/>
-        </p:nvSpPr>
-        <p:spPr>
-          <a:xfrm>
-            <a:off x="3337560" y="1554480"/>
-            <a:ext cx="4023360" cy="457200"/>
-          </a:xfrm>
-          <a:prstGeom prst="roundRect">
-            <a:avLst/>
-          </a:prstGeom>
-          <a:solidFill>
-            <a:srgbClr val="1A3A5C"/>
-          </a:solidFill>
-          <a:ln>
-            <a:noFill/>
-          </a:ln>
-          <a:effectLst/>
-        </p:spPr>
-        <p:style>
-          <a:lnRef idx="1">
-            <a:schemeClr val="accent1"/>
-          </a:lnRef>
-          <a:fillRef idx="3">
-            <a:schemeClr val="accent1"/>
-          </a:fillRef>
-          <a:effectRef idx="2">
-            <a:schemeClr val="accent1"/>
-          </a:effectRef>
-          <a:fontRef idx="minor">
-            <a:schemeClr val="lt1"/>
-          </a:fontRef>
-        </p:style>
-        <p:txBody>
-          <a:bodyPr rtlCol="0" anchor="ctr" wrap="square" lIns="137160" rIns="137160" tIns="91440" bIns="91440"/>
-          <a:lstStyle/>
-          <a:p>
-            <a:pPr algn="ctr"/>
-            <a:r>
-              <a:rPr b="1" sz="1100">
-                <a:solidFill>
-                  <a:srgbClr val="FFFFFF"/>
-                </a:solidFill>
-                <a:latin typeface="Calibri"/>
-              </a:rPr>
-              <a:t>¿Quién declara qué?</a:t>
-            </a:r>
-          </a:p>
-        </p:txBody>
-      </p:sp>
-      <p:sp>
-        <p:nvSpPr>
-          <p:cNvPr id="7" name="Rounded Rectangle 6"/>
-          <p:cNvSpPr/>
-          <p:nvPr/>
-        </p:nvSpPr>
-        <p:spPr>
-          <a:xfrm>
-            <a:off x="7406640" y="1554480"/>
-            <a:ext cx="2286000" cy="457200"/>
-          </a:xfrm>
-          <a:prstGeom prst="roundRect">
-            <a:avLst/>
-          </a:prstGeom>
-          <a:solidFill>
-            <a:srgbClr val="1A3A5C"/>
-          </a:solidFill>
-          <a:ln>
-            <a:noFill/>
-          </a:ln>
-          <a:effectLst/>
-        </p:spPr>
-        <p:style>
-          <a:lnRef idx="1">
-            <a:schemeClr val="accent1"/>
-          </a:lnRef>
-          <a:fillRef idx="3">
-            <a:schemeClr val="accent1"/>
-          </a:fillRef>
-          <a:effectRef idx="2">
-            <a:schemeClr val="accent1"/>
-          </a:effectRef>
-          <a:fontRef idx="minor">
-            <a:schemeClr val="lt1"/>
-          </a:fontRef>
-        </p:style>
-        <p:txBody>
-          <a:bodyPr rtlCol="0" anchor="ctr" wrap="square" lIns="137160" rIns="137160" tIns="91440" bIns="91440"/>
-          <a:lstStyle/>
-          <a:p>
-            <a:pPr algn="ctr"/>
-            <a:r>
-              <a:rPr b="1" sz="1100">
-                <a:solidFill>
-                  <a:srgbClr val="FFFFFF"/>
-                </a:solidFill>
-                <a:latin typeface="Calibri"/>
-              </a:rPr>
-              <a:t>Tramo IGC aprox.</a:t>
-            </a:r>
-          </a:p>
-        </p:txBody>
-      </p:sp>
-      <p:sp>
-        <p:nvSpPr>
-          <p:cNvPr id="8" name="Rounded Rectangle 7"/>
-          <p:cNvSpPr/>
-          <p:nvPr/>
-        </p:nvSpPr>
-        <p:spPr>
-          <a:xfrm>
-            <a:off x="9738360" y="1554480"/>
-            <a:ext cx="1828800" cy="457200"/>
-          </a:xfrm>
-          <a:prstGeom prst="roundRect">
-            <a:avLst/>
-          </a:prstGeom>
-          <a:solidFill>
-            <a:srgbClr val="1A3A5C"/>
-          </a:solidFill>
-          <a:ln>
-            <a:noFill/>
-          </a:ln>
-          <a:effectLst/>
-        </p:spPr>
-        <p:style>
-          <a:lnRef idx="1">
-            <a:schemeClr val="accent1"/>
-          </a:lnRef>
-          <a:fillRef idx="3">
-            <a:schemeClr val="accent1"/>
-          </a:fillRef>
-          <a:effectRef idx="2">
-            <a:schemeClr val="accent1"/>
-          </a:effectRef>
-          <a:fontRef idx="minor">
-            <a:schemeClr val="lt1"/>
-          </a:fontRef>
-        </p:style>
-        <p:txBody>
-          <a:bodyPr rtlCol="0" anchor="ctr" wrap="square" lIns="137160" rIns="137160" tIns="91440" bIns="91440"/>
-          <a:lstStyle/>
-          <a:p>
-            <a:pPr algn="ctr"/>
-            <a:r>
-              <a:rPr b="1" sz="1100">
-                <a:solidFill>
-                  <a:srgbClr val="FFFFFF"/>
-                </a:solidFill>
-                <a:latin typeface="Calibri"/>
-              </a:rPr>
-              <a:t>Efecto</a:t>
-            </a:r>
-          </a:p>
-        </p:txBody>
-      </p:sp>
-      <p:sp>
-        <p:nvSpPr>
-          <p:cNvPr id="9" name="Rounded Rectangle 8"/>
-          <p:cNvSpPr/>
-          <p:nvPr/>
-        </p:nvSpPr>
-        <p:spPr>
-          <a:xfrm>
-            <a:off x="548640" y="2057400"/>
-            <a:ext cx="2743200" cy="960120"/>
-          </a:xfrm>
-          <a:prstGeom prst="roundRect">
-            <a:avLst/>
-          </a:prstGeom>
-          <a:solidFill>
-            <a:srgbClr val="E8F3E8"/>
-          </a:solidFill>
-          <a:ln>
-            <a:noFill/>
-          </a:ln>
-          <a:effectLst/>
-        </p:spPr>
-        <p:style>
-          <a:lnRef idx="1">
-            <a:schemeClr val="accent1"/>
-          </a:lnRef>
-          <a:fillRef idx="3">
-            <a:schemeClr val="accent1"/>
-          </a:fillRef>
-          <a:effectRef idx="2">
-            <a:schemeClr val="accent1"/>
-          </a:effectRef>
-          <a:fontRef idx="minor">
-            <a:schemeClr val="lt1"/>
-          </a:fontRef>
-        </p:style>
-        <p:txBody>
-          <a:bodyPr rtlCol="0" anchor="ctr" wrap="square" lIns="137160" rIns="137160" tIns="91440" bIns="91440"/>
-          <a:lstStyle/>
-          <a:p>
-            <a:pPr algn="ctr"/>
-            <a:r>
-              <a:rPr b="1" sz="1050">
+              <a:rPr sz="1600" b="1">
+                <a:solidFill>
+                  <a:srgbClr val="C5501A"/>
+                </a:solidFill>
+                <a:latin typeface="Calibri"/>
+              </a:rPr>
+              <a:t>RESULTADO</a:t>
+            </a:r>
+          </a:p>
+          <a:p>
+            <a:pPr algn="ctr">
+              <a:spcBef>
+                <a:spcPts val="800"/>
+              </a:spcBef>
+            </a:pPr>
+            <a:r>
+              <a:rPr sz="1100">
                 <a:solidFill>
                   <a:srgbClr val="1C1C1C"/>
                 </a:solidFill>
                 <a:latin typeface="Calibri"/>
               </a:rPr>
-              <a:t>Sin esquema</a:t>
-            </a:r>
-          </a:p>
-          <a:p>
-            <a:pPr algn="ctr"/>
-            <a:r>
-              <a:rPr b="1" sz="1050">
-                <a:solidFill>
-                  <a:srgbClr val="1C1C1C"/>
-                </a:solidFill>
-                <a:latin typeface="Calibri"/>
-              </a:rPr>
-              <a:t>(Pedro trabaja solo)</a:t>
-            </a:r>
-          </a:p>
-        </p:txBody>
-      </p:sp>
-      <p:sp>
-        <p:nvSpPr>
-          <p:cNvPr id="10" name="Rounded Rectangle 9"/>
-          <p:cNvSpPr/>
-          <p:nvPr/>
-        </p:nvSpPr>
-        <p:spPr>
-          <a:xfrm>
-            <a:off x="3337560" y="2057400"/>
-            <a:ext cx="4023360" cy="960120"/>
-          </a:xfrm>
-          <a:prstGeom prst="roundRect">
-            <a:avLst/>
-          </a:prstGeom>
-          <a:solidFill>
-            <a:srgbClr val="E8F3E8"/>
-          </a:solidFill>
-          <a:ln>
-            <a:noFill/>
-          </a:ln>
-          <a:effectLst/>
-        </p:spPr>
-        <p:style>
-          <a:lnRef idx="1">
-            <a:schemeClr val="accent1"/>
-          </a:lnRef>
-          <a:fillRef idx="3">
-            <a:schemeClr val="accent1"/>
-          </a:fillRef>
-          <a:effectRef idx="2">
-            <a:schemeClr val="accent1"/>
-          </a:effectRef>
-          <a:fontRef idx="minor">
-            <a:schemeClr val="lt1"/>
-          </a:fontRef>
-        </p:style>
-        <p:txBody>
-          <a:bodyPr rtlCol="0" anchor="ctr" wrap="square" lIns="137160" rIns="137160" tIns="91440" bIns="91440"/>
-          <a:lstStyle/>
-          <a:p>
-            <a:pPr algn="l"/>
-            <a:r>
-              <a:rPr b="0" sz="1050">
-                <a:solidFill>
-                  <a:srgbClr val="1C1C1C"/>
-                </a:solidFill>
-                <a:latin typeface="Calibri"/>
-              </a:rPr>
-              <a:t>Pedro declara $300 MM</a:t>
-            </a:r>
-          </a:p>
-        </p:txBody>
-      </p:sp>
-      <p:sp>
-        <p:nvSpPr>
-          <p:cNvPr id="11" name="Rounded Rectangle 10"/>
-          <p:cNvSpPr/>
-          <p:nvPr/>
-        </p:nvSpPr>
-        <p:spPr>
-          <a:xfrm>
-            <a:off x="7406640" y="2057400"/>
-            <a:ext cx="2286000" cy="960120"/>
-          </a:xfrm>
-          <a:prstGeom prst="roundRect">
-            <a:avLst/>
-          </a:prstGeom>
-          <a:solidFill>
-            <a:srgbClr val="E8F3E8"/>
-          </a:solidFill>
-          <a:ln>
-            <a:noFill/>
-          </a:ln>
-          <a:effectLst/>
-        </p:spPr>
-        <p:style>
-          <a:lnRef idx="1">
-            <a:schemeClr val="accent1"/>
-          </a:lnRef>
-          <a:fillRef idx="3">
-            <a:schemeClr val="accent1"/>
-          </a:fillRef>
-          <a:effectRef idx="2">
-            <a:schemeClr val="accent1"/>
-          </a:effectRef>
-          <a:fontRef idx="minor">
-            <a:schemeClr val="lt1"/>
-          </a:fontRef>
-        </p:style>
-        <p:txBody>
-          <a:bodyPr rtlCol="0" anchor="ctr" wrap="square" lIns="137160" rIns="137160" tIns="91440" bIns="91440"/>
-          <a:lstStyle/>
-          <a:p>
-            <a:pPr algn="ctr"/>
-            <a:r>
-              <a:rPr b="0" sz="1050">
-                <a:solidFill>
-                  <a:srgbClr val="1C1C1C"/>
-                </a:solidFill>
-                <a:latin typeface="Calibri"/>
-              </a:rPr>
-              <a:t>Tramo marginal ≈ 40%</a:t>
-            </a:r>
-          </a:p>
-        </p:txBody>
-      </p:sp>
-      <p:sp>
-        <p:nvSpPr>
-          <p:cNvPr id="12" name="Rounded Rectangle 11"/>
-          <p:cNvSpPr/>
-          <p:nvPr/>
-        </p:nvSpPr>
-        <p:spPr>
-          <a:xfrm>
-            <a:off x="9738360" y="2057400"/>
-            <a:ext cx="1828800" cy="960120"/>
-          </a:xfrm>
-          <a:prstGeom prst="roundRect">
-            <a:avLst/>
-          </a:prstGeom>
-          <a:solidFill>
-            <a:srgbClr val="E8F3E8"/>
-          </a:solidFill>
-          <a:ln>
-            <a:noFill/>
-          </a:ln>
-          <a:effectLst/>
-        </p:spPr>
-        <p:style>
-          <a:lnRef idx="1">
-            <a:schemeClr val="accent1"/>
-          </a:lnRef>
-          <a:fillRef idx="3">
-            <a:schemeClr val="accent1"/>
-          </a:fillRef>
-          <a:effectRef idx="2">
-            <a:schemeClr val="accent1"/>
-          </a:effectRef>
-          <a:fontRef idx="minor">
-            <a:schemeClr val="lt1"/>
-          </a:fontRef>
-        </p:style>
-        <p:txBody>
-          <a:bodyPr rtlCol="0" anchor="ctr" wrap="square" lIns="137160" rIns="137160" tIns="91440" bIns="91440"/>
-          <a:lstStyle/>
-          <a:p>
-            <a:pPr algn="ctr"/>
-            <a:r>
-              <a:rPr b="1" sz="1000">
-                <a:solidFill>
-                  <a:srgbClr val="1C1C1C"/>
-                </a:solidFill>
-                <a:latin typeface="Calibri"/>
-              </a:rPr>
-              <a:t>Tributación</a:t>
-            </a:r>
-          </a:p>
-          <a:p>
-            <a:pPr algn="ctr"/>
-            <a:r>
-              <a:rPr b="1" sz="1000">
-                <a:solidFill>
-                  <a:srgbClr val="1C1C1C"/>
-                </a:solidFill>
-                <a:latin typeface="Calibri"/>
-              </a:rPr>
-              <a:t>correcta</a:t>
-            </a:r>
-          </a:p>
-        </p:txBody>
-      </p:sp>
-      <p:sp>
-        <p:nvSpPr>
-          <p:cNvPr id="13" name="Rounded Rectangle 12"/>
-          <p:cNvSpPr/>
-          <p:nvPr/>
-        </p:nvSpPr>
-        <p:spPr>
-          <a:xfrm>
-            <a:off x="548640" y="3063240"/>
-            <a:ext cx="2743200" cy="960120"/>
-          </a:xfrm>
-          <a:prstGeom prst="roundRect">
-            <a:avLst/>
-          </a:prstGeom>
-          <a:solidFill>
-            <a:srgbClr val="FBE5E5"/>
-          </a:solidFill>
-          <a:ln>
-            <a:noFill/>
-          </a:ln>
-          <a:effectLst/>
-        </p:spPr>
-        <p:style>
-          <a:lnRef idx="1">
-            <a:schemeClr val="accent1"/>
-          </a:lnRef>
-          <a:fillRef idx="3">
-            <a:schemeClr val="accent1"/>
-          </a:fillRef>
-          <a:effectRef idx="2">
-            <a:schemeClr val="accent1"/>
-          </a:effectRef>
-          <a:fontRef idx="minor">
-            <a:schemeClr val="lt1"/>
-          </a:fontRef>
-        </p:style>
-        <p:txBody>
-          <a:bodyPr rtlCol="0" anchor="ctr" wrap="square" lIns="137160" rIns="137160" tIns="91440" bIns="91440"/>
-          <a:lstStyle/>
-          <a:p>
-            <a:pPr algn="ctr"/>
-            <a:r>
-              <a:rPr b="1" sz="1050">
-                <a:solidFill>
-                  <a:srgbClr val="1C1C1C"/>
-                </a:solidFill>
-                <a:latin typeface="Calibri"/>
-              </a:rPr>
-              <a:t>Con esquema D</a:t>
-            </a:r>
-          </a:p>
-          <a:p>
-            <a:pPr algn="ctr"/>
-            <a:r>
-              <a:rPr b="1" sz="1050">
-                <a:solidFill>
-                  <a:srgbClr val="1C1C1C"/>
-                </a:solidFill>
-                <a:latin typeface="Calibri"/>
-              </a:rPr>
-              <a:t>(3 socios simbólicos)</a:t>
-            </a:r>
-          </a:p>
-        </p:txBody>
-      </p:sp>
-      <p:sp>
-        <p:nvSpPr>
-          <p:cNvPr id="14" name="Rounded Rectangle 13"/>
-          <p:cNvSpPr/>
-          <p:nvPr/>
-        </p:nvSpPr>
-        <p:spPr>
-          <a:xfrm>
-            <a:off x="3337560" y="3063240"/>
-            <a:ext cx="4023360" cy="960120"/>
-          </a:xfrm>
-          <a:prstGeom prst="roundRect">
-            <a:avLst/>
-          </a:prstGeom>
-          <a:solidFill>
-            <a:srgbClr val="FBE5E5"/>
-          </a:solidFill>
-          <a:ln>
-            <a:noFill/>
-          </a:ln>
-          <a:effectLst/>
-        </p:spPr>
-        <p:style>
-          <a:lnRef idx="1">
-            <a:schemeClr val="accent1"/>
-          </a:lnRef>
-          <a:fillRef idx="3">
-            <a:schemeClr val="accent1"/>
-          </a:fillRef>
-          <a:effectRef idx="2">
-            <a:schemeClr val="accent1"/>
-          </a:effectRef>
-          <a:fontRef idx="minor">
-            <a:schemeClr val="lt1"/>
-          </a:fontRef>
-        </p:style>
-        <p:txBody>
-          <a:bodyPr rtlCol="0" anchor="ctr" wrap="square" lIns="137160" rIns="137160" tIns="91440" bIns="91440"/>
-          <a:lstStyle/>
-          <a:p>
-            <a:pPr algn="l"/>
-            <a:r>
-              <a:rPr b="0" sz="1050">
-                <a:solidFill>
-                  <a:srgbClr val="1C1C1C"/>
-                </a:solidFill>
-                <a:latin typeface="Calibri"/>
-              </a:rPr>
-              <a:t>Pedro $100 MM · Señora $100 MM · Cuñado $100 MM</a:t>
-            </a:r>
-          </a:p>
-        </p:txBody>
-      </p:sp>
-      <p:sp>
-        <p:nvSpPr>
-          <p:cNvPr id="15" name="Rounded Rectangle 14"/>
-          <p:cNvSpPr/>
-          <p:nvPr/>
-        </p:nvSpPr>
-        <p:spPr>
-          <a:xfrm>
-            <a:off x="7406640" y="3063240"/>
-            <a:ext cx="2286000" cy="960120"/>
-          </a:xfrm>
-          <a:prstGeom prst="roundRect">
-            <a:avLst/>
-          </a:prstGeom>
-          <a:solidFill>
-            <a:srgbClr val="FBE5E5"/>
-          </a:solidFill>
-          <a:ln>
-            <a:noFill/>
-          </a:ln>
-          <a:effectLst/>
-        </p:spPr>
-        <p:style>
-          <a:lnRef idx="1">
-            <a:schemeClr val="accent1"/>
-          </a:lnRef>
-          <a:fillRef idx="3">
-            <a:schemeClr val="accent1"/>
-          </a:fillRef>
-          <a:effectRef idx="2">
-            <a:schemeClr val="accent1"/>
-          </a:effectRef>
-          <a:fontRef idx="minor">
-            <a:schemeClr val="lt1"/>
-          </a:fontRef>
-        </p:style>
-        <p:txBody>
-          <a:bodyPr rtlCol="0" anchor="ctr" wrap="square" lIns="137160" rIns="137160" tIns="91440" bIns="91440"/>
-          <a:lstStyle/>
-          <a:p>
-            <a:pPr algn="ctr"/>
-            <a:r>
-              <a:rPr b="0" sz="1050">
-                <a:solidFill>
-                  <a:srgbClr val="1C1C1C"/>
-                </a:solidFill>
-                <a:latin typeface="Calibri"/>
-              </a:rPr>
-              <a:t>Cada uno en tramo ≈ 23–35%</a:t>
-            </a:r>
-          </a:p>
-        </p:txBody>
-      </p:sp>
-      <p:sp>
-        <p:nvSpPr>
-          <p:cNvPr id="16" name="Rounded Rectangle 15"/>
-          <p:cNvSpPr/>
-          <p:nvPr/>
-        </p:nvSpPr>
-        <p:spPr>
-          <a:xfrm>
-            <a:off x="9738360" y="3063240"/>
-            <a:ext cx="1828800" cy="960120"/>
-          </a:xfrm>
-          <a:prstGeom prst="roundRect">
-            <a:avLst/>
-          </a:prstGeom>
-          <a:solidFill>
-            <a:srgbClr val="FBE5E5"/>
-          </a:solidFill>
-          <a:ln>
-            <a:noFill/>
-          </a:ln>
-          <a:effectLst/>
-        </p:spPr>
-        <p:style>
-          <a:lnRef idx="1">
-            <a:schemeClr val="accent1"/>
-          </a:lnRef>
-          <a:fillRef idx="3">
-            <a:schemeClr val="accent1"/>
-          </a:fillRef>
-          <a:effectRef idx="2">
-            <a:schemeClr val="accent1"/>
-          </a:effectRef>
-          <a:fontRef idx="minor">
-            <a:schemeClr val="lt1"/>
-          </a:fontRef>
-        </p:style>
-        <p:txBody>
-          <a:bodyPr rtlCol="0" anchor="ctr" wrap="square" lIns="137160" rIns="137160" tIns="91440" bIns="91440"/>
-          <a:lstStyle/>
-          <a:p>
-            <a:pPr algn="ctr"/>
-            <a:r>
-              <a:rPr b="1" sz="1000">
-                <a:solidFill>
-                  <a:srgbClr val="1C1C1C"/>
-                </a:solidFill>
-                <a:latin typeface="Calibri"/>
-              </a:rPr>
-              <a:t>Ahorro fiscal</a:t>
-            </a:r>
-          </a:p>
-          <a:p>
-            <a:pPr algn="ctr"/>
-            <a:r>
-              <a:rPr b="1" sz="1000">
-                <a:solidFill>
-                  <a:srgbClr val="1C1C1C"/>
-                </a:solidFill>
-                <a:latin typeface="Calibri"/>
-              </a:rPr>
-              <a:t>ARTIFICIAL</a:t>
-            </a:r>
-          </a:p>
-        </p:txBody>
-      </p:sp>
-      <p:sp>
-        <p:nvSpPr>
-          <p:cNvPr id="17" name="Rounded Rectangle 16"/>
-          <p:cNvSpPr/>
-          <p:nvPr/>
-        </p:nvSpPr>
-        <p:spPr>
-          <a:xfrm>
-            <a:off x="548640" y="4069080"/>
-            <a:ext cx="2743200" cy="960120"/>
-          </a:xfrm>
-          <a:prstGeom prst="roundRect">
-            <a:avLst/>
-          </a:prstGeom>
-          <a:solidFill>
-            <a:srgbClr val="FDE9D9"/>
-          </a:solidFill>
-          <a:ln>
-            <a:noFill/>
-          </a:ln>
-          <a:effectLst/>
-        </p:spPr>
-        <p:style>
-          <a:lnRef idx="1">
-            <a:schemeClr val="accent1"/>
-          </a:lnRef>
-          <a:fillRef idx="3">
-            <a:schemeClr val="accent1"/>
-          </a:fillRef>
-          <a:effectRef idx="2">
-            <a:schemeClr val="accent1"/>
-          </a:effectRef>
-          <a:fontRef idx="minor">
-            <a:schemeClr val="lt1"/>
-          </a:fontRef>
-        </p:style>
-        <p:txBody>
-          <a:bodyPr rtlCol="0" anchor="ctr" wrap="square" lIns="137160" rIns="137160" tIns="91440" bIns="91440"/>
-          <a:lstStyle/>
-          <a:p>
-            <a:pPr algn="ctr"/>
-            <a:r>
-              <a:rPr b="1" sz="1050">
-                <a:solidFill>
-                  <a:srgbClr val="1C1C1C"/>
-                </a:solidFill>
-                <a:latin typeface="Calibri"/>
-              </a:rPr>
-              <a:t>Diferencial</a:t>
-            </a:r>
-          </a:p>
-          <a:p>
-            <a:pPr algn="ctr"/>
-            <a:r>
-              <a:rPr b="1" sz="1050">
-                <a:solidFill>
-                  <a:srgbClr val="1C1C1C"/>
-                </a:solidFill>
-                <a:latin typeface="Calibri"/>
-              </a:rPr>
-              <a:t>(perjuicio fiscal)</a:t>
-            </a:r>
-          </a:p>
-        </p:txBody>
-      </p:sp>
-      <p:sp>
-        <p:nvSpPr>
-          <p:cNvPr id="18" name="Rounded Rectangle 17"/>
-          <p:cNvSpPr/>
-          <p:nvPr/>
-        </p:nvSpPr>
-        <p:spPr>
-          <a:xfrm>
-            <a:off x="3337560" y="4069080"/>
-            <a:ext cx="4023360" cy="960120"/>
-          </a:xfrm>
-          <a:prstGeom prst="roundRect">
-            <a:avLst/>
-          </a:prstGeom>
-          <a:solidFill>
-            <a:srgbClr val="FDE9D9"/>
-          </a:solidFill>
-          <a:ln>
-            <a:noFill/>
-          </a:ln>
-          <a:effectLst/>
-        </p:spPr>
-        <p:style>
-          <a:lnRef idx="1">
-            <a:schemeClr val="accent1"/>
-          </a:lnRef>
-          <a:fillRef idx="3">
-            <a:schemeClr val="accent1"/>
-          </a:fillRef>
-          <a:effectRef idx="2">
-            <a:schemeClr val="accent1"/>
-          </a:effectRef>
-          <a:fontRef idx="minor">
-            <a:schemeClr val="lt1"/>
-          </a:fontRef>
-        </p:style>
-        <p:txBody>
-          <a:bodyPr rtlCol="0" anchor="ctr" wrap="square" lIns="137160" rIns="137160" tIns="91440" bIns="91440"/>
-          <a:lstStyle/>
-          <a:p>
-            <a:pPr algn="l"/>
-            <a:r>
-              <a:rPr b="0" sz="1050">
-                <a:solidFill>
-                  <a:srgbClr val="1C1C1C"/>
-                </a:solidFill>
-                <a:latin typeface="Calibri"/>
-              </a:rPr>
-              <a:t>Pedro genera el 100% de los ingresos. La señora y el cuñado no atendieron pacientes.</a:t>
-            </a:r>
-          </a:p>
-        </p:txBody>
-      </p:sp>
-      <p:sp>
-        <p:nvSpPr>
-          <p:cNvPr id="19" name="Rounded Rectangle 18"/>
-          <p:cNvSpPr/>
-          <p:nvPr/>
-        </p:nvSpPr>
-        <p:spPr>
-          <a:xfrm>
-            <a:off x="7406640" y="4069080"/>
-            <a:ext cx="2286000" cy="960120"/>
-          </a:xfrm>
-          <a:prstGeom prst="roundRect">
-            <a:avLst/>
-          </a:prstGeom>
-          <a:solidFill>
-            <a:srgbClr val="FDE9D9"/>
-          </a:solidFill>
-          <a:ln>
-            <a:noFill/>
-          </a:ln>
-          <a:effectLst/>
-        </p:spPr>
-        <p:style>
-          <a:lnRef idx="1">
-            <a:schemeClr val="accent1"/>
-          </a:lnRef>
-          <a:fillRef idx="3">
-            <a:schemeClr val="accent1"/>
-          </a:fillRef>
-          <a:effectRef idx="2">
-            <a:schemeClr val="accent1"/>
-          </a:effectRef>
-          <a:fontRef idx="minor">
-            <a:schemeClr val="lt1"/>
-          </a:fontRef>
-        </p:style>
-        <p:txBody>
-          <a:bodyPr rtlCol="0" anchor="ctr" wrap="square" lIns="137160" rIns="137160" tIns="91440" bIns="91440"/>
-          <a:lstStyle/>
-          <a:p>
-            <a:pPr algn="ctr"/>
-            <a:r>
-              <a:rPr b="0" sz="1050">
-                <a:solidFill>
-                  <a:srgbClr val="1C1C1C"/>
-                </a:solidFill>
-                <a:latin typeface="Calibri"/>
-              </a:rPr>
-              <a:t>Diferencia real de tramos = ahorro real de Pedro</a:t>
-            </a:r>
-          </a:p>
-        </p:txBody>
-      </p:sp>
-      <p:sp>
-        <p:nvSpPr>
-          <p:cNvPr id="20" name="Rounded Rectangle 19"/>
-          <p:cNvSpPr/>
-          <p:nvPr/>
-        </p:nvSpPr>
-        <p:spPr>
-          <a:xfrm>
-            <a:off x="9738360" y="4069080"/>
-            <a:ext cx="1828800" cy="960120"/>
-          </a:xfrm>
-          <a:prstGeom prst="roundRect">
-            <a:avLst/>
-          </a:prstGeom>
-          <a:solidFill>
-            <a:srgbClr val="FDE9D9"/>
-          </a:solidFill>
-          <a:ln>
-            <a:noFill/>
-          </a:ln>
-          <a:effectLst/>
-        </p:spPr>
-        <p:style>
-          <a:lnRef idx="1">
-            <a:schemeClr val="accent1"/>
-          </a:lnRef>
-          <a:fillRef idx="3">
-            <a:schemeClr val="accent1"/>
-          </a:fillRef>
-          <a:effectRef idx="2">
-            <a:schemeClr val="accent1"/>
-          </a:effectRef>
-          <a:fontRef idx="minor">
-            <a:schemeClr val="lt1"/>
-          </a:fontRef>
-        </p:style>
-        <p:txBody>
-          <a:bodyPr rtlCol="0" anchor="ctr" wrap="square" lIns="137160" rIns="137160" tIns="91440" bIns="91440"/>
-          <a:lstStyle/>
-          <a:p>
-            <a:pPr algn="ctr"/>
-            <a:r>
-              <a:rPr b="1" sz="1000">
-                <a:solidFill>
-                  <a:srgbClr val="1C1C1C"/>
-                </a:solidFill>
-                <a:latin typeface="Calibri"/>
-              </a:rPr>
-              <a:t>ABUSO</a:t>
-            </a:r>
-          </a:p>
-          <a:p>
-            <a:pPr algn="ctr"/>
-            <a:r>
-              <a:rPr b="1" sz="1000">
-                <a:solidFill>
-                  <a:srgbClr val="1C1C1C"/>
-                </a:solidFill>
-                <a:latin typeface="Calibri"/>
-              </a:rPr>
-              <a:t>Art. 4 ter CT</a:t>
-            </a:r>
-          </a:p>
-        </p:txBody>
-      </p:sp>
-      <p:sp>
-        <p:nvSpPr>
-          <p:cNvPr id="21" name="Rounded Rectangle 20"/>
-          <p:cNvSpPr/>
-          <p:nvPr/>
-        </p:nvSpPr>
-        <p:spPr>
-          <a:xfrm>
-            <a:off x="548640" y="5120640"/>
-            <a:ext cx="11064240" cy="548640"/>
-          </a:xfrm>
-          <a:prstGeom prst="roundRect">
-            <a:avLst/>
-          </a:prstGeom>
-          <a:solidFill>
-            <a:srgbClr val="B03030"/>
-          </a:solidFill>
-          <a:ln>
-            <a:noFill/>
-          </a:ln>
-          <a:effectLst/>
-        </p:spPr>
-        <p:style>
-          <a:lnRef idx="1">
-            <a:schemeClr val="accent1"/>
-          </a:lnRef>
-          <a:fillRef idx="3">
-            <a:schemeClr val="accent1"/>
-          </a:fillRef>
-          <a:effectRef idx="2">
-            <a:schemeClr val="accent1"/>
-          </a:effectRef>
-          <a:fontRef idx="minor">
-            <a:schemeClr val="lt1"/>
-          </a:fontRef>
-        </p:style>
-        <p:txBody>
-          <a:bodyPr rtlCol="0" anchor="ctr" wrap="square" lIns="137160" rIns="137160" tIns="91440" bIns="91440"/>
-          <a:lstStyle/>
-          <a:p>
-            <a:pPr algn="ctr"/>
-            <a:r>
-              <a:rPr b="1" sz="1200">
-                <a:solidFill>
-                  <a:srgbClr val="FFFFFF"/>
-                </a:solidFill>
-                <a:latin typeface="Calibri"/>
-              </a:rPr>
-              <a:t>Si el TTA declara el abuso:  Pedro queda con $300 MM en su IGC + intereses + multas. La señora y el cuñado también deben reliquidar sus IGC. (Art. 4 quinquies CT)</a:t>
-            </a:r>
-          </a:p>
-        </p:txBody>
-      </p:sp>
-      <p:sp>
-        <p:nvSpPr>
-          <p:cNvPr id="22" name="Rounded Rectangle 21"/>
-          <p:cNvSpPr/>
-          <p:nvPr/>
-        </p:nvSpPr>
-        <p:spPr>
-          <a:xfrm>
-            <a:off x="548640" y="5760720"/>
-            <a:ext cx="11064240" cy="365760"/>
-          </a:xfrm>
-          <a:prstGeom prst="roundRect">
-            <a:avLst/>
-          </a:prstGeom>
-          <a:noFill/>
-          <a:ln>
-            <a:noFill/>
-          </a:ln>
-          <a:effectLst/>
-        </p:spPr>
-        <p:style>
-          <a:lnRef idx="1">
-            <a:schemeClr val="accent1"/>
-          </a:lnRef>
-          <a:fillRef idx="3">
-            <a:schemeClr val="accent1"/>
-          </a:fillRef>
-          <a:effectRef idx="2">
-            <a:schemeClr val="accent1"/>
-          </a:effectRef>
-          <a:fontRef idx="minor">
-            <a:schemeClr val="lt1"/>
-          </a:fontRef>
-        </p:style>
-        <p:txBody>
-          <a:bodyPr rtlCol="0" anchor="t" wrap="square" lIns="137160" rIns="137160" tIns="91440" bIns="91440"/>
-          <a:lstStyle/>
-          <a:p>
-            <a:pPr algn="l"/>
-            <a:r>
-              <a:rPr b="0" sz="900">
-                <a:solidFill>
-                  <a:srgbClr val="555555"/>
-                </a:solidFill>
-                <a:latin typeface="Calibri"/>
-              </a:rPr>
-              <a:t>Nota: cifras ilustrativas. El ahorro real depende de los ingresos totales, rentas de los socios y otras deducciones.</a:t>
-            </a:r>
-          </a:p>
-        </p:txBody>
-      </p:sp>
-      <p:sp>
-        <p:nvSpPr>
-          <p:cNvPr id="23" name="Rounded Rectangle 22"/>
-          <p:cNvSpPr/>
-          <p:nvPr/>
-        </p:nvSpPr>
-        <p:spPr>
-          <a:xfrm>
-            <a:off x="274320" y="6492240"/>
-            <a:ext cx="11612880" cy="274320"/>
-          </a:xfrm>
-          <a:prstGeom prst="roundRect">
-            <a:avLst/>
-          </a:prstGeom>
-          <a:noFill/>
-          <a:ln>
-            <a:noFill/>
-          </a:ln>
-          <a:effectLst/>
-        </p:spPr>
-        <p:style>
-          <a:lnRef idx="1">
-            <a:schemeClr val="accent1"/>
-          </a:lnRef>
-          <a:fillRef idx="3">
-            <a:schemeClr val="accent1"/>
-          </a:fillRef>
-          <a:effectRef idx="2">
-            <a:schemeClr val="accent1"/>
-          </a:effectRef>
-          <a:fontRef idx="minor">
-            <a:schemeClr val="lt1"/>
-          </a:fontRef>
-        </p:style>
-        <p:txBody>
-          <a:bodyPr rtlCol="0" anchor="t" wrap="square" lIns="137160" rIns="137160" tIns="91440" bIns="91440"/>
-          <a:lstStyle/>
-          <a:p>
-            <a:pPr algn="r"/>
-            <a:r>
-              <a:rPr b="0" sz="800">
-                <a:solidFill>
-                  <a:srgbClr val="555555"/>
-                </a:solidFill>
-                <a:latin typeface="Calibri"/>
-              </a:rPr>
-              <a:t>Caso 86 · Catálogo SII 2025 · Grupo 4 — Magíster Dirección Tributaria UVM  |  7</a:t>
+              <a:t>
+Declarado el abuso, el efecto es la recalificación: atribución íntegra de los ingresos al socio A para el cálculo del IGC, con intereses y multas.</a:t>
             </a:r>
           </a:p>
         </p:txBody>
@@ -7210,7 +7097,7 @@
         <p:spPr>
           <a:xfrm>
             <a:off x="548640" y="274320"/>
-            <a:ext cx="10972800" cy="731520"/>
+            <a:ext cx="11064240" cy="822960"/>
           </a:xfrm>
           <a:prstGeom prst="rect">
             <a:avLst/>
@@ -7225,32 +7112,34 @@
           <a:p>
             <a:pPr algn="l"/>
             <a:r>
-              <a:rPr sz="3000" b="0" i="0">
+              <a:rPr sz="3600" b="0" i="0">
                 <a:solidFill>
                   <a:srgbClr val="1C1C1C"/>
                 </a:solidFill>
                 <a:latin typeface="Cambria"/>
               </a:rPr>
-              <a:t>¿Qué Puede Hacer Pedro?</a:t>
-            </a:r>
-          </a:p>
-        </p:txBody>
-      </p:sp>
-      <p:sp>
-        <p:nvSpPr>
-          <p:cNvPr id="4" name="Rounded Rectangle 3"/>
+              <a:t>Alternativas legítimas de solución (1/2)</a:t>
+            </a:r>
+          </a:p>
+        </p:txBody>
+      </p:sp>
+      <p:sp>
+        <p:nvSpPr>
+          <p:cNvPr id="4" name="Rectangle 3"/>
           <p:cNvSpPr/>
           <p:nvPr/>
         </p:nvSpPr>
         <p:spPr>
           <a:xfrm>
-            <a:off x="548640" y="960120"/>
-            <a:ext cx="10972800" cy="411480"/>
-          </a:xfrm>
-          <a:prstGeom prst="roundRect">
-            <a:avLst/>
-          </a:prstGeom>
-          <a:noFill/>
+            <a:off x="548640" y="1143000"/>
+            <a:ext cx="9601200" cy="502920"/>
+          </a:xfrm>
+          <a:prstGeom prst="rect">
+            <a:avLst/>
+          </a:prstGeom>
+          <a:solidFill>
+            <a:srgbClr val="2B2B2B"/>
+          </a:solidFill>
           <a:ln>
             <a:noFill/>
           </a:ln>
@@ -7271,38 +7160,38 @@
           </a:fontRef>
         </p:style>
         <p:txBody>
-          <a:bodyPr rtlCol="0" anchor="t" wrap="square" lIns="137160" rIns="137160" tIns="91440" bIns="91440"/>
+          <a:bodyPr rtlCol="0" anchor="ctr" lIns="182880" rIns="182880"/>
           <a:lstStyle/>
           <a:p>
             <a:pPr algn="l"/>
             <a:r>
-              <a:rPr b="0" sz="1400">
-                <a:solidFill>
-                  <a:srgbClr val="555555"/>
-                </a:solidFill>
-                <a:latin typeface="Calibri"/>
-              </a:rPr>
-              <a:t>5 alternativas legítimas para organizar su actividad profesional</a:t>
-            </a:r>
-          </a:p>
-        </p:txBody>
-      </p:sp>
-      <p:sp>
-        <p:nvSpPr>
-          <p:cNvPr id="5" name="Oval 4"/>
+              <a:rPr sz="1800" b="1" u="sng">
+                <a:solidFill>
+                  <a:srgbClr val="E6A43C"/>
+                </a:solidFill>
+                <a:latin typeface="Calibri"/>
+              </a:rPr>
+              <a:t>Estructuras conforme al ordenamiento tributario</a:t>
+            </a:r>
+          </a:p>
+        </p:txBody>
+      </p:sp>
+      <p:sp>
+        <p:nvSpPr>
+          <p:cNvPr id="5" name="Rectangle 4"/>
           <p:cNvSpPr/>
           <p:nvPr/>
         </p:nvSpPr>
         <p:spPr>
           <a:xfrm>
-            <a:off x="566928" y="1746504"/>
-            <a:ext cx="512064" cy="512064"/>
-          </a:xfrm>
-          <a:prstGeom prst="ellipse">
-            <a:avLst/>
-          </a:prstGeom>
-          <a:solidFill>
-            <a:srgbClr val="1A6B3C"/>
+            <a:off x="548640" y="1828800"/>
+            <a:ext cx="9601200" cy="457200"/>
+          </a:xfrm>
+          <a:prstGeom prst="rect">
+            <a:avLst/>
+          </a:prstGeom>
+          <a:solidFill>
+            <a:srgbClr val="2B2B2B"/>
           </a:solidFill>
           <a:ln>
             <a:noFill/>
@@ -7324,38 +7213,38 @@
           </a:fontRef>
         </p:style>
         <p:txBody>
-          <a:bodyPr rtlCol="0" anchor="ctr" lIns="0" rIns="0" tIns="0" bIns="0"/>
-          <a:lstStyle/>
-          <a:p>
-            <a:pPr algn="ctr"/>
-            <a:r>
-              <a:rPr sz="1600" b="1">
-                <a:solidFill>
-                  <a:srgbClr val="FFFFFF"/>
-                </a:solidFill>
-                <a:latin typeface="Calibri"/>
-              </a:rPr>
-              <a:t>1</a:t>
-            </a:r>
-          </a:p>
-        </p:txBody>
-      </p:sp>
-      <p:sp>
-        <p:nvSpPr>
-          <p:cNvPr id="6" name="Rounded Rectangle 5"/>
+          <a:bodyPr rtlCol="0" anchor="ctr" lIns="182880" rIns="182880"/>
+          <a:lstStyle/>
+          <a:p>
+            <a:pPr algn="l"/>
+            <a:r>
+              <a:rPr sz="1800" b="1" u="sng">
+                <a:solidFill>
+                  <a:srgbClr val="E6A43C"/>
+                </a:solidFill>
+                <a:latin typeface="Calibri"/>
+              </a:rPr>
+              <a:t>Alternativa 1 — Profesional independiente (Art. 42 N°2 LIR)</a:t>
+            </a:r>
+          </a:p>
+        </p:txBody>
+      </p:sp>
+      <p:sp>
+        <p:nvSpPr>
+          <p:cNvPr id="6" name="Rectangle 5"/>
           <p:cNvSpPr/>
           <p:nvPr/>
         </p:nvSpPr>
         <p:spPr>
           <a:xfrm>
-            <a:off x="1234440" y="1554480"/>
-            <a:ext cx="3657600" cy="896112"/>
-          </a:xfrm>
-          <a:prstGeom prst="roundRect">
-            <a:avLst/>
-          </a:prstGeom>
-          <a:solidFill>
-            <a:srgbClr val="1A6B3C"/>
+            <a:off x="548640" y="2286000"/>
+            <a:ext cx="9601200" cy="960120"/>
+          </a:xfrm>
+          <a:prstGeom prst="rect">
+            <a:avLst/>
+          </a:prstGeom>
+          <a:solidFill>
+            <a:srgbClr val="F4F6F9"/>
           </a:solidFill>
           <a:ln>
             <a:noFill/>
@@ -7377,38 +7266,38 @@
           </a:fontRef>
         </p:style>
         <p:txBody>
-          <a:bodyPr rtlCol="0" anchor="ctr" wrap="square" lIns="137160" rIns="137160" tIns="91440" bIns="91440"/>
+          <a:bodyPr rtlCol="0" anchor="t" wrap="square" lIns="137160" rIns="137160" tIns="91440" bIns="91440"/>
           <a:lstStyle/>
           <a:p>
             <a:pPr algn="l"/>
             <a:r>
-              <a:rPr b="1" sz="1150">
-                <a:solidFill>
-                  <a:srgbClr val="FFFFFF"/>
-                </a:solidFill>
-                <a:latin typeface="Calibri"/>
-              </a:rPr>
-              <a:t>Profesional independiente</a:t>
-            </a:r>
-          </a:p>
-        </p:txBody>
-      </p:sp>
-      <p:sp>
-        <p:nvSpPr>
-          <p:cNvPr id="7" name="Rounded Rectangle 6"/>
+              <a:rPr sz="1050" b="0">
+                <a:solidFill>
+                  <a:srgbClr val="1C1C1C"/>
+                </a:solidFill>
+                <a:latin typeface="Calibri"/>
+              </a:rPr>
+              <a:t>El socio A ejerce como persona natural independiente, emite boletas de honorarios y declara en segunda categoría. Puede optar entre gastos efectivos o presuntos (30% con tope de 15 UTA). Tributa con IGC sobre la totalidad de los ingresos. Opción simple, sin exposición a NGA.</a:t>
+            </a:r>
+          </a:p>
+        </p:txBody>
+      </p:sp>
+      <p:sp>
+        <p:nvSpPr>
+          <p:cNvPr id="7" name="Rectangle 6"/>
           <p:cNvSpPr/>
           <p:nvPr/>
         </p:nvSpPr>
         <p:spPr>
           <a:xfrm>
-            <a:off x="4983480" y="1554480"/>
-            <a:ext cx="6858000" cy="896112"/>
-          </a:xfrm>
-          <a:prstGeom prst="roundRect">
-            <a:avLst/>
-          </a:prstGeom>
-          <a:solidFill>
-            <a:srgbClr val="F4F6F9"/>
+            <a:off x="548640" y="3319272"/>
+            <a:ext cx="9601200" cy="457200"/>
+          </a:xfrm>
+          <a:prstGeom prst="rect">
+            <a:avLst/>
+          </a:prstGeom>
+          <a:solidFill>
+            <a:srgbClr val="2B2B2B"/>
           </a:solidFill>
           <a:ln>
             <a:noFill/>
@@ -7430,38 +7319,38 @@
           </a:fontRef>
         </p:style>
         <p:txBody>
-          <a:bodyPr rtlCol="0" anchor="ctr" wrap="square" lIns="137160" rIns="137160" tIns="91440" bIns="91440"/>
+          <a:bodyPr rtlCol="0" anchor="ctr" lIns="182880" rIns="182880"/>
           <a:lstStyle/>
           <a:p>
             <a:pPr algn="l"/>
             <a:r>
-              <a:rPr b="0" sz="1050">
-                <a:solidFill>
-                  <a:srgbClr val="1C1C1C"/>
-                </a:solidFill>
-                <a:latin typeface="Calibri"/>
-              </a:rPr>
-              <a:t>Pedro emite boletas de honorarios y declara directamente. Puede deducir gastos efectivos o presuntos (30%, tope 15 UTA). Sin riesgo NGA.</a:t>
-            </a:r>
-          </a:p>
-        </p:txBody>
-      </p:sp>
-      <p:sp>
-        <p:nvSpPr>
-          <p:cNvPr id="8" name="Oval 7"/>
+              <a:rPr sz="1800" b="1" u="sng">
+                <a:solidFill>
+                  <a:srgbClr val="E6A43C"/>
+                </a:solidFill>
+                <a:latin typeface="Calibri"/>
+              </a:rPr>
+              <a:t>Alternativa 2 — Sociedad de profesionales con socios que ejerzan profesión</a:t>
+            </a:r>
+          </a:p>
+        </p:txBody>
+      </p:sp>
+      <p:sp>
+        <p:nvSpPr>
+          <p:cNvPr id="8" name="Rectangle 7"/>
           <p:cNvSpPr/>
           <p:nvPr/>
         </p:nvSpPr>
         <p:spPr>
           <a:xfrm>
-            <a:off x="566928" y="2688336"/>
-            <a:ext cx="512064" cy="512064"/>
-          </a:xfrm>
-          <a:prstGeom prst="ellipse">
-            <a:avLst/>
-          </a:prstGeom>
-          <a:solidFill>
-            <a:srgbClr val="1A3A5C"/>
+            <a:off x="548640" y="3776472"/>
+            <a:ext cx="9601200" cy="960120"/>
+          </a:xfrm>
+          <a:prstGeom prst="rect">
+            <a:avLst/>
+          </a:prstGeom>
+          <a:solidFill>
+            <a:srgbClr val="F4F6F9"/>
           </a:solidFill>
           <a:ln>
             <a:noFill/>
@@ -7483,38 +7372,38 @@
           </a:fontRef>
         </p:style>
         <p:txBody>
-          <a:bodyPr rtlCol="0" anchor="ctr" lIns="0" rIns="0" tIns="0" bIns="0"/>
-          <a:lstStyle/>
-          <a:p>
-            <a:pPr algn="ctr"/>
-            <a:r>
-              <a:rPr sz="1600" b="1">
-                <a:solidFill>
-                  <a:srgbClr val="FFFFFF"/>
-                </a:solidFill>
-                <a:latin typeface="Calibri"/>
-              </a:rPr>
-              <a:t>2</a:t>
-            </a:r>
-          </a:p>
-        </p:txBody>
-      </p:sp>
-      <p:sp>
-        <p:nvSpPr>
-          <p:cNvPr id="9" name="Rounded Rectangle 8"/>
+          <a:bodyPr rtlCol="0" anchor="t" wrap="square" lIns="137160" rIns="137160" tIns="91440" bIns="91440"/>
+          <a:lstStyle/>
+          <a:p>
+            <a:pPr algn="l"/>
+            <a:r>
+              <a:rPr sz="1050" b="0">
+                <a:solidFill>
+                  <a:srgbClr val="1C1C1C"/>
+                </a:solidFill>
+                <a:latin typeface="Calibri"/>
+              </a:rPr>
+              <a:t>Si A desea asociarse, debe hacerlo con profesionales que efectivamente coadyuven a la prestación de servicios para la sociedad. En ese caso D califica legítimamente como sociedad de profesionales y puede optar por tributar en primera o segunda categoría conforme al Art. 42 N°2 inc. 3° LIR.</a:t>
+            </a:r>
+          </a:p>
+        </p:txBody>
+      </p:sp>
+      <p:sp>
+        <p:nvSpPr>
+          <p:cNvPr id="9" name="Rectangle 8"/>
           <p:cNvSpPr/>
           <p:nvPr/>
         </p:nvSpPr>
         <p:spPr>
           <a:xfrm>
-            <a:off x="1234440" y="2496312"/>
-            <a:ext cx="3657600" cy="896112"/>
-          </a:xfrm>
-          <a:prstGeom prst="roundRect">
-            <a:avLst/>
-          </a:prstGeom>
-          <a:solidFill>
-            <a:srgbClr val="1A3A5C"/>
+            <a:off x="548640" y="4809744"/>
+            <a:ext cx="9601200" cy="457200"/>
+          </a:xfrm>
+          <a:prstGeom prst="rect">
+            <a:avLst/>
+          </a:prstGeom>
+          <a:solidFill>
+            <a:srgbClr val="2B2B2B"/>
           </a:solidFill>
           <a:ln>
             <a:noFill/>
@@ -7536,34 +7425,34 @@
           </a:fontRef>
         </p:style>
         <p:txBody>
-          <a:bodyPr rtlCol="0" anchor="ctr" wrap="square" lIns="137160" rIns="137160" tIns="91440" bIns="91440"/>
+          <a:bodyPr rtlCol="0" anchor="ctr" lIns="182880" rIns="182880"/>
           <a:lstStyle/>
           <a:p>
             <a:pPr algn="l"/>
             <a:r>
-              <a:rPr b="1" sz="1150">
-                <a:solidFill>
-                  <a:srgbClr val="FFFFFF"/>
-                </a:solidFill>
-                <a:latin typeface="Calibri"/>
-              </a:rPr>
-              <a:t>Sociedad con socios que trabajen de verdad</a:t>
-            </a:r>
-          </a:p>
-        </p:txBody>
-      </p:sp>
-      <p:sp>
-        <p:nvSpPr>
-          <p:cNvPr id="10" name="Rounded Rectangle 9"/>
+              <a:rPr sz="1800" b="1" u="sng">
+                <a:solidFill>
+                  <a:srgbClr val="E6A43C"/>
+                </a:solidFill>
+                <a:latin typeface="Calibri"/>
+              </a:rPr>
+              <a:t>Alternativa 3 — Distribución de utilidades proporcional al trabajo real</a:t>
+            </a:r>
+          </a:p>
+        </p:txBody>
+      </p:sp>
+      <p:sp>
+        <p:nvSpPr>
+          <p:cNvPr id="10" name="Rectangle 9"/>
           <p:cNvSpPr/>
           <p:nvPr/>
         </p:nvSpPr>
         <p:spPr>
           <a:xfrm>
-            <a:off x="4983480" y="2496312"/>
-            <a:ext cx="6858000" cy="896112"/>
-          </a:xfrm>
-          <a:prstGeom prst="roundRect">
+            <a:off x="548640" y="5266944"/>
+            <a:ext cx="9601200" cy="960120"/>
+          </a:xfrm>
+          <a:prstGeom prst="rect">
             <a:avLst/>
           </a:prstGeom>
           <a:solidFill>
@@ -7589,38 +7478,74 @@
           </a:fontRef>
         </p:style>
         <p:txBody>
-          <a:bodyPr rtlCol="0" anchor="ctr" wrap="square" lIns="137160" rIns="137160" tIns="91440" bIns="91440"/>
+          <a:bodyPr rtlCol="0" anchor="t" wrap="square" lIns="137160" rIns="137160" tIns="91440" bIns="91440"/>
           <a:lstStyle/>
           <a:p>
             <a:pPr algn="l"/>
             <a:r>
-              <a:rPr b="0" sz="1050">
+              <a:rPr sz="1050" b="0">
                 <a:solidFill>
                   <a:srgbClr val="1C1C1C"/>
                 </a:solidFill>
                 <a:latin typeface="Calibri"/>
               </a:rPr>
-              <a:t>Pedro se asocia con otros médicos que efectivamente atiendan pacientes. Cada socio aporta trabajo real → distribución de utilidades legítima.</a:t>
-            </a:r>
-          </a:p>
-        </p:txBody>
-      </p:sp>
-      <p:sp>
-        <p:nvSpPr>
-          <p:cNvPr id="11" name="Oval 10"/>
+              <a:t>Manteniendo a A, B y C como socios, los estatutos pueden contemplar:</a:t>
+            </a:r>
+          </a:p>
+          <a:p>
+            <a:pPr algn="l"/>
+            <a:r>
+              <a:rPr sz="1050" b="0">
+                <a:solidFill>
+                  <a:srgbClr val="1C1C1C"/>
+                </a:solidFill>
+                <a:latin typeface="Calibri"/>
+              </a:rPr>
+              <a:t>(i) participación social diferenciada acorde al aporte efectivo (ej. A 90%, B 5%, C 5%); o</a:t>
+            </a:r>
+          </a:p>
+          <a:p>
+            <a:pPr algn="l"/>
+            <a:r>
+              <a:rPr sz="1050" b="0">
+                <a:solidFill>
+                  <a:srgbClr val="1C1C1C"/>
+                </a:solidFill>
+                <a:latin typeface="Calibri"/>
+              </a:rPr>
+              <a:t>(ii) sueldo patronal a A previo al reparto de utilidades.</a:t>
+            </a:r>
+          </a:p>
+          <a:p>
+            <a:pPr algn="l"/>
+            <a:r>
+              <a:rPr sz="1050" b="0">
+                <a:solidFill>
+                  <a:srgbClr val="1C1C1C"/>
+                </a:solidFill>
+                <a:latin typeface="Calibri"/>
+              </a:rPr>
+              <a:t>La distribución debe reflejar la realidad económica del aporte.</a:t>
+            </a:r>
+          </a:p>
+        </p:txBody>
+      </p:sp>
+      <p:sp>
+        <p:nvSpPr>
+          <p:cNvPr id="11" name="Rectangle 10"/>
           <p:cNvSpPr/>
           <p:nvPr/>
         </p:nvSpPr>
         <p:spPr>
           <a:xfrm>
-            <a:off x="566928" y="3630168"/>
-            <a:ext cx="512064" cy="512064"/>
-          </a:xfrm>
-          <a:prstGeom prst="ellipse">
-            <a:avLst/>
-          </a:prstGeom>
-          <a:solidFill>
-            <a:srgbClr val="8EB4E3"/>
+            <a:off x="10332720" y="1828800"/>
+            <a:ext cx="1691640" cy="4526280"/>
+          </a:xfrm>
+          <a:prstGeom prst="rect">
+            <a:avLst/>
+          </a:prstGeom>
+          <a:solidFill>
+            <a:srgbClr val="FDE9D9"/>
           </a:solidFill>
           <a:ln>
             <a:noFill/>
@@ -7642,493 +7567,35 @@
           </a:fontRef>
         </p:style>
         <p:txBody>
-          <a:bodyPr rtlCol="0" anchor="ctr" lIns="0" rIns="0" tIns="0" bIns="0"/>
+          <a:bodyPr rtlCol="0" anchor="ctr" wrap="square" lIns="109728" rIns="109728" tIns="137160" bIns="137160"/>
           <a:lstStyle/>
           <a:p>
             <a:pPr algn="ctr"/>
             <a:r>
               <a:rPr sz="1600" b="1">
                 <a:solidFill>
-                  <a:srgbClr val="FFFFFF"/>
-                </a:solidFill>
-                <a:latin typeface="Calibri"/>
-              </a:rPr>
-              <a:t>3</a:t>
-            </a:r>
-          </a:p>
-        </p:txBody>
-      </p:sp>
-      <p:sp>
-        <p:nvSpPr>
-          <p:cNvPr id="12" name="Rounded Rectangle 11"/>
-          <p:cNvSpPr/>
-          <p:nvPr/>
-        </p:nvSpPr>
-        <p:spPr>
-          <a:xfrm>
-            <a:off x="1234440" y="3438144"/>
-            <a:ext cx="3657600" cy="896112"/>
-          </a:xfrm>
-          <a:prstGeom prst="roundRect">
-            <a:avLst/>
-          </a:prstGeom>
-          <a:solidFill>
-            <a:srgbClr val="8EB4E3"/>
-          </a:solidFill>
-          <a:ln>
-            <a:noFill/>
-          </a:ln>
-          <a:effectLst/>
-        </p:spPr>
-        <p:style>
-          <a:lnRef idx="1">
-            <a:schemeClr val="accent1"/>
-          </a:lnRef>
-          <a:fillRef idx="3">
-            <a:schemeClr val="accent1"/>
-          </a:fillRef>
-          <a:effectRef idx="2">
-            <a:schemeClr val="accent1"/>
-          </a:effectRef>
-          <a:fontRef idx="minor">
-            <a:schemeClr val="lt1"/>
-          </a:fontRef>
-        </p:style>
-        <p:txBody>
-          <a:bodyPr rtlCol="0" anchor="ctr" wrap="square" lIns="137160" rIns="137160" tIns="91440" bIns="91440"/>
-          <a:lstStyle/>
-          <a:p>
-            <a:pPr algn="l"/>
-            <a:r>
-              <a:rPr b="1" sz="1150">
-                <a:solidFill>
-                  <a:srgbClr val="1A3A5C"/>
-                </a:solidFill>
-                <a:latin typeface="Calibri"/>
-              </a:rPr>
-              <a:t>Distribución proporcional al trabajo (misma sociedad)</a:t>
-            </a:r>
-          </a:p>
-        </p:txBody>
-      </p:sp>
-      <p:sp>
-        <p:nvSpPr>
-          <p:cNvPr id="13" name="Rounded Rectangle 12"/>
-          <p:cNvSpPr/>
-          <p:nvPr/>
-        </p:nvSpPr>
-        <p:spPr>
-          <a:xfrm>
-            <a:off x="4983480" y="3438144"/>
-            <a:ext cx="6858000" cy="896112"/>
-          </a:xfrm>
-          <a:prstGeom prst="roundRect">
-            <a:avLst/>
-          </a:prstGeom>
-          <a:solidFill>
-            <a:srgbClr val="F4F6F9"/>
-          </a:solidFill>
-          <a:ln>
-            <a:noFill/>
-          </a:ln>
-          <a:effectLst/>
-        </p:spPr>
-        <p:style>
-          <a:lnRef idx="1">
-            <a:schemeClr val="accent1"/>
-          </a:lnRef>
-          <a:fillRef idx="3">
-            <a:schemeClr val="accent1"/>
-          </a:fillRef>
-          <a:effectRef idx="2">
-            <a:schemeClr val="accent1"/>
-          </a:effectRef>
-          <a:fontRef idx="minor">
-            <a:schemeClr val="lt1"/>
-          </a:fontRef>
-        </p:style>
-        <p:txBody>
-          <a:bodyPr rtlCol="0" anchor="ctr" wrap="square" lIns="137160" rIns="137160" tIns="91440" bIns="91440"/>
-          <a:lstStyle/>
-          <a:p>
-            <a:pPr algn="l"/>
-            <a:r>
-              <a:rPr b="0" sz="1050">
+                  <a:srgbClr val="C5501A"/>
+                </a:solidFill>
+                <a:latin typeface="Calibri"/>
+              </a:rPr>
+              <a:t>RESULTADO</a:t>
+            </a:r>
+          </a:p>
+          <a:p>
+            <a:pPr algn="ctr">
+              <a:spcBef>
+                <a:spcPts val="800"/>
+              </a:spcBef>
+            </a:pPr>
+            <a:r>
+              <a:rPr sz="1100">
                 <a:solidFill>
                   <a:srgbClr val="1C1C1C"/>
                 </a:solidFill>
                 <a:latin typeface="Calibri"/>
               </a:rPr>
-              <a:t>Si D se mantiene: Pedro recibe el 90% de utilidades y B/C el 5% c/u, acorde a su aporte real. Debe haber algún rol efectivo de B y C.</a:t>
-            </a:r>
-          </a:p>
-        </p:txBody>
-      </p:sp>
-      <p:sp>
-        <p:nvSpPr>
-          <p:cNvPr id="14" name="Oval 13"/>
-          <p:cNvSpPr/>
-          <p:nvPr/>
-        </p:nvSpPr>
-        <p:spPr>
-          <a:xfrm>
-            <a:off x="566928" y="4572000"/>
-            <a:ext cx="512064" cy="512064"/>
-          </a:xfrm>
-          <a:prstGeom prst="ellipse">
-            <a:avLst/>
-          </a:prstGeom>
-          <a:solidFill>
-            <a:srgbClr val="C5501A"/>
-          </a:solidFill>
-          <a:ln>
-            <a:noFill/>
-          </a:ln>
-          <a:effectLst/>
-        </p:spPr>
-        <p:style>
-          <a:lnRef idx="1">
-            <a:schemeClr val="accent1"/>
-          </a:lnRef>
-          <a:fillRef idx="3">
-            <a:schemeClr val="accent1"/>
-          </a:fillRef>
-          <a:effectRef idx="2">
-            <a:schemeClr val="accent1"/>
-          </a:effectRef>
-          <a:fontRef idx="minor">
-            <a:schemeClr val="lt1"/>
-          </a:fontRef>
-        </p:style>
-        <p:txBody>
-          <a:bodyPr rtlCol="0" anchor="ctr" lIns="0" rIns="0" tIns="0" bIns="0"/>
-          <a:lstStyle/>
-          <a:p>
-            <a:pPr algn="ctr"/>
-            <a:r>
-              <a:rPr sz="1600" b="1">
-                <a:solidFill>
-                  <a:srgbClr val="FFFFFF"/>
-                </a:solidFill>
-                <a:latin typeface="Calibri"/>
-              </a:rPr>
-              <a:t>4</a:t>
-            </a:r>
-          </a:p>
-        </p:txBody>
-      </p:sp>
-      <p:sp>
-        <p:nvSpPr>
-          <p:cNvPr id="15" name="Rounded Rectangle 14"/>
-          <p:cNvSpPr/>
-          <p:nvPr/>
-        </p:nvSpPr>
-        <p:spPr>
-          <a:xfrm>
-            <a:off x="1234440" y="4379976"/>
-            <a:ext cx="3657600" cy="896112"/>
-          </a:xfrm>
-          <a:prstGeom prst="roundRect">
-            <a:avLst/>
-          </a:prstGeom>
-          <a:solidFill>
-            <a:srgbClr val="C5501A"/>
-          </a:solidFill>
-          <a:ln>
-            <a:noFill/>
-          </a:ln>
-          <a:effectLst/>
-        </p:spPr>
-        <p:style>
-          <a:lnRef idx="1">
-            <a:schemeClr val="accent1"/>
-          </a:lnRef>
-          <a:fillRef idx="3">
-            <a:schemeClr val="accent1"/>
-          </a:fillRef>
-          <a:effectRef idx="2">
-            <a:schemeClr val="accent1"/>
-          </a:effectRef>
-          <a:fontRef idx="minor">
-            <a:schemeClr val="lt1"/>
-          </a:fontRef>
-        </p:style>
-        <p:txBody>
-          <a:bodyPr rtlCol="0" anchor="ctr" wrap="square" lIns="137160" rIns="137160" tIns="91440" bIns="91440"/>
-          <a:lstStyle/>
-          <a:p>
-            <a:pPr algn="l"/>
-            <a:r>
-              <a:rPr b="1" sz="1150">
-                <a:solidFill>
-                  <a:srgbClr val="FFFFFF"/>
-                </a:solidFill>
-                <a:latin typeface="Calibri"/>
-              </a:rPr>
-              <a:t>SpA — régimen Pro Pyme 14D N°3</a:t>
-            </a:r>
-          </a:p>
-        </p:txBody>
-      </p:sp>
-      <p:sp>
-        <p:nvSpPr>
-          <p:cNvPr id="16" name="Rounded Rectangle 15"/>
-          <p:cNvSpPr/>
-          <p:nvPr/>
-        </p:nvSpPr>
-        <p:spPr>
-          <a:xfrm>
-            <a:off x="4983480" y="4379976"/>
-            <a:ext cx="6858000" cy="896112"/>
-          </a:xfrm>
-          <a:prstGeom prst="roundRect">
-            <a:avLst/>
-          </a:prstGeom>
-          <a:solidFill>
-            <a:srgbClr val="F4F6F9"/>
-          </a:solidFill>
-          <a:ln>
-            <a:noFill/>
-          </a:ln>
-          <a:effectLst/>
-        </p:spPr>
-        <p:style>
-          <a:lnRef idx="1">
-            <a:schemeClr val="accent1"/>
-          </a:lnRef>
-          <a:fillRef idx="3">
-            <a:schemeClr val="accent1"/>
-          </a:fillRef>
-          <a:effectRef idx="2">
-            <a:schemeClr val="accent1"/>
-          </a:effectRef>
-          <a:fontRef idx="minor">
-            <a:schemeClr val="lt1"/>
-          </a:fontRef>
-        </p:style>
-        <p:txBody>
-          <a:bodyPr rtlCol="0" anchor="ctr" wrap="square" lIns="137160" rIns="137160" tIns="91440" bIns="91440"/>
-          <a:lstStyle/>
-          <a:p>
-            <a:pPr algn="l"/>
-            <a:r>
-              <a:rPr b="0" sz="1050">
-                <a:solidFill>
-                  <a:srgbClr val="1C1C1C"/>
-                </a:solidFill>
-                <a:latin typeface="Calibri"/>
-              </a:rPr>
-              <a:t>Pedro constituye SpA. IDPC al 25%; Pedro paga IGC sobre retiros. Permite reinversión y planificación. Exige sustancia económica.</a:t>
-            </a:r>
-          </a:p>
-        </p:txBody>
-      </p:sp>
-      <p:sp>
-        <p:nvSpPr>
-          <p:cNvPr id="17" name="Oval 16"/>
-          <p:cNvSpPr/>
-          <p:nvPr/>
-        </p:nvSpPr>
-        <p:spPr>
-          <a:xfrm>
-            <a:off x="566928" y="5513832"/>
-            <a:ext cx="512064" cy="512064"/>
-          </a:xfrm>
-          <a:prstGeom prst="ellipse">
-            <a:avLst/>
-          </a:prstGeom>
-          <a:solidFill>
-            <a:srgbClr val="E6A43C"/>
-          </a:solidFill>
-          <a:ln>
-            <a:noFill/>
-          </a:ln>
-          <a:effectLst/>
-        </p:spPr>
-        <p:style>
-          <a:lnRef idx="1">
-            <a:schemeClr val="accent1"/>
-          </a:lnRef>
-          <a:fillRef idx="3">
-            <a:schemeClr val="accent1"/>
-          </a:fillRef>
-          <a:effectRef idx="2">
-            <a:schemeClr val="accent1"/>
-          </a:effectRef>
-          <a:fontRef idx="minor">
-            <a:schemeClr val="lt1"/>
-          </a:fontRef>
-        </p:style>
-        <p:txBody>
-          <a:bodyPr rtlCol="0" anchor="ctr" lIns="0" rIns="0" tIns="0" bIns="0"/>
-          <a:lstStyle/>
-          <a:p>
-            <a:pPr algn="ctr"/>
-            <a:r>
-              <a:rPr sz="1600" b="1">
-                <a:solidFill>
-                  <a:srgbClr val="FFFFFF"/>
-                </a:solidFill>
-                <a:latin typeface="Calibri"/>
-              </a:rPr>
-              <a:t>5</a:t>
-            </a:r>
-          </a:p>
-        </p:txBody>
-      </p:sp>
-      <p:sp>
-        <p:nvSpPr>
-          <p:cNvPr id="18" name="Rounded Rectangle 17"/>
-          <p:cNvSpPr/>
-          <p:nvPr/>
-        </p:nvSpPr>
-        <p:spPr>
-          <a:xfrm>
-            <a:off x="1234440" y="5321808"/>
-            <a:ext cx="3657600" cy="896112"/>
-          </a:xfrm>
-          <a:prstGeom prst="roundRect">
-            <a:avLst/>
-          </a:prstGeom>
-          <a:solidFill>
-            <a:srgbClr val="E6A43C"/>
-          </a:solidFill>
-          <a:ln>
-            <a:noFill/>
-          </a:ln>
-          <a:effectLst/>
-        </p:spPr>
-        <p:style>
-          <a:lnRef idx="1">
-            <a:schemeClr val="accent1"/>
-          </a:lnRef>
-          <a:fillRef idx="3">
-            <a:schemeClr val="accent1"/>
-          </a:fillRef>
-          <a:effectRef idx="2">
-            <a:schemeClr val="accent1"/>
-          </a:effectRef>
-          <a:fontRef idx="minor">
-            <a:schemeClr val="lt1"/>
-          </a:fontRef>
-        </p:style>
-        <p:txBody>
-          <a:bodyPr rtlCol="0" anchor="ctr" wrap="square" lIns="137160" rIns="137160" tIns="91440" bIns="91440"/>
-          <a:lstStyle/>
-          <a:p>
-            <a:pPr algn="l"/>
-            <a:r>
-              <a:rPr b="1" sz="1150">
-                <a:solidFill>
-                  <a:srgbClr val="FFFFFF"/>
-                </a:solidFill>
-                <a:latin typeface="Calibri"/>
-              </a:rPr>
-              <a:t>Régimen Transparente 14D N°8</a:t>
-            </a:r>
-          </a:p>
-        </p:txBody>
-      </p:sp>
-      <p:sp>
-        <p:nvSpPr>
-          <p:cNvPr id="19" name="Rounded Rectangle 18"/>
-          <p:cNvSpPr/>
-          <p:nvPr/>
-        </p:nvSpPr>
-        <p:spPr>
-          <a:xfrm>
-            <a:off x="4983480" y="5321808"/>
-            <a:ext cx="6858000" cy="896112"/>
-          </a:xfrm>
-          <a:prstGeom prst="roundRect">
-            <a:avLst/>
-          </a:prstGeom>
-          <a:solidFill>
-            <a:srgbClr val="F4F6F9"/>
-          </a:solidFill>
-          <a:ln>
-            <a:noFill/>
-          </a:ln>
-          <a:effectLst/>
-        </p:spPr>
-        <p:style>
-          <a:lnRef idx="1">
-            <a:schemeClr val="accent1"/>
-          </a:lnRef>
-          <a:fillRef idx="3">
-            <a:schemeClr val="accent1"/>
-          </a:fillRef>
-          <a:effectRef idx="2">
-            <a:schemeClr val="accent1"/>
-          </a:effectRef>
-          <a:fontRef idx="minor">
-            <a:schemeClr val="lt1"/>
-          </a:fontRef>
-        </p:style>
-        <p:txBody>
-          <a:bodyPr rtlCol="0" anchor="ctr" wrap="square" lIns="137160" rIns="137160" tIns="91440" bIns="91440"/>
-          <a:lstStyle/>
-          <a:p>
-            <a:pPr algn="l"/>
-            <a:r>
-              <a:rPr b="0" sz="1050">
-                <a:solidFill>
-                  <a:srgbClr val="1C1C1C"/>
-                </a:solidFill>
-                <a:latin typeface="Calibri"/>
-              </a:rPr>
-              <a:t>La empresa no paga IDPC; socios pagan IGC directo. Solo válido si los socios tienen rol económico real; no resuelve el problema si B y C siguen sin trabajar.</a:t>
-            </a:r>
-          </a:p>
-        </p:txBody>
-      </p:sp>
-      <p:sp>
-        <p:nvSpPr>
-          <p:cNvPr id="20" name="Rounded Rectangle 19"/>
-          <p:cNvSpPr/>
-          <p:nvPr/>
-        </p:nvSpPr>
-        <p:spPr>
-          <a:xfrm>
-            <a:off x="274320" y="6492240"/>
-            <a:ext cx="11612880" cy="274320"/>
-          </a:xfrm>
-          <a:prstGeom prst="roundRect">
-            <a:avLst/>
-          </a:prstGeom>
-          <a:noFill/>
-          <a:ln>
-            <a:noFill/>
-          </a:ln>
-          <a:effectLst/>
-        </p:spPr>
-        <p:style>
-          <a:lnRef idx="1">
-            <a:schemeClr val="accent1"/>
-          </a:lnRef>
-          <a:fillRef idx="3">
-            <a:schemeClr val="accent1"/>
-          </a:fillRef>
-          <a:effectRef idx="2">
-            <a:schemeClr val="accent1"/>
-          </a:effectRef>
-          <a:fontRef idx="minor">
-            <a:schemeClr val="lt1"/>
-          </a:fontRef>
-        </p:style>
-        <p:txBody>
-          <a:bodyPr rtlCol="0" anchor="t" wrap="square" lIns="137160" rIns="137160" tIns="91440" bIns="91440"/>
-          <a:lstStyle/>
-          <a:p>
-            <a:pPr algn="r"/>
-            <a:r>
-              <a:rPr b="0" sz="800">
-                <a:solidFill>
-                  <a:srgbClr val="555555"/>
-                </a:solidFill>
-                <a:latin typeface="Calibri"/>
-              </a:rPr>
-              <a:t>Caso 86 · Catálogo SII 2025 · Grupo 4 — Magíster Dirección Tributaria UVM  |  8</a:t>
+              <a:t>
+Toda alternativa debe poder acreditar SUSTANCIA ECONÓMICA REAL. La sola existencia formal de la figura no es suficiente.</a:t>
             </a:r>
           </a:p>
         </p:txBody>
@@ -8204,7 +7671,7 @@
         <p:spPr>
           <a:xfrm>
             <a:off x="548640" y="274320"/>
-            <a:ext cx="10972800" cy="731520"/>
+            <a:ext cx="11064240" cy="822960"/>
           </a:xfrm>
           <a:prstGeom prst="rect">
             <a:avLst/>
@@ -8219,32 +7686,34 @@
           <a:p>
             <a:pPr algn="l"/>
             <a:r>
-              <a:rPr sz="3400" b="0" i="0">
+              <a:rPr sz="3600" b="0" i="0">
                 <a:solidFill>
                   <a:srgbClr val="1C1C1C"/>
                 </a:solidFill>
                 <a:latin typeface="Cambria"/>
               </a:rPr>
-              <a:t>Conclusiones</a:t>
-            </a:r>
-          </a:p>
-        </p:txBody>
-      </p:sp>
-      <p:sp>
-        <p:nvSpPr>
-          <p:cNvPr id="4" name="Rounded Rectangle 3"/>
+              <a:t>Alternativas legítimas de solución (2/2)</a:t>
+            </a:r>
+          </a:p>
+        </p:txBody>
+      </p:sp>
+      <p:sp>
+        <p:nvSpPr>
+          <p:cNvPr id="4" name="Rectangle 3"/>
           <p:cNvSpPr/>
           <p:nvPr/>
         </p:nvSpPr>
         <p:spPr>
           <a:xfrm>
-            <a:off x="548640" y="1005840"/>
-            <a:ext cx="10972800" cy="411480"/>
-          </a:xfrm>
-          <a:prstGeom prst="roundRect">
-            <a:avLst/>
-          </a:prstGeom>
-          <a:noFill/>
+            <a:off x="548640" y="1143000"/>
+            <a:ext cx="9601200" cy="502920"/>
+          </a:xfrm>
+          <a:prstGeom prst="rect">
+            <a:avLst/>
+          </a:prstGeom>
+          <a:solidFill>
+            <a:srgbClr val="2B2B2B"/>
+          </a:solidFill>
           <a:ln>
             <a:noFill/>
           </a:ln>
@@ -8265,38 +7734,38 @@
           </a:fontRef>
         </p:style>
         <p:txBody>
-          <a:bodyPr rtlCol="0" anchor="t" wrap="square" lIns="137160" rIns="137160" tIns="91440" bIns="91440"/>
+          <a:bodyPr rtlCol="0" anchor="ctr" lIns="182880" rIns="182880"/>
           <a:lstStyle/>
           <a:p>
             <a:pPr algn="l"/>
             <a:r>
-              <a:rPr b="0" sz="1400">
-                <a:solidFill>
-                  <a:srgbClr val="555555"/>
-                </a:solidFill>
-                <a:latin typeface="Calibri"/>
-              </a:rPr>
-              <a:t>Caso 86 — ¿Qué aprendemos?</a:t>
-            </a:r>
-          </a:p>
-        </p:txBody>
-      </p:sp>
-      <p:sp>
-        <p:nvSpPr>
-          <p:cNvPr id="5" name="Oval 4"/>
+              <a:rPr sz="1800" b="1" u="sng">
+                <a:solidFill>
+                  <a:srgbClr val="E6A43C"/>
+                </a:solidFill>
+                <a:latin typeface="Calibri"/>
+              </a:rPr>
+              <a:t>Vehículos societarios con sustancia económica</a:t>
+            </a:r>
+          </a:p>
+        </p:txBody>
+      </p:sp>
+      <p:sp>
+        <p:nvSpPr>
+          <p:cNvPr id="5" name="Rectangle 4"/>
           <p:cNvSpPr/>
           <p:nvPr/>
         </p:nvSpPr>
         <p:spPr>
           <a:xfrm>
-            <a:off x="548640" y="1746504"/>
-            <a:ext cx="512064" cy="512064"/>
-          </a:xfrm>
-          <a:prstGeom prst="ellipse">
-            <a:avLst/>
-          </a:prstGeom>
-          <a:solidFill>
-            <a:srgbClr val="B03030"/>
+            <a:off x="548640" y="1828800"/>
+            <a:ext cx="9601200" cy="457200"/>
+          </a:xfrm>
+          <a:prstGeom prst="rect">
+            <a:avLst/>
+          </a:prstGeom>
+          <a:solidFill>
+            <a:srgbClr val="2B2B2B"/>
           </a:solidFill>
           <a:ln>
             <a:noFill/>
@@ -8318,38 +7787,38 @@
           </a:fontRef>
         </p:style>
         <p:txBody>
-          <a:bodyPr rtlCol="0" anchor="ctr" lIns="0" rIns="0" tIns="0" bIns="0"/>
-          <a:lstStyle/>
-          <a:p>
-            <a:pPr algn="ctr"/>
-            <a:r>
-              <a:rPr sz="1600" b="1">
-                <a:solidFill>
-                  <a:srgbClr val="FFFFFF"/>
-                </a:solidFill>
-                <a:latin typeface="Calibri"/>
-              </a:rPr>
-              <a:t>1</a:t>
-            </a:r>
-          </a:p>
-        </p:txBody>
-      </p:sp>
-      <p:sp>
-        <p:nvSpPr>
-          <p:cNvPr id="6" name="Rounded Rectangle 5"/>
+          <a:bodyPr rtlCol="0" anchor="ctr" lIns="182880" rIns="182880"/>
+          <a:lstStyle/>
+          <a:p>
+            <a:pPr algn="l"/>
+            <a:r>
+              <a:rPr sz="1800" b="1" u="sng">
+                <a:solidFill>
+                  <a:srgbClr val="E6A43C"/>
+                </a:solidFill>
+                <a:latin typeface="Calibri"/>
+              </a:rPr>
+              <a:t>Alternativa 4 — SpA acogida al régimen Pro Pyme 14 D N°3 LIR</a:t>
+            </a:r>
+          </a:p>
+        </p:txBody>
+      </p:sp>
+      <p:sp>
+        <p:nvSpPr>
+          <p:cNvPr id="6" name="Rectangle 5"/>
           <p:cNvSpPr/>
           <p:nvPr/>
         </p:nvSpPr>
         <p:spPr>
           <a:xfrm>
-            <a:off x="1234440" y="1600200"/>
-            <a:ext cx="2926080" cy="804672"/>
-          </a:xfrm>
-          <a:prstGeom prst="roundRect">
-            <a:avLst/>
-          </a:prstGeom>
-          <a:solidFill>
-            <a:srgbClr val="B03030"/>
+            <a:off x="548640" y="2286000"/>
+            <a:ext cx="9601200" cy="1371600"/>
+          </a:xfrm>
+          <a:prstGeom prst="rect">
+            <a:avLst/>
+          </a:prstGeom>
+          <a:solidFill>
+            <a:srgbClr val="F4F6F9"/>
           </a:solidFill>
           <a:ln>
             <a:noFill/>
@@ -8371,38 +7840,38 @@
           </a:fontRef>
         </p:style>
         <p:txBody>
-          <a:bodyPr rtlCol="0" anchor="ctr" wrap="square" lIns="137160" rIns="137160" tIns="91440" bIns="91440"/>
+          <a:bodyPr rtlCol="0" anchor="t" wrap="square" lIns="137160" rIns="137160" tIns="91440" bIns="91440"/>
           <a:lstStyle/>
           <a:p>
             <a:pPr algn="l"/>
             <a:r>
-              <a:rPr b="1" sz="1150">
-                <a:solidFill>
-                  <a:srgbClr val="FFFFFF"/>
-                </a:solidFill>
-                <a:latin typeface="Calibri"/>
-              </a:rPr>
-              <a:t>Abuso, no simulación</a:t>
-            </a:r>
-          </a:p>
-        </p:txBody>
-      </p:sp>
-      <p:sp>
-        <p:nvSpPr>
-          <p:cNvPr id="7" name="Rounded Rectangle 6"/>
+              <a:rPr sz="1050" b="0">
+                <a:solidFill>
+                  <a:srgbClr val="1C1C1C"/>
+                </a:solidFill>
+                <a:latin typeface="Calibri"/>
+              </a:rPr>
+              <a:t>Constitución de Sociedad por Acciones (SpA) acogida al régimen Pro Pyme General del Art. 14 letra D N°3 de la LIR, con tasa de IDPC del 25%. Permite planificación de retiros y reinversión. No tiene las restricciones específicas de la sociedad de profesionales del Art. 42 N°2, pero exige sustancia económica real en la sociedad.</a:t>
+            </a:r>
+          </a:p>
+        </p:txBody>
+      </p:sp>
+      <p:sp>
+        <p:nvSpPr>
+          <p:cNvPr id="7" name="Rectangle 6"/>
           <p:cNvSpPr/>
           <p:nvPr/>
         </p:nvSpPr>
         <p:spPr>
           <a:xfrm>
-            <a:off x="4251960" y="1600200"/>
-            <a:ext cx="7589520" cy="804672"/>
-          </a:xfrm>
-          <a:prstGeom prst="roundRect">
-            <a:avLst/>
-          </a:prstGeom>
-          <a:solidFill>
-            <a:srgbClr val="F4F6F9"/>
+            <a:off x="548640" y="3749040"/>
+            <a:ext cx="9601200" cy="457200"/>
+          </a:xfrm>
+          <a:prstGeom prst="rect">
+            <a:avLst/>
+          </a:prstGeom>
+          <a:solidFill>
+            <a:srgbClr val="2B2B2B"/>
           </a:solidFill>
           <a:ln>
             <a:noFill/>
@@ -8424,38 +7893,38 @@
           </a:fontRef>
         </p:style>
         <p:txBody>
-          <a:bodyPr rtlCol="0" anchor="ctr" wrap="square" lIns="137160" rIns="137160" tIns="91440" bIns="91440"/>
+          <a:bodyPr rtlCol="0" anchor="ctr" lIns="182880" rIns="182880"/>
           <a:lstStyle/>
           <a:p>
             <a:pPr algn="l"/>
             <a:r>
-              <a:rPr b="0" sz="1050">
-                <a:solidFill>
-                  <a:srgbClr val="1C1C1C"/>
-                </a:solidFill>
-                <a:latin typeface="Calibri"/>
-              </a:rPr>
-              <a:t>Los actos son reales. El problema es la FORMA inapropiada. La sociedad y los socios existen, pero B y C no aportan valor económico real.</a:t>
-            </a:r>
-          </a:p>
-        </p:txBody>
-      </p:sp>
-      <p:sp>
-        <p:nvSpPr>
-          <p:cNvPr id="8" name="Oval 7"/>
+              <a:rPr sz="1800" b="1" u="sng">
+                <a:solidFill>
+                  <a:srgbClr val="E6A43C"/>
+                </a:solidFill>
+                <a:latin typeface="Calibri"/>
+              </a:rPr>
+              <a:t>Alternativa 5 — Régimen Pro Pyme Transparente — 14 D N°8 LIR</a:t>
+            </a:r>
+          </a:p>
+        </p:txBody>
+      </p:sp>
+      <p:sp>
+        <p:nvSpPr>
+          <p:cNvPr id="8" name="Rectangle 7"/>
           <p:cNvSpPr/>
           <p:nvPr/>
         </p:nvSpPr>
         <p:spPr>
           <a:xfrm>
-            <a:off x="548640" y="2624328"/>
-            <a:ext cx="512064" cy="512064"/>
-          </a:xfrm>
-          <a:prstGeom prst="ellipse">
-            <a:avLst/>
-          </a:prstGeom>
-          <a:solidFill>
-            <a:srgbClr val="C5501A"/>
+            <a:off x="548640" y="4206240"/>
+            <a:ext cx="9601200" cy="1371600"/>
+          </a:xfrm>
+          <a:prstGeom prst="rect">
+            <a:avLst/>
+          </a:prstGeom>
+          <a:solidFill>
+            <a:srgbClr val="F4F6F9"/>
           </a:solidFill>
           <a:ln>
             <a:noFill/>
@@ -8477,38 +7946,38 @@
           </a:fontRef>
         </p:style>
         <p:txBody>
-          <a:bodyPr rtlCol="0" anchor="ctr" lIns="0" rIns="0" tIns="0" bIns="0"/>
-          <a:lstStyle/>
-          <a:p>
-            <a:pPr algn="ctr"/>
-            <a:r>
-              <a:rPr sz="1600" b="1">
-                <a:solidFill>
-                  <a:srgbClr val="FFFFFF"/>
-                </a:solidFill>
-                <a:latin typeface="Calibri"/>
-              </a:rPr>
-              <a:t>2</a:t>
-            </a:r>
-          </a:p>
-        </p:txBody>
-      </p:sp>
-      <p:sp>
-        <p:nvSpPr>
-          <p:cNvPr id="9" name="Rounded Rectangle 8"/>
+          <a:bodyPr rtlCol="0" anchor="t" wrap="square" lIns="137160" rIns="137160" tIns="91440" bIns="91440"/>
+          <a:lstStyle/>
+          <a:p>
+            <a:pPr algn="l"/>
+            <a:r>
+              <a:rPr sz="1050" b="0">
+                <a:solidFill>
+                  <a:srgbClr val="1C1C1C"/>
+                </a:solidFill>
+                <a:latin typeface="Calibri"/>
+              </a:rPr>
+              <a:t>Si los socios son únicamente personas naturales, puede evaluarse el régimen transparente del Art. 14 letra D N°8 LIR: la empresa no paga IDPC y los socios tributan directamente con IGC. ATENCIÓN: este régimen no resuelve el problema de fondo si B y C siguen siendo socios sin sustancia económica real; el SII puede igualmente aplicar las NGA.</a:t>
+            </a:r>
+          </a:p>
+        </p:txBody>
+      </p:sp>
+      <p:sp>
+        <p:nvSpPr>
+          <p:cNvPr id="9" name="Rectangle 8"/>
           <p:cNvSpPr/>
           <p:nvPr/>
         </p:nvSpPr>
         <p:spPr>
           <a:xfrm>
-            <a:off x="1234440" y="2478024"/>
-            <a:ext cx="2926080" cy="804672"/>
-          </a:xfrm>
-          <a:prstGeom prst="roundRect">
-            <a:avLst/>
-          </a:prstGeom>
-          <a:solidFill>
-            <a:srgbClr val="C5501A"/>
+            <a:off x="10332720" y="1828800"/>
+            <a:ext cx="1691640" cy="4526280"/>
+          </a:xfrm>
+          <a:prstGeom prst="rect">
+            <a:avLst/>
+          </a:prstGeom>
+          <a:solidFill>
+            <a:srgbClr val="FDE9D9"/>
           </a:solidFill>
           <a:ln>
             <a:noFill/>
@@ -8530,38 +7999,73 @@
           </a:fontRef>
         </p:style>
         <p:txBody>
-          <a:bodyPr rtlCol="0" anchor="ctr" wrap="square" lIns="137160" rIns="137160" tIns="91440" bIns="91440"/>
-          <a:lstStyle/>
-          <a:p>
-            <a:pPr algn="l"/>
-            <a:r>
-              <a:rPr b="1" sz="1150">
-                <a:solidFill>
-                  <a:srgbClr val="FFFFFF"/>
-                </a:solidFill>
-                <a:latin typeface="Calibri"/>
-              </a:rPr>
-              <a:t>La sociedad D no califica</a:t>
-            </a:r>
-          </a:p>
-        </p:txBody>
-      </p:sp>
-      <p:sp>
-        <p:nvSpPr>
-          <p:cNvPr id="10" name="Rounded Rectangle 9"/>
+          <a:bodyPr rtlCol="0" anchor="ctr" wrap="square" lIns="109728" rIns="109728" tIns="137160" bIns="137160"/>
+          <a:lstStyle/>
+          <a:p>
+            <a:pPr algn="ctr"/>
+            <a:r>
+              <a:rPr sz="1600" b="1">
+                <a:solidFill>
+                  <a:srgbClr val="C5501A"/>
+                </a:solidFill>
+                <a:latin typeface="Calibri"/>
+              </a:rPr>
+              <a:t>RESULTADO</a:t>
+            </a:r>
+          </a:p>
+          <a:p>
+            <a:pPr algn="ctr">
+              <a:spcBef>
+                <a:spcPts val="800"/>
+              </a:spcBef>
+            </a:pPr>
+            <a:r>
+              <a:rPr sz="1100">
+                <a:solidFill>
+                  <a:srgbClr val="1C1C1C"/>
+                </a:solidFill>
+                <a:latin typeface="Calibri"/>
+              </a:rPr>
+              <a:t>
+La elección de la estructura dependerá de los objetivos del contribuyente, el nivel de ingresos y la composición real del equipo profesional.</a:t>
+            </a:r>
+          </a:p>
+        </p:txBody>
+      </p:sp>
+    </p:spTree>
+  </p:cSld>
+  <p:clrMapOvr>
+    <a:masterClrMapping/>
+  </p:clrMapOvr>
+</p:sld>
+</file>
+
+<file path=ppt/slides/slide8.xml><?xml version="1.0" encoding="utf-8"?>
+<p:sld xmlns:a="http://schemas.openxmlformats.org/drawingml/2006/main" xmlns:p="http://schemas.openxmlformats.org/presentationml/2006/main" xmlns:r="http://schemas.openxmlformats.org/officeDocument/2006/relationships">
+  <p:cSld>
+    <p:spTree>
+      <p:nvGrpSpPr>
+        <p:cNvPr id="1" name=""/>
+        <p:cNvGrpSpPr/>
+        <p:nvPr/>
+      </p:nvGrpSpPr>
+      <p:grpSpPr/>
+      <p:sp>
+        <p:nvSpPr>
+          <p:cNvPr id="2" name="Rectangle 1"/>
           <p:cNvSpPr/>
           <p:nvPr/>
         </p:nvSpPr>
         <p:spPr>
           <a:xfrm>
-            <a:off x="4251960" y="2478024"/>
-            <a:ext cx="7589520" cy="804672"/>
-          </a:xfrm>
-          <a:prstGeom prst="roundRect">
-            <a:avLst/>
-          </a:prstGeom>
-          <a:solidFill>
-            <a:srgbClr val="F4F6F9"/>
+            <a:off x="0" y="0"/>
+            <a:ext cx="12191695" cy="6858000"/>
+          </a:xfrm>
+          <a:prstGeom prst="rect">
+            <a:avLst/>
+          </a:prstGeom>
+          <a:solidFill>
+            <a:srgbClr val="CBCBCB"/>
           </a:solidFill>
           <a:ln>
             <a:noFill/>
@@ -8583,38 +8087,64 @@
           </a:fontRef>
         </p:style>
         <p:txBody>
-          <a:bodyPr rtlCol="0" anchor="ctr" wrap="square" lIns="137160" rIns="137160" tIns="91440" bIns="91440"/>
+          <a:bodyPr rtlCol="0" anchor="ctr"/>
+          <a:lstStyle/>
+          <a:p>
+            <a:pPr algn="ctr"/>
+          </a:p>
+        </p:txBody>
+      </p:sp>
+      <p:sp>
+        <p:nvSpPr>
+          <p:cNvPr id="3" name="TextBox 2"/>
+          <p:cNvSpPr txBox="1"/>
+          <p:nvPr/>
+        </p:nvSpPr>
+        <p:spPr>
+          <a:xfrm>
+            <a:off x="548640" y="274320"/>
+            <a:ext cx="11064240" cy="822960"/>
+          </a:xfrm>
+          <a:prstGeom prst="rect">
+            <a:avLst/>
+          </a:prstGeom>
+          <a:noFill/>
+        </p:spPr>
+        <p:txBody>
+          <a:bodyPr wrap="square" lIns="0" rIns="0" tIns="0" bIns="0">
+            <a:spAutoFit/>
+          </a:bodyPr>
           <a:lstStyle/>
           <a:p>
             <a:pPr algn="l"/>
             <a:r>
-              <a:rPr b="0" sz="1050">
+              <a:rPr sz="3600" b="0" i="0">
                 <a:solidFill>
                   <a:srgbClr val="1C1C1C"/>
                 </a:solidFill>
-                <a:latin typeface="Calibri"/>
-              </a:rPr>
-              <a:t>Sin cumplir los requisitos de las Circulares N°21/1991 y N°50/2020, D no es sociedad de profesionales → el esquema no tiene amparo legal.</a:t>
-            </a:r>
-          </a:p>
-        </p:txBody>
-      </p:sp>
-      <p:sp>
-        <p:nvSpPr>
-          <p:cNvPr id="11" name="Oval 10"/>
+                <a:latin typeface="Cambria"/>
+              </a:rPr>
+              <a:t>Conclusiones</a:t>
+            </a:r>
+          </a:p>
+        </p:txBody>
+      </p:sp>
+      <p:sp>
+        <p:nvSpPr>
+          <p:cNvPr id="4" name="Rectangle 3"/>
           <p:cNvSpPr/>
           <p:nvPr/>
         </p:nvSpPr>
         <p:spPr>
           <a:xfrm>
-            <a:off x="548640" y="3502152"/>
-            <a:ext cx="512064" cy="512064"/>
-          </a:xfrm>
-          <a:prstGeom prst="ellipse">
-            <a:avLst/>
-          </a:prstGeom>
-          <a:solidFill>
-            <a:srgbClr val="1A3A5C"/>
+            <a:off x="548640" y="1143000"/>
+            <a:ext cx="9601200" cy="502920"/>
+          </a:xfrm>
+          <a:prstGeom prst="rect">
+            <a:avLst/>
+          </a:prstGeom>
+          <a:solidFill>
+            <a:srgbClr val="2B2B2B"/>
           </a:solidFill>
           <a:ln>
             <a:noFill/>
@@ -8636,38 +8166,38 @@
           </a:fontRef>
         </p:style>
         <p:txBody>
-          <a:bodyPr rtlCol="0" anchor="ctr" lIns="0" rIns="0" tIns="0" bIns="0"/>
-          <a:lstStyle/>
-          <a:p>
-            <a:pPr algn="ctr"/>
-            <a:r>
-              <a:rPr sz="1600" b="1">
-                <a:solidFill>
-                  <a:srgbClr val="FFFFFF"/>
-                </a:solidFill>
-                <a:latin typeface="Calibri"/>
-              </a:rPr>
-              <a:t>3</a:t>
-            </a:r>
-          </a:p>
-        </p:txBody>
-      </p:sp>
-      <p:sp>
-        <p:nvSpPr>
-          <p:cNvPr id="12" name="Rounded Rectangle 11"/>
+          <a:bodyPr rtlCol="0" anchor="ctr" lIns="182880" rIns="182880"/>
+          <a:lstStyle/>
+          <a:p>
+            <a:pPr algn="l"/>
+            <a:r>
+              <a:rPr sz="1800" b="1" u="sng">
+                <a:solidFill>
+                  <a:srgbClr val="E6A43C"/>
+                </a:solidFill>
+                <a:latin typeface="Calibri"/>
+              </a:rPr>
+              <a:t>Caso 86 — Síntesis del análisis del grupo</a:t>
+            </a:r>
+          </a:p>
+        </p:txBody>
+      </p:sp>
+      <p:sp>
+        <p:nvSpPr>
+          <p:cNvPr id="5" name="Rectangle 4"/>
           <p:cNvSpPr/>
           <p:nvPr/>
         </p:nvSpPr>
         <p:spPr>
           <a:xfrm>
-            <a:off x="1234440" y="3355848"/>
-            <a:ext cx="2926080" cy="804672"/>
-          </a:xfrm>
-          <a:prstGeom prst="roundRect">
-            <a:avLst/>
-          </a:prstGeom>
-          <a:solidFill>
-            <a:srgbClr val="1A3A5C"/>
+            <a:off x="548640" y="1828800"/>
+            <a:ext cx="9601200" cy="777240"/>
+          </a:xfrm>
+          <a:prstGeom prst="rect">
+            <a:avLst/>
+          </a:prstGeom>
+          <a:solidFill>
+            <a:srgbClr val="F4F6F9"/>
           </a:solidFill>
           <a:ln>
             <a:noFill/>
@@ -8694,29 +8224,29 @@
           <a:p>
             <a:pPr algn="l"/>
             <a:r>
-              <a:rPr b="1" sz="1150">
-                <a:solidFill>
-                  <a:srgbClr val="FFFFFF"/>
-                </a:solidFill>
-                <a:latin typeface="Calibri"/>
-              </a:rPr>
-              <a:t>El SII puede actuar — consecuencias concretas</a:t>
-            </a:r>
-          </a:p>
-        </p:txBody>
-      </p:sp>
-      <p:sp>
-        <p:nvSpPr>
-          <p:cNvPr id="13" name="Rounded Rectangle 12"/>
+              <a:rPr sz="1100" b="0">
+                <a:solidFill>
+                  <a:srgbClr val="1C1C1C"/>
+                </a:solidFill>
+                <a:latin typeface="Calibri"/>
+              </a:rPr>
+              <a:t>1.  El esquema configura ABUSO de las formas jurídicas (Art. 4 ter CT). No es simulación: los actos son reales, pero la forma jurídica es inapropiada para el sustrato económico que se quiere amparar.</a:t>
+            </a:r>
+          </a:p>
+        </p:txBody>
+      </p:sp>
+      <p:sp>
+        <p:nvSpPr>
+          <p:cNvPr id="6" name="Rectangle 5"/>
           <p:cNvSpPr/>
           <p:nvPr/>
         </p:nvSpPr>
         <p:spPr>
           <a:xfrm>
-            <a:off x="4251960" y="3355848"/>
-            <a:ext cx="7589520" cy="804672"/>
-          </a:xfrm>
-          <a:prstGeom prst="roundRect">
+            <a:off x="548640" y="2670048"/>
+            <a:ext cx="9601200" cy="777240"/>
+          </a:xfrm>
+          <a:prstGeom prst="rect">
             <a:avLst/>
           </a:prstGeom>
           <a:solidFill>
@@ -8747,33 +8277,33 @@
           <a:p>
             <a:pPr algn="l"/>
             <a:r>
-              <a:rPr b="0" sz="1050">
+              <a:rPr sz="1100" b="0">
                 <a:solidFill>
                   <a:srgbClr val="1C1C1C"/>
                 </a:solidFill>
                 <a:latin typeface="Calibri"/>
               </a:rPr>
-              <a:t>Art. 4 quinquies CT: declaración de abuso ante el TTA → Pedro recibe los $300 MM íntegros en su IGC + intereses + multas.</a:t>
-            </a:r>
-          </a:p>
-        </p:txBody>
-      </p:sp>
-      <p:sp>
-        <p:nvSpPr>
-          <p:cNvPr id="14" name="Oval 13"/>
+              <a:t>2.  La sociedad D NO califica como sociedad de profesionales conforme a las Circulares N°21/1991 y N°50/2020 del SII, dado que B y C no ejercen su profesión para la sociedad.</a:t>
+            </a:r>
+          </a:p>
+        </p:txBody>
+      </p:sp>
+      <p:sp>
+        <p:nvSpPr>
+          <p:cNvPr id="7" name="Rectangle 6"/>
           <p:cNvSpPr/>
           <p:nvPr/>
         </p:nvSpPr>
         <p:spPr>
           <a:xfrm>
-            <a:off x="548640" y="4379976"/>
-            <a:ext cx="512064" cy="512064"/>
-          </a:xfrm>
-          <a:prstGeom prst="ellipse">
-            <a:avLst/>
-          </a:prstGeom>
-          <a:solidFill>
-            <a:srgbClr val="1A6B3C"/>
+            <a:off x="548640" y="3511296"/>
+            <a:ext cx="9601200" cy="777240"/>
+          </a:xfrm>
+          <a:prstGeom prst="rect">
+            <a:avLst/>
+          </a:prstGeom>
+          <a:solidFill>
+            <a:srgbClr val="F4F6F9"/>
           </a:solidFill>
           <a:ln>
             <a:noFill/>
@@ -8795,38 +8325,38 @@
           </a:fontRef>
         </p:style>
         <p:txBody>
-          <a:bodyPr rtlCol="0" anchor="ctr" lIns="0" rIns="0" tIns="0" bIns="0"/>
-          <a:lstStyle/>
-          <a:p>
-            <a:pPr algn="ctr"/>
-            <a:r>
-              <a:rPr sz="1600" b="1">
-                <a:solidFill>
-                  <a:srgbClr val="FFFFFF"/>
-                </a:solidFill>
-                <a:latin typeface="Calibri"/>
-              </a:rPr>
-              <a:t>4</a:t>
-            </a:r>
-          </a:p>
-        </p:txBody>
-      </p:sp>
-      <p:sp>
-        <p:nvSpPr>
-          <p:cNvPr id="15" name="Rounded Rectangle 14"/>
+          <a:bodyPr rtlCol="0" anchor="ctr" wrap="square" lIns="137160" rIns="137160" tIns="91440" bIns="91440"/>
+          <a:lstStyle/>
+          <a:p>
+            <a:pPr algn="l"/>
+            <a:r>
+              <a:rPr sz="1100" b="0">
+                <a:solidFill>
+                  <a:srgbClr val="1C1C1C"/>
+                </a:solidFill>
+                <a:latin typeface="Calibri"/>
+              </a:rPr>
+              <a:t>3.  Configurándose los tres elementos del Art. 4 ter CT, el Director del SII puede requerir al Tribunal Tributario y Aduanero la declaración de abuso (Art. 4 quinquies CT), con atribución íntegra de los ingresos al socio A, más intereses y multas.</a:t>
+            </a:r>
+          </a:p>
+        </p:txBody>
+      </p:sp>
+      <p:sp>
+        <p:nvSpPr>
+          <p:cNvPr id="8" name="Rectangle 7"/>
           <p:cNvSpPr/>
           <p:nvPr/>
         </p:nvSpPr>
         <p:spPr>
           <a:xfrm>
-            <a:off x="1234440" y="4233672"/>
-            <a:ext cx="2926080" cy="804672"/>
-          </a:xfrm>
-          <a:prstGeom prst="roundRect">
-            <a:avLst/>
-          </a:prstGeom>
-          <a:solidFill>
-            <a:srgbClr val="1A6B3C"/>
+            <a:off x="548640" y="4352544"/>
+            <a:ext cx="9601200" cy="777240"/>
+          </a:xfrm>
+          <a:prstGeom prst="rect">
+            <a:avLst/>
+          </a:prstGeom>
+          <a:solidFill>
+            <a:srgbClr val="F4F6F9"/>
           </a:solidFill>
           <a:ln>
             <a:noFill/>
@@ -8853,29 +8383,29 @@
           <a:p>
             <a:pPr algn="l"/>
             <a:r>
-              <a:rPr b="1" sz="1150">
-                <a:solidFill>
-                  <a:srgbClr val="FFFFFF"/>
-                </a:solidFill>
-                <a:latin typeface="Calibri"/>
-              </a:rPr>
-              <a:t>La clave: sustancia económica</a:t>
-            </a:r>
-          </a:p>
-        </p:txBody>
-      </p:sp>
-      <p:sp>
-        <p:nvSpPr>
-          <p:cNvPr id="16" name="Rounded Rectangle 15"/>
+              <a:rPr sz="1100" b="0">
+                <a:solidFill>
+                  <a:srgbClr val="1C1C1C"/>
+                </a:solidFill>
+                <a:latin typeface="Calibri"/>
+              </a:rPr>
+              <a:t>4.  Existen alternativas legítimas de organización tributaria (profesional independiente, sociedad de profesionales con socios reales, distribución proporcional al trabajo, SpA Pro Pyme).</a:t>
+            </a:r>
+          </a:p>
+        </p:txBody>
+      </p:sp>
+      <p:sp>
+        <p:nvSpPr>
+          <p:cNvPr id="9" name="Rectangle 8"/>
           <p:cNvSpPr/>
           <p:nvPr/>
         </p:nvSpPr>
         <p:spPr>
           <a:xfrm>
-            <a:off x="4251960" y="4233672"/>
-            <a:ext cx="7589520" cy="804672"/>
-          </a:xfrm>
-          <a:prstGeom prst="roundRect">
+            <a:off x="548640" y="5193792"/>
+            <a:ext cx="9601200" cy="777240"/>
+          </a:xfrm>
+          <a:prstGeom prst="rect">
             <a:avLst/>
           </a:prstGeom>
           <a:solidFill>
@@ -8906,33 +8436,33 @@
           <a:p>
             <a:pPr algn="l"/>
             <a:r>
-              <a:rPr b="0" sz="1050">
+              <a:rPr sz="1100" b="0">
                 <a:solidFill>
                   <a:srgbClr val="1C1C1C"/>
                 </a:solidFill>
                 <a:latin typeface="Calibri"/>
               </a:rPr>
-              <a:t>Cualquier estructura es aceptable si cada socio aporta trabajo real, capital relevante, clientela o dirección. La forma jurídica sola no basta.</a:t>
-            </a:r>
-          </a:p>
-        </p:txBody>
-      </p:sp>
-      <p:sp>
-        <p:nvSpPr>
-          <p:cNvPr id="17" name="Oval 16"/>
+              <a:t>5.  Toda estructura debe poder acreditar SUSTANCIA ECONÓMICA REAL. La sola forma jurídica no es suficiente; el SII y los tribunales exigirán demostración del aporte efectivo de cada socio (trabajo, capital, clientela o dirección).</a:t>
+            </a:r>
+          </a:p>
+        </p:txBody>
+      </p:sp>
+      <p:sp>
+        <p:nvSpPr>
+          <p:cNvPr id="10" name="Rectangle 9"/>
           <p:cNvSpPr/>
           <p:nvPr/>
         </p:nvSpPr>
         <p:spPr>
           <a:xfrm>
-            <a:off x="548640" y="5257800"/>
-            <a:ext cx="512064" cy="512064"/>
-          </a:xfrm>
-          <a:prstGeom prst="ellipse">
-            <a:avLst/>
-          </a:prstGeom>
-          <a:solidFill>
-            <a:srgbClr val="8EB4E3"/>
+            <a:off x="10332720" y="1828800"/>
+            <a:ext cx="1691640" cy="4526280"/>
+          </a:xfrm>
+          <a:prstGeom prst="rect">
+            <a:avLst/>
+          </a:prstGeom>
+          <a:solidFill>
+            <a:srgbClr val="FDE9D9"/>
           </a:solidFill>
           <a:ln>
             <a:noFill/>
@@ -8954,38 +8484,73 @@
           </a:fontRef>
         </p:style>
         <p:txBody>
-          <a:bodyPr rtlCol="0" anchor="ctr" lIns="0" rIns="0" tIns="0" bIns="0"/>
+          <a:bodyPr rtlCol="0" anchor="ctr" wrap="square" lIns="109728" rIns="109728" tIns="137160" bIns="137160"/>
           <a:lstStyle/>
           <a:p>
             <a:pPr algn="ctr"/>
             <a:r>
               <a:rPr sz="1600" b="1">
                 <a:solidFill>
-                  <a:srgbClr val="1A3A5C"/>
-                </a:solidFill>
-                <a:latin typeface="Calibri"/>
-              </a:rPr>
-              <a:t>5</a:t>
-            </a:r>
-          </a:p>
-        </p:txBody>
-      </p:sp>
-      <p:sp>
-        <p:nvSpPr>
-          <p:cNvPr id="18" name="Rounded Rectangle 17"/>
+                  <a:srgbClr val="C5501A"/>
+                </a:solidFill>
+                <a:latin typeface="Calibri"/>
+              </a:rPr>
+              <a:t>RESULTADO</a:t>
+            </a:r>
+          </a:p>
+          <a:p>
+            <a:pPr algn="ctr">
+              <a:spcBef>
+                <a:spcPts val="800"/>
+              </a:spcBef>
+            </a:pPr>
+            <a:r>
+              <a:rPr sz="1100">
+                <a:solidFill>
+                  <a:srgbClr val="1C1C1C"/>
+                </a:solidFill>
+                <a:latin typeface="Calibri"/>
+              </a:rPr>
+              <a:t>
+El Caso 86 ilustra el límite entre la planificación tributaria legítima y el abuso: la forma jurídica debe estar respaldada por sustancia económica real.</a:t>
+            </a:r>
+          </a:p>
+        </p:txBody>
+      </p:sp>
+    </p:spTree>
+  </p:cSld>
+  <p:clrMapOvr>
+    <a:masterClrMapping/>
+  </p:clrMapOvr>
+</p:sld>
+</file>
+
+<file path=ppt/slides/slide9.xml><?xml version="1.0" encoding="utf-8"?>
+<p:sld xmlns:a="http://schemas.openxmlformats.org/drawingml/2006/main" xmlns:p="http://schemas.openxmlformats.org/presentationml/2006/main" xmlns:r="http://schemas.openxmlformats.org/officeDocument/2006/relationships">
+  <p:cSld>
+    <p:spTree>
+      <p:nvGrpSpPr>
+        <p:cNvPr id="1" name=""/>
+        <p:cNvGrpSpPr/>
+        <p:nvPr/>
+      </p:nvGrpSpPr>
+      <p:grpSpPr/>
+      <p:sp>
+        <p:nvSpPr>
+          <p:cNvPr id="2" name="Rectangle 1"/>
           <p:cNvSpPr/>
           <p:nvPr/>
         </p:nvSpPr>
         <p:spPr>
           <a:xfrm>
-            <a:off x="1234440" y="5111496"/>
-            <a:ext cx="2926080" cy="804672"/>
-          </a:xfrm>
-          <a:prstGeom prst="roundRect">
-            <a:avLst/>
-          </a:prstGeom>
-          <a:solidFill>
-            <a:srgbClr val="8EB4E3"/>
+            <a:off x="0" y="0"/>
+            <a:ext cx="12191695" cy="6858000"/>
+          </a:xfrm>
+          <a:prstGeom prst="rect">
+            <a:avLst/>
+          </a:prstGeom>
+          <a:solidFill>
+            <a:srgbClr val="2B2B2B"/>
           </a:solidFill>
           <a:ln>
             <a:noFill/>
@@ -9007,38 +8572,99 @@
           </a:fontRef>
         </p:style>
         <p:txBody>
-          <a:bodyPr rtlCol="0" anchor="ctr" wrap="square" lIns="137160" rIns="137160" tIns="91440" bIns="91440"/>
-          <a:lstStyle/>
-          <a:p>
-            <a:pPr algn="l"/>
-            <a:r>
-              <a:rPr b="1" sz="1150">
-                <a:solidFill>
-                  <a:srgbClr val="1A3A5C"/>
-                </a:solidFill>
-                <a:latin typeface="Calibri"/>
-              </a:rPr>
-              <a:t>Mensaje del Caso 86</a:t>
-            </a:r>
-          </a:p>
-        </p:txBody>
-      </p:sp>
-      <p:sp>
-        <p:nvSpPr>
-          <p:cNvPr id="19" name="Rounded Rectangle 18"/>
+          <a:bodyPr rtlCol="0" anchor="ctr"/>
+          <a:lstStyle/>
+          <a:p>
+            <a:pPr algn="ctr"/>
+          </a:p>
+        </p:txBody>
+      </p:sp>
+      <p:sp>
+        <p:nvSpPr>
+          <p:cNvPr id="3" name="TextBox 2"/>
+          <p:cNvSpPr txBox="1"/>
+          <p:nvPr/>
+        </p:nvSpPr>
+        <p:spPr>
+          <a:xfrm>
+            <a:off x="914400" y="1371600"/>
+            <a:ext cx="10332720" cy="914400"/>
+          </a:xfrm>
+          <a:prstGeom prst="rect">
+            <a:avLst/>
+          </a:prstGeom>
+          <a:noFill/>
+        </p:spPr>
+        <p:txBody>
+          <a:bodyPr wrap="square" lIns="0" rIns="0" tIns="0" bIns="0">
+            <a:spAutoFit/>
+          </a:bodyPr>
+          <a:lstStyle/>
+          <a:p>
+            <a:pPr algn="ctr"/>
+            <a:r>
+              <a:rPr sz="4800" b="1" i="0">
+                <a:solidFill>
+                  <a:srgbClr val="E6A43C"/>
+                </a:solidFill>
+                <a:latin typeface="Cambria"/>
+              </a:rPr>
+              <a:t>Grupo 4</a:t>
+            </a:r>
+          </a:p>
+        </p:txBody>
+      </p:sp>
+      <p:sp>
+        <p:nvSpPr>
+          <p:cNvPr id="4" name="TextBox 3"/>
+          <p:cNvSpPr txBox="1"/>
+          <p:nvPr/>
+        </p:nvSpPr>
+        <p:spPr>
+          <a:xfrm>
+            <a:off x="914400" y="2468880"/>
+            <a:ext cx="10332720" cy="548640"/>
+          </a:xfrm>
+          <a:prstGeom prst="rect">
+            <a:avLst/>
+          </a:prstGeom>
+          <a:noFill/>
+        </p:spPr>
+        <p:txBody>
+          <a:bodyPr wrap="square" lIns="0" rIns="0" tIns="0" bIns="0">
+            <a:spAutoFit/>
+          </a:bodyPr>
+          <a:lstStyle/>
+          <a:p>
+            <a:pPr algn="ctr"/>
+            <a:r>
+              <a:rPr sz="1800" b="0" i="0">
+                <a:solidFill>
+                  <a:srgbClr val="FFFFFF"/>
+                </a:solidFill>
+                <a:latin typeface="Calibri"/>
+              </a:rPr>
+              <a:t>Caso 86 — Catálogo de Esquemas Tributarios SII 2025</a:t>
+            </a:r>
+          </a:p>
+        </p:txBody>
+      </p:sp>
+      <p:sp>
+        <p:nvSpPr>
+          <p:cNvPr id="5" name="Rectangle 4"/>
           <p:cNvSpPr/>
           <p:nvPr/>
         </p:nvSpPr>
         <p:spPr>
           <a:xfrm>
-            <a:off x="4251960" y="5111496"/>
-            <a:ext cx="7589520" cy="804672"/>
-          </a:xfrm>
-          <a:prstGeom prst="roundRect">
-            <a:avLst/>
-          </a:prstGeom>
-          <a:solidFill>
-            <a:srgbClr val="F4F6F9"/>
+            <a:off x="1371600" y="3657600"/>
+            <a:ext cx="2240280" cy="640080"/>
+          </a:xfrm>
+          <a:prstGeom prst="rect">
+            <a:avLst/>
+          </a:prstGeom>
+          <a:solidFill>
+            <a:srgbClr val="FDE9D9"/>
           </a:solidFill>
           <a:ln>
             <a:noFill/>
@@ -9063,35 +8689,35 @@
           <a:bodyPr rtlCol="0" anchor="ctr" wrap="square" lIns="137160" rIns="137160" tIns="91440" bIns="91440"/>
           <a:lstStyle/>
           <a:p>
-            <a:pPr algn="l"/>
-            <a:r>
-              <a:rPr b="0" sz="1050">
-                <a:solidFill>
-                  <a:srgbClr val="1C1C1C"/>
-                </a:solidFill>
-                <a:latin typeface="Calibri"/>
-              </a:rPr>
-              <a:t>Planificación tributaria ≠ abuso. El límite está en la sustancia económica. Si el único motivo es el ahorro fiscal, el SII tiene herramientas para actuar.</a:t>
-            </a:r>
-          </a:p>
-        </p:txBody>
-      </p:sp>
-      <p:sp>
-        <p:nvSpPr>
-          <p:cNvPr id="20" name="Rounded Rectangle 19"/>
+            <a:pPr algn="ctr"/>
+            <a:r>
+              <a:rPr sz="1400" b="1">
+                <a:solidFill>
+                  <a:srgbClr val="C5501A"/>
+                </a:solidFill>
+                <a:latin typeface="Calibri"/>
+              </a:rPr>
+              <a:t>Andrea Añasco</a:t>
+            </a:r>
+          </a:p>
+        </p:txBody>
+      </p:sp>
+      <p:sp>
+        <p:nvSpPr>
+          <p:cNvPr id="6" name="Rectangle 5"/>
           <p:cNvSpPr/>
           <p:nvPr/>
         </p:nvSpPr>
         <p:spPr>
           <a:xfrm>
-            <a:off x="548640" y="6400800"/>
-            <a:ext cx="11064240" cy="320040"/>
-          </a:xfrm>
-          <a:prstGeom prst="roundRect">
-            <a:avLst/>
-          </a:prstGeom>
-          <a:solidFill>
-            <a:srgbClr val="1A3A5C"/>
+            <a:off x="3776472" y="3657600"/>
+            <a:ext cx="2240280" cy="640080"/>
+          </a:xfrm>
+          <a:prstGeom prst="rect">
+            <a:avLst/>
+          </a:prstGeom>
+          <a:solidFill>
+            <a:srgbClr val="FDE9D9"/>
           </a:solidFill>
           <a:ln>
             <a:noFill/>
@@ -9118,32 +8744,34 @@
           <a:p>
             <a:pPr algn="ctr"/>
             <a:r>
-              <a:rPr b="1" sz="1000">
-                <a:solidFill>
-                  <a:srgbClr val="FFFFFF"/>
-                </a:solidFill>
-                <a:latin typeface="Calibri"/>
-              </a:rPr>
-              <a:t>Grupo 4: Andrea Añasco · Gema Sepúlveda · Karen Rebolledo · Nicolás Muñoz</a:t>
-            </a:r>
-          </a:p>
-        </p:txBody>
-      </p:sp>
-      <p:sp>
-        <p:nvSpPr>
-          <p:cNvPr id="21" name="Rounded Rectangle 20"/>
+              <a:rPr sz="1400" b="1">
+                <a:solidFill>
+                  <a:srgbClr val="C5501A"/>
+                </a:solidFill>
+                <a:latin typeface="Calibri"/>
+              </a:rPr>
+              <a:t>Gema Sepúlveda</a:t>
+            </a:r>
+          </a:p>
+        </p:txBody>
+      </p:sp>
+      <p:sp>
+        <p:nvSpPr>
+          <p:cNvPr id="7" name="Rectangle 6"/>
           <p:cNvSpPr/>
           <p:nvPr/>
         </p:nvSpPr>
         <p:spPr>
           <a:xfrm>
-            <a:off x="274320" y="6492240"/>
-            <a:ext cx="11612880" cy="274320"/>
-          </a:xfrm>
-          <a:prstGeom prst="roundRect">
-            <a:avLst/>
-          </a:prstGeom>
-          <a:noFill/>
+            <a:off x="6181344" y="3657600"/>
+            <a:ext cx="2240280" cy="640080"/>
+          </a:xfrm>
+          <a:prstGeom prst="rect">
+            <a:avLst/>
+          </a:prstGeom>
+          <a:solidFill>
+            <a:srgbClr val="FDE9D9"/>
+          </a:solidFill>
           <a:ln>
             <a:noFill/>
           </a:ln>
@@ -9164,18 +8792,106 @@
           </a:fontRef>
         </p:style>
         <p:txBody>
-          <a:bodyPr rtlCol="0" anchor="t" wrap="square" lIns="137160" rIns="137160" tIns="91440" bIns="91440"/>
-          <a:lstStyle/>
-          <a:p>
-            <a:pPr algn="r"/>
-            <a:r>
-              <a:rPr b="0" sz="800">
-                <a:solidFill>
-                  <a:srgbClr val="555555"/>
-                </a:solidFill>
-                <a:latin typeface="Calibri"/>
-              </a:rPr>
-              <a:t>Caso 86 · Catálogo SII 2025 · Grupo 4 — Magíster Dirección Tributaria UVM  |  9</a:t>
+          <a:bodyPr rtlCol="0" anchor="ctr" wrap="square" lIns="137160" rIns="137160" tIns="91440" bIns="91440"/>
+          <a:lstStyle/>
+          <a:p>
+            <a:pPr algn="ctr"/>
+            <a:r>
+              <a:rPr sz="1400" b="1">
+                <a:solidFill>
+                  <a:srgbClr val="C5501A"/>
+                </a:solidFill>
+                <a:latin typeface="Calibri"/>
+              </a:rPr>
+              <a:t>Karen Rebolledo</a:t>
+            </a:r>
+          </a:p>
+        </p:txBody>
+      </p:sp>
+      <p:sp>
+        <p:nvSpPr>
+          <p:cNvPr id="8" name="Rectangle 7"/>
+          <p:cNvSpPr/>
+          <p:nvPr/>
+        </p:nvSpPr>
+        <p:spPr>
+          <a:xfrm>
+            <a:off x="8586216" y="3657600"/>
+            <a:ext cx="2240280" cy="640080"/>
+          </a:xfrm>
+          <a:prstGeom prst="rect">
+            <a:avLst/>
+          </a:prstGeom>
+          <a:solidFill>
+            <a:srgbClr val="FDE9D9"/>
+          </a:solidFill>
+          <a:ln>
+            <a:noFill/>
+          </a:ln>
+          <a:effectLst/>
+        </p:spPr>
+        <p:style>
+          <a:lnRef idx="1">
+            <a:schemeClr val="accent1"/>
+          </a:lnRef>
+          <a:fillRef idx="3">
+            <a:schemeClr val="accent1"/>
+          </a:fillRef>
+          <a:effectRef idx="2">
+            <a:schemeClr val="accent1"/>
+          </a:effectRef>
+          <a:fontRef idx="minor">
+            <a:schemeClr val="lt1"/>
+          </a:fontRef>
+        </p:style>
+        <p:txBody>
+          <a:bodyPr rtlCol="0" anchor="ctr" wrap="square" lIns="137160" rIns="137160" tIns="91440" bIns="91440"/>
+          <a:lstStyle/>
+          <a:p>
+            <a:pPr algn="ctr"/>
+            <a:r>
+              <a:rPr sz="1400" b="1">
+                <a:solidFill>
+                  <a:srgbClr val="C5501A"/>
+                </a:solidFill>
+                <a:latin typeface="Calibri"/>
+              </a:rPr>
+              <a:t>Nicolás Muñoz</a:t>
+            </a:r>
+          </a:p>
+        </p:txBody>
+      </p:sp>
+      <p:sp>
+        <p:nvSpPr>
+          <p:cNvPr id="9" name="TextBox 8"/>
+          <p:cNvSpPr txBox="1"/>
+          <p:nvPr/>
+        </p:nvSpPr>
+        <p:spPr>
+          <a:xfrm>
+            <a:off x="914400" y="5760720"/>
+            <a:ext cx="10332720" cy="457200"/>
+          </a:xfrm>
+          <a:prstGeom prst="rect">
+            <a:avLst/>
+          </a:prstGeom>
+          <a:noFill/>
+        </p:spPr>
+        <p:txBody>
+          <a:bodyPr wrap="square" lIns="0" rIns="0" tIns="0" bIns="0">
+            <a:spAutoFit/>
+          </a:bodyPr>
+          <a:lstStyle/>
+          <a:p>
+            <a:pPr algn="ctr"/>
+            <a:r>
+              <a:rPr sz="1200" b="0" i="0">
+                <a:solidFill>
+                  <a:srgbClr val="CCCCCC"/>
+                </a:solidFill>
+                <a:latin typeface="Calibri"/>
+              </a:rPr>
+              <a:t>Magíster en Dirección Tributaria — Universidad Viña del Mar</a:t>
             </a:r>
           </a:p>
         </p:txBody>

--- a/Caso86_Presentacion.pptx
+++ b/Caso86_Presentacion.pptx
@@ -12317,78 +12317,34 @@
       </p:sp>
       <p:sp>
         <p:nvSpPr>
-          <p:cNvPr id="100" name="Header7"/>
-          <p:cNvSpPr>
-            <a:spLocks noGrp="1"/>
-          </p:cNvSpPr>
-          <p:nvPr>
-            <p:ph type="body" idx="1"/>
-          </p:nvPr>
-        </p:nvSpPr>
-        <p:spPr>
-          <a:xfrm>
-            <a:off x="594360" y="1362456"/>
-            <a:ext cx="6428232" cy="502920"/>
-          </a:xfrm>
-          <a:solidFill>
-            <a:schemeClr val="tx1">
-              <a:alpha val="74000"/>
-            </a:schemeClr>
-          </a:solidFill>
-        </p:spPr>
-        <p:txBody>
-          <a:bodyPr/>
-          <a:lstStyle/>
-          <a:p>
-            <a:r>
-              <a:rPr lang="es-CL" dirty="0">
-                <a:solidFill>
-                  <a:srgbClr val="FFC000"/>
-                </a:solidFill>
-              </a:rPr>
-              <a:t>Alternativas de solución</a:t>
-            </a:r>
-          </a:p>
-        </p:txBody>
-      </p:sp>
-      <p:sp>
-        <p:nvSpPr>
-          <p:cNvPr id="101" name="PanelOscuro 101"/>
+          <p:cNvPr id="100" name="Panel100"/>
           <p:cNvSpPr/>
           <p:nvPr/>
         </p:nvSpPr>
         <p:spPr>
           <a:xfrm>
-            <a:off x="7132320" y="1362456"/>
-            <a:ext cx="4462272" cy="5047488"/>
+            <a:off x="6858000" y="2029968"/>
+            <a:ext cx="5120640" cy="4626864"/>
           </a:xfrm>
           <a:prstGeom prst="rect">
             <a:avLst/>
           </a:prstGeom>
           <a:gradFill>
             <a:gsLst>
-              <a:gs pos="73000">
+              <a:gs pos="0">
                 <a:schemeClr val="dk1">
-                  <a:tint val="60000"/>
+                  <a:tint val="55000"/>
                   <a:satMod val="105000"/>
-                  <a:lumMod val="105000"/>
-                </a:schemeClr>
-              </a:gs>
-              <a:gs pos="100000">
-                <a:schemeClr val="dk1">
-                  <a:tint val="65000"/>
-                  <a:satMod val="100000"/>
-                  <a:lumMod val="100000"/>
                 </a:schemeClr>
               </a:gs>
               <a:gs pos="100000">
                 <a:schemeClr val="dk1">
                   <a:tint val="70000"/>
                   <a:satMod val="100000"/>
-                  <a:lumMod val="100000"/>
                 </a:schemeClr>
               </a:gs>
             </a:gsLst>
+            <a:lin ang="5400000" scaled="0"/>
           </a:gradFill>
         </p:spPr>
         <p:style>
@@ -12406,7 +12362,7 @@
           </a:fontRef>
         </p:style>
         <p:txBody>
-          <a:bodyPr rtlCol="0" anchor="ctr"/>
+          <a:bodyPr/>
           <a:lstStyle/>
           <a:p>
             <a:endParaRPr lang="es-CL" dirty="0"/>
@@ -12415,14 +12371,14 @@
       </p:sp>
       <p:sp>
         <p:nvSpPr>
-          <p:cNvPr id="102" name="TB 102"/>
+          <p:cNvPr id="101" name="TB101"/>
           <p:cNvSpPr txBox="1"/>
           <p:nvPr/>
         </p:nvSpPr>
         <p:spPr>
           <a:xfrm>
-            <a:off x="7242048" y="1453896"/>
-            <a:ext cx="4242816" cy="411480"/>
+            <a:off x="6986016" y="2139696"/>
+            <a:ext cx="4864607" cy="2148840"/>
           </a:xfrm>
           <a:prstGeom prst="rect">
             <a:avLst/>
@@ -12430,45 +12386,26 @@
           <a:noFill/>
         </p:spPr>
         <p:txBody>
-          <a:bodyPr wrap="square" rtlCol="0"/>
+          <a:bodyPr wrap="square" rtlCol="0">
+            <a:normAutofit/>
+          </a:bodyPr>
           <a:lstStyle/>
           <a:p>
-            <a:pPr algn="ctr"/>
-            <a:r>
-              <a:rPr lang="es-CL" sz="1300" dirty="0">
+            <a:r>
+              <a:rPr lang="es-CL" sz="1200" b="1" dirty="0">
                 <a:solidFill>
                   <a:srgbClr val="FFC000"/>
                 </a:solidFill>
-                <a:b>1</a:b>
               </a:rPr>
-              <a:t>Consideraciones importantes</a:t>
-            </a:r>
-          </a:p>
-        </p:txBody>
-      </p:sp>
-      <p:sp>
-        <p:nvSpPr>
-          <p:cNvPr id="103" name="TB 103"/>
-          <p:cNvSpPr txBox="1"/>
-          <p:nvPr/>
-        </p:nvSpPr>
-        <p:spPr>
-          <a:xfrm>
-            <a:off x="7242048" y="1911095"/>
-            <a:ext cx="4242816" cy="2103120"/>
-          </a:xfrm>
-          <a:prstGeom prst="rect">
-            <a:avLst/>
-          </a:prstGeom>
-          <a:noFill/>
-        </p:spPr>
-        <p:txBody>
-          <a:bodyPr wrap="square" rtlCol="0"/>
-          <a:lstStyle/>
-          <a:p>
-            <a:pPr algn="l"/>
-            <a:r>
-              <a:rPr lang="es-CL" sz="1000" dirty="0">
+              <a:t>Consideraciones</a:t>
+            </a:r>
+          </a:p>
+          <a:p>
+            <a:endParaRPr lang="es-CL" sz="600" dirty="0"/>
+          </a:p>
+          <a:p>
+            <a:r>
+              <a:rPr lang="es-CL" sz="980" dirty="0">
                 <a:solidFill>
                   <a:srgbClr val="FFFFFF"/>
                 </a:solidFill>
@@ -12477,31 +12414,38 @@
             </a:r>
           </a:p>
           <a:p>
-            <a:pPr algn="l"/>
-            <a:r>
-              <a:rPr lang="es-CL" sz="1000" dirty="0">
+            <a:r>
+              <a:rPr lang="es-CL" sz="980" dirty="0">
                 <a:solidFill>
                   <a:srgbClr val="FFFFFF"/>
                 </a:solidFill>
               </a:rPr>
-              <a:t>válida frente a las NGA, debe poder</a:t>
-            </a:r>
-          </a:p>
-          <a:p>
-            <a:pPr algn="l"/>
-            <a:r>
-              <a:rPr lang="es-CL" sz="1000" dirty="0">
+              <a:t>válida frente a las NGA, el socio</a:t>
+            </a:r>
+          </a:p>
+          <a:p>
+            <a:r>
+              <a:rPr lang="es-CL" sz="980" dirty="0">
                 <a:solidFill>
                   <a:srgbClr val="FFFFFF"/>
                 </a:solidFill>
               </a:rPr>
-              <a:t>acreditar SUSTANCIA ECONÓMICA REAL:</a:t>
-            </a:r>
-          </a:p>
-          <a:p>
-            <a:pPr algn="l"/>
-            <a:r>
-              <a:rPr lang="es-CL" sz="1000" dirty="0">
+              <a:t>debe poder acreditar SUSTANCIA</a:t>
+            </a:r>
+          </a:p>
+          <a:p>
+            <a:r>
+              <a:rPr lang="es-CL" sz="980" dirty="0">
+                <a:solidFill>
+                  <a:srgbClr val="FFFFFF"/>
+                </a:solidFill>
+              </a:rPr>
+              <a:t>ECONÓMICA REAL:</a:t>
+            </a:r>
+          </a:p>
+          <a:p>
+            <a:r>
+              <a:rPr lang="es-CL" sz="980" dirty="0">
                 <a:solidFill>
                   <a:srgbClr val="FFFFFF"/>
                 </a:solidFill>
@@ -12510,214 +12454,228 @@
             </a:r>
           </a:p>
           <a:p>
-            <a:pPr algn="l"/>
-            <a:r>
-              <a:rPr lang="es-CL" sz="1000" dirty="0">
+            <a:r>
+              <a:rPr lang="es-CL" sz="980" dirty="0">
                 <a:solidFill>
                   <a:srgbClr val="FFFFFF"/>
                 </a:solidFill>
               </a:rPr>
-              <a:t>▪  Todos los socios deben ejercer</a:t>
-            </a:r>
-          </a:p>
-          <a:p>
-            <a:pPr algn="l"/>
-            <a:r>
-              <a:rPr lang="es-CL" sz="1000" dirty="0">
+              <a:t>• Todos los socios deben ejercer su</a:t>
+            </a:r>
+          </a:p>
+          <a:p>
+            <a:r>
+              <a:rPr lang="es-CL" sz="980" dirty="0">
                 <a:solidFill>
                   <a:srgbClr val="FFFFFF"/>
                 </a:solidFill>
               </a:rPr>
-              <a:t>    su profesión para la sociedad.</a:t>
-            </a:r>
-          </a:p>
-          <a:p>
-            <a:pPr algn="l"/>
-            <a:r>
-              <a:rPr lang="es-CL" sz="1000" dirty="0">
+              <a:t>  profesión para la sociedad.</a:t>
+            </a:r>
+          </a:p>
+          <a:p>
+            <a:r>
+              <a:rPr lang="es-CL" sz="980" dirty="0">
                 <a:solidFill>
                   <a:srgbClr val="FFFFFF"/>
                 </a:solidFill>
               </a:rPr>
-              <a:t/>
-            </a:r>
-          </a:p>
-          <a:p>
-            <a:pPr algn="l"/>
-            <a:r>
-              <a:rPr lang="es-CL" sz="1000" dirty="0">
+              <a:t>• La distribución de utilidades debe</a:t>
+            </a:r>
+          </a:p>
+          <a:p>
+            <a:r>
+              <a:rPr lang="es-CL" sz="980" dirty="0">
                 <a:solidFill>
                   <a:srgbClr val="FFFFFF"/>
                 </a:solidFill>
               </a:rPr>
-              <a:t>▪  La distribución de utilidades debe</a:t>
-            </a:r>
-          </a:p>
-          <a:p>
-            <a:pPr algn="l"/>
-            <a:r>
-              <a:rPr lang="es-CL" sz="1000" dirty="0">
+              <a:t>  reflejar el aporte efectivo.</a:t>
+            </a:r>
+          </a:p>
+          <a:p>
+            <a:r>
+              <a:rPr lang="es-CL" sz="980" dirty="0">
                 <a:solidFill>
                   <a:srgbClr val="FFFFFF"/>
                 </a:solidFill>
               </a:rPr>
-              <a:t>    reflejar el aporte efectivo.</a:t>
-            </a:r>
-          </a:p>
-          <a:p>
-            <a:pPr algn="l"/>
-            <a:r>
-              <a:rPr lang="es-CL" sz="1000" dirty="0">
+              <a:t>• El capital debe ser significativo</a:t>
+            </a:r>
+          </a:p>
+          <a:p>
+            <a:r>
+              <a:rPr lang="es-CL" sz="980" dirty="0">
                 <a:solidFill>
                   <a:srgbClr val="FFFFFF"/>
                 </a:solidFill>
               </a:rPr>
-              <a:t/>
-            </a:r>
-          </a:p>
-          <a:p>
-            <a:pPr algn="l"/>
-            <a:r>
-              <a:rPr lang="es-CL" sz="1000" dirty="0">
+              <a:t>  respecto a los ingresos.</a:t>
+            </a:r>
+          </a:p>
+        </p:txBody>
+      </p:sp>
+      <p:sp>
+        <p:nvSpPr>
+          <p:cNvPr id="102" name="TB102"/>
+          <p:cNvSpPr txBox="1"/>
+          <p:nvPr/>
+        </p:nvSpPr>
+        <p:spPr>
+          <a:xfrm>
+            <a:off x="6986016" y="4407408"/>
+            <a:ext cx="4864607" cy="2148840"/>
+          </a:xfrm>
+          <a:prstGeom prst="rect">
+            <a:avLst/>
+          </a:prstGeom>
+          <a:noFill/>
+        </p:spPr>
+        <p:txBody>
+          <a:bodyPr wrap="square" rtlCol="0">
+            <a:normAutofit/>
+          </a:bodyPr>
+          <a:lstStyle/>
+          <a:p>
+            <a:r>
+              <a:rPr lang="es-CL" sz="1200" b="1" dirty="0">
+                <a:solidFill>
+                  <a:srgbClr val="FFC000"/>
+                </a:solidFill>
+              </a:rPr>
+              <a:t>Normativa de referencia</a:t>
+            </a:r>
+          </a:p>
+          <a:p>
+            <a:endParaRPr lang="es-CL" sz="600" dirty="0"/>
+          </a:p>
+          <a:p>
+            <a:r>
+              <a:rPr lang="es-CL" sz="980" dirty="0">
                 <a:solidFill>
                   <a:srgbClr val="FFFFFF"/>
                 </a:solidFill>
               </a:rPr>
-              <a:t>▪  El capital debe ser relevante en</a:t>
-            </a:r>
-          </a:p>
-          <a:p>
-            <a:pPr algn="l"/>
-            <a:r>
-              <a:rPr lang="es-CL" sz="1000" dirty="0">
+              <a:t>• Art. 42 N°2 LIR</a:t>
+            </a:r>
+          </a:p>
+          <a:p>
+            <a:r>
+              <a:rPr lang="es-CL" sz="980" dirty="0">
                 <a:solidFill>
                   <a:srgbClr val="FFFFFF"/>
                 </a:solidFill>
               </a:rPr>
-              <a:t>    relación a los ingresos.</a:t>
-            </a:r>
-          </a:p>
-        </p:txBody>
-      </p:sp>
-      <p:sp>
-        <p:nvSpPr>
-          <p:cNvPr id="104" name="TB 104"/>
-          <p:cNvSpPr txBox="1"/>
-          <p:nvPr/>
-        </p:nvSpPr>
-        <p:spPr>
-          <a:xfrm>
-            <a:off x="7242048" y="4151376"/>
-            <a:ext cx="4242816" cy="411480"/>
-          </a:xfrm>
-          <a:prstGeom prst="rect">
-            <a:avLst/>
-          </a:prstGeom>
-          <a:noFill/>
-        </p:spPr>
-        <p:txBody>
-          <a:bodyPr wrap="square" rtlCol="0"/>
-          <a:lstStyle/>
-          <a:p>
-            <a:pPr algn="ctr"/>
-            <a:r>
-              <a:rPr lang="es-CL" sz="1200" dirty="0">
-                <a:solidFill>
-                  <a:srgbClr val="FFC000"/>
-                </a:solidFill>
-                <a:b>1</a:b>
-              </a:rPr>
-              <a:t>Normativa de referencia</a:t>
-            </a:r>
-          </a:p>
-        </p:txBody>
-      </p:sp>
-      <p:sp>
-        <p:nvSpPr>
-          <p:cNvPr id="105" name="TB 105"/>
-          <p:cNvSpPr txBox="1"/>
-          <p:nvPr/>
-        </p:nvSpPr>
-        <p:spPr>
-          <a:xfrm>
-            <a:off x="7242048" y="4608576"/>
-            <a:ext cx="4242816" cy="1691640"/>
-          </a:xfrm>
-          <a:prstGeom prst="rect">
-            <a:avLst/>
-          </a:prstGeom>
-          <a:noFill/>
-        </p:spPr>
-        <p:txBody>
-          <a:bodyPr wrap="square" rtlCol="0"/>
-          <a:lstStyle/>
-          <a:p>
-            <a:pPr algn="l"/>
-            <a:r>
-              <a:rPr lang="es-CL" sz="1000" dirty="0">
+              <a:t>  Rentas 2ª categoría</a:t>
+            </a:r>
+          </a:p>
+          <a:p>
+            <a:r>
+              <a:rPr lang="es-CL" sz="980" dirty="0">
                 <a:solidFill>
                   <a:srgbClr val="FFFFFF"/>
                 </a:solidFill>
               </a:rPr>
-              <a:t>▪  Art. 42 N°2 LIR — rentas 2ª cat.</a:t>
-            </a:r>
-          </a:p>
-          <a:p>
-            <a:pPr algn="l"/>
-            <a:r>
-              <a:rPr lang="es-CL" sz="1000" dirty="0">
+              <a:t>• Art. 14 D N°3 y N°8 LIR</a:t>
+            </a:r>
+          </a:p>
+          <a:p>
+            <a:r>
+              <a:rPr lang="es-CL" sz="980" dirty="0">
                 <a:solidFill>
                   <a:srgbClr val="FFFFFF"/>
                 </a:solidFill>
               </a:rPr>
-              <a:t>▪  Art. 14 D N°3 y N°8 LIR — regímenes</a:t>
-            </a:r>
-          </a:p>
-          <a:p>
-            <a:pPr algn="l"/>
-            <a:r>
-              <a:rPr lang="es-CL" sz="1000" dirty="0">
+              <a:t>  Regímenes Pro Pyme</a:t>
+            </a:r>
+          </a:p>
+          <a:p>
+            <a:r>
+              <a:rPr lang="es-CL" sz="980" dirty="0">
                 <a:solidFill>
                   <a:srgbClr val="FFFFFF"/>
                 </a:solidFill>
               </a:rPr>
-              <a:t>▪  Arts. 4 bis y 4 ter CT — NGA</a:t>
-            </a:r>
-          </a:p>
-          <a:p>
-            <a:pPr algn="l"/>
-            <a:r>
-              <a:rPr lang="es-CL" sz="1000" dirty="0">
+              <a:t>• Arts. 4 bis y 4 ter CT</a:t>
+            </a:r>
+          </a:p>
+          <a:p>
+            <a:r>
+              <a:rPr lang="es-CL" sz="980" dirty="0">
                 <a:solidFill>
                   <a:srgbClr val="FFFFFF"/>
                 </a:solidFill>
               </a:rPr>
-              <a:t>▪  Circ. N°21/1991 y N°50/2020 SII</a:t>
-            </a:r>
-          </a:p>
-          <a:p>
-            <a:pPr algn="l"/>
-            <a:r>
-              <a:rPr lang="es-CL" sz="1000" dirty="0">
+              <a:t>  Normas generales antielusivas</a:t>
+            </a:r>
+          </a:p>
+          <a:p>
+            <a:r>
+              <a:rPr lang="es-CL" sz="980" dirty="0">
                 <a:solidFill>
                   <a:srgbClr val="FFFFFF"/>
                 </a:solidFill>
               </a:rPr>
-              <a:t>▪  Circ. N°65/2015 SII</a:t>
-            </a:r>
-          </a:p>
-        </p:txBody>
-      </p:sp>
-      <p:sp>
-        <p:nvSpPr>
-          <p:cNvPr id="110" name="Rect 110"/>
+              <a:t>• Circ. N°21/1991 y N°50/2020 SII</a:t>
+            </a:r>
+          </a:p>
+          <a:p>
+            <a:r>
+              <a:rPr lang="es-CL" sz="980" dirty="0">
+                <a:solidFill>
+                  <a:srgbClr val="FFFFFF"/>
+                </a:solidFill>
+              </a:rPr>
+              <a:t>• Circ. N°65/2015 SII</a:t>
+            </a:r>
+          </a:p>
+        </p:txBody>
+      </p:sp>
+      <p:sp>
+        <p:nvSpPr>
+          <p:cNvPr id="103" name="Hdr103"/>
           <p:cNvSpPr/>
           <p:nvPr/>
         </p:nvSpPr>
         <p:spPr>
           <a:xfrm>
-            <a:off x="594360" y="1920240"/>
-            <a:ext cx="6428232" cy="320040"/>
+            <a:off x="457200" y="2029968"/>
+            <a:ext cx="6309360" cy="420624"/>
+          </a:xfrm>
+          <a:prstGeom prst="rect">
+            <a:avLst/>
+          </a:prstGeom>
+          <a:solidFill>
+            <a:schemeClr val="tx1">
+              <a:alpha val="82000"/>
+            </a:schemeClr>
+          </a:solidFill>
+        </p:spPr>
+        <p:txBody>
+          <a:bodyPr rtlCol="0" anchor="ctr"/>
+          <a:lstStyle/>
+          <a:p>
+            <a:r>
+              <a:rPr lang="es-CL" sz="1600" b="1" dirty="0">
+                <a:solidFill>
+                  <a:srgbClr val="FFC000"/>
+                </a:solidFill>
+              </a:rPr>
+              <a:t>Alternativas de solución</a:t>
+            </a:r>
+          </a:p>
+        </p:txBody>
+      </p:sp>
+      <p:sp>
+        <p:nvSpPr>
+          <p:cNvPr id="110" name="Rect110"/>
+          <p:cNvSpPr/>
+          <p:nvPr/>
+        </p:nvSpPr>
+        <p:spPr>
+          <a:xfrm>
+            <a:off x="457200" y="2487168"/>
+            <a:ext cx="6309360" cy="292608"/>
           </a:xfrm>
           <a:prstGeom prst="rect">
             <a:avLst/>
@@ -12740,7 +12698,9 @@
           </a:fontRef>
         </p:style>
         <p:txBody>
-          <a:bodyPr rtlCol="0" anchor="ctr"/>
+          <a:bodyPr rtlCol="0" anchor="ctr">
+            <a:normAutofit/>
+          </a:bodyPr>
           <a:lstStyle/>
           <a:p>
             <a:r>
@@ -12754,64 +12714,48 @@
       </p:sp>
       <p:sp>
         <p:nvSpPr>
-          <p:cNvPr id="111" name="AltDesc0"/>
+          <p:cNvPr id="111" name="Desc111"/>
           <p:cNvSpPr/>
           <p:nvPr/>
         </p:nvSpPr>
         <p:spPr>
           <a:xfrm>
-            <a:off x="594360" y="2240280"/>
-            <a:ext cx="6428232" cy="429768"/>
+            <a:off x="457200" y="2779776"/>
+            <a:ext cx="6309360" cy="475488"/>
           </a:xfrm>
           <a:prstGeom prst="rect">
             <a:avLst/>
           </a:prstGeom>
-        </p:spPr>
-        <p:style>
-          <a:lnRef idx="2">
-            <a:schemeClr val="accent1">
-              <a:shade val="50000"/>
-            </a:schemeClr>
-          </a:lnRef>
-          <a:fillRef idx="2">
+          <a:solidFill>
             <a:schemeClr val="accent1">
               <a:tint val="20000"/>
             </a:schemeClr>
-          </a:fillRef>
-          <a:effectRef idx="0">
-            <a:schemeClr val="accent1"/>
-          </a:effectRef>
-          <a:fontRef idx="minor">
-            <a:schemeClr val="dk1"/>
-          </a:fontRef>
-        </p:style>
-        <p:txBody>
-          <a:bodyPr rtlCol="0" anchor="ctr"/>
+          </a:solidFill>
+        </p:spPr>
+        <p:txBody>
+          <a:bodyPr rtlCol="0" anchor="ctr">
+            <a:normAutofit/>
+          </a:bodyPr>
           <a:lstStyle/>
           <a:p>
-            <a:r>
-              <a:rPr lang="es-CL" sz="950" dirty="0"/>
-              <a:t>A ejerce como persona natural. Emite boletas de honorarios. Gastos efectivos</a:t>
-            </a:r>
-          </a:p>
-          <a:p>
-            <a:r>
-              <a:rPr lang="es-CL" sz="950" dirty="0"/>
-              <a:t>o presuntos (30%, tope 15 UTA). Paga IGC sobre el total. Sin riesgo NGA.</a:t>
-            </a:r>
-          </a:p>
-        </p:txBody>
-      </p:sp>
-      <p:sp>
-        <p:nvSpPr>
-          <p:cNvPr id="112" name="Rect 112"/>
+            <a:pPr marL="114300" indent="-114300"/>
+            <a:r>
+              <a:rPr lang="es-CL" sz="1000" dirty="0"/>
+              <a:t>A ejerce como persona natural, emite boletas de honorarios. Puede deducir gastos efectivos o presuntos (30%, tope 15 UTA). Paga IGC sobre el total. Sin riesgo NGA.</a:t>
+            </a:r>
+          </a:p>
+        </p:txBody>
+      </p:sp>
+      <p:sp>
+        <p:nvSpPr>
+          <p:cNvPr id="112" name="Rect112"/>
           <p:cNvSpPr/>
           <p:nvPr/>
         </p:nvSpPr>
         <p:spPr>
           <a:xfrm>
-            <a:off x="594360" y="2724912"/>
-            <a:ext cx="6428232" cy="320040"/>
+            <a:off x="457200" y="3310128"/>
+            <a:ext cx="6309360" cy="292608"/>
           </a:xfrm>
           <a:prstGeom prst="rect">
             <a:avLst/>
@@ -12834,7 +12778,9 @@
           </a:fontRef>
         </p:style>
         <p:txBody>
-          <a:bodyPr rtlCol="0" anchor="ctr"/>
+          <a:bodyPr rtlCol="0" anchor="ctr">
+            <a:normAutofit/>
+          </a:bodyPr>
           <a:lstStyle/>
           <a:p>
             <a:r>
@@ -12848,64 +12794,48 @@
       </p:sp>
       <p:sp>
         <p:nvSpPr>
-          <p:cNvPr id="113" name="AltDesc1"/>
+          <p:cNvPr id="113" name="Desc113"/>
           <p:cNvSpPr/>
           <p:nvPr/>
         </p:nvSpPr>
         <p:spPr>
           <a:xfrm>
-            <a:off x="594360" y="3044952"/>
-            <a:ext cx="6428232" cy="429768"/>
+            <a:off x="457200" y="3602736"/>
+            <a:ext cx="6309360" cy="475488"/>
           </a:xfrm>
           <a:prstGeom prst="rect">
             <a:avLst/>
           </a:prstGeom>
-        </p:spPr>
-        <p:style>
-          <a:lnRef idx="2">
-            <a:schemeClr val="accent1">
-              <a:shade val="50000"/>
-            </a:schemeClr>
-          </a:lnRef>
-          <a:fillRef idx="2">
+          <a:solidFill>
             <a:schemeClr val="accent1">
               <a:tint val="20000"/>
             </a:schemeClr>
-          </a:fillRef>
-          <a:effectRef idx="0">
-            <a:schemeClr val="accent1"/>
-          </a:effectRef>
-          <a:fontRef idx="minor">
-            <a:schemeClr val="dk1"/>
-          </a:fontRef>
-        </p:style>
-        <p:txBody>
-          <a:bodyPr rtlCol="0" anchor="ctr"/>
+          </a:solidFill>
+        </p:spPr>
+        <p:txBody>
+          <a:bodyPr rtlCol="0" anchor="ctr">
+            <a:normAutofit/>
+          </a:bodyPr>
           <a:lstStyle/>
           <a:p>
-            <a:r>
-              <a:rPr lang="es-CL" sz="950" dirty="0"/>
-              <a:t>A se asocia con profesionales que efectivamente presten servicios</a:t>
-            </a:r>
-          </a:p>
-          <a:p>
-            <a:r>
-              <a:rPr lang="es-CL" sz="950" dirty="0"/>
-              <a:t>para la sociedad. D califica legítimamente bajo Art. 42 N°2 inc. 3° LIR.</a:t>
-            </a:r>
-          </a:p>
-        </p:txBody>
-      </p:sp>
-      <p:sp>
-        <p:nvSpPr>
-          <p:cNvPr id="114" name="Rect 114"/>
+            <a:pPr marL="114300" indent="-114300"/>
+            <a:r>
+              <a:rPr lang="es-CL" sz="1000" dirty="0"/>
+              <a:t>A se asocia con profesionales que efectivamente presten servicios para la sociedad. D califica legítimamente bajo Art. 42 N°2 inc. 3° LIR.</a:t>
+            </a:r>
+          </a:p>
+        </p:txBody>
+      </p:sp>
+      <p:sp>
+        <p:nvSpPr>
+          <p:cNvPr id="114" name="Rect114"/>
           <p:cNvSpPr/>
           <p:nvPr/>
         </p:nvSpPr>
         <p:spPr>
           <a:xfrm>
-            <a:off x="594360" y="3529584"/>
-            <a:ext cx="6428232" cy="320040"/>
+            <a:off x="457200" y="4133088"/>
+            <a:ext cx="6309360" cy="292608"/>
           </a:xfrm>
           <a:prstGeom prst="rect">
             <a:avLst/>
@@ -12928,78 +12858,64 @@
           </a:fontRef>
         </p:style>
         <p:txBody>
-          <a:bodyPr rtlCol="0" anchor="ctr"/>
+          <a:bodyPr rtlCol="0" anchor="ctr">
+            <a:normAutofit/>
+          </a:bodyPr>
           <a:lstStyle/>
           <a:p>
             <a:r>
               <a:rPr lang="es-CL" sz="1100" dirty="0">
                 <a:b>1</a:b>
               </a:rPr>
-              <a:t>Alt. 3 — Distribución de utilidades proporcional al trabajo real</a:t>
-            </a:r>
-          </a:p>
-        </p:txBody>
-      </p:sp>
-      <p:sp>
-        <p:nvSpPr>
-          <p:cNvPr id="115" name="AltDesc2"/>
+              <a:t>Alt. 3 — Distribución proporcional al trabajo real</a:t>
+            </a:r>
+          </a:p>
+        </p:txBody>
+      </p:sp>
+      <p:sp>
+        <p:nvSpPr>
+          <p:cNvPr id="115" name="Desc115"/>
           <p:cNvSpPr/>
           <p:nvPr/>
         </p:nvSpPr>
         <p:spPr>
           <a:xfrm>
-            <a:off x="594360" y="3849624"/>
-            <a:ext cx="6428232" cy="429768"/>
+            <a:off x="457200" y="4425696"/>
+            <a:ext cx="6309360" cy="475488"/>
           </a:xfrm>
           <a:prstGeom prst="rect">
             <a:avLst/>
           </a:prstGeom>
-        </p:spPr>
-        <p:style>
-          <a:lnRef idx="2">
-            <a:schemeClr val="accent1">
-              <a:shade val="50000"/>
-            </a:schemeClr>
-          </a:lnRef>
-          <a:fillRef idx="2">
+          <a:solidFill>
             <a:schemeClr val="accent1">
               <a:tint val="20000"/>
             </a:schemeClr>
-          </a:fillRef>
-          <a:effectRef idx="0">
-            <a:schemeClr val="accent1"/>
-          </a:effectRef>
-          <a:fontRef idx="minor">
-            <a:schemeClr val="dk1"/>
-          </a:fontRef>
-        </p:style>
-        <p:txBody>
-          <a:bodyPr rtlCol="0" anchor="ctr"/>
+          </a:solidFill>
+        </p:spPr>
+        <p:txBody>
+          <a:bodyPr rtlCol="0" anchor="ctr">
+            <a:normAutofit/>
+          </a:bodyPr>
           <a:lstStyle/>
           <a:p>
-            <a:r>
-              <a:rPr lang="es-CL" sz="950" dirty="0"/>
-              <a:t>Estatutos contemplan participación diferenciada acorde al aporte efectivo</a:t>
-            </a:r>
-          </a:p>
-          <a:p>
-            <a:r>
-              <a:rPr lang="es-CL" sz="950" dirty="0"/>
-              <a:t>o sueldo patronal previo al reparto. Debe reflejar la realidad económica.</a:t>
-            </a:r>
-          </a:p>
-        </p:txBody>
-      </p:sp>
-      <p:sp>
-        <p:nvSpPr>
-          <p:cNvPr id="116" name="Rect 116"/>
+            <a:pPr marL="114300" indent="-114300"/>
+            <a:r>
+              <a:rPr lang="es-CL" sz="1000" dirty="0"/>
+              <a:t>Estatutos con participación diferenciada (ej. A 90%, B 5%, C 5%) o sueldo patronal previo al reparto. La distribución debe reflejar el aporte efectivo de cada socio.</a:t>
+            </a:r>
+          </a:p>
+        </p:txBody>
+      </p:sp>
+      <p:sp>
+        <p:nvSpPr>
+          <p:cNvPr id="116" name="Rect116"/>
           <p:cNvSpPr/>
           <p:nvPr/>
         </p:nvSpPr>
         <p:spPr>
           <a:xfrm>
-            <a:off x="594360" y="4334256"/>
-            <a:ext cx="6428232" cy="320040"/>
+            <a:off x="457200" y="4956048"/>
+            <a:ext cx="6309360" cy="292608"/>
           </a:xfrm>
           <a:prstGeom prst="rect">
             <a:avLst/>
@@ -13022,7 +12938,9 @@
           </a:fontRef>
         </p:style>
         <p:txBody>
-          <a:bodyPr rtlCol="0" anchor="ctr"/>
+          <a:bodyPr rtlCol="0" anchor="ctr">
+            <a:normAutofit/>
+          </a:bodyPr>
           <a:lstStyle/>
           <a:p>
             <a:r>
@@ -13036,64 +12954,48 @@
       </p:sp>
       <p:sp>
         <p:nvSpPr>
-          <p:cNvPr id="117" name="AltDesc3"/>
+          <p:cNvPr id="117" name="Desc117"/>
           <p:cNvSpPr/>
           <p:nvPr/>
         </p:nvSpPr>
         <p:spPr>
           <a:xfrm>
-            <a:off x="594360" y="4654296"/>
-            <a:ext cx="6428232" cy="429768"/>
+            <a:off x="457200" y="5248656"/>
+            <a:ext cx="6309360" cy="475488"/>
           </a:xfrm>
           <a:prstGeom prst="rect">
             <a:avLst/>
           </a:prstGeom>
-        </p:spPr>
-        <p:style>
-          <a:lnRef idx="2">
-            <a:schemeClr val="accent1">
-              <a:shade val="50000"/>
-            </a:schemeClr>
-          </a:lnRef>
-          <a:fillRef idx="2">
+          <a:solidFill>
             <a:schemeClr val="accent1">
               <a:tint val="20000"/>
             </a:schemeClr>
-          </a:fillRef>
-          <a:effectRef idx="0">
-            <a:schemeClr val="accent1"/>
-          </a:effectRef>
-          <a:fontRef idx="minor">
-            <a:schemeClr val="dk1"/>
-          </a:fontRef>
-        </p:style>
-        <p:txBody>
-          <a:bodyPr rtlCol="0" anchor="ctr"/>
+          </a:solidFill>
+        </p:spPr>
+        <p:txBody>
+          <a:bodyPr rtlCol="0" anchor="ctr">
+            <a:normAutofit/>
+          </a:bodyPr>
           <a:lstStyle/>
           <a:p>
-            <a:r>
-              <a:rPr lang="es-CL" sz="950" dirty="0"/>
-              <a:t>SpA con IDPC al 25%. Permite planificación de retiros y reinversión.</a:t>
-            </a:r>
-          </a:p>
-          <a:p>
-            <a:r>
-              <a:rPr lang="es-CL" sz="950" dirty="0"/>
-              <a:t>Sin restricciones de la sociedad de profesionales. Exige sustancia real.</a:t>
-            </a:r>
-          </a:p>
-        </p:txBody>
-      </p:sp>
-      <p:sp>
-        <p:nvSpPr>
-          <p:cNvPr id="118" name="Rect 118"/>
+            <a:pPr marL="114300" indent="-114300"/>
+            <a:r>
+              <a:rPr lang="es-CL" sz="1000" dirty="0"/>
+              <a:t>SpA con IDPC al 25%. Permite planificación de retiros y reinversión. No tiene las restricciones de la sociedad de profesionales, pero exige sustancia económica real.</a:t>
+            </a:r>
+          </a:p>
+        </p:txBody>
+      </p:sp>
+      <p:sp>
+        <p:nvSpPr>
+          <p:cNvPr id="118" name="Rect118"/>
           <p:cNvSpPr/>
           <p:nvPr/>
         </p:nvSpPr>
         <p:spPr>
           <a:xfrm>
-            <a:off x="594360" y="5138927"/>
-            <a:ext cx="6428232" cy="320040"/>
+            <a:off x="457200" y="5779008"/>
+            <a:ext cx="6309360" cy="292608"/>
           </a:xfrm>
           <a:prstGeom prst="rect">
             <a:avLst/>
@@ -13116,7 +13018,9 @@
           </a:fontRef>
         </p:style>
         <p:txBody>
-          <a:bodyPr rtlCol="0" anchor="ctr"/>
+          <a:bodyPr rtlCol="0" anchor="ctr">
+            <a:normAutofit/>
+          </a:bodyPr>
           <a:lstStyle/>
           <a:p>
             <a:r>
@@ -13130,50 +13034,34 @@
       </p:sp>
       <p:sp>
         <p:nvSpPr>
-          <p:cNvPr id="119" name="AltDesc4"/>
+          <p:cNvPr id="119" name="Desc119"/>
           <p:cNvSpPr/>
           <p:nvPr/>
         </p:nvSpPr>
         <p:spPr>
           <a:xfrm>
-            <a:off x="594360" y="5458967"/>
-            <a:ext cx="6428232" cy="429768"/>
+            <a:off x="457200" y="6071616"/>
+            <a:ext cx="6309360" cy="475488"/>
           </a:xfrm>
           <a:prstGeom prst="rect">
             <a:avLst/>
           </a:prstGeom>
-        </p:spPr>
-        <p:style>
-          <a:lnRef idx="2">
-            <a:schemeClr val="accent1">
-              <a:shade val="50000"/>
-            </a:schemeClr>
-          </a:lnRef>
-          <a:fillRef idx="2">
+          <a:solidFill>
             <a:schemeClr val="accent1">
               <a:tint val="20000"/>
             </a:schemeClr>
-          </a:fillRef>
-          <a:effectRef idx="0">
-            <a:schemeClr val="accent1"/>
-          </a:effectRef>
-          <a:fontRef idx="minor">
-            <a:schemeClr val="dk1"/>
-          </a:fontRef>
-        </p:style>
-        <p:txBody>
-          <a:bodyPr rtlCol="0" anchor="ctr"/>
+          </a:solidFill>
+        </p:spPr>
+        <p:txBody>
+          <a:bodyPr rtlCol="0" anchor="ctr">
+            <a:normAutofit/>
+          </a:bodyPr>
           <a:lstStyle/>
           <a:p>
-            <a:r>
-              <a:rPr lang="es-CL" sz="950" dirty="0"/>
-              <a:t>La empresa no paga IDPC; socios tributan con IGC. SOLO válido si B y C</a:t>
-            </a:r>
-          </a:p>
-          <a:p>
-            <a:r>
-              <a:rPr lang="es-CL" sz="950" dirty="0"/>
-              <a:t>tienen sustancia económica real — de lo contrario el SII aplica NGA.</a:t>
+            <a:pPr marL="114300" indent="-114300"/>
+            <a:r>
+              <a:rPr lang="es-CL" sz="1000" dirty="0"/>
+              <a:t>La empresa no paga IDPC; socios tributan con IGC directo. Válido solo si B y C aportan sustancia real — de lo contrario el SII igualmente puede aplicar las NGA.</a:t>
             </a:r>
           </a:p>
         </p:txBody>
@@ -13238,78 +13126,34 @@
       </p:sp>
       <p:sp>
         <p:nvSpPr>
-          <p:cNvPr id="200" name="Header8"/>
-          <p:cNvSpPr>
-            <a:spLocks noGrp="1"/>
-          </p:cNvSpPr>
-          <p:nvPr>
-            <p:ph type="body" idx="1"/>
-          </p:nvPr>
-        </p:nvSpPr>
-        <p:spPr>
-          <a:xfrm>
-            <a:off x="594360" y="1362456"/>
-            <a:ext cx="6428232" cy="502920"/>
-          </a:xfrm>
-          <a:solidFill>
-            <a:schemeClr val="tx1">
-              <a:alpha val="74000"/>
-            </a:schemeClr>
-          </a:solidFill>
-        </p:spPr>
-        <p:txBody>
-          <a:bodyPr/>
-          <a:lstStyle/>
-          <a:p>
-            <a:r>
-              <a:rPr lang="es-CL" dirty="0">
-                <a:solidFill>
-                  <a:srgbClr val="FFC000"/>
-                </a:solidFill>
-              </a:rPr>
-              <a:t>Síntesis del análisis</a:t>
-            </a:r>
-          </a:p>
-        </p:txBody>
-      </p:sp>
-      <p:sp>
-        <p:nvSpPr>
-          <p:cNvPr id="201" name="PanelOscuro 201"/>
+          <p:cNvPr id="200" name="Panel200"/>
           <p:cNvSpPr/>
           <p:nvPr/>
         </p:nvSpPr>
         <p:spPr>
           <a:xfrm>
-            <a:off x="7132320" y="1362456"/>
-            <a:ext cx="4462272" cy="5047488"/>
+            <a:off x="6858000" y="2029968"/>
+            <a:ext cx="5120640" cy="4626864"/>
           </a:xfrm>
           <a:prstGeom prst="rect">
             <a:avLst/>
           </a:prstGeom>
           <a:gradFill>
             <a:gsLst>
-              <a:gs pos="73000">
+              <a:gs pos="0">
                 <a:schemeClr val="dk1">
-                  <a:tint val="60000"/>
+                  <a:tint val="55000"/>
                   <a:satMod val="105000"/>
-                  <a:lumMod val="105000"/>
-                </a:schemeClr>
-              </a:gs>
-              <a:gs pos="100000">
-                <a:schemeClr val="dk1">
-                  <a:tint val="65000"/>
-                  <a:satMod val="100000"/>
-                  <a:lumMod val="100000"/>
                 </a:schemeClr>
               </a:gs>
               <a:gs pos="100000">
                 <a:schemeClr val="dk1">
                   <a:tint val="70000"/>
                   <a:satMod val="100000"/>
-                  <a:lumMod val="100000"/>
                 </a:schemeClr>
               </a:gs>
             </a:gsLst>
+            <a:lin ang="5400000" scaled="0"/>
           </a:gradFill>
         </p:spPr>
         <p:style>
@@ -13327,7 +13171,7 @@
           </a:fontRef>
         </p:style>
         <p:txBody>
-          <a:bodyPr rtlCol="0" anchor="ctr"/>
+          <a:bodyPr/>
           <a:lstStyle/>
           <a:p>
             <a:endParaRPr lang="es-CL" dirty="0"/>
@@ -13336,14 +13180,14 @@
       </p:sp>
       <p:sp>
         <p:nvSpPr>
-          <p:cNvPr id="202" name="TB 202"/>
+          <p:cNvPr id="201" name="TB201"/>
           <p:cNvSpPr txBox="1"/>
           <p:nvPr/>
         </p:nvSpPr>
         <p:spPr>
           <a:xfrm>
-            <a:off x="7242048" y="1453896"/>
-            <a:ext cx="4242816" cy="411480"/>
+            <a:off x="6986016" y="2139696"/>
+            <a:ext cx="4864607" cy="2560320"/>
           </a:xfrm>
           <a:prstGeom prst="rect">
             <a:avLst/>
@@ -13351,45 +13195,26 @@
           <a:noFill/>
         </p:spPr>
         <p:txBody>
-          <a:bodyPr wrap="square" rtlCol="0"/>
+          <a:bodyPr wrap="square" rtlCol="0">
+            <a:normAutofit/>
+          </a:bodyPr>
           <a:lstStyle/>
           <a:p>
-            <a:pPr algn="ctr"/>
-            <a:r>
-              <a:rPr lang="es-CL" sz="1300" dirty="0">
+            <a:r>
+              <a:rPr lang="es-CL" sz="1200" b="1" dirty="0">
                 <a:solidFill>
                   <a:srgbClr val="FFC000"/>
                 </a:solidFill>
-                <a:b>1</a:b>
               </a:rPr>
               <a:t>Posición del Grupo 4</a:t>
             </a:r>
           </a:p>
-        </p:txBody>
-      </p:sp>
-      <p:sp>
-        <p:nvSpPr>
-          <p:cNvPr id="203" name="TB 203"/>
-          <p:cNvSpPr txBox="1"/>
-          <p:nvPr/>
-        </p:nvSpPr>
-        <p:spPr>
-          <a:xfrm>
-            <a:off x="7242048" y="1911095"/>
-            <a:ext cx="4242816" cy="2286000"/>
-          </a:xfrm>
-          <a:prstGeom prst="rect">
-            <a:avLst/>
-          </a:prstGeom>
-          <a:noFill/>
-        </p:spPr>
-        <p:txBody>
-          <a:bodyPr wrap="square" rtlCol="0"/>
-          <a:lstStyle/>
-          <a:p>
-            <a:pPr algn="l"/>
-            <a:r>
-              <a:rPr lang="es-CL" sz="1000" dirty="0">
+          <a:p>
+            <a:endParaRPr lang="es-CL" sz="600" dirty="0"/>
+          </a:p>
+          <a:p>
+            <a:r>
+              <a:rPr lang="es-CL" sz="980" dirty="0">
                 <a:solidFill>
                   <a:srgbClr val="FFFFFF"/>
                 </a:solidFill>
@@ -13398,20 +13223,18 @@
             </a:r>
           </a:p>
           <a:p>
-            <a:pPr algn="l"/>
-            <a:r>
-              <a:rPr lang="es-CL" sz="1000" dirty="0">
+            <a:r>
+              <a:rPr lang="es-CL" sz="980" dirty="0">
                 <a:solidFill>
                   <a:srgbClr val="FFFFFF"/>
                 </a:solidFill>
               </a:rPr>
-              <a:t>las formas jurídicas (Art. 4 ter CT).</a:t>
-            </a:r>
-          </a:p>
-          <a:p>
-            <a:pPr algn="l"/>
-            <a:r>
-              <a:rPr lang="es-CL" sz="1000" dirty="0">
+              <a:t>formas jurídicas (Art. 4 ter CT).</a:t>
+            </a:r>
+          </a:p>
+          <a:p>
+            <a:r>
+              <a:rPr lang="es-CL" sz="980" dirty="0">
                 <a:solidFill>
                   <a:srgbClr val="FFFFFF"/>
                 </a:solidFill>
@@ -13420,9 +13243,8 @@
             </a:r>
           </a:p>
           <a:p>
-            <a:pPr algn="l"/>
-            <a:r>
-              <a:rPr lang="es-CL" sz="1000" dirty="0">
+            <a:r>
+              <a:rPr lang="es-CL" sz="980" dirty="0">
                 <a:solidFill>
                   <a:srgbClr val="FFFFFF"/>
                 </a:solidFill>
@@ -13431,9 +13253,8 @@
             </a:r>
           </a:p>
           <a:p>
-            <a:pPr algn="l"/>
-            <a:r>
-              <a:rPr lang="es-CL" sz="1000" dirty="0">
+            <a:r>
+              <a:rPr lang="es-CL" sz="980" dirty="0">
                 <a:solidFill>
                   <a:srgbClr val="FFFFFF"/>
                 </a:solidFill>
@@ -13442,31 +13263,28 @@
             </a:r>
           </a:p>
           <a:p>
-            <a:pPr algn="l"/>
-            <a:r>
-              <a:rPr lang="es-CL" sz="1000" dirty="0">
+            <a:r>
+              <a:rPr lang="es-CL" sz="980" dirty="0">
                 <a:solidFill>
                   <a:srgbClr val="FFFFFF"/>
                 </a:solidFill>
               </a:rPr>
-              <a:t>inapropiada para el sustrato</a:t>
-            </a:r>
-          </a:p>
-          <a:p>
-            <a:pPr algn="l"/>
-            <a:r>
-              <a:rPr lang="es-CL" sz="1000" dirty="0">
+              <a:t>inapropiada — el único efecto</a:t>
+            </a:r>
+          </a:p>
+          <a:p>
+            <a:r>
+              <a:rPr lang="es-CL" sz="980" dirty="0">
                 <a:solidFill>
                   <a:srgbClr val="FFFFFF"/>
                 </a:solidFill>
               </a:rPr>
-              <a:t>económico del caso.</a:t>
-            </a:r>
-          </a:p>
-          <a:p>
-            <a:pPr algn="l"/>
-            <a:r>
-              <a:rPr lang="es-CL" sz="1000" dirty="0">
+              <a:t>relevante es tributario.</a:t>
+            </a:r>
+          </a:p>
+          <a:p>
+            <a:r>
+              <a:rPr lang="es-CL" sz="980" dirty="0">
                 <a:solidFill>
                   <a:srgbClr val="FFFFFF"/>
                 </a:solidFill>
@@ -13475,9 +13293,8 @@
             </a:r>
           </a:p>
           <a:p>
-            <a:pPr algn="l"/>
-            <a:r>
-              <a:rPr lang="es-CL" sz="1000" dirty="0">
+            <a:r>
+              <a:rPr lang="es-CL" sz="980" dirty="0">
                 <a:solidFill>
                   <a:srgbClr val="FFFFFF"/>
                 </a:solidFill>
@@ -13486,61 +13303,57 @@
             </a:r>
           </a:p>
           <a:p>
-            <a:pPr algn="l"/>
-            <a:r>
-              <a:rPr lang="es-CL" sz="1000" dirty="0">
+            <a:r>
+              <a:rPr lang="es-CL" sz="980" dirty="0">
                 <a:solidFill>
                   <a:srgbClr val="FFFFFF"/>
                 </a:solidFill>
               </a:rPr>
-              <a:t>▪  Andrea Añasco</a:t>
-            </a:r>
-          </a:p>
-          <a:p>
-            <a:pPr algn="l"/>
-            <a:r>
-              <a:rPr lang="es-CL" sz="1000" dirty="0">
+              <a:t>  Andrea Añasco</a:t>
+            </a:r>
+          </a:p>
+          <a:p>
+            <a:r>
+              <a:rPr lang="es-CL" sz="980" dirty="0">
                 <a:solidFill>
                   <a:srgbClr val="FFFFFF"/>
                 </a:solidFill>
               </a:rPr>
-              <a:t>▪  Gema Sepúlveda</a:t>
-            </a:r>
-          </a:p>
-          <a:p>
-            <a:pPr algn="l"/>
-            <a:r>
-              <a:rPr lang="es-CL" sz="1000" dirty="0">
+              <a:t>  Gema Sepúlveda</a:t>
+            </a:r>
+          </a:p>
+          <a:p>
+            <a:r>
+              <a:rPr lang="es-CL" sz="980" dirty="0">
                 <a:solidFill>
                   <a:srgbClr val="FFFFFF"/>
                 </a:solidFill>
               </a:rPr>
-              <a:t>▪  Karen Rebolledo</a:t>
-            </a:r>
-          </a:p>
-          <a:p>
-            <a:pPr algn="l"/>
-            <a:r>
-              <a:rPr lang="es-CL" sz="1000" dirty="0">
+              <a:t>  Karen Rebolledo</a:t>
+            </a:r>
+          </a:p>
+          <a:p>
+            <a:r>
+              <a:rPr lang="es-CL" sz="980" dirty="0">
                 <a:solidFill>
                   <a:srgbClr val="FFFFFF"/>
                 </a:solidFill>
               </a:rPr>
-              <a:t>▪  Nicolás Muñoz</a:t>
-            </a:r>
-          </a:p>
-        </p:txBody>
-      </p:sp>
-      <p:sp>
-        <p:nvSpPr>
-          <p:cNvPr id="204" name="TB 204"/>
+              <a:t>  Nicolás Muñoz</a:t>
+            </a:r>
+          </a:p>
+        </p:txBody>
+      </p:sp>
+      <p:sp>
+        <p:nvSpPr>
+          <p:cNvPr id="202" name="TB202"/>
           <p:cNvSpPr txBox="1"/>
           <p:nvPr/>
         </p:nvSpPr>
         <p:spPr>
           <a:xfrm>
-            <a:off x="7242048" y="4334256"/>
-            <a:ext cx="4242816" cy="411480"/>
+            <a:off x="6986016" y="4818888"/>
+            <a:ext cx="4864607" cy="1737360"/>
           </a:xfrm>
           <a:prstGeom prst="rect">
             <a:avLst/>
@@ -13548,108 +13361,120 @@
           <a:noFill/>
         </p:spPr>
         <p:txBody>
-          <a:bodyPr wrap="square" rtlCol="0"/>
+          <a:bodyPr wrap="square" rtlCol="0">
+            <a:normAutofit/>
+          </a:bodyPr>
           <a:lstStyle/>
           <a:p>
-            <a:pPr algn="ctr"/>
-            <a:r>
-              <a:rPr lang="es-CL" sz="1200" dirty="0">
+            <a:r>
+              <a:rPr lang="es-CL" sz="1200" b="1" dirty="0">
                 <a:solidFill>
                   <a:srgbClr val="FFC000"/>
                 </a:solidFill>
-                <a:b>1</a:b>
               </a:rPr>
-              <a:t>Norma aplicable</a:t>
-            </a:r>
-          </a:p>
-        </p:txBody>
-      </p:sp>
-      <p:sp>
-        <p:nvSpPr>
-          <p:cNvPr id="205" name="TB 205"/>
-          <p:cNvSpPr txBox="1"/>
-          <p:nvPr/>
-        </p:nvSpPr>
-        <p:spPr>
-          <a:xfrm>
-            <a:off x="7242048" y="4791456"/>
-            <a:ext cx="4242816" cy="1508760"/>
-          </a:xfrm>
-          <a:prstGeom prst="rect">
-            <a:avLst/>
-          </a:prstGeom>
-          <a:noFill/>
-        </p:spPr>
-        <p:txBody>
-          <a:bodyPr wrap="square" rtlCol="0"/>
-          <a:lstStyle/>
-          <a:p>
-            <a:pPr algn="l"/>
-            <a:r>
-              <a:rPr lang="es-CL" sz="1000" dirty="0">
+              <a:t>Norma aplicada</a:t>
+            </a:r>
+          </a:p>
+          <a:p>
+            <a:endParaRPr lang="es-CL" sz="600" dirty="0"/>
+          </a:p>
+          <a:p>
+            <a:r>
+              <a:rPr lang="es-CL" sz="980" dirty="0">
                 <a:solidFill>
                   <a:srgbClr val="FFFFFF"/>
                 </a:solidFill>
               </a:rPr>
-              <a:t>▪  Art. 4 ter CT — ABUSO</a:t>
-            </a:r>
-          </a:p>
-          <a:p>
-            <a:pPr algn="l"/>
-            <a:r>
-              <a:rPr lang="es-CL" sz="1000" dirty="0">
+              <a:t>• Art. 4 ter CT — Abuso</a:t>
+            </a:r>
+          </a:p>
+          <a:p>
+            <a:r>
+              <a:rPr lang="es-CL" sz="980" dirty="0">
                 <a:solidFill>
                   <a:srgbClr val="FFFFFF"/>
                 </a:solidFill>
               </a:rPr>
-              <a:t>▪  Art. 4 quinquies CT — Procedimiento</a:t>
-            </a:r>
-          </a:p>
-          <a:p>
-            <a:pPr algn="l"/>
-            <a:r>
-              <a:rPr lang="es-CL" sz="1000" dirty="0">
+              <a:t>• Art. 4 quinquies CT — Procedimiento</a:t>
+            </a:r>
+          </a:p>
+          <a:p>
+            <a:r>
+              <a:rPr lang="es-CL" sz="980" dirty="0">
                 <a:solidFill>
                   <a:srgbClr val="FFFFFF"/>
                 </a:solidFill>
               </a:rPr>
-              <a:t>▪  Art. 42 N°2 LIR</a:t>
-            </a:r>
-          </a:p>
-          <a:p>
-            <a:pPr algn="l"/>
-            <a:r>
-              <a:rPr lang="es-CL" sz="1000" dirty="0">
+              <a:t>• Art. 42 N°2 LIR</a:t>
+            </a:r>
+          </a:p>
+          <a:p>
+            <a:r>
+              <a:rPr lang="es-CL" sz="980" dirty="0">
                 <a:solidFill>
                   <a:srgbClr val="FFFFFF"/>
                 </a:solidFill>
               </a:rPr>
-              <a:t>▪  Circ. N°21/1991 y N°50/2020 SII</a:t>
-            </a:r>
-          </a:p>
-          <a:p>
-            <a:pPr algn="l"/>
-            <a:r>
-              <a:rPr lang="es-CL" sz="1000" dirty="0">
+              <a:t>• Circ. N°21/1991 y N°50/2020 SII</a:t>
+            </a:r>
+          </a:p>
+          <a:p>
+            <a:r>
+              <a:rPr lang="es-CL" sz="980" dirty="0">
                 <a:solidFill>
                   <a:srgbClr val="FFFFFF"/>
                 </a:solidFill>
               </a:rPr>
-              <a:t>▪  Ley N°20.780 y N°21.210</a:t>
-            </a:r>
-          </a:p>
-        </p:txBody>
-      </p:sp>
-      <p:sp>
-        <p:nvSpPr>
-          <p:cNvPr id="210" name="Rect 210"/>
+              <a:t>• Ley N°20.780 y Ley N°21.210</a:t>
+            </a:r>
+          </a:p>
+        </p:txBody>
+      </p:sp>
+      <p:sp>
+        <p:nvSpPr>
+          <p:cNvPr id="203" name="Hdr203"/>
           <p:cNvSpPr/>
           <p:nvPr/>
         </p:nvSpPr>
         <p:spPr>
           <a:xfrm>
-            <a:off x="594360" y="1920240"/>
-            <a:ext cx="6428232" cy="320040"/>
+            <a:off x="457200" y="2029968"/>
+            <a:ext cx="6309360" cy="420624"/>
+          </a:xfrm>
+          <a:prstGeom prst="rect">
+            <a:avLst/>
+          </a:prstGeom>
+          <a:solidFill>
+            <a:schemeClr val="tx1">
+              <a:alpha val="82000"/>
+            </a:schemeClr>
+          </a:solidFill>
+        </p:spPr>
+        <p:txBody>
+          <a:bodyPr rtlCol="0" anchor="ctr"/>
+          <a:lstStyle/>
+          <a:p>
+            <a:r>
+              <a:rPr lang="es-CL" sz="1600" b="1" dirty="0">
+                <a:solidFill>
+                  <a:srgbClr val="FFC000"/>
+                </a:solidFill>
+              </a:rPr>
+              <a:t>Síntesis del análisis — Caso 86</a:t>
+            </a:r>
+          </a:p>
+        </p:txBody>
+      </p:sp>
+      <p:sp>
+        <p:nvSpPr>
+          <p:cNvPr id="210" name="Rect210"/>
+          <p:cNvSpPr/>
+          <p:nvPr/>
+        </p:nvSpPr>
+        <p:spPr>
+          <a:xfrm>
+            <a:off x="457200" y="2487168"/>
+            <a:ext cx="6309360" cy="292608"/>
           </a:xfrm>
           <a:prstGeom prst="rect">
             <a:avLst/>
@@ -13672,78 +13497,64 @@
           </a:fontRef>
         </p:style>
         <p:txBody>
-          <a:bodyPr rtlCol="0" anchor="ctr"/>
+          <a:bodyPr rtlCol="0" anchor="ctr">
+            <a:normAutofit/>
+          </a:bodyPr>
           <a:lstStyle/>
           <a:p>
             <a:r>
               <a:rPr lang="es-CL" sz="1100" dirty="0">
                 <a:b>1</a:b>
               </a:rPr>
-              <a:t>ABUSO de formas jurídicas — Art. 4 ter CT</a:t>
-            </a:r>
-          </a:p>
-        </p:txBody>
-      </p:sp>
-      <p:sp>
-        <p:nvSpPr>
-          <p:cNvPr id="211" name="ConcDesc0"/>
+              <a:t>1. ABUSO de formas jurídicas — Art. 4 ter CT</a:t>
+            </a:r>
+          </a:p>
+        </p:txBody>
+      </p:sp>
+      <p:sp>
+        <p:nvSpPr>
+          <p:cNvPr id="211" name="Desc211"/>
           <p:cNvSpPr/>
           <p:nvPr/>
         </p:nvSpPr>
         <p:spPr>
           <a:xfrm>
-            <a:off x="594360" y="2240280"/>
-            <a:ext cx="6428232" cy="429768"/>
+            <a:off x="457200" y="2779776"/>
+            <a:ext cx="6309360" cy="475488"/>
           </a:xfrm>
           <a:prstGeom prst="rect">
             <a:avLst/>
           </a:prstGeom>
-        </p:spPr>
-        <p:style>
-          <a:lnRef idx="2">
-            <a:schemeClr val="accent1">
-              <a:shade val="50000"/>
-            </a:schemeClr>
-          </a:lnRef>
-          <a:fillRef idx="2">
+          <a:solidFill>
             <a:schemeClr val="accent1">
               <a:tint val="20000"/>
             </a:schemeClr>
-          </a:fillRef>
-          <a:effectRef idx="0">
-            <a:schemeClr val="accent1"/>
-          </a:effectRef>
-          <a:fontRef idx="minor">
-            <a:schemeClr val="dk1"/>
-          </a:fontRef>
-        </p:style>
-        <p:txBody>
-          <a:bodyPr rtlCol="0" anchor="ctr"/>
+          </a:solidFill>
+        </p:spPr>
+        <p:txBody>
+          <a:bodyPr rtlCol="0" anchor="ctr">
+            <a:normAutofit/>
+          </a:bodyPr>
           <a:lstStyle/>
           <a:p>
-            <a:r>
-              <a:rPr lang="es-CL" sz="950" dirty="0"/>
-              <a:t>El esquema utiliza una forma jurídica inapropiada para el sustrato económico.</a:t>
-            </a:r>
-          </a:p>
-          <a:p>
-            <a:r>
-              <a:rPr lang="es-CL" sz="950" dirty="0"/>
-              <a:t>Los actos son reales pero el único efecto relevante es tributario.</a:t>
-            </a:r>
-          </a:p>
-        </p:txBody>
-      </p:sp>
-      <p:sp>
-        <p:nvSpPr>
-          <p:cNvPr id="212" name="Rect 212"/>
+            <a:pPr marL="114300" indent="-114300"/>
+            <a:r>
+              <a:rPr lang="es-CL" sz="1000" dirty="0"/>
+              <a:t>El esquema usa la figura de sociedad de profesionales de forma inapropiada. Los actos son reales, pero el único efecto relevante distinto del tributario es ninguno.</a:t>
+            </a:r>
+          </a:p>
+        </p:txBody>
+      </p:sp>
+      <p:sp>
+        <p:nvSpPr>
+          <p:cNvPr id="212" name="Rect212"/>
           <p:cNvSpPr/>
           <p:nvPr/>
         </p:nvSpPr>
         <p:spPr>
           <a:xfrm>
-            <a:off x="594360" y="2724912"/>
-            <a:ext cx="6428232" cy="320040"/>
+            <a:off x="457200" y="3310128"/>
+            <a:ext cx="6309360" cy="292608"/>
           </a:xfrm>
           <a:prstGeom prst="rect">
             <a:avLst/>
@@ -13766,78 +13577,64 @@
           </a:fontRef>
         </p:style>
         <p:txBody>
-          <a:bodyPr rtlCol="0" anchor="ctr"/>
+          <a:bodyPr rtlCol="0" anchor="ctr">
+            <a:normAutofit/>
+          </a:bodyPr>
           <a:lstStyle/>
           <a:p>
             <a:r>
               <a:rPr lang="es-CL" sz="1100" dirty="0">
                 <a:b>1</a:b>
               </a:rPr>
-              <a:t>La sociedad D NO califica como sociedad de profesionales</a:t>
-            </a:r>
-          </a:p>
-        </p:txBody>
-      </p:sp>
-      <p:sp>
-        <p:nvSpPr>
-          <p:cNvPr id="213" name="ConcDesc1"/>
+              <a:t>2. La sociedad D no califica como sociedad de profesionales</a:t>
+            </a:r>
+          </a:p>
+        </p:txBody>
+      </p:sp>
+      <p:sp>
+        <p:nvSpPr>
+          <p:cNvPr id="213" name="Desc213"/>
           <p:cNvSpPr/>
           <p:nvPr/>
         </p:nvSpPr>
         <p:spPr>
           <a:xfrm>
-            <a:off x="594360" y="3044952"/>
-            <a:ext cx="6428232" cy="429768"/>
+            <a:off x="457200" y="3602736"/>
+            <a:ext cx="6309360" cy="475488"/>
           </a:xfrm>
           <a:prstGeom prst="rect">
             <a:avLst/>
           </a:prstGeom>
-        </p:spPr>
-        <p:style>
-          <a:lnRef idx="2">
-            <a:schemeClr val="accent1">
-              <a:shade val="50000"/>
-            </a:schemeClr>
-          </a:lnRef>
-          <a:fillRef idx="2">
+          <a:solidFill>
             <a:schemeClr val="accent1">
               <a:tint val="20000"/>
             </a:schemeClr>
-          </a:fillRef>
-          <a:effectRef idx="0">
-            <a:schemeClr val="accent1"/>
-          </a:effectRef>
-          <a:fontRef idx="minor">
-            <a:schemeClr val="dk1"/>
-          </a:fontRef>
-        </p:style>
-        <p:txBody>
-          <a:bodyPr rtlCol="0" anchor="ctr"/>
+          </a:solidFill>
+        </p:spPr>
+        <p:txBody>
+          <a:bodyPr rtlCol="0" anchor="ctr">
+            <a:normAutofit/>
+          </a:bodyPr>
           <a:lstStyle/>
           <a:p>
-            <a:r>
-              <a:rPr lang="es-CL" sz="950" dirty="0"/>
-              <a:t>B y C no ejercen su profesión para la sociedad, incumpliendo requisito</a:t>
-            </a:r>
-          </a:p>
-          <a:p>
-            <a:r>
-              <a:rPr lang="es-CL" sz="950" dirty="0"/>
-              <a:t>copulativo de las Circulares N°21/1991 y N°50/2020 del SII.</a:t>
-            </a:r>
-          </a:p>
-        </p:txBody>
-      </p:sp>
-      <p:sp>
-        <p:nvSpPr>
-          <p:cNvPr id="214" name="Rect 214"/>
+            <a:pPr marL="114300" indent="-114300"/>
+            <a:r>
+              <a:rPr lang="es-CL" sz="1000" dirty="0"/>
+              <a:t>B y C no ejercen su profesión para D, incumpliendo el requisito copulativo de las Circulares N°21/1991 y N°50/2020 del SII.</a:t>
+            </a:r>
+          </a:p>
+        </p:txBody>
+      </p:sp>
+      <p:sp>
+        <p:nvSpPr>
+          <p:cNvPr id="214" name="Rect214"/>
           <p:cNvSpPr/>
           <p:nvPr/>
         </p:nvSpPr>
         <p:spPr>
           <a:xfrm>
-            <a:off x="594360" y="3529584"/>
-            <a:ext cx="6428232" cy="320040"/>
+            <a:off x="457200" y="4133088"/>
+            <a:ext cx="6309360" cy="292608"/>
           </a:xfrm>
           <a:prstGeom prst="rect">
             <a:avLst/>
@@ -13860,78 +13657,64 @@
           </a:fontRef>
         </p:style>
         <p:txBody>
-          <a:bodyPr rtlCol="0" anchor="ctr"/>
+          <a:bodyPr rtlCol="0" anchor="ctr">
+            <a:normAutofit/>
+          </a:bodyPr>
           <a:lstStyle/>
           <a:p>
             <a:r>
               <a:rPr lang="es-CL" sz="1100" dirty="0">
                 <a:b>1</a:b>
               </a:rPr>
-              <a:t>El SII puede requerir declaración de abuso al TTA</a:t>
-            </a:r>
-          </a:p>
-        </p:txBody>
-      </p:sp>
-      <p:sp>
-        <p:nvSpPr>
-          <p:cNvPr id="215" name="ConcDesc2"/>
+              <a:t>3. El SII puede requerir declaración de abuso al TTA</a:t>
+            </a:r>
+          </a:p>
+        </p:txBody>
+      </p:sp>
+      <p:sp>
+        <p:nvSpPr>
+          <p:cNvPr id="215" name="Desc215"/>
           <p:cNvSpPr/>
           <p:nvPr/>
         </p:nvSpPr>
         <p:spPr>
           <a:xfrm>
-            <a:off x="594360" y="3849624"/>
-            <a:ext cx="6428232" cy="429768"/>
+            <a:off x="457200" y="4425696"/>
+            <a:ext cx="6309360" cy="475488"/>
           </a:xfrm>
           <a:prstGeom prst="rect">
             <a:avLst/>
           </a:prstGeom>
-        </p:spPr>
-        <p:style>
-          <a:lnRef idx="2">
-            <a:schemeClr val="accent1">
-              <a:shade val="50000"/>
-            </a:schemeClr>
-          </a:lnRef>
-          <a:fillRef idx="2">
+          <a:solidFill>
             <a:schemeClr val="accent1">
               <a:tint val="20000"/>
             </a:schemeClr>
-          </a:fillRef>
-          <a:effectRef idx="0">
-            <a:schemeClr val="accent1"/>
-          </a:effectRef>
-          <a:fontRef idx="minor">
-            <a:schemeClr val="dk1"/>
-          </a:fontRef>
-        </p:style>
-        <p:txBody>
-          <a:bodyPr rtlCol="0" anchor="ctr"/>
+          </a:solidFill>
+        </p:spPr>
+        <p:txBody>
+          <a:bodyPr rtlCol="0" anchor="ctr">
+            <a:normAutofit/>
+          </a:bodyPr>
           <a:lstStyle/>
           <a:p>
-            <a:r>
-              <a:rPr lang="es-CL" sz="950" dirty="0"/>
-              <a:t>Art. 4 quinquies CT: el Director puede solicitar al Tribunal Tributario y</a:t>
-            </a:r>
-          </a:p>
-          <a:p>
-            <a:r>
-              <a:rPr lang="es-CL" sz="950" dirty="0"/>
-              <a:t>Aduanero la declaración de abuso → recalificación + intereses + multas.</a:t>
-            </a:r>
-          </a:p>
-        </p:txBody>
-      </p:sp>
-      <p:sp>
-        <p:nvSpPr>
-          <p:cNvPr id="216" name="Rect 216"/>
+            <a:pPr marL="114300" indent="-114300"/>
+            <a:r>
+              <a:rPr lang="es-CL" sz="1000" dirty="0"/>
+              <a:t>Art. 4 quinquies CT: el Director del SII puede pedir al Tribunal Tributario y Aduanero la declaración de abuso → recalificación + intereses + multas.</a:t>
+            </a:r>
+          </a:p>
+        </p:txBody>
+      </p:sp>
+      <p:sp>
+        <p:nvSpPr>
+          <p:cNvPr id="216" name="Rect216"/>
           <p:cNvSpPr/>
           <p:nvPr/>
         </p:nvSpPr>
         <p:spPr>
           <a:xfrm>
-            <a:off x="594360" y="4334256"/>
-            <a:ext cx="6428232" cy="320040"/>
+            <a:off x="457200" y="4956048"/>
+            <a:ext cx="6309360" cy="292608"/>
           </a:xfrm>
           <a:prstGeom prst="rect">
             <a:avLst/>
@@ -13954,78 +13737,64 @@
           </a:fontRef>
         </p:style>
         <p:txBody>
-          <a:bodyPr rtlCol="0" anchor="ctr"/>
+          <a:bodyPr rtlCol="0" anchor="ctr">
+            <a:normAutofit/>
+          </a:bodyPr>
           <a:lstStyle/>
           <a:p>
             <a:r>
               <a:rPr lang="es-CL" sz="1100" dirty="0">
                 <a:b>1</a:b>
               </a:rPr>
-              <a:t>Existen alternativas legítimas de organización</a:t>
-            </a:r>
-          </a:p>
-        </p:txBody>
-      </p:sp>
-      <p:sp>
-        <p:nvSpPr>
-          <p:cNvPr id="217" name="ConcDesc3"/>
+              <a:t>4. Existen alternativas legítimas de organización</a:t>
+            </a:r>
+          </a:p>
+        </p:txBody>
+      </p:sp>
+      <p:sp>
+        <p:nvSpPr>
+          <p:cNvPr id="217" name="Desc217"/>
           <p:cNvSpPr/>
           <p:nvPr/>
         </p:nvSpPr>
         <p:spPr>
           <a:xfrm>
-            <a:off x="594360" y="4654296"/>
-            <a:ext cx="6428232" cy="429768"/>
+            <a:off x="457200" y="5248656"/>
+            <a:ext cx="6309360" cy="475488"/>
           </a:xfrm>
           <a:prstGeom prst="rect">
             <a:avLst/>
           </a:prstGeom>
-        </p:spPr>
-        <p:style>
-          <a:lnRef idx="2">
-            <a:schemeClr val="accent1">
-              <a:shade val="50000"/>
-            </a:schemeClr>
-          </a:lnRef>
-          <a:fillRef idx="2">
+          <a:solidFill>
             <a:schemeClr val="accent1">
               <a:tint val="20000"/>
             </a:schemeClr>
-          </a:fillRef>
-          <a:effectRef idx="0">
-            <a:schemeClr val="accent1"/>
-          </a:effectRef>
-          <a:fontRef idx="minor">
-            <a:schemeClr val="dk1"/>
-          </a:fontRef>
-        </p:style>
-        <p:txBody>
-          <a:bodyPr rtlCol="0" anchor="ctr"/>
+          </a:solidFill>
+        </p:spPr>
+        <p:txBody>
+          <a:bodyPr rtlCol="0" anchor="ctr">
+            <a:normAutofit/>
+          </a:bodyPr>
           <a:lstStyle/>
           <a:p>
-            <a:r>
-              <a:rPr lang="es-CL" sz="950" dirty="0"/>
-              <a:t>Profesional independiente, sociedad de profesionales con socios reales,</a:t>
-            </a:r>
-          </a:p>
-          <a:p>
-            <a:r>
-              <a:rPr lang="es-CL" sz="950" dirty="0"/>
-              <a:t>SpA Pro Pyme (14 D N°3) o distribución proporcional al trabajo real.</a:t>
-            </a:r>
-          </a:p>
-        </p:txBody>
-      </p:sp>
-      <p:sp>
-        <p:nvSpPr>
-          <p:cNvPr id="218" name="Rect 218"/>
+            <a:pPr marL="114300" indent="-114300"/>
+            <a:r>
+              <a:rPr lang="es-CL" sz="1000" dirty="0"/>
+              <a:t>Profesional independiente, sociedad de profesionales con socios reales, SpA Pro Pyme (14 D N°3) o distribución de utilidades proporcional al trabajo.</a:t>
+            </a:r>
+          </a:p>
+        </p:txBody>
+      </p:sp>
+      <p:sp>
+        <p:nvSpPr>
+          <p:cNvPr id="218" name="Rect218"/>
           <p:cNvSpPr/>
           <p:nvPr/>
         </p:nvSpPr>
         <p:spPr>
           <a:xfrm>
-            <a:off x="594360" y="5138927"/>
-            <a:ext cx="6428232" cy="320040"/>
+            <a:off x="457200" y="5779008"/>
+            <a:ext cx="6309360" cy="292608"/>
           </a:xfrm>
           <a:prstGeom prst="rect">
             <a:avLst/>
@@ -14048,64 +13817,50 @@
           </a:fontRef>
         </p:style>
         <p:txBody>
-          <a:bodyPr rtlCol="0" anchor="ctr"/>
+          <a:bodyPr rtlCol="0" anchor="ctr">
+            <a:normAutofit/>
+          </a:bodyPr>
           <a:lstStyle/>
           <a:p>
             <a:r>
               <a:rPr lang="es-CL" sz="1100" dirty="0">
                 <a:b>1</a:b>
               </a:rPr>
-              <a:t>La clave es la sustancia económica</a:t>
-            </a:r>
-          </a:p>
-        </p:txBody>
-      </p:sp>
-      <p:sp>
-        <p:nvSpPr>
-          <p:cNvPr id="219" name="ConcDesc4"/>
+              <a:t>5. La clave: sustancia económica real</a:t>
+            </a:r>
+          </a:p>
+        </p:txBody>
+      </p:sp>
+      <p:sp>
+        <p:nvSpPr>
+          <p:cNvPr id="219" name="Desc219"/>
           <p:cNvSpPr/>
           <p:nvPr/>
         </p:nvSpPr>
         <p:spPr>
           <a:xfrm>
-            <a:off x="594360" y="5458967"/>
-            <a:ext cx="6428232" cy="429768"/>
+            <a:off x="457200" y="6071616"/>
+            <a:ext cx="6309360" cy="475488"/>
           </a:xfrm>
           <a:prstGeom prst="rect">
             <a:avLst/>
           </a:prstGeom>
-        </p:spPr>
-        <p:style>
-          <a:lnRef idx="2">
-            <a:schemeClr val="accent1">
-              <a:shade val="50000"/>
-            </a:schemeClr>
-          </a:lnRef>
-          <a:fillRef idx="2">
+          <a:solidFill>
             <a:schemeClr val="accent1">
               <a:tint val="20000"/>
             </a:schemeClr>
-          </a:fillRef>
-          <a:effectRef idx="0">
-            <a:schemeClr val="accent1"/>
-          </a:effectRef>
-          <a:fontRef idx="minor">
-            <a:schemeClr val="dk1"/>
-          </a:fontRef>
-        </p:style>
-        <p:txBody>
-          <a:bodyPr rtlCol="0" anchor="ctr"/>
+          </a:solidFill>
+        </p:spPr>
+        <p:txBody>
+          <a:bodyPr rtlCol="0" anchor="ctr">
+            <a:normAutofit/>
+          </a:bodyPr>
           <a:lstStyle/>
           <a:p>
-            <a:r>
-              <a:rPr lang="es-CL" sz="950" dirty="0"/>
-              <a:t>Toda estructura debe poder demostrar que los socios aportan trabajo, capital,</a:t>
-            </a:r>
-          </a:p>
-          <a:p>
-            <a:r>
-              <a:rPr lang="es-CL" sz="950" dirty="0"/>
-              <a:t>clientela o dirección real. La forma jurídica por sí sola no es suficiente.</a:t>
+            <a:pPr marL="114300" indent="-114300"/>
+            <a:r>
+              <a:rPr lang="es-CL" sz="1000" dirty="0"/>
+              <a:t>Toda estructura debe demostrar que los socios aportan trabajo, capital, clientela o dirección efectiva. La forma jurídica por sí sola no es suficiente frente a NGA.</a:t>
             </a:r>
           </a:p>
         </p:txBody>

--- a/Caso86_Presentacion.pptx
+++ b/Caso86_Presentacion.pptx
@@ -3508,14 +3508,14 @@
         </p:nvSpPr>
         <p:spPr>
           <a:xfrm>
-            <a:off x="548640" y="4343400"/>
-            <a:ext cx="2651760" cy="502920"/>
+            <a:off x="457200" y="4343400"/>
+            <a:ext cx="2606040" cy="502920"/>
           </a:xfrm>
           <a:prstGeom prst="roundRect">
             <a:avLst/>
           </a:prstGeom>
           <a:solidFill>
-            <a:srgbClr val="254E80"/>
+            <a:srgbClr val="2E7BC4"/>
           </a:solidFill>
           <a:ln>
             <a:noFill/>
@@ -3561,14 +3561,14 @@
         </p:nvSpPr>
         <p:spPr>
           <a:xfrm>
-            <a:off x="3337560" y="4343400"/>
-            <a:ext cx="2651760" cy="502920"/>
+            <a:off x="3172968" y="4343400"/>
+            <a:ext cx="2606040" cy="502920"/>
           </a:xfrm>
           <a:prstGeom prst="roundRect">
             <a:avLst/>
           </a:prstGeom>
           <a:solidFill>
-            <a:srgbClr val="254E80"/>
+            <a:srgbClr val="2E7BC4"/>
           </a:solidFill>
           <a:ln>
             <a:noFill/>
@@ -3614,14 +3614,14 @@
         </p:nvSpPr>
         <p:spPr>
           <a:xfrm>
-            <a:off x="6126479" y="4343400"/>
-            <a:ext cx="2651760" cy="502920"/>
+            <a:off x="5888736" y="4343400"/>
+            <a:ext cx="2606040" cy="502920"/>
           </a:xfrm>
           <a:prstGeom prst="roundRect">
             <a:avLst/>
           </a:prstGeom>
           <a:solidFill>
-            <a:srgbClr val="254E80"/>
+            <a:srgbClr val="2E7BC4"/>
           </a:solidFill>
           <a:ln>
             <a:noFill/>
@@ -3667,14 +3667,14 @@
         </p:nvSpPr>
         <p:spPr>
           <a:xfrm>
-            <a:off x="8915400" y="4343400"/>
-            <a:ext cx="2651760" cy="502920"/>
+            <a:off x="8604504" y="4343400"/>
+            <a:ext cx="2606040" cy="502920"/>
           </a:xfrm>
           <a:prstGeom prst="roundRect">
             <a:avLst/>
           </a:prstGeom>
           <a:solidFill>
-            <a:srgbClr val="254E80"/>
+            <a:srgbClr val="2E7BC4"/>
           </a:solidFill>
           <a:ln>
             <a:noFill/>
@@ -3767,50 +3767,6 @@
       <p:grpSpPr/>
       <p:sp>
         <p:nvSpPr>
-          <p:cNvPr id="5" name="Rectangle 4"/>
-          <p:cNvSpPr/>
-          <p:nvPr/>
-        </p:nvSpPr>
-        <p:spPr>
-          <a:xfrm>
-            <a:off x="0" y="0"/>
-            <a:ext cx="12191695" cy="1325880"/>
-          </a:xfrm>
-          <a:prstGeom prst="rect">
-            <a:avLst/>
-          </a:prstGeom>
-          <a:solidFill>
-            <a:srgbClr val="1A3A5C"/>
-          </a:solidFill>
-          <a:ln>
-            <a:noFill/>
-          </a:ln>
-          <a:effectLst/>
-        </p:spPr>
-        <p:style>
-          <a:lnRef idx="1">
-            <a:schemeClr val="accent1"/>
-          </a:lnRef>
-          <a:fillRef idx="3">
-            <a:schemeClr val="accent1"/>
-          </a:fillRef>
-          <a:effectRef idx="2">
-            <a:schemeClr val="accent1"/>
-          </a:effectRef>
-          <a:fontRef idx="minor">
-            <a:schemeClr val="lt1"/>
-          </a:fontRef>
-        </p:style>
-        <p:txBody>
-          <a:bodyPr rtlCol="0" anchor="ctr"/>
-          <a:lstStyle/>
-          <a:p>
-            <a:pPr algn="ctr"/>
-          </a:p>
-        </p:txBody>
-      </p:sp>
-      <p:sp>
-        <p:nvSpPr>
           <p:cNvPr id="2" name="Rectangle 1"/>
           <p:cNvSpPr/>
           <p:nvPr/>
@@ -3929,6 +3885,50 @@
               </a:rPr>
               <a:t>Grupo 4: Andrea Añasco · Gema Sepúlveda · Karen Rebolledo · Nicolás Muñoz   |   Caso 86 — Catálogo de Esquemas Tributarios SII 2025</a:t>
             </a:r>
+          </a:p>
+        </p:txBody>
+      </p:sp>
+      <p:sp>
+        <p:nvSpPr>
+          <p:cNvPr id="5" name="Rectangle 4"/>
+          <p:cNvSpPr/>
+          <p:nvPr/>
+        </p:nvSpPr>
+        <p:spPr>
+          <a:xfrm>
+            <a:off x="0" y="0"/>
+            <a:ext cx="12191695" cy="1325880"/>
+          </a:xfrm>
+          <a:prstGeom prst="rect">
+            <a:avLst/>
+          </a:prstGeom>
+          <a:solidFill>
+            <a:srgbClr val="1A3A5C"/>
+          </a:solidFill>
+          <a:ln>
+            <a:noFill/>
+          </a:ln>
+          <a:effectLst/>
+        </p:spPr>
+        <p:style>
+          <a:lnRef idx="1">
+            <a:schemeClr val="accent1"/>
+          </a:lnRef>
+          <a:fillRef idx="3">
+            <a:schemeClr val="accent1"/>
+          </a:fillRef>
+          <a:effectRef idx="2">
+            <a:schemeClr val="accent1"/>
+          </a:effectRef>
+          <a:fontRef idx="minor">
+            <a:schemeClr val="lt1"/>
+          </a:fontRef>
+        </p:style>
+        <p:txBody>
+          <a:bodyPr rtlCol="0" anchor="ctr"/>
+          <a:lstStyle/>
+          <a:p>
+            <a:pPr algn="ctr"/>
           </a:p>
         </p:txBody>
       </p:sp>
@@ -4689,50 +4689,6 @@
       <p:grpSpPr/>
       <p:sp>
         <p:nvSpPr>
-          <p:cNvPr id="5" name="Rectangle 4"/>
-          <p:cNvSpPr/>
-          <p:nvPr/>
-        </p:nvSpPr>
-        <p:spPr>
-          <a:xfrm>
-            <a:off x="0" y="0"/>
-            <a:ext cx="12191695" cy="1325880"/>
-          </a:xfrm>
-          <a:prstGeom prst="rect">
-            <a:avLst/>
-          </a:prstGeom>
-          <a:solidFill>
-            <a:srgbClr val="1A3A5C"/>
-          </a:solidFill>
-          <a:ln>
-            <a:noFill/>
-          </a:ln>
-          <a:effectLst/>
-        </p:spPr>
-        <p:style>
-          <a:lnRef idx="1">
-            <a:schemeClr val="accent1"/>
-          </a:lnRef>
-          <a:fillRef idx="3">
-            <a:schemeClr val="accent1"/>
-          </a:fillRef>
-          <a:effectRef idx="2">
-            <a:schemeClr val="accent1"/>
-          </a:effectRef>
-          <a:fontRef idx="minor">
-            <a:schemeClr val="lt1"/>
-          </a:fontRef>
-        </p:style>
-        <p:txBody>
-          <a:bodyPr rtlCol="0" anchor="ctr"/>
-          <a:lstStyle/>
-          <a:p>
-            <a:pPr algn="ctr"/>
-          </a:p>
-        </p:txBody>
-      </p:sp>
-      <p:sp>
-        <p:nvSpPr>
           <p:cNvPr id="2" name="Rectangle 1"/>
           <p:cNvSpPr/>
           <p:nvPr/>
@@ -4851,6 +4807,50 @@
               </a:rPr>
               <a:t>Grupo 4: Andrea Añasco · Gema Sepúlveda · Karen Rebolledo · Nicolás Muñoz   |   Caso 86 — Catálogo de Esquemas Tributarios SII 2025</a:t>
             </a:r>
+          </a:p>
+        </p:txBody>
+      </p:sp>
+      <p:sp>
+        <p:nvSpPr>
+          <p:cNvPr id="5" name="Rectangle 4"/>
+          <p:cNvSpPr/>
+          <p:nvPr/>
+        </p:nvSpPr>
+        <p:spPr>
+          <a:xfrm>
+            <a:off x="0" y="0"/>
+            <a:ext cx="12191695" cy="1325880"/>
+          </a:xfrm>
+          <a:prstGeom prst="rect">
+            <a:avLst/>
+          </a:prstGeom>
+          <a:solidFill>
+            <a:srgbClr val="1A3A5C"/>
+          </a:solidFill>
+          <a:ln>
+            <a:noFill/>
+          </a:ln>
+          <a:effectLst/>
+        </p:spPr>
+        <p:style>
+          <a:lnRef idx="1">
+            <a:schemeClr val="accent1"/>
+          </a:lnRef>
+          <a:fillRef idx="3">
+            <a:schemeClr val="accent1"/>
+          </a:fillRef>
+          <a:effectRef idx="2">
+            <a:schemeClr val="accent1"/>
+          </a:effectRef>
+          <a:fontRef idx="minor">
+            <a:schemeClr val="lt1"/>
+          </a:fontRef>
+        </p:style>
+        <p:txBody>
+          <a:bodyPr rtlCol="0" anchor="ctr"/>
+          <a:lstStyle/>
+          <a:p>
+            <a:pPr algn="ctr"/>
           </a:p>
         </p:txBody>
       </p:sp>
@@ -6219,50 +6219,6 @@
       <p:grpSpPr/>
       <p:sp>
         <p:nvSpPr>
-          <p:cNvPr id="5" name="Rectangle 4"/>
-          <p:cNvSpPr/>
-          <p:nvPr/>
-        </p:nvSpPr>
-        <p:spPr>
-          <a:xfrm>
-            <a:off x="0" y="0"/>
-            <a:ext cx="12191695" cy="1325880"/>
-          </a:xfrm>
-          <a:prstGeom prst="rect">
-            <a:avLst/>
-          </a:prstGeom>
-          <a:solidFill>
-            <a:srgbClr val="1A3A5C"/>
-          </a:solidFill>
-          <a:ln>
-            <a:noFill/>
-          </a:ln>
-          <a:effectLst/>
-        </p:spPr>
-        <p:style>
-          <a:lnRef idx="1">
-            <a:schemeClr val="accent1"/>
-          </a:lnRef>
-          <a:fillRef idx="3">
-            <a:schemeClr val="accent1"/>
-          </a:fillRef>
-          <a:effectRef idx="2">
-            <a:schemeClr val="accent1"/>
-          </a:effectRef>
-          <a:fontRef idx="minor">
-            <a:schemeClr val="lt1"/>
-          </a:fontRef>
-        </p:style>
-        <p:txBody>
-          <a:bodyPr rtlCol="0" anchor="ctr"/>
-          <a:lstStyle/>
-          <a:p>
-            <a:pPr algn="ctr"/>
-          </a:p>
-        </p:txBody>
-      </p:sp>
-      <p:sp>
-        <p:nvSpPr>
           <p:cNvPr id="2" name="Rectangle 1"/>
           <p:cNvSpPr/>
           <p:nvPr/>
@@ -6386,6 +6342,50 @@
       </p:sp>
       <p:sp>
         <p:nvSpPr>
+          <p:cNvPr id="5" name="Rectangle 4"/>
+          <p:cNvSpPr/>
+          <p:nvPr/>
+        </p:nvSpPr>
+        <p:spPr>
+          <a:xfrm>
+            <a:off x="0" y="0"/>
+            <a:ext cx="12191695" cy="1325880"/>
+          </a:xfrm>
+          <a:prstGeom prst="rect">
+            <a:avLst/>
+          </a:prstGeom>
+          <a:solidFill>
+            <a:srgbClr val="1A3A5C"/>
+          </a:solidFill>
+          <a:ln>
+            <a:noFill/>
+          </a:ln>
+          <a:effectLst/>
+        </p:spPr>
+        <p:style>
+          <a:lnRef idx="1">
+            <a:schemeClr val="accent1"/>
+          </a:lnRef>
+          <a:fillRef idx="3">
+            <a:schemeClr val="accent1"/>
+          </a:fillRef>
+          <a:effectRef idx="2">
+            <a:schemeClr val="accent1"/>
+          </a:effectRef>
+          <a:fontRef idx="minor">
+            <a:schemeClr val="lt1"/>
+          </a:fontRef>
+        </p:style>
+        <p:txBody>
+          <a:bodyPr rtlCol="0" anchor="ctr"/>
+          <a:lstStyle/>
+          <a:p>
+            <a:pPr algn="ctr"/>
+          </a:p>
+        </p:txBody>
+      </p:sp>
+      <p:sp>
+        <p:nvSpPr>
           <p:cNvPr id="6" name="Rectangle 5"/>
           <p:cNvSpPr/>
           <p:nvPr/>
@@ -7386,7 +7386,7 @@
             <a:r>
               <a:rPr sz="2000" b="1" i="0">
                 <a:solidFill>
-                  <a:srgbClr val="2E7BC4"/>
+                  <a:srgbClr val="FFFFFF"/>
                 </a:solidFill>
                 <a:latin typeface="Calibri"/>
               </a:rPr>
@@ -7509,7 +7509,7 @@
             <a:r>
               <a:rPr sz="2000" b="1" i="0">
                 <a:solidFill>
-                  <a:srgbClr val="1A3A5C"/>
+                  <a:srgbClr val="FFFFFF"/>
                 </a:solidFill>
                 <a:latin typeface="Calibri"/>
               </a:rPr>
@@ -7632,7 +7632,7 @@
             <a:r>
               <a:rPr sz="2000" b="1" i="0">
                 <a:solidFill>
-                  <a:srgbClr val="2E7BC4"/>
+                  <a:srgbClr val="FFFFFF"/>
                 </a:solidFill>
                 <a:latin typeface="Calibri"/>
               </a:rPr>
@@ -7754,7 +7754,7 @@
         </p:nvSpPr>
         <p:spPr>
           <a:xfrm>
-            <a:off x="7498079" y="2606040"/>
+            <a:off x="7498079" y="1664208"/>
             <a:ext cx="777240" cy="256032"/>
           </a:xfrm>
           <a:prstGeom prst="rect">
@@ -7789,7 +7789,7 @@
         </p:nvSpPr>
         <p:spPr>
           <a:xfrm>
-            <a:off x="8887967" y="2606040"/>
+            <a:off x="8887967" y="1664208"/>
             <a:ext cx="777240" cy="256032"/>
           </a:xfrm>
           <a:prstGeom prst="rect">
@@ -7824,7 +7824,7 @@
         </p:nvSpPr>
         <p:spPr>
           <a:xfrm>
-            <a:off x="10241280" y="2606040"/>
+            <a:off x="10241280" y="1664208"/>
             <a:ext cx="777240" cy="256032"/>
           </a:xfrm>
           <a:prstGeom prst="rect">
@@ -7978,50 +7978,6 @@
       <p:grpSpPr/>
       <p:sp>
         <p:nvSpPr>
-          <p:cNvPr id="5" name="Rectangle 4"/>
-          <p:cNvSpPr/>
-          <p:nvPr/>
-        </p:nvSpPr>
-        <p:spPr>
-          <a:xfrm>
-            <a:off x="0" y="0"/>
-            <a:ext cx="12191695" cy="1325880"/>
-          </a:xfrm>
-          <a:prstGeom prst="rect">
-            <a:avLst/>
-          </a:prstGeom>
-          <a:solidFill>
-            <a:srgbClr val="1A3A5C"/>
-          </a:solidFill>
-          <a:ln>
-            <a:noFill/>
-          </a:ln>
-          <a:effectLst/>
-        </p:spPr>
-        <p:style>
-          <a:lnRef idx="1">
-            <a:schemeClr val="accent1"/>
-          </a:lnRef>
-          <a:fillRef idx="3">
-            <a:schemeClr val="accent1"/>
-          </a:fillRef>
-          <a:effectRef idx="2">
-            <a:schemeClr val="accent1"/>
-          </a:effectRef>
-          <a:fontRef idx="minor">
-            <a:schemeClr val="lt1"/>
-          </a:fontRef>
-        </p:style>
-        <p:txBody>
-          <a:bodyPr rtlCol="0" anchor="ctr"/>
-          <a:lstStyle/>
-          <a:p>
-            <a:pPr algn="ctr"/>
-          </a:p>
-        </p:txBody>
-      </p:sp>
-      <p:sp>
-        <p:nvSpPr>
           <p:cNvPr id="2" name="Rectangle 1"/>
           <p:cNvSpPr/>
           <p:nvPr/>
@@ -8145,6 +8101,50 @@
       </p:sp>
       <p:sp>
         <p:nvSpPr>
+          <p:cNvPr id="5" name="Rectangle 4"/>
+          <p:cNvSpPr/>
+          <p:nvPr/>
+        </p:nvSpPr>
+        <p:spPr>
+          <a:xfrm>
+            <a:off x="0" y="0"/>
+            <a:ext cx="12191695" cy="1325880"/>
+          </a:xfrm>
+          <a:prstGeom prst="rect">
+            <a:avLst/>
+          </a:prstGeom>
+          <a:solidFill>
+            <a:srgbClr val="1A3A5C"/>
+          </a:solidFill>
+          <a:ln>
+            <a:noFill/>
+          </a:ln>
+          <a:effectLst/>
+        </p:spPr>
+        <p:style>
+          <a:lnRef idx="1">
+            <a:schemeClr val="accent1"/>
+          </a:lnRef>
+          <a:fillRef idx="3">
+            <a:schemeClr val="accent1"/>
+          </a:fillRef>
+          <a:effectRef idx="2">
+            <a:schemeClr val="accent1"/>
+          </a:effectRef>
+          <a:fontRef idx="minor">
+            <a:schemeClr val="lt1"/>
+          </a:fontRef>
+        </p:style>
+        <p:txBody>
+          <a:bodyPr rtlCol="0" anchor="ctr"/>
+          <a:lstStyle/>
+          <a:p>
+            <a:pPr algn="ctr"/>
+          </a:p>
+        </p:txBody>
+      </p:sp>
+      <p:sp>
+        <p:nvSpPr>
           <p:cNvPr id="6" name="Rectangle 5"/>
           <p:cNvSpPr/>
           <p:nvPr/>
@@ -8964,7 +8964,7 @@
         </p:nvSpPr>
         <p:spPr>
           <a:xfrm>
-            <a:off x="3291840" y="3520440"/>
+            <a:off x="3291840" y="3246120"/>
             <a:ext cx="685800" cy="246888"/>
           </a:xfrm>
           <a:prstGeom prst="rect">
@@ -9052,7 +9052,7 @@
         </p:nvSpPr>
         <p:spPr>
           <a:xfrm>
-            <a:off x="4160520" y="3520440"/>
+            <a:off x="4160520" y="3246120"/>
             <a:ext cx="685800" cy="246888"/>
           </a:xfrm>
           <a:prstGeom prst="rect">
@@ -9140,7 +9140,7 @@
         </p:nvSpPr>
         <p:spPr>
           <a:xfrm>
-            <a:off x="5029200" y="3520440"/>
+            <a:off x="5029200" y="3246120"/>
             <a:ext cx="685800" cy="246888"/>
           </a:xfrm>
           <a:prstGeom prst="rect">
@@ -9547,50 +9547,6 @@
       <p:grpSpPr/>
       <p:sp>
         <p:nvSpPr>
-          <p:cNvPr id="5" name="Rectangle 4"/>
-          <p:cNvSpPr/>
-          <p:nvPr/>
-        </p:nvSpPr>
-        <p:spPr>
-          <a:xfrm>
-            <a:off x="0" y="0"/>
-            <a:ext cx="12191695" cy="1325880"/>
-          </a:xfrm>
-          <a:prstGeom prst="rect">
-            <a:avLst/>
-          </a:prstGeom>
-          <a:solidFill>
-            <a:srgbClr val="1A3A5C"/>
-          </a:solidFill>
-          <a:ln>
-            <a:noFill/>
-          </a:ln>
-          <a:effectLst/>
-        </p:spPr>
-        <p:style>
-          <a:lnRef idx="1">
-            <a:schemeClr val="accent1"/>
-          </a:lnRef>
-          <a:fillRef idx="3">
-            <a:schemeClr val="accent1"/>
-          </a:fillRef>
-          <a:effectRef idx="2">
-            <a:schemeClr val="accent1"/>
-          </a:effectRef>
-          <a:fontRef idx="minor">
-            <a:schemeClr val="lt1"/>
-          </a:fontRef>
-        </p:style>
-        <p:txBody>
-          <a:bodyPr rtlCol="0" anchor="ctr"/>
-          <a:lstStyle/>
-          <a:p>
-            <a:pPr algn="ctr"/>
-          </a:p>
-        </p:txBody>
-      </p:sp>
-      <p:sp>
-        <p:nvSpPr>
           <p:cNvPr id="2" name="Rectangle 1"/>
           <p:cNvSpPr/>
           <p:nvPr/>
@@ -9709,6 +9665,50 @@
               </a:rPr>
               <a:t>Grupo 4: Andrea Añasco · Gema Sepúlveda · Karen Rebolledo · Nicolás Muñoz   |   Caso 86 — Catálogo de Esquemas Tributarios SII 2025</a:t>
             </a:r>
+          </a:p>
+        </p:txBody>
+      </p:sp>
+      <p:sp>
+        <p:nvSpPr>
+          <p:cNvPr id="5" name="Rectangle 4"/>
+          <p:cNvSpPr/>
+          <p:nvPr/>
+        </p:nvSpPr>
+        <p:spPr>
+          <a:xfrm>
+            <a:off x="0" y="0"/>
+            <a:ext cx="12191695" cy="1325880"/>
+          </a:xfrm>
+          <a:prstGeom prst="rect">
+            <a:avLst/>
+          </a:prstGeom>
+          <a:solidFill>
+            <a:srgbClr val="1A3A5C"/>
+          </a:solidFill>
+          <a:ln>
+            <a:noFill/>
+          </a:ln>
+          <a:effectLst/>
+        </p:spPr>
+        <p:style>
+          <a:lnRef idx="1">
+            <a:schemeClr val="accent1"/>
+          </a:lnRef>
+          <a:fillRef idx="3">
+            <a:schemeClr val="accent1"/>
+          </a:fillRef>
+          <a:effectRef idx="2">
+            <a:schemeClr val="accent1"/>
+          </a:effectRef>
+          <a:fontRef idx="minor">
+            <a:schemeClr val="lt1"/>
+          </a:fontRef>
+        </p:style>
+        <p:txBody>
+          <a:bodyPr rtlCol="0" anchor="ctr"/>
+          <a:lstStyle/>
+          <a:p>
+            <a:pPr algn="ctr"/>
           </a:p>
         </p:txBody>
       </p:sp>
@@ -11321,50 +11321,6 @@
       <p:grpSpPr/>
       <p:sp>
         <p:nvSpPr>
-          <p:cNvPr id="5" name="Rectangle 4"/>
-          <p:cNvSpPr/>
-          <p:nvPr/>
-        </p:nvSpPr>
-        <p:spPr>
-          <a:xfrm>
-            <a:off x="0" y="0"/>
-            <a:ext cx="12191695" cy="1325880"/>
-          </a:xfrm>
-          <a:prstGeom prst="rect">
-            <a:avLst/>
-          </a:prstGeom>
-          <a:solidFill>
-            <a:srgbClr val="1A3A5C"/>
-          </a:solidFill>
-          <a:ln>
-            <a:noFill/>
-          </a:ln>
-          <a:effectLst/>
-        </p:spPr>
-        <p:style>
-          <a:lnRef idx="1">
-            <a:schemeClr val="accent1"/>
-          </a:lnRef>
-          <a:fillRef idx="3">
-            <a:schemeClr val="accent1"/>
-          </a:fillRef>
-          <a:effectRef idx="2">
-            <a:schemeClr val="accent1"/>
-          </a:effectRef>
-          <a:fontRef idx="minor">
-            <a:schemeClr val="lt1"/>
-          </a:fontRef>
-        </p:style>
-        <p:txBody>
-          <a:bodyPr rtlCol="0" anchor="ctr"/>
-          <a:lstStyle/>
-          <a:p>
-            <a:pPr algn="ctr"/>
-          </a:p>
-        </p:txBody>
-      </p:sp>
-      <p:sp>
-        <p:nvSpPr>
           <p:cNvPr id="2" name="Rectangle 1"/>
           <p:cNvSpPr/>
           <p:nvPr/>
@@ -11483,6 +11439,50 @@
               </a:rPr>
               <a:t>Grupo 4: Andrea Añasco · Gema Sepúlveda · Karen Rebolledo · Nicolás Muñoz   |   Caso 86 — Catálogo de Esquemas Tributarios SII 2025</a:t>
             </a:r>
+          </a:p>
+        </p:txBody>
+      </p:sp>
+      <p:sp>
+        <p:nvSpPr>
+          <p:cNvPr id="5" name="Rectangle 4"/>
+          <p:cNvSpPr/>
+          <p:nvPr/>
+        </p:nvSpPr>
+        <p:spPr>
+          <a:xfrm>
+            <a:off x="0" y="0"/>
+            <a:ext cx="12191695" cy="1325880"/>
+          </a:xfrm>
+          <a:prstGeom prst="rect">
+            <a:avLst/>
+          </a:prstGeom>
+          <a:solidFill>
+            <a:srgbClr val="1A3A5C"/>
+          </a:solidFill>
+          <a:ln>
+            <a:noFill/>
+          </a:ln>
+          <a:effectLst/>
+        </p:spPr>
+        <p:style>
+          <a:lnRef idx="1">
+            <a:schemeClr val="accent1"/>
+          </a:lnRef>
+          <a:fillRef idx="3">
+            <a:schemeClr val="accent1"/>
+          </a:fillRef>
+          <a:effectRef idx="2">
+            <a:schemeClr val="accent1"/>
+          </a:effectRef>
+          <a:fontRef idx="minor">
+            <a:schemeClr val="lt1"/>
+          </a:fontRef>
+        </p:style>
+        <p:txBody>
+          <a:bodyPr rtlCol="0" anchor="ctr"/>
+          <a:lstStyle/>
+          <a:p>
+            <a:pPr algn="ctr"/>
           </a:p>
         </p:txBody>
       </p:sp>
@@ -12828,50 +12828,6 @@
       <p:grpSpPr/>
       <p:sp>
         <p:nvSpPr>
-          <p:cNvPr id="5" name="Rectangle 4"/>
-          <p:cNvSpPr/>
-          <p:nvPr/>
-        </p:nvSpPr>
-        <p:spPr>
-          <a:xfrm>
-            <a:off x="0" y="0"/>
-            <a:ext cx="12191695" cy="1325880"/>
-          </a:xfrm>
-          <a:prstGeom prst="rect">
-            <a:avLst/>
-          </a:prstGeom>
-          <a:solidFill>
-            <a:srgbClr val="1A3A5C"/>
-          </a:solidFill>
-          <a:ln>
-            <a:noFill/>
-          </a:ln>
-          <a:effectLst/>
-        </p:spPr>
-        <p:style>
-          <a:lnRef idx="1">
-            <a:schemeClr val="accent1"/>
-          </a:lnRef>
-          <a:fillRef idx="3">
-            <a:schemeClr val="accent1"/>
-          </a:fillRef>
-          <a:effectRef idx="2">
-            <a:schemeClr val="accent1"/>
-          </a:effectRef>
-          <a:fontRef idx="minor">
-            <a:schemeClr val="lt1"/>
-          </a:fontRef>
-        </p:style>
-        <p:txBody>
-          <a:bodyPr rtlCol="0" anchor="ctr"/>
-          <a:lstStyle/>
-          <a:p>
-            <a:pPr algn="ctr"/>
-          </a:p>
-        </p:txBody>
-      </p:sp>
-      <p:sp>
-        <p:nvSpPr>
           <p:cNvPr id="2" name="Rectangle 1"/>
           <p:cNvSpPr/>
           <p:nvPr/>
@@ -12990,6 +12946,50 @@
               </a:rPr>
               <a:t>Grupo 4: Andrea Añasco · Gema Sepúlveda · Karen Rebolledo · Nicolás Muñoz   |   Caso 86 — Catálogo de Esquemas Tributarios SII 2025</a:t>
             </a:r>
+          </a:p>
+        </p:txBody>
+      </p:sp>
+      <p:sp>
+        <p:nvSpPr>
+          <p:cNvPr id="5" name="Rectangle 4"/>
+          <p:cNvSpPr/>
+          <p:nvPr/>
+        </p:nvSpPr>
+        <p:spPr>
+          <a:xfrm>
+            <a:off x="0" y="0"/>
+            <a:ext cx="12191695" cy="1325880"/>
+          </a:xfrm>
+          <a:prstGeom prst="rect">
+            <a:avLst/>
+          </a:prstGeom>
+          <a:solidFill>
+            <a:srgbClr val="1A3A5C"/>
+          </a:solidFill>
+          <a:ln>
+            <a:noFill/>
+          </a:ln>
+          <a:effectLst/>
+        </p:spPr>
+        <p:style>
+          <a:lnRef idx="1">
+            <a:schemeClr val="accent1"/>
+          </a:lnRef>
+          <a:fillRef idx="3">
+            <a:schemeClr val="accent1"/>
+          </a:fillRef>
+          <a:effectRef idx="2">
+            <a:schemeClr val="accent1"/>
+          </a:effectRef>
+          <a:fontRef idx="minor">
+            <a:schemeClr val="lt1"/>
+          </a:fontRef>
+        </p:style>
+        <p:txBody>
+          <a:bodyPr rtlCol="0" anchor="ctr"/>
+          <a:lstStyle/>
+          <a:p>
+            <a:pPr algn="ctr"/>
           </a:p>
         </p:txBody>
       </p:sp>
